--- a/learn_nextjs/2_App_Router/App_Router.pptx
+++ b/learn_nextjs/2_App_Router/App_Router.pptx
@@ -5,16 +5,17 @@
     <p:sldMasterId id="2147483648" r:id="rId4"/>
   </p:sldMasterIdLst>
   <p:notesMasterIdLst>
-    <p:notesMasterId r:id="rId9"/>
+    <p:notesMasterId r:id="rId10"/>
   </p:notesMasterIdLst>
   <p:handoutMasterIdLst>
-    <p:handoutMasterId r:id="rId10"/>
+    <p:handoutMasterId r:id="rId11"/>
   </p:handoutMasterIdLst>
   <p:sldIdLst>
-    <p:sldId id="256" r:id="rId5"/>
-    <p:sldId id="257" r:id="rId6"/>
-    <p:sldId id="276" r:id="rId7"/>
-    <p:sldId id="270" r:id="rId8"/>
+    <p:sldId id="276" r:id="rId5"/>
+    <p:sldId id="256" r:id="rId6"/>
+    <p:sldId id="257" r:id="rId7"/>
+    <p:sldId id="277" r:id="rId8"/>
+    <p:sldId id="270" r:id="rId9"/>
   </p:sldIdLst>
   <p:sldSz cx="12192000" cy="6858000"/>
   <p:notesSz cx="6858000" cy="9144000"/>
@@ -1703,30 +1704,87 @@
     <dgm:pt modelId="{3F8A6D25-EC33-4E79-9F36-36771A974919}">
       <dgm:prSet phldrT="[Text]" phldr="0" custT="1"/>
       <dgm:spPr>
-        <a:solidFill>
-          <a:schemeClr val="tx1">
-            <a:lumMod val="85000"/>
-          </a:schemeClr>
-        </a:solidFill>
+        <a:gradFill rotWithShape="0">
+          <a:gsLst>
+            <a:gs pos="0">
+              <a:srgbClr val="ACD433">
+                <a:hueOff val="0"/>
+                <a:satOff val="0"/>
+                <a:lumOff val="0"/>
+                <a:alphaOff val="0"/>
+                <a:tint val="98000"/>
+                <a:lumMod val="114000"/>
+              </a:srgbClr>
+            </a:gs>
+            <a:gs pos="100000">
+              <a:srgbClr val="ACD433">
+                <a:hueOff val="0"/>
+                <a:satOff val="0"/>
+                <a:lumOff val="0"/>
+                <a:alphaOff val="0"/>
+                <a:shade val="90000"/>
+                <a:lumMod val="84000"/>
+              </a:srgbClr>
+            </a:gs>
+          </a:gsLst>
+          <a:lin ang="5400000" scaled="0"/>
+        </a:gradFill>
+        <a:ln>
+          <a:noFill/>
+        </a:ln>
+        <a:effectLst>
+          <a:outerShdw blurRad="38100" dist="25400" dir="5400000" rotWithShape="0">
+            <a:srgbClr val="000000">
+              <a:alpha val="45000"/>
+            </a:srgbClr>
+          </a:outerShdw>
+        </a:effectLst>
+        <a:scene3d>
+          <a:camera prst="orthographicFront"/>
+          <a:lightRig rig="threePt" dir="t">
+            <a:rot lat="0" lon="0" rev="7500000"/>
+          </a:lightRig>
+        </a:scene3d>
+        <a:sp3d prstMaterial="plastic">
+          <a:bevelT w="127000" h="25400" prst="relaxedInset"/>
+        </a:sp3d>
       </dgm:spPr>
       <dgm:t>
-        <a:bodyPr/>
+        <a:bodyPr spcFirstLastPara="0" vert="horz" wrap="square" lIns="170688" tIns="85344" rIns="42672" bIns="85344" numCol="1" spcCol="1270" anchor="ctr" anchorCtr="0"/>
         <a:lstStyle/>
         <a:p>
+          <a:pPr marL="0" lvl="0" indent="0" algn="ctr" defTabSz="1422400">
+            <a:lnSpc>
+              <a:spcPct val="90000"/>
+            </a:lnSpc>
+            <a:spcBef>
+              <a:spcPct val="0"/>
+            </a:spcBef>
+            <a:spcAft>
+              <a:spcPct val="35000"/>
+            </a:spcAft>
+            <a:buNone/>
+          </a:pPr>
           <a:r>
-            <a:rPr lang="en-US" sz="3200" b="1">
+            <a:rPr lang="en-US" sz="3200" b="1" kern="1200">
               <a:solidFill>
                 <a:srgbClr val="00B050"/>
               </a:solidFill>
               <a:effectLst/>
+              <a:latin typeface="Century Gothic" panose="020B0502020202020204"/>
+              <a:ea typeface="+mn-ea"/>
+              <a:cs typeface="+mn-cs"/>
             </a:rPr>
             <a:t>App Router</a:t>
           </a:r>
-          <a:endParaRPr lang="en-US" sz="3200" b="1" dirty="0">
+          <a:endParaRPr lang="en-US" sz="3200" b="1" kern="1200" dirty="0">
             <a:solidFill>
               <a:srgbClr val="00B050"/>
             </a:solidFill>
             <a:effectLst/>
+            <a:latin typeface="Century Gothic" panose="020B0502020202020204"/>
+            <a:ea typeface="+mn-ea"/>
+            <a:cs typeface="+mn-cs"/>
           </a:endParaRPr>
         </a:p>
       </dgm:t>
@@ -1910,7 +1968,15 @@
           <dgm:bulletEnabled val="1"/>
         </dgm:presLayoutVars>
       </dgm:prSet>
-      <dgm:spPr/>
+      <dgm:spPr>
+        <a:xfrm>
+          <a:off x="2586569" y="431693"/>
+          <a:ext cx="3229188" cy="1291675"/>
+        </a:xfrm>
+        <a:prstGeom prst="chevron">
+          <a:avLst/>
+        </a:prstGeom>
+      </dgm:spPr>
     </dgm:pt>
     <dgm:pt modelId="{D7399875-5945-4082-A56B-0967B2FF1CAA}" type="pres">
       <dgm:prSet presAssocID="{F5C31149-F876-40A6-9FD4-9FC1A73D7103}" presName="parSpace" presStyleCnt="0"/>
@@ -2409,11 +2475,31 @@
         <a:prstGeom prst="chevron">
           <a:avLst/>
         </a:prstGeom>
-        <a:solidFill>
-          <a:schemeClr val="tx1">
-            <a:lumMod val="85000"/>
-          </a:schemeClr>
-        </a:solidFill>
+        <a:gradFill rotWithShape="0">
+          <a:gsLst>
+            <a:gs pos="0">
+              <a:srgbClr val="ACD433">
+                <a:hueOff val="0"/>
+                <a:satOff val="0"/>
+                <a:lumOff val="0"/>
+                <a:alphaOff val="0"/>
+                <a:tint val="98000"/>
+                <a:lumMod val="114000"/>
+              </a:srgbClr>
+            </a:gs>
+            <a:gs pos="100000">
+              <a:srgbClr val="ACD433">
+                <a:hueOff val="0"/>
+                <a:satOff val="0"/>
+                <a:lumOff val="0"/>
+                <a:alphaOff val="0"/>
+                <a:shade val="90000"/>
+                <a:lumMod val="84000"/>
+              </a:srgbClr>
+            </a:gs>
+          </a:gsLst>
+          <a:lin ang="5400000" scaled="0"/>
+        </a:gradFill>
         <a:ln>
           <a:noFill/>
         </a:ln>
@@ -2449,7 +2535,7 @@
         </a:fontRef>
       </dsp:style>
       <dsp:txBody>
-        <a:bodyPr spcFirstLastPara="0" vert="horz" wrap="square" lIns="128016" tIns="85344" rIns="42672" bIns="85344" numCol="1" spcCol="1270" anchor="ctr" anchorCtr="0">
+        <a:bodyPr spcFirstLastPara="0" vert="horz" wrap="square" lIns="170688" tIns="85344" rIns="42672" bIns="85344" numCol="1" spcCol="1270" anchor="ctr" anchorCtr="0">
           <a:noAutofit/>
         </a:bodyPr>
         <a:lstStyle/>
@@ -2472,6 +2558,9 @@
                 <a:srgbClr val="00B050"/>
               </a:solidFill>
               <a:effectLst/>
+              <a:latin typeface="Century Gothic" panose="020B0502020202020204"/>
+              <a:ea typeface="+mn-ea"/>
+              <a:cs typeface="+mn-cs"/>
             </a:rPr>
             <a:t>App Router</a:t>
           </a:r>
@@ -2480,6 +2569,9 @@
               <a:srgbClr val="00B050"/>
             </a:solidFill>
             <a:effectLst/>
+            <a:latin typeface="Century Gothic" panose="020B0502020202020204"/>
+            <a:ea typeface="+mn-ea"/>
+            <a:cs typeface="+mn-cs"/>
           </a:endParaRPr>
         </a:p>
       </dsp:txBody>
@@ -5901,7 +5993,7 @@
           <a:p>
             <a:fld id="{F6E59275-AFE1-4999-B78A-D0D76B9F2B0B}" type="datetimeFigureOut">
               <a:rPr lang="en-US" smtClean="0"/>
-              <a:t>1/21/2026</a:t>
+              <a:t>1/24/2026</a:t>
             </a:fld>
             <a:endParaRPr lang="en-US" dirty="0"/>
           </a:p>
@@ -6078,7 +6170,7 @@
           <a:p>
             <a:fld id="{B3EADD7A-FE61-48EE-BE0E-8546E5401374}" type="datetimeFigureOut">
               <a:rPr lang="en-US" smtClean="0"/>
-              <a:t>1/20/2026</a:t>
+              <a:t>1/24/2026</a:t>
             </a:fld>
             <a:endParaRPr lang="en-US" dirty="0"/>
           </a:p>
@@ -6350,6 +6442,114 @@
   <p:cSld>
     <p:spTree>
       <p:nvGrpSpPr>
+        <p:cNvPr id="1" name="">
+          <a:extLst>
+            <a:ext uri="{FF2B5EF4-FFF2-40B4-BE49-F238E27FC236}">
+              <a16:creationId xmlns:a16="http://schemas.microsoft.com/office/drawing/2014/main" id="{4EAC7126-4785-6F23-806A-94F4FA0E0FC3}"/>
+            </a:ext>
+          </a:extLst>
+        </p:cNvPr>
+        <p:cNvGrpSpPr/>
+        <p:nvPr/>
+      </p:nvGrpSpPr>
+      <p:grpSpPr>
+        <a:xfrm>
+          <a:off x="0" y="0"/>
+          <a:ext cx="0" cy="0"/>
+          <a:chOff x="0" y="0"/>
+          <a:chExt cx="0" cy="0"/>
+        </a:xfrm>
+      </p:grpSpPr>
+      <p:sp>
+        <p:nvSpPr>
+          <p:cNvPr id="2" name="Slide Image Placeholder 1">
+            <a:extLst>
+              <a:ext uri="{FF2B5EF4-FFF2-40B4-BE49-F238E27FC236}">
+                <a16:creationId xmlns:a16="http://schemas.microsoft.com/office/drawing/2014/main" id="{BFA150D2-105A-2F82-0ECB-F19BD7BEA00F}"/>
+              </a:ext>
+            </a:extLst>
+          </p:cNvPr>
+          <p:cNvSpPr>
+            <a:spLocks noGrp="1" noRot="1" noChangeAspect="1"/>
+          </p:cNvSpPr>
+          <p:nvPr>
+            <p:ph type="sldImg"/>
+          </p:nvPr>
+        </p:nvSpPr>
+        <p:spPr/>
+      </p:sp>
+      <p:sp>
+        <p:nvSpPr>
+          <p:cNvPr id="3" name="Notes Placeholder 2">
+            <a:extLst>
+              <a:ext uri="{FF2B5EF4-FFF2-40B4-BE49-F238E27FC236}">
+                <a16:creationId xmlns:a16="http://schemas.microsoft.com/office/drawing/2014/main" id="{588D1BEE-D27E-E195-D315-77C949C297E1}"/>
+              </a:ext>
+            </a:extLst>
+          </p:cNvPr>
+          <p:cNvSpPr>
+            <a:spLocks noGrp="1"/>
+          </p:cNvSpPr>
+          <p:nvPr>
+            <p:ph type="body" idx="1"/>
+          </p:nvPr>
+        </p:nvSpPr>
+        <p:spPr/>
+        <p:txBody>
+          <a:bodyPr/>
+          <a:lstStyle/>
+          <a:p>
+            <a:endParaRPr lang="en-US" dirty="0"/>
+          </a:p>
+        </p:txBody>
+      </p:sp>
+      <p:sp>
+        <p:nvSpPr>
+          <p:cNvPr id="4" name="Slide Number Placeholder 3">
+            <a:extLst>
+              <a:ext uri="{FF2B5EF4-FFF2-40B4-BE49-F238E27FC236}">
+                <a16:creationId xmlns:a16="http://schemas.microsoft.com/office/drawing/2014/main" id="{2D139FE7-EB62-CD28-CCC1-F88018C3681A}"/>
+              </a:ext>
+            </a:extLst>
+          </p:cNvPr>
+          <p:cNvSpPr>
+            <a:spLocks noGrp="1"/>
+          </p:cNvSpPr>
+          <p:nvPr>
+            <p:ph type="sldNum" sz="quarter" idx="5"/>
+          </p:nvPr>
+        </p:nvSpPr>
+        <p:spPr/>
+        <p:txBody>
+          <a:bodyPr/>
+          <a:lstStyle/>
+          <a:p>
+            <a:fld id="{EE000EEB-8338-48D7-8EE8-EE0082EF7602}" type="slidenum">
+              <a:rPr lang="en-US" smtClean="0"/>
+              <a:t>1</a:t>
+            </a:fld>
+            <a:endParaRPr lang="en-US" dirty="0"/>
+          </a:p>
+        </p:txBody>
+      </p:sp>
+    </p:spTree>
+    <p:extLst>
+      <p:ext uri="{BB962C8B-B14F-4D97-AF65-F5344CB8AC3E}">
+        <p14:creationId xmlns:p14="http://schemas.microsoft.com/office/powerpoint/2010/main" val="1215950728"/>
+      </p:ext>
+    </p:extLst>
+  </p:cSld>
+  <p:clrMapOvr>
+    <a:masterClrMapping/>
+  </p:clrMapOvr>
+</p:notes>
+</file>
+
+<file path=ppt/notesSlides/notesSlide2.xml><?xml version="1.0" encoding="utf-8"?>
+<p:notes xmlns:a="http://schemas.openxmlformats.org/drawingml/2006/main" xmlns:r="http://schemas.openxmlformats.org/officeDocument/2006/relationships" xmlns:p="http://schemas.openxmlformats.org/presentationml/2006/main">
+  <p:cSld>
+    <p:spTree>
+      <p:nvGrpSpPr>
         <p:cNvPr id="1" name=""/>
         <p:cNvGrpSpPr/>
         <p:nvPr/>
@@ -6410,7 +6610,7 @@
           <a:p>
             <a:fld id="{EE000EEB-8338-48D7-8EE8-EE0082EF7602}" type="slidenum">
               <a:rPr lang="en-US" smtClean="0"/>
-              <a:t>1</a:t>
+              <a:t>2</a:t>
             </a:fld>
             <a:endParaRPr lang="en-US" dirty="0"/>
           </a:p>
@@ -6429,7 +6629,7 @@
 </p:notes>
 </file>
 
-<file path=ppt/notesSlides/notesSlide2.xml><?xml version="1.0" encoding="utf-8"?>
+<file path=ppt/notesSlides/notesSlide3.xml><?xml version="1.0" encoding="utf-8"?>
 <p:notes xmlns:a="http://schemas.openxmlformats.org/drawingml/2006/main" xmlns:r="http://schemas.openxmlformats.org/officeDocument/2006/relationships" xmlns:p="http://schemas.openxmlformats.org/presentationml/2006/main">
   <p:cSld>
     <p:spTree>
@@ -6518,7 +6718,7 @@
           <a:p>
             <a:fld id="{EE000EEB-8338-48D7-8EE8-EE0082EF7602}" type="slidenum">
               <a:rPr lang="en-US" smtClean="0"/>
-              <a:t>2</a:t>
+              <a:t>3</a:t>
             </a:fld>
             <a:endParaRPr lang="en-US" dirty="0"/>
           </a:p>
@@ -6537,7 +6737,7 @@
 </p:notes>
 </file>
 
-<file path=ppt/notesSlides/notesSlide3.xml><?xml version="1.0" encoding="utf-8"?>
+<file path=ppt/notesSlides/notesSlide4.xml><?xml version="1.0" encoding="utf-8"?>
 <p:notes xmlns:a="http://schemas.openxmlformats.org/drawingml/2006/main" xmlns:r="http://schemas.openxmlformats.org/officeDocument/2006/relationships" xmlns:p="http://schemas.openxmlformats.org/presentationml/2006/main">
   <p:cSld>
     <p:spTree>
@@ -6545,7 +6745,7 @@
         <p:cNvPr id="1" name="">
           <a:extLst>
             <a:ext uri="{FF2B5EF4-FFF2-40B4-BE49-F238E27FC236}">
-              <a16:creationId xmlns:a16="http://schemas.microsoft.com/office/drawing/2014/main" id="{4EAC7126-4785-6F23-806A-94F4FA0E0FC3}"/>
+              <a16:creationId xmlns:a16="http://schemas.microsoft.com/office/drawing/2014/main" id="{2874FF35-9CC1-662F-C04B-06BB8FB9BE38}"/>
             </a:ext>
           </a:extLst>
         </p:cNvPr>
@@ -6565,7 +6765,7 @@
           <p:cNvPr id="2" name="Slide Image Placeholder 1">
             <a:extLst>
               <a:ext uri="{FF2B5EF4-FFF2-40B4-BE49-F238E27FC236}">
-                <a16:creationId xmlns:a16="http://schemas.microsoft.com/office/drawing/2014/main" id="{BFA150D2-105A-2F82-0ECB-F19BD7BEA00F}"/>
+                <a16:creationId xmlns:a16="http://schemas.microsoft.com/office/drawing/2014/main" id="{8BED8448-A4E1-7CD9-3902-0B9A90D73364}"/>
               </a:ext>
             </a:extLst>
           </p:cNvPr>
@@ -6583,7 +6783,7 @@
           <p:cNvPr id="3" name="Notes Placeholder 2">
             <a:extLst>
               <a:ext uri="{FF2B5EF4-FFF2-40B4-BE49-F238E27FC236}">
-                <a16:creationId xmlns:a16="http://schemas.microsoft.com/office/drawing/2014/main" id="{588D1BEE-D27E-E195-D315-77C949C297E1}"/>
+                <a16:creationId xmlns:a16="http://schemas.microsoft.com/office/drawing/2014/main" id="{A2C24DDA-3136-DAF9-BE11-BD505F7ADE7D}"/>
               </a:ext>
             </a:extLst>
           </p:cNvPr>
@@ -6608,7 +6808,7 @@
           <p:cNvPr id="4" name="Slide Number Placeholder 3">
             <a:extLst>
               <a:ext uri="{FF2B5EF4-FFF2-40B4-BE49-F238E27FC236}">
-                <a16:creationId xmlns:a16="http://schemas.microsoft.com/office/drawing/2014/main" id="{2D139FE7-EB62-CD28-CCC1-F88018C3681A}"/>
+                <a16:creationId xmlns:a16="http://schemas.microsoft.com/office/drawing/2014/main" id="{A3128D75-8D16-2FB4-3901-EE3D079BAAF2}"/>
               </a:ext>
             </a:extLst>
           </p:cNvPr>
@@ -6626,7 +6826,7 @@
           <a:p>
             <a:fld id="{EE000EEB-8338-48D7-8EE8-EE0082EF7602}" type="slidenum">
               <a:rPr lang="en-US" smtClean="0"/>
-              <a:t>3</a:t>
+              <a:t>4</a:t>
             </a:fld>
             <a:endParaRPr lang="en-US" dirty="0"/>
           </a:p>
@@ -6635,7 +6835,7 @@
     </p:spTree>
     <p:extLst>
       <p:ext uri="{BB962C8B-B14F-4D97-AF65-F5344CB8AC3E}">
-        <p14:creationId xmlns:p14="http://schemas.microsoft.com/office/powerpoint/2010/main" val="1215950728"/>
+        <p14:creationId xmlns:p14="http://schemas.microsoft.com/office/powerpoint/2010/main" val="2528888568"/>
       </p:ext>
     </p:extLst>
   </p:cSld>
@@ -6645,7 +6845,7 @@
 </p:notes>
 </file>
 
-<file path=ppt/notesSlides/notesSlide4.xml><?xml version="1.0" encoding="utf-8"?>
+<file path=ppt/notesSlides/notesSlide5.xml><?xml version="1.0" encoding="utf-8"?>
 <p:notes xmlns:a="http://schemas.openxmlformats.org/drawingml/2006/main" xmlns:r="http://schemas.openxmlformats.org/officeDocument/2006/relationships" xmlns:p="http://schemas.openxmlformats.org/presentationml/2006/main">
   <p:cSld>
     <p:spTree>
@@ -6734,7 +6934,7 @@
           <a:p>
             <a:fld id="{EE000EEB-8338-48D7-8EE8-EE0082EF7602}" type="slidenum">
               <a:rPr lang="en-US" smtClean="0"/>
-              <a:t>4</a:t>
+              <a:t>5</a:t>
             </a:fld>
             <a:endParaRPr lang="en-US" dirty="0"/>
           </a:p>
@@ -6936,7 +7136,7 @@
           <a:p>
             <a:fld id="{4AAD347D-5ACD-4C99-B74B-A9C85AD731AF}" type="datetimeFigureOut">
               <a:rPr lang="en-US" dirty="0"/>
-              <a:t>1/20/2026</a:t>
+              <a:t>1/24/2026</a:t>
             </a:fld>
             <a:endParaRPr lang="en-US" dirty="0"/>
           </a:p>
@@ -7206,7 +7406,7 @@
           <a:p>
             <a:fld id="{4509A250-FF31-4206-8172-F9D3106AACB1}" type="datetimeFigureOut">
               <a:rPr lang="en-US" dirty="0"/>
-              <a:t>1/20/2026</a:t>
+              <a:t>1/24/2026</a:t>
             </a:fld>
             <a:endParaRPr lang="en-US" dirty="0"/>
           </a:p>
@@ -7395,7 +7595,7 @@
           <a:p>
             <a:fld id="{4509A250-FF31-4206-8172-F9D3106AACB1}" type="datetimeFigureOut">
               <a:rPr lang="en-US" dirty="0"/>
-              <a:t>1/20/2026</a:t>
+              <a:t>1/24/2026</a:t>
             </a:fld>
             <a:endParaRPr lang="en-US" dirty="0"/>
           </a:p>
@@ -7658,7 +7858,7 @@
           <a:p>
             <a:fld id="{4509A250-FF31-4206-8172-F9D3106AACB1}" type="datetimeFigureOut">
               <a:rPr lang="en-US" dirty="0"/>
-              <a:t>1/20/2026</a:t>
+              <a:t>1/24/2026</a:t>
             </a:fld>
             <a:endParaRPr lang="en-US" dirty="0"/>
           </a:p>
@@ -7985,7 +8185,7 @@
           <a:p>
             <a:fld id="{4509A250-FF31-4206-8172-F9D3106AACB1}" type="datetimeFigureOut">
               <a:rPr lang="en-US" dirty="0"/>
-              <a:t>1/20/2026</a:t>
+              <a:t>1/24/2026</a:t>
             </a:fld>
             <a:endParaRPr lang="en-US" dirty="0"/>
           </a:p>
@@ -8590,7 +8790,7 @@
           <a:p>
             <a:fld id="{4509A250-FF31-4206-8172-F9D3106AACB1}" type="datetimeFigureOut">
               <a:rPr lang="en-US" dirty="0"/>
-              <a:t>1/20/2026</a:t>
+              <a:t>1/24/2026</a:t>
             </a:fld>
             <a:endParaRPr lang="en-US" dirty="0"/>
           </a:p>
@@ -9432,7 +9632,7 @@
           <a:p>
             <a:fld id="{4509A250-FF31-4206-8172-F9D3106AACB1}" type="datetimeFigureOut">
               <a:rPr lang="en-US" dirty="0"/>
-              <a:t>1/20/2026</a:t>
+              <a:t>1/24/2026</a:t>
             </a:fld>
             <a:endParaRPr lang="en-US" dirty="0"/>
           </a:p>
@@ -9597,7 +9797,7 @@
           <a:p>
             <a:fld id="{4509A250-FF31-4206-8172-F9D3106AACB1}" type="datetimeFigureOut">
               <a:rPr lang="en-US" dirty="0"/>
-              <a:t>1/20/2026</a:t>
+              <a:t>1/24/2026</a:t>
             </a:fld>
             <a:endParaRPr lang="en-US" dirty="0"/>
           </a:p>
@@ -9772,7 +9972,7 @@
           <a:p>
             <a:fld id="{4509A250-FF31-4206-8172-F9D3106AACB1}" type="datetimeFigureOut">
               <a:rPr lang="en-US" dirty="0"/>
-              <a:t>1/20/2026</a:t>
+              <a:t>1/24/2026</a:t>
             </a:fld>
             <a:endParaRPr lang="en-US" dirty="0"/>
           </a:p>
@@ -9937,7 +10137,7 @@
           <a:p>
             <a:fld id="{4509A250-FF31-4206-8172-F9D3106AACB1}" type="datetimeFigureOut">
               <a:rPr lang="en-US" dirty="0"/>
-              <a:t>1/20/2026</a:t>
+              <a:t>1/24/2026</a:t>
             </a:fld>
             <a:endParaRPr lang="en-US" dirty="0"/>
           </a:p>
@@ -10176,7 +10376,7 @@
           <a:p>
             <a:fld id="{4509A250-FF31-4206-8172-F9D3106AACB1}" type="datetimeFigureOut">
               <a:rPr lang="en-US" dirty="0"/>
-              <a:t>1/20/2026</a:t>
+              <a:t>1/24/2026</a:t>
             </a:fld>
             <a:endParaRPr lang="en-US" dirty="0"/>
           </a:p>
@@ -10463,7 +10663,7 @@
           <a:p>
             <a:fld id="{4509A250-FF31-4206-8172-F9D3106AACB1}" type="datetimeFigureOut">
               <a:rPr lang="en-US" dirty="0"/>
-              <a:t>1/20/2026</a:t>
+              <a:t>1/24/2026</a:t>
             </a:fld>
             <a:endParaRPr lang="en-US" dirty="0"/>
           </a:p>
@@ -10896,7 +11096,7 @@
           <a:p>
             <a:fld id="{4509A250-FF31-4206-8172-F9D3106AACB1}" type="datetimeFigureOut">
               <a:rPr lang="en-US" dirty="0"/>
-              <a:t>1/20/2026</a:t>
+              <a:t>1/24/2026</a:t>
             </a:fld>
             <a:endParaRPr lang="en-US" dirty="0"/>
           </a:p>
@@ -11009,7 +11209,7 @@
           <a:p>
             <a:fld id="{4509A250-FF31-4206-8172-F9D3106AACB1}" type="datetimeFigureOut">
               <a:rPr lang="en-US" dirty="0"/>
-              <a:t>1/20/2026</a:t>
+              <a:t>1/24/2026</a:t>
             </a:fld>
             <a:endParaRPr lang="en-US" dirty="0"/>
           </a:p>
@@ -11099,7 +11299,7 @@
           <a:p>
             <a:fld id="{4509A250-FF31-4206-8172-F9D3106AACB1}" type="datetimeFigureOut">
               <a:rPr lang="en-US" dirty="0"/>
-              <a:t>1/20/2026</a:t>
+              <a:t>1/24/2026</a:t>
             </a:fld>
             <a:endParaRPr lang="en-US" dirty="0"/>
           </a:p>
@@ -11373,7 +11573,7 @@
           <a:p>
             <a:fld id="{4509A250-FF31-4206-8172-F9D3106AACB1}" type="datetimeFigureOut">
               <a:rPr lang="en-US" dirty="0"/>
-              <a:t>1/20/2026</a:t>
+              <a:t>1/24/2026</a:t>
             </a:fld>
             <a:endParaRPr lang="en-US" dirty="0"/>
           </a:p>
@@ -11643,7 +11843,7 @@
           <a:p>
             <a:fld id="{4509A250-FF31-4206-8172-F9D3106AACB1}" type="datetimeFigureOut">
               <a:rPr lang="en-US" dirty="0"/>
-              <a:t>1/20/2026</a:t>
+              <a:t>1/24/2026</a:t>
             </a:fld>
             <a:endParaRPr lang="en-US" dirty="0"/>
           </a:p>
@@ -12081,7 +12281,7 @@
           <a:p>
             <a:fld id="{4509A250-FF31-4206-8172-F9D3106AACB1}" type="datetimeFigureOut">
               <a:rPr lang="en-US" dirty="0"/>
-              <a:t>1/20/2026</a:t>
+              <a:t>1/24/2026</a:t>
             </a:fld>
             <a:endParaRPr lang="en-US" dirty="0"/>
           </a:p>
@@ -12564,6 +12764,180 @@
 <file path=ppt/slides/slide1.xml><?xml version="1.0" encoding="utf-8"?>
 <p:sld xmlns:a="http://schemas.openxmlformats.org/drawingml/2006/main" xmlns:r="http://schemas.openxmlformats.org/officeDocument/2006/relationships" xmlns:p="http://schemas.openxmlformats.org/presentationml/2006/main">
   <p:cSld>
+    <p:spTree>
+      <p:nvGrpSpPr>
+        <p:cNvPr id="1" name="">
+          <a:extLst>
+            <a:ext uri="{FF2B5EF4-FFF2-40B4-BE49-F238E27FC236}">
+              <a16:creationId xmlns:a16="http://schemas.microsoft.com/office/drawing/2014/main" id="{0CC0224E-FBBF-DCF2-BCE0-F89D770B9121}"/>
+            </a:ext>
+          </a:extLst>
+        </p:cNvPr>
+        <p:cNvGrpSpPr/>
+        <p:nvPr/>
+      </p:nvGrpSpPr>
+      <p:grpSpPr>
+        <a:xfrm>
+          <a:off x="0" y="0"/>
+          <a:ext cx="0" cy="0"/>
+          <a:chOff x="0" y="0"/>
+          <a:chExt cx="0" cy="0"/>
+        </a:xfrm>
+      </p:grpSpPr>
+      <p:pic>
+        <p:nvPicPr>
+          <p:cNvPr id="5" name="Picture 4" descr="chain links">
+            <a:extLst>
+              <a:ext uri="{FF2B5EF4-FFF2-40B4-BE49-F238E27FC236}">
+                <a16:creationId xmlns:a16="http://schemas.microsoft.com/office/drawing/2014/main" id="{DD2F1915-0578-BFD3-9A84-EC539FE67EA3}"/>
+              </a:ext>
+            </a:extLst>
+          </p:cNvPr>
+          <p:cNvPicPr>
+            <a:picLocks noChangeAspect="1"/>
+          </p:cNvPicPr>
+          <p:nvPr/>
+        </p:nvPicPr>
+        <p:blipFill rotWithShape="1">
+          <a:blip r:embed="rId3">
+            <a:duotone>
+              <a:prstClr val="black"/>
+              <a:schemeClr val="accent5">
+                <a:tint val="45000"/>
+                <a:satMod val="400000"/>
+              </a:schemeClr>
+            </a:duotone>
+            <a:alphaModFix amt="25000"/>
+          </a:blip>
+          <a:srcRect t="23391" r="9091"/>
+          <a:stretch/>
+        </p:blipFill>
+        <p:spPr>
+          <a:xfrm>
+            <a:off x="0" y="10"/>
+            <a:ext cx="12191980" cy="6857990"/>
+          </a:xfrm>
+          <a:prstGeom prst="rect">
+            <a:avLst/>
+          </a:prstGeom>
+        </p:spPr>
+      </p:pic>
+      <p:pic>
+        <p:nvPicPr>
+          <p:cNvPr id="11" name="Picture 10" descr="A white circle with a blue circle with a blue circle with a blue circle with a white circle with a blue circle with a blue circle with a white circle with a blue circle with a blue circle&#10;&#10;AI-generated content may be incorrect.">
+            <a:extLst>
+              <a:ext uri="{FF2B5EF4-FFF2-40B4-BE49-F238E27FC236}">
+                <a16:creationId xmlns:a16="http://schemas.microsoft.com/office/drawing/2014/main" id="{0F598311-938F-38BB-7988-5E42EF16CBD5}"/>
+              </a:ext>
+            </a:extLst>
+          </p:cNvPr>
+          <p:cNvPicPr>
+            <a:picLocks noChangeAspect="1"/>
+          </p:cNvPicPr>
+          <p:nvPr/>
+        </p:nvPicPr>
+        <p:blipFill>
+          <a:blip r:embed="rId4"/>
+          <a:stretch>
+            <a:fillRect/>
+          </a:stretch>
+        </p:blipFill>
+        <p:spPr>
+          <a:xfrm>
+            <a:off x="3661894" y="1055718"/>
+            <a:ext cx="5675290" cy="3424467"/>
+          </a:xfrm>
+          <a:prstGeom prst="rect">
+            <a:avLst/>
+          </a:prstGeom>
+          <a:ln>
+            <a:noFill/>
+          </a:ln>
+          <a:effectLst>
+            <a:softEdge rad="112500"/>
+          </a:effectLst>
+        </p:spPr>
+      </p:pic>
+      <p:sp>
+        <p:nvSpPr>
+          <p:cNvPr id="2" name="Title 1">
+            <a:extLst>
+              <a:ext uri="{FF2B5EF4-FFF2-40B4-BE49-F238E27FC236}">
+                <a16:creationId xmlns:a16="http://schemas.microsoft.com/office/drawing/2014/main" id="{33C9C9B5-0B44-AD56-606E-CF46AAE42647}"/>
+              </a:ext>
+            </a:extLst>
+          </p:cNvPr>
+          <p:cNvSpPr>
+            <a:spLocks noGrp="1"/>
+          </p:cNvSpPr>
+          <p:nvPr>
+            <p:ph type="ctrTitle"/>
+          </p:nvPr>
+        </p:nvSpPr>
+        <p:spPr>
+          <a:xfrm>
+            <a:off x="217749" y="205956"/>
+            <a:ext cx="7602064" cy="1266497"/>
+          </a:xfrm>
+        </p:spPr>
+        <p:txBody>
+          <a:bodyPr anchor="ctr">
+            <a:normAutofit/>
+          </a:bodyPr>
+          <a:lstStyle/>
+          <a:p>
+            <a:r>
+              <a:rPr lang="en-US" altLang="zh-CN" sz="6000" b="1" dirty="0"/>
+              <a:t>Learn Next.js</a:t>
+            </a:r>
+            <a:endParaRPr lang="ru-RU" sz="6000" b="1" dirty="0"/>
+          </a:p>
+        </p:txBody>
+      </p:sp>
+      <p:graphicFrame>
+        <p:nvGraphicFramePr>
+          <p:cNvPr id="12" name="Diagram 11">
+            <a:extLst>
+              <a:ext uri="{FF2B5EF4-FFF2-40B4-BE49-F238E27FC236}">
+                <a16:creationId xmlns:a16="http://schemas.microsoft.com/office/drawing/2014/main" id="{0BA4EC0A-CB15-D8BB-A5A0-B712501C96D3}"/>
+              </a:ext>
+            </a:extLst>
+          </p:cNvPr>
+          <p:cNvGraphicFramePr/>
+          <p:nvPr>
+            <p:extLst>
+              <p:ext uri="{D42A27DB-BD31-4B8C-83A1-F6EECF244321}">
+                <p14:modId xmlns:p14="http://schemas.microsoft.com/office/powerpoint/2010/main" val="380498904"/>
+              </p:ext>
+            </p:extLst>
+          </p:nvPr>
+        </p:nvGraphicFramePr>
+        <p:xfrm>
+          <a:off x="652530" y="4211392"/>
+          <a:ext cx="10985677" cy="2155063"/>
+        </p:xfrm>
+        <a:graphic>
+          <a:graphicData uri="http://schemas.openxmlformats.org/drawingml/2006/diagram">
+            <dgm:relIds xmlns:dgm="http://schemas.openxmlformats.org/drawingml/2006/diagram" xmlns:r="http://schemas.openxmlformats.org/officeDocument/2006/relationships" r:dm="rId5" r:lo="rId6" r:qs="rId7" r:cs="rId8"/>
+          </a:graphicData>
+        </a:graphic>
+      </p:graphicFrame>
+    </p:spTree>
+    <p:extLst>
+      <p:ext uri="{BB962C8B-B14F-4D97-AF65-F5344CB8AC3E}">
+        <p14:creationId xmlns:p14="http://schemas.microsoft.com/office/powerpoint/2010/main" val="3303699240"/>
+      </p:ext>
+    </p:extLst>
+  </p:cSld>
+  <p:clrMapOvr>
+    <a:masterClrMapping/>
+  </p:clrMapOvr>
+</p:sld>
+</file>
+
+<file path=ppt/slides/slide2.xml><?xml version="1.0" encoding="utf-8"?>
+<p:sld xmlns:a="http://schemas.openxmlformats.org/drawingml/2006/main" xmlns:r="http://schemas.openxmlformats.org/officeDocument/2006/relationships" xmlns:p="http://schemas.openxmlformats.org/presentationml/2006/main">
+  <p:cSld>
     <p:bg>
       <p:bgPr>
         <a:blipFill rotWithShape="1">
@@ -13145,7 +13519,7 @@
         </p:nvSpPr>
         <p:spPr>
           <a:xfrm>
-            <a:off x="6816859" y="2915811"/>
+            <a:off x="6816859" y="2042508"/>
             <a:ext cx="4897822" cy="1266497"/>
           </a:xfrm>
         </p:spPr>
@@ -13235,7 +13609,7 @@
 </p:sld>
 </file>
 
-<file path=ppt/slides/slide2.xml><?xml version="1.0" encoding="utf-8"?>
+<file path=ppt/slides/slide3.xml><?xml version="1.0" encoding="utf-8"?>
 <p:sld xmlns:a="http://schemas.openxmlformats.org/drawingml/2006/main" xmlns:r="http://schemas.openxmlformats.org/officeDocument/2006/relationships" xmlns:p="http://schemas.openxmlformats.org/presentationml/2006/main">
   <p:cSld>
     <p:spTree>
@@ -13314,21 +13688,21 @@
         </p:nvSpPr>
         <p:spPr>
           <a:xfrm>
-            <a:off x="5065160" y="2139720"/>
+            <a:off x="5065159" y="1398922"/>
             <a:ext cx="7011227" cy="788415"/>
           </a:xfrm>
         </p:spPr>
         <p:txBody>
           <a:bodyPr>
-            <a:normAutofit/>
+            <a:normAutofit lnSpcReduction="10000"/>
           </a:bodyPr>
           <a:lstStyle/>
           <a:p>
             <a:r>
-              <a:rPr lang="en-US" altLang="zh-CN" sz="4400" b="1" dirty="0"/>
+              <a:rPr lang="en-US" altLang="zh-CN" sz="4800" b="1" dirty="0"/>
               <a:t>1. Getting Started</a:t>
             </a:r>
-            <a:endParaRPr lang="en-US" sz="4400" b="1" dirty="0"/>
+            <a:endParaRPr lang="en-US" sz="4800" b="1" dirty="0"/>
           </a:p>
         </p:txBody>
       </p:sp>
@@ -13348,7 +13722,7 @@
         </p:nvSpPr>
         <p:spPr>
           <a:xfrm>
-            <a:off x="4731248" y="0"/>
+            <a:off x="8570773" y="2419"/>
             <a:ext cx="2102069" cy="1447801"/>
           </a:xfrm>
           <a:prstGeom prst="rect">
@@ -13697,8 +14071,8 @@
         </p:nvSpPr>
         <p:spPr>
           <a:xfrm>
-            <a:off x="4474323" y="961696"/>
-            <a:ext cx="7602064" cy="1266497"/>
+            <a:off x="4011986" y="30293"/>
+            <a:ext cx="4741596" cy="1266497"/>
           </a:xfrm>
         </p:spPr>
         <p:txBody>
@@ -13717,10 +14091,10 @@
       </p:sp>
       <p:pic>
         <p:nvPicPr>
-          <p:cNvPr id="12" name="Picture 11">
+          <p:cNvPr id="8" name="Picture 7">
             <a:extLst>
               <a:ext uri="{FF2B5EF4-FFF2-40B4-BE49-F238E27FC236}">
-                <a16:creationId xmlns:a16="http://schemas.microsoft.com/office/drawing/2014/main" id="{A8CD8F92-5A26-6FA0-40AF-B8E58D2B6D9A}"/>
+                <a16:creationId xmlns:a16="http://schemas.microsoft.com/office/drawing/2014/main" id="{9DB10A20-E426-E955-9570-E22A7E2EE97E}"/>
               </a:ext>
             </a:extLst>
           </p:cNvPr>
@@ -13737,8 +14111,8 @@
         </p:blipFill>
         <p:spPr>
           <a:xfrm>
-            <a:off x="176129" y="2490518"/>
-            <a:ext cx="8596387" cy="4005009"/>
+            <a:off x="226031" y="2090603"/>
+            <a:ext cx="8897420" cy="4413955"/>
           </a:xfrm>
           <a:prstGeom prst="roundRect">
             <a:avLst>
@@ -13782,7 +14156,7 @@
 </p:sld>
 </file>
 
-<file path=ppt/slides/slide3.xml><?xml version="1.0" encoding="utf-8"?>
+<file path=ppt/slides/slide4.xml><?xml version="1.0" encoding="utf-8"?>
 <p:sld xmlns:a="http://schemas.openxmlformats.org/drawingml/2006/main" xmlns:r="http://schemas.openxmlformats.org/officeDocument/2006/relationships" xmlns:p="http://schemas.openxmlformats.org/presentationml/2006/main">
   <p:cSld>
     <p:spTree>
@@ -13790,7 +14164,7 @@
         <p:cNvPr id="1" name="">
           <a:extLst>
             <a:ext uri="{FF2B5EF4-FFF2-40B4-BE49-F238E27FC236}">
-              <a16:creationId xmlns:a16="http://schemas.microsoft.com/office/drawing/2014/main" id="{0CC0224E-FBBF-DCF2-BCE0-F89D770B9121}"/>
+              <a16:creationId xmlns:a16="http://schemas.microsoft.com/office/drawing/2014/main" id="{C1888C70-013E-E4B0-35AC-B37FDF955590}"/>
             </a:ext>
           </a:extLst>
         </p:cNvPr>
@@ -13810,7 +14184,7 @@
           <p:cNvPr id="5" name="Picture 4" descr="chain links">
             <a:extLst>
               <a:ext uri="{FF2B5EF4-FFF2-40B4-BE49-F238E27FC236}">
-                <a16:creationId xmlns:a16="http://schemas.microsoft.com/office/drawing/2014/main" id="{DD2F1915-0578-BFD3-9A84-EC539FE67EA3}"/>
+                <a16:creationId xmlns:a16="http://schemas.microsoft.com/office/drawing/2014/main" id="{303AF50B-B741-6B45-E1EA-64FFED3E2841}"/>
               </a:ext>
             </a:extLst>
           </p:cNvPr>
@@ -13843,12 +14217,300 @@
           </a:prstGeom>
         </p:spPr>
       </p:pic>
+      <p:sp>
+        <p:nvSpPr>
+          <p:cNvPr id="3" name="Subtitle 2">
+            <a:extLst>
+              <a:ext uri="{FF2B5EF4-FFF2-40B4-BE49-F238E27FC236}">
+                <a16:creationId xmlns:a16="http://schemas.microsoft.com/office/drawing/2014/main" id="{1614207A-E840-8E82-6644-D8AECCEA0E4C}"/>
+              </a:ext>
+            </a:extLst>
+          </p:cNvPr>
+          <p:cNvSpPr>
+            <a:spLocks noGrp="1"/>
+          </p:cNvSpPr>
+          <p:nvPr>
+            <p:ph type="subTitle" idx="1"/>
+          </p:nvPr>
+        </p:nvSpPr>
+        <p:spPr>
+          <a:xfrm>
+            <a:off x="5065159" y="1398922"/>
+            <a:ext cx="7011227" cy="788415"/>
+          </a:xfrm>
+        </p:spPr>
+        <p:txBody>
+          <a:bodyPr>
+            <a:normAutofit lnSpcReduction="10000"/>
+          </a:bodyPr>
+          <a:lstStyle/>
+          <a:p>
+            <a:r>
+              <a:rPr lang="en-US" altLang="zh-CN" sz="4800" b="1" dirty="0"/>
+              <a:t>2. CSS Styling</a:t>
+            </a:r>
+            <a:endParaRPr lang="en-US" sz="4800" b="1" dirty="0"/>
+          </a:p>
+        </p:txBody>
+      </p:sp>
+      <p:sp>
+        <p:nvSpPr>
+          <p:cNvPr id="7" name="Subtitle 2">
+            <a:extLst>
+              <a:ext uri="{FF2B5EF4-FFF2-40B4-BE49-F238E27FC236}">
+                <a16:creationId xmlns:a16="http://schemas.microsoft.com/office/drawing/2014/main" id="{4821D0EE-231E-E66E-3862-EEA8A7AB3567}"/>
+              </a:ext>
+            </a:extLst>
+          </p:cNvPr>
+          <p:cNvSpPr txBox="1">
+            <a:spLocks/>
+          </p:cNvSpPr>
+          <p:nvPr/>
+        </p:nvSpPr>
+        <p:spPr>
+          <a:xfrm>
+            <a:off x="8570773" y="2419"/>
+            <a:ext cx="2102069" cy="1447801"/>
+          </a:xfrm>
+          <a:prstGeom prst="rect">
+            <a:avLst/>
+          </a:prstGeom>
+        </p:spPr>
+        <p:txBody>
+          <a:bodyPr vert="horz" lIns="91440" tIns="45720" rIns="91440" bIns="45720" rtlCol="0" anchor="ctr">
+            <a:normAutofit fontScale="92500" lnSpcReduction="20000"/>
+          </a:bodyPr>
+          <a:lstStyle>
+            <a:lvl1pPr marL="0" indent="0" algn="l" defTabSz="457200" rtl="0" eaLnBrk="1" latinLnBrk="0" hangingPunct="1">
+              <a:spcBef>
+                <a:spcPts val="1000"/>
+              </a:spcBef>
+              <a:spcAft>
+                <a:spcPts val="0"/>
+              </a:spcAft>
+              <a:buClr>
+                <a:schemeClr val="accent1"/>
+              </a:buClr>
+              <a:buSzPct val="80000"/>
+              <a:buFont typeface="Wingdings 3" charset="2"/>
+              <a:buNone/>
+              <a:defRPr sz="2000" b="0" i="0" kern="1200" cap="all">
+                <a:solidFill>
+                  <a:schemeClr val="accent1"/>
+                </a:solidFill>
+                <a:latin typeface="+mj-lt"/>
+                <a:ea typeface="+mj-ea"/>
+                <a:cs typeface="+mj-cs"/>
+              </a:defRPr>
+            </a:lvl1pPr>
+            <a:lvl2pPr marL="457200" indent="0" algn="ctr" defTabSz="457200" rtl="0" eaLnBrk="1" latinLnBrk="0" hangingPunct="1">
+              <a:spcBef>
+                <a:spcPts val="1000"/>
+              </a:spcBef>
+              <a:spcAft>
+                <a:spcPts val="0"/>
+              </a:spcAft>
+              <a:buClr>
+                <a:schemeClr val="accent1"/>
+              </a:buClr>
+              <a:buSzPct val="80000"/>
+              <a:buFont typeface="Wingdings 3" charset="2"/>
+              <a:buNone/>
+              <a:defRPr sz="1800" b="0" i="0" kern="1200">
+                <a:solidFill>
+                  <a:schemeClr val="tx1">
+                    <a:tint val="75000"/>
+                  </a:schemeClr>
+                </a:solidFill>
+                <a:latin typeface="+mj-lt"/>
+                <a:ea typeface="+mj-ea"/>
+                <a:cs typeface="+mj-cs"/>
+              </a:defRPr>
+            </a:lvl2pPr>
+            <a:lvl3pPr marL="914400" indent="0" algn="ctr" defTabSz="457200" rtl="0" eaLnBrk="1" latinLnBrk="0" hangingPunct="1">
+              <a:spcBef>
+                <a:spcPts val="1000"/>
+              </a:spcBef>
+              <a:spcAft>
+                <a:spcPts val="0"/>
+              </a:spcAft>
+              <a:buClr>
+                <a:schemeClr val="accent1"/>
+              </a:buClr>
+              <a:buSzPct val="80000"/>
+              <a:buFont typeface="Wingdings 3" charset="2"/>
+              <a:buNone/>
+              <a:defRPr sz="1600" b="0" i="0" kern="1200">
+                <a:solidFill>
+                  <a:schemeClr val="tx1">
+                    <a:tint val="75000"/>
+                  </a:schemeClr>
+                </a:solidFill>
+                <a:latin typeface="+mj-lt"/>
+                <a:ea typeface="+mj-ea"/>
+                <a:cs typeface="+mj-cs"/>
+              </a:defRPr>
+            </a:lvl3pPr>
+            <a:lvl4pPr marL="1371600" indent="0" algn="ctr" defTabSz="457200" rtl="0" eaLnBrk="1" latinLnBrk="0" hangingPunct="1">
+              <a:spcBef>
+                <a:spcPts val="1000"/>
+              </a:spcBef>
+              <a:spcAft>
+                <a:spcPts val="0"/>
+              </a:spcAft>
+              <a:buClr>
+                <a:schemeClr val="accent1"/>
+              </a:buClr>
+              <a:buSzPct val="80000"/>
+              <a:buFont typeface="Wingdings 3" charset="2"/>
+              <a:buNone/>
+              <a:defRPr sz="1400" b="0" i="0" kern="1200">
+                <a:solidFill>
+                  <a:schemeClr val="tx1">
+                    <a:tint val="75000"/>
+                  </a:schemeClr>
+                </a:solidFill>
+                <a:latin typeface="+mj-lt"/>
+                <a:ea typeface="+mj-ea"/>
+                <a:cs typeface="+mj-cs"/>
+              </a:defRPr>
+            </a:lvl4pPr>
+            <a:lvl5pPr marL="1828800" indent="0" algn="ctr" defTabSz="457200" rtl="0" eaLnBrk="1" latinLnBrk="0" hangingPunct="1">
+              <a:spcBef>
+                <a:spcPts val="1000"/>
+              </a:spcBef>
+              <a:spcAft>
+                <a:spcPts val="0"/>
+              </a:spcAft>
+              <a:buClr>
+                <a:schemeClr val="accent1"/>
+              </a:buClr>
+              <a:buSzPct val="80000"/>
+              <a:buFont typeface="Wingdings 3" charset="2"/>
+              <a:buNone/>
+              <a:defRPr sz="1400" b="0" i="0" kern="1200">
+                <a:solidFill>
+                  <a:schemeClr val="tx1">
+                    <a:tint val="75000"/>
+                  </a:schemeClr>
+                </a:solidFill>
+                <a:latin typeface="+mj-lt"/>
+                <a:ea typeface="+mj-ea"/>
+                <a:cs typeface="+mj-cs"/>
+              </a:defRPr>
+            </a:lvl5pPr>
+            <a:lvl6pPr marL="2286000" indent="0" algn="ctr" defTabSz="457200" rtl="0" eaLnBrk="1" latinLnBrk="0" hangingPunct="1">
+              <a:spcBef>
+                <a:spcPts val="1000"/>
+              </a:spcBef>
+              <a:spcAft>
+                <a:spcPts val="0"/>
+              </a:spcAft>
+              <a:buClr>
+                <a:schemeClr val="accent1"/>
+              </a:buClr>
+              <a:buSzPct val="80000"/>
+              <a:buFont typeface="Wingdings 3" charset="2"/>
+              <a:buNone/>
+              <a:defRPr sz="1400" b="0" i="0" kern="1200">
+                <a:solidFill>
+                  <a:schemeClr val="tx1">
+                    <a:tint val="75000"/>
+                  </a:schemeClr>
+                </a:solidFill>
+                <a:latin typeface="+mj-lt"/>
+                <a:ea typeface="+mj-ea"/>
+                <a:cs typeface="+mj-cs"/>
+              </a:defRPr>
+            </a:lvl6pPr>
+            <a:lvl7pPr marL="2743200" indent="0" algn="ctr" defTabSz="457200" rtl="0" eaLnBrk="1" latinLnBrk="0" hangingPunct="1">
+              <a:spcBef>
+                <a:spcPts val="1000"/>
+              </a:spcBef>
+              <a:spcAft>
+                <a:spcPts val="0"/>
+              </a:spcAft>
+              <a:buClr>
+                <a:schemeClr val="accent1"/>
+              </a:buClr>
+              <a:buSzPct val="80000"/>
+              <a:buFont typeface="Wingdings 3" charset="2"/>
+              <a:buNone/>
+              <a:defRPr sz="1400" b="0" i="0" kern="1200">
+                <a:solidFill>
+                  <a:schemeClr val="tx1">
+                    <a:tint val="75000"/>
+                  </a:schemeClr>
+                </a:solidFill>
+                <a:latin typeface="+mj-lt"/>
+                <a:ea typeface="+mj-ea"/>
+                <a:cs typeface="+mj-cs"/>
+              </a:defRPr>
+            </a:lvl7pPr>
+            <a:lvl8pPr marL="3200400" indent="0" algn="ctr" defTabSz="457200" rtl="0" eaLnBrk="1" latinLnBrk="0" hangingPunct="1">
+              <a:spcBef>
+                <a:spcPts val="1000"/>
+              </a:spcBef>
+              <a:spcAft>
+                <a:spcPts val="0"/>
+              </a:spcAft>
+              <a:buClr>
+                <a:schemeClr val="accent1"/>
+              </a:buClr>
+              <a:buSzPct val="80000"/>
+              <a:buFont typeface="Wingdings 3" charset="2"/>
+              <a:buNone/>
+              <a:defRPr sz="1400" b="0" i="0" kern="1200">
+                <a:solidFill>
+                  <a:schemeClr val="tx1">
+                    <a:tint val="75000"/>
+                  </a:schemeClr>
+                </a:solidFill>
+                <a:latin typeface="+mj-lt"/>
+                <a:ea typeface="+mj-ea"/>
+                <a:cs typeface="+mj-cs"/>
+              </a:defRPr>
+            </a:lvl8pPr>
+            <a:lvl9pPr marL="3657600" indent="0" algn="ctr" defTabSz="457200" rtl="0" eaLnBrk="1" latinLnBrk="0" hangingPunct="1">
+              <a:spcBef>
+                <a:spcPts val="1000"/>
+              </a:spcBef>
+              <a:spcAft>
+                <a:spcPts val="0"/>
+              </a:spcAft>
+              <a:buClr>
+                <a:schemeClr val="accent1"/>
+              </a:buClr>
+              <a:buSzPct val="80000"/>
+              <a:buFont typeface="Wingdings 3" charset="2"/>
+              <a:buNone/>
+              <a:defRPr sz="1400" b="0" i="0" kern="1200">
+                <a:solidFill>
+                  <a:schemeClr val="tx1">
+                    <a:tint val="75000"/>
+                  </a:schemeClr>
+                </a:solidFill>
+                <a:latin typeface="+mj-lt"/>
+                <a:ea typeface="+mj-ea"/>
+                <a:cs typeface="+mj-cs"/>
+              </a:defRPr>
+            </a:lvl9pPr>
+          </a:lstStyle>
+          <a:p>
+            <a:pPr algn="ctr"/>
+            <a:r>
+              <a:rPr lang="en-US" sz="11500" b="1" dirty="0"/>
+              <a:t>01</a:t>
+            </a:r>
+          </a:p>
+        </p:txBody>
+      </p:sp>
       <p:pic>
         <p:nvPicPr>
-          <p:cNvPr id="11" name="Picture 10" descr="A white circle with a blue circle with a blue circle with a blue circle with a white circle with a blue circle with a blue circle with a white circle with a blue circle with a blue circle&#10;&#10;AI-generated content may be incorrect.">
+          <p:cNvPr id="4" name="Picture 3">
             <a:extLst>
               <a:ext uri="{FF2B5EF4-FFF2-40B4-BE49-F238E27FC236}">
-                <a16:creationId xmlns:a16="http://schemas.microsoft.com/office/drawing/2014/main" id="{0F598311-938F-38BB-7988-5E42EF16CBD5}"/>
+                <a16:creationId xmlns:a16="http://schemas.microsoft.com/office/drawing/2014/main" id="{D9340BB6-8185-95AC-92A3-8179751E9899}"/>
               </a:ext>
             </a:extLst>
           </p:cNvPr>
@@ -13865,8 +14527,8 @@
         </p:blipFill>
         <p:spPr>
           <a:xfrm>
-            <a:off x="3661894" y="1055718"/>
-            <a:ext cx="5675290" cy="3424467"/>
+            <a:off x="0" y="0"/>
+            <a:ext cx="5065160" cy="3226085"/>
           </a:xfrm>
           <a:prstGeom prst="rect">
             <a:avLst/>
@@ -13879,12 +14541,71 @@
           </a:effectLst>
         </p:spPr>
       </p:pic>
+      <p:pic>
+        <p:nvPicPr>
+          <p:cNvPr id="10" name="Picture 9">
+            <a:extLst>
+              <a:ext uri="{FF2B5EF4-FFF2-40B4-BE49-F238E27FC236}">
+                <a16:creationId xmlns:a16="http://schemas.microsoft.com/office/drawing/2014/main" id="{3A60BBC2-DFE3-3D7D-77C2-E41099BA84A4}"/>
+              </a:ext>
+            </a:extLst>
+          </p:cNvPr>
+          <p:cNvPicPr>
+            <a:picLocks noChangeAspect="1"/>
+          </p:cNvPicPr>
+          <p:nvPr/>
+        </p:nvPicPr>
+        <p:blipFill>
+          <a:blip r:embed="rId5"/>
+          <a:stretch>
+            <a:fillRect/>
+          </a:stretch>
+        </p:blipFill>
+        <p:spPr>
+          <a:xfrm>
+            <a:off x="10078948" y="5619964"/>
+            <a:ext cx="2150828" cy="988692"/>
+          </a:xfrm>
+          <a:prstGeom prst="rect">
+            <a:avLst/>
+          </a:prstGeom>
+          <a:solidFill>
+            <a:srgbClr val="FFFFFF">
+              <a:shade val="85000"/>
+            </a:srgbClr>
+          </a:solidFill>
+          <a:ln w="190500" cap="rnd">
+            <a:solidFill>
+              <a:srgbClr val="FFFFFF"/>
+            </a:solidFill>
+          </a:ln>
+          <a:effectLst>
+            <a:outerShdw blurRad="36195" dist="12700" dir="11400000" algn="tl" rotWithShape="0">
+              <a:srgbClr val="000000">
+                <a:alpha val="33000"/>
+              </a:srgbClr>
+            </a:outerShdw>
+          </a:effectLst>
+          <a:scene3d>
+            <a:camera prst="perspectiveContrastingLeftFacing">
+              <a:rot lat="540000" lon="2100000" rev="0"/>
+            </a:camera>
+            <a:lightRig rig="soft" dir="t"/>
+          </a:scene3d>
+          <a:sp3d contourW="12700" prstMaterial="matte">
+            <a:bevelT w="63500" h="50800"/>
+            <a:contourClr>
+              <a:srgbClr val="C0C0C0"/>
+            </a:contourClr>
+          </a:sp3d>
+        </p:spPr>
+      </p:pic>
       <p:sp>
         <p:nvSpPr>
           <p:cNvPr id="2" name="Title 1">
             <a:extLst>
               <a:ext uri="{FF2B5EF4-FFF2-40B4-BE49-F238E27FC236}">
-                <a16:creationId xmlns:a16="http://schemas.microsoft.com/office/drawing/2014/main" id="{33C9C9B5-0B44-AD56-606E-CF46AAE42647}"/>
+                <a16:creationId xmlns:a16="http://schemas.microsoft.com/office/drawing/2014/main" id="{AC7B7C93-BCED-F10C-E31D-56BDA9728641}"/>
               </a:ext>
             </a:extLst>
           </p:cNvPr>
@@ -13897,8 +14618,8 @@
         </p:nvSpPr>
         <p:spPr>
           <a:xfrm>
-            <a:off x="344498" y="575330"/>
-            <a:ext cx="7602064" cy="1266497"/>
+            <a:off x="4011986" y="30293"/>
+            <a:ext cx="4741596" cy="1266497"/>
           </a:xfrm>
         </p:spPr>
         <p:txBody>
@@ -13908,45 +14629,17 @@
           <a:lstStyle/>
           <a:p>
             <a:r>
-              <a:rPr lang="en-US" altLang="zh-CN" sz="6000" b="1" dirty="0"/>
-              <a:t>Learn Next.js</a:t>
+              <a:rPr lang="en-US" sz="6000" b="1" dirty="0"/>
+              <a:t>App Router</a:t>
             </a:r>
             <a:endParaRPr lang="ru-RU" sz="6000" b="1" dirty="0"/>
           </a:p>
         </p:txBody>
       </p:sp>
-      <p:graphicFrame>
-        <p:nvGraphicFramePr>
-          <p:cNvPr id="12" name="Diagram 11">
-            <a:extLst>
-              <a:ext uri="{FF2B5EF4-FFF2-40B4-BE49-F238E27FC236}">
-                <a16:creationId xmlns:a16="http://schemas.microsoft.com/office/drawing/2014/main" id="{0BA4EC0A-CB15-D8BB-A5A0-B712501C96D3}"/>
-              </a:ext>
-            </a:extLst>
-          </p:cNvPr>
-          <p:cNvGraphicFramePr/>
-          <p:nvPr>
-            <p:extLst>
-              <p:ext uri="{D42A27DB-BD31-4B8C-83A1-F6EECF244321}">
-                <p14:modId xmlns:p14="http://schemas.microsoft.com/office/powerpoint/2010/main" val="3974774323"/>
-              </p:ext>
-            </p:extLst>
-          </p:nvPr>
-        </p:nvGraphicFramePr>
-        <p:xfrm>
-          <a:off x="652530" y="4211392"/>
-          <a:ext cx="10985677" cy="2155063"/>
-        </p:xfrm>
-        <a:graphic>
-          <a:graphicData uri="http://schemas.openxmlformats.org/drawingml/2006/diagram">
-            <dgm:relIds xmlns:dgm="http://schemas.openxmlformats.org/drawingml/2006/diagram" xmlns:r="http://schemas.openxmlformats.org/officeDocument/2006/relationships" r:dm="rId5" r:lo="rId6" r:qs="rId7" r:cs="rId8"/>
-          </a:graphicData>
-        </a:graphic>
-      </p:graphicFrame>
     </p:spTree>
     <p:extLst>
       <p:ext uri="{BB962C8B-B14F-4D97-AF65-F5344CB8AC3E}">
-        <p14:creationId xmlns:p14="http://schemas.microsoft.com/office/powerpoint/2010/main" val="3303699240"/>
+        <p14:creationId xmlns:p14="http://schemas.microsoft.com/office/powerpoint/2010/main" val="1425094003"/>
       </p:ext>
     </p:extLst>
   </p:cSld>
@@ -13956,7 +14649,7 @@
 </p:sld>
 </file>
 
-<file path=ppt/slides/slide4.xml><?xml version="1.0" encoding="utf-8"?>
+<file path=ppt/slides/slide5.xml><?xml version="1.0" encoding="utf-8"?>
 <p:sld xmlns:a="http://schemas.openxmlformats.org/drawingml/2006/main" xmlns:r="http://schemas.openxmlformats.org/officeDocument/2006/relationships" xmlns:p="http://schemas.openxmlformats.org/presentationml/2006/main">
   <p:cSld>
     <p:spTree>
@@ -15088,12 +15781,12 @@
 </file>
 
 <file path=customXml/item1.xml><?xml version="1.0" encoding="utf-8"?>
-<p:properties xmlns:p="http://schemas.microsoft.com/office/2006/metadata/properties" xmlns:xsi="http://www.w3.org/2001/XMLSchema-instance" xmlns:pc="http://schemas.microsoft.com/office/infopath/2007/PartnerControls">
-  <documentManagement>
-    <Status xmlns="71af3243-3dd4-4a8d-8c0d-dd76da1f02a5">Not started</Status>
-    <MediaServiceKeyPoints xmlns="71af3243-3dd4-4a8d-8c0d-dd76da1f02a5" xsi:nil="true"/>
-  </documentManagement>
-</p:properties>
+<?mso-contentType ?>
+<FormTemplates xmlns="http://schemas.microsoft.com/sharepoint/v3/contenttype/forms">
+  <Display>DocumentLibraryForm</Display>
+  <Edit>DocumentLibraryForm</Edit>
+  <New>DocumentLibraryForm</New>
+</FormTemplates>
 </file>
 
 <file path=customXml/item2.xml><?xml version="1.0" encoding="utf-8"?>
@@ -15318,20 +16011,18 @@
 </file>
 
 <file path=customXml/item3.xml><?xml version="1.0" encoding="utf-8"?>
-<?mso-contentType ?>
-<FormTemplates xmlns="http://schemas.microsoft.com/sharepoint/v3/contenttype/forms">
-  <Display>DocumentLibraryForm</Display>
-  <Edit>DocumentLibraryForm</Edit>
-  <New>DocumentLibraryForm</New>
-</FormTemplates>
+<p:properties xmlns:p="http://schemas.microsoft.com/office/2006/metadata/properties" xmlns:xsi="http://www.w3.org/2001/XMLSchema-instance" xmlns:pc="http://schemas.microsoft.com/office/infopath/2007/PartnerControls">
+  <documentManagement>
+    <Status xmlns="71af3243-3dd4-4a8d-8c0d-dd76da1f02a5">Not started</Status>
+    <MediaServiceKeyPoints xmlns="71af3243-3dd4-4a8d-8c0d-dd76da1f02a5" xsi:nil="true"/>
+  </documentManagement>
+</p:properties>
 </file>
 
 <file path=customXml/itemProps1.xml><?xml version="1.0" encoding="utf-8"?>
-<ds:datastoreItem xmlns:ds="http://schemas.openxmlformats.org/officeDocument/2006/customXml" ds:itemID="{048C88F1-1664-415F-AFCE-F6CF45809817}">
+<ds:datastoreItem xmlns:ds="http://schemas.openxmlformats.org/officeDocument/2006/customXml" ds:itemID="{0D16958A-754B-4396-9457-FD7A427A37DD}">
   <ds:schemaRefs>
-    <ds:schemaRef ds:uri="http://schemas.microsoft.com/office/2006/metadata/properties"/>
-    <ds:schemaRef ds:uri="http://schemas.microsoft.com/office/infopath/2007/PartnerControls"/>
-    <ds:schemaRef ds:uri="71af3243-3dd4-4a8d-8c0d-dd76da1f02a5"/>
+    <ds:schemaRef ds:uri="http://schemas.microsoft.com/sharepoint/v3/contenttype/forms"/>
   </ds:schemaRefs>
 </ds:datastoreItem>
 </file>
@@ -15356,9 +16047,11 @@
 </file>
 
 <file path=customXml/itemProps3.xml><?xml version="1.0" encoding="utf-8"?>
-<ds:datastoreItem xmlns:ds="http://schemas.openxmlformats.org/officeDocument/2006/customXml" ds:itemID="{0D16958A-754B-4396-9457-FD7A427A37DD}">
+<ds:datastoreItem xmlns:ds="http://schemas.openxmlformats.org/officeDocument/2006/customXml" ds:itemID="{048C88F1-1664-415F-AFCE-F6CF45809817}">
   <ds:schemaRefs>
-    <ds:schemaRef ds:uri="http://schemas.microsoft.com/sharepoint/v3/contenttype/forms"/>
+    <ds:schemaRef ds:uri="http://schemas.microsoft.com/office/2006/metadata/properties"/>
+    <ds:schemaRef ds:uri="http://schemas.microsoft.com/office/infopath/2007/PartnerControls"/>
+    <ds:schemaRef ds:uri="71af3243-3dd4-4a8d-8c0d-dd76da1f02a5"/>
   </ds:schemaRefs>
 </ds:datastoreItem>
 </file>
--- a/learn_nextjs/2_App_Router/App_Router.pptx
+++ b/learn_nextjs/2_App_Router/App_Router.pptx
@@ -5,10 +5,10 @@
     <p:sldMasterId id="2147483648" r:id="rId4"/>
   </p:sldMasterIdLst>
   <p:notesMasterIdLst>
-    <p:notesMasterId r:id="rId10"/>
+    <p:notesMasterId r:id="rId11"/>
   </p:notesMasterIdLst>
   <p:handoutMasterIdLst>
-    <p:handoutMasterId r:id="rId11"/>
+    <p:handoutMasterId r:id="rId12"/>
   </p:handoutMasterIdLst>
   <p:sldIdLst>
     <p:sldId id="276" r:id="rId5"/>
@@ -16,6 +16,7 @@
     <p:sldId id="257" r:id="rId7"/>
     <p:sldId id="277" r:id="rId8"/>
     <p:sldId id="270" r:id="rId9"/>
+    <p:sldId id="278" r:id="rId10"/>
   </p:sldIdLst>
   <p:sldSz cx="12192000" cy="6858000"/>
   <p:notesSz cx="6858000" cy="9144000"/>
@@ -884,6 +885,753 @@
 </file>
 
 <file path=ppt/diagrams/colors2.xml><?xml version="1.0" encoding="utf-8"?>
+<dgm:colorsDef xmlns:dgm="http://schemas.openxmlformats.org/drawingml/2006/diagram" xmlns:a="http://schemas.openxmlformats.org/drawingml/2006/main" uniqueId="urn:microsoft.com/office/officeart/2005/8/colors/accent1_2">
+  <dgm:title val=""/>
+  <dgm:desc val=""/>
+  <dgm:catLst>
+    <dgm:cat type="accent1" pri="11200"/>
+  </dgm:catLst>
+  <dgm:styleLbl name="node0">
+    <dgm:fillClrLst meth="repeat">
+      <a:schemeClr val="accent1"/>
+    </dgm:fillClrLst>
+    <dgm:linClrLst meth="repeat">
+      <a:schemeClr val="lt1"/>
+    </dgm:linClrLst>
+    <dgm:effectClrLst/>
+    <dgm:txLinClrLst/>
+    <dgm:txFillClrLst/>
+    <dgm:txEffectClrLst/>
+  </dgm:styleLbl>
+  <dgm:styleLbl name="alignNode1">
+    <dgm:fillClrLst meth="repeat">
+      <a:schemeClr val="accent1"/>
+    </dgm:fillClrLst>
+    <dgm:linClrLst meth="repeat">
+      <a:schemeClr val="accent1"/>
+    </dgm:linClrLst>
+    <dgm:effectClrLst/>
+    <dgm:txLinClrLst/>
+    <dgm:txFillClrLst/>
+    <dgm:txEffectClrLst/>
+  </dgm:styleLbl>
+  <dgm:styleLbl name="node1">
+    <dgm:fillClrLst meth="repeat">
+      <a:schemeClr val="accent1"/>
+    </dgm:fillClrLst>
+    <dgm:linClrLst meth="repeat">
+      <a:schemeClr val="lt1"/>
+    </dgm:linClrLst>
+    <dgm:effectClrLst/>
+    <dgm:txLinClrLst/>
+    <dgm:txFillClrLst/>
+    <dgm:txEffectClrLst/>
+  </dgm:styleLbl>
+  <dgm:styleLbl name="lnNode1">
+    <dgm:fillClrLst meth="repeat">
+      <a:schemeClr val="accent1"/>
+    </dgm:fillClrLst>
+    <dgm:linClrLst meth="repeat">
+      <a:schemeClr val="lt1"/>
+    </dgm:linClrLst>
+    <dgm:effectClrLst/>
+    <dgm:txLinClrLst/>
+    <dgm:txFillClrLst/>
+    <dgm:txEffectClrLst/>
+  </dgm:styleLbl>
+  <dgm:styleLbl name="vennNode1">
+    <dgm:fillClrLst meth="repeat">
+      <a:schemeClr val="accent1">
+        <a:alpha val="50000"/>
+      </a:schemeClr>
+    </dgm:fillClrLst>
+    <dgm:linClrLst meth="repeat">
+      <a:schemeClr val="lt1"/>
+    </dgm:linClrLst>
+    <dgm:effectClrLst/>
+    <dgm:txLinClrLst/>
+    <dgm:txFillClrLst/>
+    <dgm:txEffectClrLst/>
+  </dgm:styleLbl>
+  <dgm:styleLbl name="node2">
+    <dgm:fillClrLst meth="repeat">
+      <a:schemeClr val="accent1"/>
+    </dgm:fillClrLst>
+    <dgm:linClrLst meth="repeat">
+      <a:schemeClr val="lt1"/>
+    </dgm:linClrLst>
+    <dgm:effectClrLst/>
+    <dgm:txLinClrLst/>
+    <dgm:txFillClrLst/>
+    <dgm:txEffectClrLst/>
+  </dgm:styleLbl>
+  <dgm:styleLbl name="node3">
+    <dgm:fillClrLst meth="repeat">
+      <a:schemeClr val="accent1"/>
+    </dgm:fillClrLst>
+    <dgm:linClrLst meth="repeat">
+      <a:schemeClr val="lt1"/>
+    </dgm:linClrLst>
+    <dgm:effectClrLst/>
+    <dgm:txLinClrLst/>
+    <dgm:txFillClrLst/>
+    <dgm:txEffectClrLst/>
+  </dgm:styleLbl>
+  <dgm:styleLbl name="node4">
+    <dgm:fillClrLst meth="repeat">
+      <a:schemeClr val="accent1"/>
+    </dgm:fillClrLst>
+    <dgm:linClrLst meth="repeat">
+      <a:schemeClr val="lt1"/>
+    </dgm:linClrLst>
+    <dgm:effectClrLst/>
+    <dgm:txLinClrLst/>
+    <dgm:txFillClrLst/>
+    <dgm:txEffectClrLst/>
+  </dgm:styleLbl>
+  <dgm:styleLbl name="fgImgPlace1">
+    <dgm:fillClrLst meth="repeat">
+      <a:schemeClr val="accent1">
+        <a:tint val="50000"/>
+      </a:schemeClr>
+    </dgm:fillClrLst>
+    <dgm:linClrLst meth="repeat">
+      <a:schemeClr val="lt1"/>
+    </dgm:linClrLst>
+    <dgm:effectClrLst/>
+    <dgm:txLinClrLst/>
+    <dgm:txFillClrLst meth="repeat">
+      <a:schemeClr val="lt1"/>
+    </dgm:txFillClrLst>
+    <dgm:txEffectClrLst/>
+  </dgm:styleLbl>
+  <dgm:styleLbl name="alignImgPlace1">
+    <dgm:fillClrLst meth="repeat">
+      <a:schemeClr val="accent1">
+        <a:tint val="50000"/>
+      </a:schemeClr>
+    </dgm:fillClrLst>
+    <dgm:linClrLst meth="repeat">
+      <a:schemeClr val="lt1"/>
+    </dgm:linClrLst>
+    <dgm:effectClrLst/>
+    <dgm:txLinClrLst/>
+    <dgm:txFillClrLst meth="repeat">
+      <a:schemeClr val="lt1"/>
+    </dgm:txFillClrLst>
+    <dgm:txEffectClrLst/>
+  </dgm:styleLbl>
+  <dgm:styleLbl name="bgImgPlace1">
+    <dgm:fillClrLst meth="repeat">
+      <a:schemeClr val="accent1">
+        <a:tint val="50000"/>
+      </a:schemeClr>
+    </dgm:fillClrLst>
+    <dgm:linClrLst meth="repeat">
+      <a:schemeClr val="lt1"/>
+    </dgm:linClrLst>
+    <dgm:effectClrLst/>
+    <dgm:txLinClrLst/>
+    <dgm:txFillClrLst meth="repeat">
+      <a:schemeClr val="lt1"/>
+    </dgm:txFillClrLst>
+    <dgm:txEffectClrLst/>
+  </dgm:styleLbl>
+  <dgm:styleLbl name="sibTrans2D1">
+    <dgm:fillClrLst meth="repeat">
+      <a:schemeClr val="accent1">
+        <a:tint val="60000"/>
+      </a:schemeClr>
+    </dgm:fillClrLst>
+    <dgm:linClrLst meth="repeat">
+      <a:schemeClr val="accent1">
+        <a:tint val="60000"/>
+      </a:schemeClr>
+    </dgm:linClrLst>
+    <dgm:effectClrLst/>
+    <dgm:txLinClrLst/>
+    <dgm:txFillClrLst/>
+    <dgm:txEffectClrLst/>
+  </dgm:styleLbl>
+  <dgm:styleLbl name="fgSibTrans2D1">
+    <dgm:fillClrLst meth="repeat">
+      <a:schemeClr val="accent1">
+        <a:tint val="60000"/>
+      </a:schemeClr>
+    </dgm:fillClrLst>
+    <dgm:linClrLst meth="repeat">
+      <a:schemeClr val="accent1">
+        <a:tint val="60000"/>
+      </a:schemeClr>
+    </dgm:linClrLst>
+    <dgm:effectClrLst/>
+    <dgm:txLinClrLst/>
+    <dgm:txFillClrLst/>
+    <dgm:txEffectClrLst/>
+  </dgm:styleLbl>
+  <dgm:styleLbl name="bgSibTrans2D1">
+    <dgm:fillClrLst meth="repeat">
+      <a:schemeClr val="accent1">
+        <a:tint val="60000"/>
+      </a:schemeClr>
+    </dgm:fillClrLst>
+    <dgm:linClrLst meth="repeat">
+      <a:schemeClr val="accent1">
+        <a:tint val="60000"/>
+      </a:schemeClr>
+    </dgm:linClrLst>
+    <dgm:effectClrLst/>
+    <dgm:txLinClrLst/>
+    <dgm:txFillClrLst/>
+    <dgm:txEffectClrLst/>
+  </dgm:styleLbl>
+  <dgm:styleLbl name="sibTrans1D1">
+    <dgm:fillClrLst meth="repeat">
+      <a:schemeClr val="accent1"/>
+    </dgm:fillClrLst>
+    <dgm:linClrLst meth="repeat">
+      <a:schemeClr val="accent1"/>
+    </dgm:linClrLst>
+    <dgm:effectClrLst/>
+    <dgm:txLinClrLst/>
+    <dgm:txFillClrLst meth="repeat">
+      <a:schemeClr val="tx1"/>
+    </dgm:txFillClrLst>
+    <dgm:txEffectClrLst/>
+  </dgm:styleLbl>
+  <dgm:styleLbl name="callout">
+    <dgm:fillClrLst meth="repeat">
+      <a:schemeClr val="accent1"/>
+    </dgm:fillClrLst>
+    <dgm:linClrLst meth="repeat">
+      <a:schemeClr val="accent1">
+        <a:tint val="50000"/>
+      </a:schemeClr>
+    </dgm:linClrLst>
+    <dgm:effectClrLst/>
+    <dgm:txLinClrLst/>
+    <dgm:txFillClrLst meth="repeat">
+      <a:schemeClr val="tx1"/>
+    </dgm:txFillClrLst>
+    <dgm:txEffectClrLst/>
+  </dgm:styleLbl>
+  <dgm:styleLbl name="asst0">
+    <dgm:fillClrLst meth="repeat">
+      <a:schemeClr val="accent1"/>
+    </dgm:fillClrLst>
+    <dgm:linClrLst meth="repeat">
+      <a:schemeClr val="lt1"/>
+    </dgm:linClrLst>
+    <dgm:effectClrLst/>
+    <dgm:txLinClrLst/>
+    <dgm:txFillClrLst/>
+    <dgm:txEffectClrLst/>
+  </dgm:styleLbl>
+  <dgm:styleLbl name="asst1">
+    <dgm:fillClrLst meth="repeat">
+      <a:schemeClr val="accent1"/>
+    </dgm:fillClrLst>
+    <dgm:linClrLst meth="repeat">
+      <a:schemeClr val="lt1"/>
+    </dgm:linClrLst>
+    <dgm:effectClrLst/>
+    <dgm:txLinClrLst/>
+    <dgm:txFillClrLst/>
+    <dgm:txEffectClrLst/>
+  </dgm:styleLbl>
+  <dgm:styleLbl name="asst2">
+    <dgm:fillClrLst meth="repeat">
+      <a:schemeClr val="accent1"/>
+    </dgm:fillClrLst>
+    <dgm:linClrLst meth="repeat">
+      <a:schemeClr val="lt1"/>
+    </dgm:linClrLst>
+    <dgm:effectClrLst/>
+    <dgm:txLinClrLst/>
+    <dgm:txFillClrLst/>
+    <dgm:txEffectClrLst/>
+  </dgm:styleLbl>
+  <dgm:styleLbl name="asst3">
+    <dgm:fillClrLst meth="repeat">
+      <a:schemeClr val="accent1"/>
+    </dgm:fillClrLst>
+    <dgm:linClrLst meth="repeat">
+      <a:schemeClr val="lt1"/>
+    </dgm:linClrLst>
+    <dgm:effectClrLst/>
+    <dgm:txLinClrLst/>
+    <dgm:txFillClrLst/>
+    <dgm:txEffectClrLst/>
+  </dgm:styleLbl>
+  <dgm:styleLbl name="asst4">
+    <dgm:fillClrLst meth="repeat">
+      <a:schemeClr val="accent1"/>
+    </dgm:fillClrLst>
+    <dgm:linClrLst meth="repeat">
+      <a:schemeClr val="lt1"/>
+    </dgm:linClrLst>
+    <dgm:effectClrLst/>
+    <dgm:txLinClrLst/>
+    <dgm:txFillClrLst/>
+    <dgm:txEffectClrLst/>
+  </dgm:styleLbl>
+  <dgm:styleLbl name="parChTrans2D1">
+    <dgm:fillClrLst meth="repeat">
+      <a:schemeClr val="accent1">
+        <a:tint val="60000"/>
+      </a:schemeClr>
+    </dgm:fillClrLst>
+    <dgm:linClrLst meth="repeat">
+      <a:schemeClr val="accent1">
+        <a:tint val="60000"/>
+      </a:schemeClr>
+    </dgm:linClrLst>
+    <dgm:effectClrLst/>
+    <dgm:txLinClrLst/>
+    <dgm:txFillClrLst meth="repeat">
+      <a:schemeClr val="lt1"/>
+    </dgm:txFillClrLst>
+    <dgm:txEffectClrLst/>
+  </dgm:styleLbl>
+  <dgm:styleLbl name="parChTrans2D2">
+    <dgm:fillClrLst meth="repeat">
+      <a:schemeClr val="accent1"/>
+    </dgm:fillClrLst>
+    <dgm:linClrLst meth="repeat">
+      <a:schemeClr val="accent1"/>
+    </dgm:linClrLst>
+    <dgm:effectClrLst/>
+    <dgm:txLinClrLst/>
+    <dgm:txFillClrLst meth="repeat">
+      <a:schemeClr val="lt1"/>
+    </dgm:txFillClrLst>
+    <dgm:txEffectClrLst/>
+  </dgm:styleLbl>
+  <dgm:styleLbl name="parChTrans2D3">
+    <dgm:fillClrLst meth="repeat">
+      <a:schemeClr val="accent1"/>
+    </dgm:fillClrLst>
+    <dgm:linClrLst meth="repeat">
+      <a:schemeClr val="accent1"/>
+    </dgm:linClrLst>
+    <dgm:effectClrLst/>
+    <dgm:txLinClrLst/>
+    <dgm:txFillClrLst meth="repeat">
+      <a:schemeClr val="lt1"/>
+    </dgm:txFillClrLst>
+    <dgm:txEffectClrLst/>
+  </dgm:styleLbl>
+  <dgm:styleLbl name="parChTrans2D4">
+    <dgm:fillClrLst meth="repeat">
+      <a:schemeClr val="accent1"/>
+    </dgm:fillClrLst>
+    <dgm:linClrLst meth="repeat">
+      <a:schemeClr val="accent1"/>
+    </dgm:linClrLst>
+    <dgm:effectClrLst/>
+    <dgm:txLinClrLst/>
+    <dgm:txFillClrLst meth="repeat">
+      <a:schemeClr val="lt1"/>
+    </dgm:txFillClrLst>
+    <dgm:txEffectClrLst/>
+  </dgm:styleLbl>
+  <dgm:styleLbl name="parChTrans1D1">
+    <dgm:fillClrLst meth="repeat">
+      <a:schemeClr val="accent1"/>
+    </dgm:fillClrLst>
+    <dgm:linClrLst meth="repeat">
+      <a:schemeClr val="accent1">
+        <a:shade val="60000"/>
+      </a:schemeClr>
+    </dgm:linClrLst>
+    <dgm:effectClrLst/>
+    <dgm:txLinClrLst/>
+    <dgm:txFillClrLst meth="repeat">
+      <a:schemeClr val="tx1"/>
+    </dgm:txFillClrLst>
+    <dgm:txEffectClrLst/>
+  </dgm:styleLbl>
+  <dgm:styleLbl name="parChTrans1D2">
+    <dgm:fillClrLst meth="repeat">
+      <a:schemeClr val="accent1"/>
+    </dgm:fillClrLst>
+    <dgm:linClrLst meth="repeat">
+      <a:schemeClr val="accent1">
+        <a:shade val="60000"/>
+      </a:schemeClr>
+    </dgm:linClrLst>
+    <dgm:effectClrLst/>
+    <dgm:txLinClrLst/>
+    <dgm:txFillClrLst meth="repeat">
+      <a:schemeClr val="tx1"/>
+    </dgm:txFillClrLst>
+    <dgm:txEffectClrLst/>
+  </dgm:styleLbl>
+  <dgm:styleLbl name="parChTrans1D3">
+    <dgm:fillClrLst meth="repeat">
+      <a:schemeClr val="accent1"/>
+    </dgm:fillClrLst>
+    <dgm:linClrLst meth="repeat">
+      <a:schemeClr val="accent1">
+        <a:shade val="80000"/>
+      </a:schemeClr>
+    </dgm:linClrLst>
+    <dgm:effectClrLst/>
+    <dgm:txLinClrLst/>
+    <dgm:txFillClrLst meth="repeat">
+      <a:schemeClr val="tx1"/>
+    </dgm:txFillClrLst>
+    <dgm:txEffectClrLst/>
+  </dgm:styleLbl>
+  <dgm:styleLbl name="parChTrans1D4">
+    <dgm:fillClrLst meth="repeat">
+      <a:schemeClr val="accent1"/>
+    </dgm:fillClrLst>
+    <dgm:linClrLst meth="repeat">
+      <a:schemeClr val="accent1">
+        <a:shade val="80000"/>
+      </a:schemeClr>
+    </dgm:linClrLst>
+    <dgm:effectClrLst/>
+    <dgm:txLinClrLst/>
+    <dgm:txFillClrLst meth="repeat">
+      <a:schemeClr val="tx1"/>
+    </dgm:txFillClrLst>
+    <dgm:txEffectClrLst/>
+  </dgm:styleLbl>
+  <dgm:styleLbl name="fgAcc1">
+    <dgm:fillClrLst meth="repeat">
+      <a:schemeClr val="lt1">
+        <a:alpha val="90000"/>
+      </a:schemeClr>
+    </dgm:fillClrLst>
+    <dgm:linClrLst meth="repeat">
+      <a:schemeClr val="accent1"/>
+    </dgm:linClrLst>
+    <dgm:effectClrLst/>
+    <dgm:txLinClrLst/>
+    <dgm:txFillClrLst meth="repeat">
+      <a:schemeClr val="dk1"/>
+    </dgm:txFillClrLst>
+    <dgm:txEffectClrLst/>
+  </dgm:styleLbl>
+  <dgm:styleLbl name="conFgAcc1">
+    <dgm:fillClrLst meth="repeat">
+      <a:schemeClr val="lt1">
+        <a:alpha val="90000"/>
+      </a:schemeClr>
+    </dgm:fillClrLst>
+    <dgm:linClrLst meth="repeat">
+      <a:schemeClr val="accent1"/>
+    </dgm:linClrLst>
+    <dgm:effectClrLst/>
+    <dgm:txLinClrLst/>
+    <dgm:txFillClrLst meth="repeat">
+      <a:schemeClr val="dk1"/>
+    </dgm:txFillClrLst>
+    <dgm:txEffectClrLst/>
+  </dgm:styleLbl>
+  <dgm:styleLbl name="alignAcc1">
+    <dgm:fillClrLst meth="repeat">
+      <a:schemeClr val="lt1">
+        <a:alpha val="90000"/>
+      </a:schemeClr>
+    </dgm:fillClrLst>
+    <dgm:linClrLst meth="repeat">
+      <a:schemeClr val="accent1"/>
+    </dgm:linClrLst>
+    <dgm:effectClrLst/>
+    <dgm:txLinClrLst/>
+    <dgm:txFillClrLst meth="repeat">
+      <a:schemeClr val="dk1"/>
+    </dgm:txFillClrLst>
+    <dgm:txEffectClrLst/>
+  </dgm:styleLbl>
+  <dgm:styleLbl name="trAlignAcc1">
+    <dgm:fillClrLst meth="repeat">
+      <a:schemeClr val="lt1">
+        <a:alpha val="40000"/>
+      </a:schemeClr>
+    </dgm:fillClrLst>
+    <dgm:linClrLst meth="repeat">
+      <a:schemeClr val="accent1"/>
+    </dgm:linClrLst>
+    <dgm:effectClrLst/>
+    <dgm:txLinClrLst/>
+    <dgm:txFillClrLst meth="repeat">
+      <a:schemeClr val="dk1"/>
+    </dgm:txFillClrLst>
+    <dgm:txEffectClrLst/>
+  </dgm:styleLbl>
+  <dgm:styleLbl name="bgAcc1">
+    <dgm:fillClrLst meth="repeat">
+      <a:schemeClr val="lt1">
+        <a:alpha val="90000"/>
+      </a:schemeClr>
+    </dgm:fillClrLst>
+    <dgm:linClrLst meth="repeat">
+      <a:schemeClr val="accent1"/>
+    </dgm:linClrLst>
+    <dgm:effectClrLst/>
+    <dgm:txLinClrLst/>
+    <dgm:txFillClrLst meth="repeat">
+      <a:schemeClr val="dk1"/>
+    </dgm:txFillClrLst>
+    <dgm:txEffectClrLst/>
+  </dgm:styleLbl>
+  <dgm:styleLbl name="solidFgAcc1">
+    <dgm:fillClrLst meth="repeat">
+      <a:schemeClr val="lt1"/>
+    </dgm:fillClrLst>
+    <dgm:linClrLst meth="repeat">
+      <a:schemeClr val="accent1"/>
+    </dgm:linClrLst>
+    <dgm:effectClrLst/>
+    <dgm:txLinClrLst/>
+    <dgm:txFillClrLst meth="repeat">
+      <a:schemeClr val="dk1"/>
+    </dgm:txFillClrLst>
+    <dgm:txEffectClrLst/>
+  </dgm:styleLbl>
+  <dgm:styleLbl name="solidAlignAcc1">
+    <dgm:fillClrLst meth="repeat">
+      <a:schemeClr val="lt1"/>
+    </dgm:fillClrLst>
+    <dgm:linClrLst meth="repeat">
+      <a:schemeClr val="accent1"/>
+    </dgm:linClrLst>
+    <dgm:effectClrLst/>
+    <dgm:txLinClrLst/>
+    <dgm:txFillClrLst meth="repeat">
+      <a:schemeClr val="dk1"/>
+    </dgm:txFillClrLst>
+    <dgm:txEffectClrLst/>
+  </dgm:styleLbl>
+  <dgm:styleLbl name="solidBgAcc1">
+    <dgm:fillClrLst meth="repeat">
+      <a:schemeClr val="lt1"/>
+    </dgm:fillClrLst>
+    <dgm:linClrLst meth="repeat">
+      <a:schemeClr val="accent1"/>
+    </dgm:linClrLst>
+    <dgm:effectClrLst/>
+    <dgm:txLinClrLst/>
+    <dgm:txFillClrLst meth="repeat">
+      <a:schemeClr val="dk1"/>
+    </dgm:txFillClrLst>
+    <dgm:txEffectClrLst/>
+  </dgm:styleLbl>
+  <dgm:styleLbl name="fgAccFollowNode1">
+    <dgm:fillClrLst meth="repeat">
+      <a:schemeClr val="accent1">
+        <a:alpha val="90000"/>
+        <a:tint val="40000"/>
+      </a:schemeClr>
+    </dgm:fillClrLst>
+    <dgm:linClrLst meth="repeat">
+      <a:schemeClr val="accent1">
+        <a:alpha val="90000"/>
+        <a:tint val="40000"/>
+      </a:schemeClr>
+    </dgm:linClrLst>
+    <dgm:effectClrLst/>
+    <dgm:txLinClrLst/>
+    <dgm:txFillClrLst meth="repeat">
+      <a:schemeClr val="dk1"/>
+    </dgm:txFillClrLst>
+    <dgm:txEffectClrLst/>
+  </dgm:styleLbl>
+  <dgm:styleLbl name="alignAccFollowNode1">
+    <dgm:fillClrLst meth="repeat">
+      <a:schemeClr val="accent1">
+        <a:alpha val="90000"/>
+        <a:tint val="40000"/>
+      </a:schemeClr>
+    </dgm:fillClrLst>
+    <dgm:linClrLst meth="repeat">
+      <a:schemeClr val="accent1">
+        <a:alpha val="90000"/>
+        <a:tint val="40000"/>
+      </a:schemeClr>
+    </dgm:linClrLst>
+    <dgm:effectClrLst/>
+    <dgm:txLinClrLst/>
+    <dgm:txFillClrLst meth="repeat">
+      <a:schemeClr val="dk1"/>
+    </dgm:txFillClrLst>
+    <dgm:txEffectClrLst/>
+  </dgm:styleLbl>
+  <dgm:styleLbl name="bgAccFollowNode1">
+    <dgm:fillClrLst meth="repeat">
+      <a:schemeClr val="accent1">
+        <a:alpha val="90000"/>
+        <a:tint val="40000"/>
+      </a:schemeClr>
+    </dgm:fillClrLst>
+    <dgm:linClrLst meth="repeat">
+      <a:schemeClr val="accent1">
+        <a:alpha val="90000"/>
+        <a:tint val="40000"/>
+      </a:schemeClr>
+    </dgm:linClrLst>
+    <dgm:effectClrLst/>
+    <dgm:txLinClrLst/>
+    <dgm:txFillClrLst meth="repeat">
+      <a:schemeClr val="dk1"/>
+    </dgm:txFillClrLst>
+    <dgm:txEffectClrLst/>
+  </dgm:styleLbl>
+  <dgm:styleLbl name="fgAcc0">
+    <dgm:fillClrLst meth="repeat">
+      <a:schemeClr val="lt1">
+        <a:alpha val="90000"/>
+      </a:schemeClr>
+    </dgm:fillClrLst>
+    <dgm:linClrLst meth="repeat">
+      <a:schemeClr val="accent1"/>
+    </dgm:linClrLst>
+    <dgm:effectClrLst/>
+    <dgm:txLinClrLst/>
+    <dgm:txFillClrLst meth="repeat">
+      <a:schemeClr val="dk1"/>
+    </dgm:txFillClrLst>
+    <dgm:txEffectClrLst/>
+  </dgm:styleLbl>
+  <dgm:styleLbl name="fgAcc2">
+    <dgm:fillClrLst meth="repeat">
+      <a:schemeClr val="lt1">
+        <a:alpha val="90000"/>
+      </a:schemeClr>
+    </dgm:fillClrLst>
+    <dgm:linClrLst meth="repeat">
+      <a:schemeClr val="accent1"/>
+    </dgm:linClrLst>
+    <dgm:effectClrLst/>
+    <dgm:txLinClrLst/>
+    <dgm:txFillClrLst meth="repeat">
+      <a:schemeClr val="dk1"/>
+    </dgm:txFillClrLst>
+    <dgm:txEffectClrLst/>
+  </dgm:styleLbl>
+  <dgm:styleLbl name="fgAcc3">
+    <dgm:fillClrLst meth="repeat">
+      <a:schemeClr val="lt1">
+        <a:alpha val="90000"/>
+      </a:schemeClr>
+    </dgm:fillClrLst>
+    <dgm:linClrLst meth="repeat">
+      <a:schemeClr val="accent1"/>
+    </dgm:linClrLst>
+    <dgm:effectClrLst/>
+    <dgm:txLinClrLst/>
+    <dgm:txFillClrLst meth="repeat">
+      <a:schemeClr val="dk1"/>
+    </dgm:txFillClrLst>
+    <dgm:txEffectClrLst/>
+  </dgm:styleLbl>
+  <dgm:styleLbl name="fgAcc4">
+    <dgm:fillClrLst meth="repeat">
+      <a:schemeClr val="lt1">
+        <a:alpha val="90000"/>
+      </a:schemeClr>
+    </dgm:fillClrLst>
+    <dgm:linClrLst meth="repeat">
+      <a:schemeClr val="accent1"/>
+    </dgm:linClrLst>
+    <dgm:effectClrLst/>
+    <dgm:txLinClrLst/>
+    <dgm:txFillClrLst meth="repeat">
+      <a:schemeClr val="dk1"/>
+    </dgm:txFillClrLst>
+    <dgm:txEffectClrLst/>
+  </dgm:styleLbl>
+  <dgm:styleLbl name="bgShp">
+    <dgm:fillClrLst meth="repeat">
+      <a:schemeClr val="accent1">
+        <a:tint val="40000"/>
+      </a:schemeClr>
+    </dgm:fillClrLst>
+    <dgm:linClrLst meth="repeat">
+      <a:schemeClr val="accent1"/>
+    </dgm:linClrLst>
+    <dgm:effectClrLst/>
+    <dgm:txLinClrLst/>
+    <dgm:txFillClrLst meth="repeat">
+      <a:schemeClr val="dk1"/>
+    </dgm:txFillClrLst>
+    <dgm:txEffectClrLst/>
+  </dgm:styleLbl>
+  <dgm:styleLbl name="dkBgShp">
+    <dgm:fillClrLst meth="repeat">
+      <a:schemeClr val="accent1">
+        <a:shade val="80000"/>
+      </a:schemeClr>
+    </dgm:fillClrLst>
+    <dgm:linClrLst meth="repeat">
+      <a:schemeClr val="accent1"/>
+    </dgm:linClrLst>
+    <dgm:effectClrLst/>
+    <dgm:txLinClrLst/>
+    <dgm:txFillClrLst meth="repeat">
+      <a:schemeClr val="lt1"/>
+    </dgm:txFillClrLst>
+    <dgm:txEffectClrLst/>
+  </dgm:styleLbl>
+  <dgm:styleLbl name="trBgShp">
+    <dgm:fillClrLst meth="repeat">
+      <a:schemeClr val="accent1">
+        <a:tint val="50000"/>
+        <a:alpha val="40000"/>
+      </a:schemeClr>
+    </dgm:fillClrLst>
+    <dgm:linClrLst meth="repeat">
+      <a:schemeClr val="accent1"/>
+    </dgm:linClrLst>
+    <dgm:effectClrLst/>
+    <dgm:txLinClrLst/>
+    <dgm:txFillClrLst meth="repeat">
+      <a:schemeClr val="lt1"/>
+    </dgm:txFillClrLst>
+    <dgm:txEffectClrLst/>
+  </dgm:styleLbl>
+  <dgm:styleLbl name="fgShp">
+    <dgm:fillClrLst meth="repeat">
+      <a:schemeClr val="accent1">
+        <a:tint val="60000"/>
+      </a:schemeClr>
+    </dgm:fillClrLst>
+    <dgm:linClrLst meth="repeat">
+      <a:schemeClr val="lt1"/>
+    </dgm:linClrLst>
+    <dgm:effectClrLst/>
+    <dgm:txLinClrLst/>
+    <dgm:txFillClrLst meth="repeat">
+      <a:schemeClr val="dk1"/>
+    </dgm:txFillClrLst>
+    <dgm:txEffectClrLst/>
+  </dgm:styleLbl>
+  <dgm:styleLbl name="revTx">
+    <dgm:fillClrLst meth="repeat">
+      <a:schemeClr val="lt1">
+        <a:alpha val="0"/>
+      </a:schemeClr>
+    </dgm:fillClrLst>
+    <dgm:linClrLst meth="repeat">
+      <a:schemeClr val="dk1">
+        <a:alpha val="0"/>
+      </a:schemeClr>
+    </dgm:linClrLst>
+    <dgm:effectClrLst/>
+    <dgm:txLinClrLst/>
+    <dgm:txFillClrLst meth="repeat">
+      <a:schemeClr val="tx1"/>
+    </dgm:txFillClrLst>
+    <dgm:txEffectClrLst/>
+  </dgm:styleLbl>
+</dgm:colorsDef>
+</file>
+
+<file path=ppt/diagrams/colors3.xml><?xml version="1.0" encoding="utf-8"?>
 <dgm:colorsDef xmlns:dgm="http://schemas.openxmlformats.org/drawingml/2006/diagram" xmlns:a="http://schemas.openxmlformats.org/drawingml/2006/main" uniqueId="urn:microsoft.com/office/officeart/2005/8/colors/accent1_2">
   <dgm:title val=""/>
   <dgm:desc val=""/>
@@ -2032,6 +2780,317 @@
 </file>
 
 <file path=ppt/diagrams/data2.xml><?xml version="1.0" encoding="utf-8"?>
+<dgm:dataModel xmlns:dgm="http://schemas.openxmlformats.org/drawingml/2006/diagram" xmlns:a="http://schemas.openxmlformats.org/drawingml/2006/main">
+  <dgm:ptLst>
+    <dgm:pt modelId="{1BAF38FA-668C-42FF-833B-8125D0660C5A}" type="doc">
+      <dgm:prSet loTypeId="urn:microsoft.com/office/officeart/2005/8/layout/hChevron3" loCatId="process" qsTypeId="urn:microsoft.com/office/officeart/2005/8/quickstyle/simple1" qsCatId="simple" csTypeId="urn:microsoft.com/office/officeart/2005/8/colors/accent1_2" csCatId="accent1" phldr="1"/>
+      <dgm:spPr/>
+      <dgm:t>
+        <a:bodyPr/>
+        <a:lstStyle/>
+        <a:p>
+          <a:endParaRPr lang="en-US"/>
+        </a:p>
+      </dgm:t>
+    </dgm:pt>
+    <dgm:pt modelId="{02F2DEB5-04B2-43B0-AE1F-484092092F8C}">
+      <dgm:prSet phldrT="[Text]" phldr="0"/>
+      <dgm:spPr>
+        <a:ln>
+          <a:solidFill>
+            <a:schemeClr val="accent6">
+              <a:lumMod val="75000"/>
+            </a:schemeClr>
+          </a:solidFill>
+        </a:ln>
+      </dgm:spPr>
+      <dgm:t>
+        <a:bodyPr/>
+        <a:lstStyle/>
+        <a:p>
+          <a:endParaRPr lang="en-US"/>
+        </a:p>
+      </dgm:t>
+    </dgm:pt>
+    <dgm:pt modelId="{086CFFA7-5016-4BB1-BF31-ADB78F91B03E}" type="parTrans" cxnId="{CFE9B22D-431F-42D5-A9DD-A34070B50E6D}">
+      <dgm:prSet/>
+      <dgm:spPr/>
+      <dgm:t>
+        <a:bodyPr/>
+        <a:lstStyle/>
+        <a:p>
+          <a:endParaRPr lang="en-US"/>
+        </a:p>
+      </dgm:t>
+    </dgm:pt>
+    <dgm:pt modelId="{98B402DD-A062-43D3-B135-4A9AE401840E}" type="sibTrans" cxnId="{CFE9B22D-431F-42D5-A9DD-A34070B50E6D}">
+      <dgm:prSet/>
+      <dgm:spPr/>
+      <dgm:t>
+        <a:bodyPr/>
+        <a:lstStyle/>
+        <a:p>
+          <a:endParaRPr lang="en-US"/>
+        </a:p>
+      </dgm:t>
+    </dgm:pt>
+    <dgm:pt modelId="{3F8A6D25-EC33-4E79-9F36-36771A974919}">
+      <dgm:prSet phldrT="[Text]" phldr="0" custT="1"/>
+      <dgm:spPr>
+        <a:solidFill>
+          <a:srgbClr val="ACD433">
+            <a:hueOff val="0"/>
+            <a:satOff val="0"/>
+            <a:lumOff val="0"/>
+            <a:alphaOff val="0"/>
+          </a:srgbClr>
+        </a:solidFill>
+        <a:ln w="19050" cap="rnd" cmpd="sng" algn="ctr">
+          <a:solidFill>
+            <a:schemeClr val="accent6">
+              <a:lumMod val="75000"/>
+            </a:schemeClr>
+          </a:solidFill>
+          <a:prstDash val="solid"/>
+        </a:ln>
+        <a:effectLst/>
+      </dgm:spPr>
+      <dgm:t>
+        <a:bodyPr spcFirstLastPara="0" vert="horz" wrap="square" lIns="261366" tIns="130683" rIns="65342" bIns="130683" numCol="1" spcCol="1270" anchor="ctr" anchorCtr="0"/>
+        <a:lstStyle/>
+        <a:p>
+          <a:pPr marL="0" lvl="0" indent="0" algn="ctr" defTabSz="2178050">
+            <a:lnSpc>
+              <a:spcPct val="90000"/>
+            </a:lnSpc>
+            <a:spcBef>
+              <a:spcPct val="0"/>
+            </a:spcBef>
+            <a:spcAft>
+              <a:spcPct val="35000"/>
+            </a:spcAft>
+            <a:buNone/>
+          </a:pPr>
+          <a:endParaRPr lang="en-US" sz="4900" kern="1200" dirty="0">
+            <a:solidFill>
+              <a:prstClr val="white"/>
+            </a:solidFill>
+            <a:latin typeface="Century Gothic" panose="020B0502020202020204"/>
+            <a:ea typeface="+mn-ea"/>
+            <a:cs typeface="+mn-cs"/>
+          </a:endParaRPr>
+        </a:p>
+      </dgm:t>
+    </dgm:pt>
+    <dgm:pt modelId="{2214299D-707F-429C-A23D-9EE2F39CF74A}" type="parTrans" cxnId="{0C42CAF2-971C-4068-B645-A373CE11E869}">
+      <dgm:prSet/>
+      <dgm:spPr/>
+      <dgm:t>
+        <a:bodyPr/>
+        <a:lstStyle/>
+        <a:p>
+          <a:endParaRPr lang="en-US"/>
+        </a:p>
+      </dgm:t>
+    </dgm:pt>
+    <dgm:pt modelId="{F5C31149-F876-40A6-9FD4-9FC1A73D7103}" type="sibTrans" cxnId="{0C42CAF2-971C-4068-B645-A373CE11E869}">
+      <dgm:prSet/>
+      <dgm:spPr/>
+      <dgm:t>
+        <a:bodyPr/>
+        <a:lstStyle/>
+        <a:p>
+          <a:endParaRPr lang="en-US"/>
+        </a:p>
+      </dgm:t>
+    </dgm:pt>
+    <dgm:pt modelId="{2A8D39A9-50C8-4D4F-B033-79DECE006E66}">
+      <dgm:prSet phldrT="[Text]" phldr="0"/>
+      <dgm:spPr>
+        <a:solidFill>
+          <a:schemeClr val="tx1">
+            <a:lumMod val="95000"/>
+          </a:schemeClr>
+        </a:solidFill>
+        <a:ln>
+          <a:solidFill>
+            <a:schemeClr val="accent6">
+              <a:lumMod val="75000"/>
+            </a:schemeClr>
+          </a:solidFill>
+        </a:ln>
+      </dgm:spPr>
+      <dgm:t>
+        <a:bodyPr/>
+        <a:lstStyle/>
+        <a:p>
+          <a:endParaRPr lang="en-US" dirty="0"/>
+        </a:p>
+      </dgm:t>
+    </dgm:pt>
+    <dgm:pt modelId="{315C08A7-84C9-4B75-B41E-C170BAF53261}" type="parTrans" cxnId="{2667F885-9801-44B0-94AB-28C9292F3E74}">
+      <dgm:prSet/>
+      <dgm:spPr/>
+      <dgm:t>
+        <a:bodyPr/>
+        <a:lstStyle/>
+        <a:p>
+          <a:endParaRPr lang="en-US"/>
+        </a:p>
+      </dgm:t>
+    </dgm:pt>
+    <dgm:pt modelId="{55984B9E-0D3F-4FAD-8385-14CE83ECD63D}" type="sibTrans" cxnId="{2667F885-9801-44B0-94AB-28C9292F3E74}">
+      <dgm:prSet/>
+      <dgm:spPr/>
+      <dgm:t>
+        <a:bodyPr/>
+        <a:lstStyle/>
+        <a:p>
+          <a:endParaRPr lang="en-US"/>
+        </a:p>
+      </dgm:t>
+    </dgm:pt>
+    <dgm:pt modelId="{6D71B52B-3920-4F69-82CF-D2F6B276680D}">
+      <dgm:prSet phldrT="[Text]" phldr="0"/>
+      <dgm:spPr>
+        <a:solidFill>
+          <a:schemeClr val="tx1">
+            <a:lumMod val="95000"/>
+          </a:schemeClr>
+        </a:solidFill>
+        <a:ln>
+          <a:solidFill>
+            <a:schemeClr val="accent6">
+              <a:lumMod val="75000"/>
+            </a:schemeClr>
+          </a:solidFill>
+        </a:ln>
+      </dgm:spPr>
+      <dgm:t>
+        <a:bodyPr/>
+        <a:lstStyle/>
+        <a:p>
+          <a:endParaRPr lang="en-US" dirty="0"/>
+        </a:p>
+      </dgm:t>
+    </dgm:pt>
+    <dgm:pt modelId="{D523D338-016A-4C79-9BD8-F4C65FDC3E4A}" type="parTrans" cxnId="{92E5502B-D54D-4966-9E24-506A6D560BD2}">
+      <dgm:prSet/>
+      <dgm:spPr/>
+      <dgm:t>
+        <a:bodyPr/>
+        <a:lstStyle/>
+        <a:p>
+          <a:endParaRPr lang="en-US"/>
+        </a:p>
+      </dgm:t>
+    </dgm:pt>
+    <dgm:pt modelId="{CD4D0C60-FE61-48F8-A8F6-566EF2190D5C}" type="sibTrans" cxnId="{92E5502B-D54D-4966-9E24-506A6D560BD2}">
+      <dgm:prSet/>
+      <dgm:spPr/>
+      <dgm:t>
+        <a:bodyPr/>
+        <a:lstStyle/>
+        <a:p>
+          <a:endParaRPr lang="en-US"/>
+        </a:p>
+      </dgm:t>
+    </dgm:pt>
+    <dgm:pt modelId="{CDD65885-70A5-408A-AD16-60B5296FD84F}" type="pres">
+      <dgm:prSet presAssocID="{1BAF38FA-668C-42FF-833B-8125D0660C5A}" presName="Name0" presStyleCnt="0">
+        <dgm:presLayoutVars>
+          <dgm:dir/>
+          <dgm:resizeHandles val="exact"/>
+        </dgm:presLayoutVars>
+      </dgm:prSet>
+      <dgm:spPr/>
+    </dgm:pt>
+    <dgm:pt modelId="{3B3B9CF9-ACCC-4AAF-B159-A5ECCE9F91FA}" type="pres">
+      <dgm:prSet presAssocID="{02F2DEB5-04B2-43B0-AE1F-484092092F8C}" presName="parTxOnly" presStyleLbl="node1" presStyleIdx="0" presStyleCnt="4">
+        <dgm:presLayoutVars>
+          <dgm:bulletEnabled val="1"/>
+        </dgm:presLayoutVars>
+      </dgm:prSet>
+      <dgm:spPr/>
+    </dgm:pt>
+    <dgm:pt modelId="{5EA737B2-FAEA-4E29-B7AB-D4AF56C6722A}" type="pres">
+      <dgm:prSet presAssocID="{98B402DD-A062-43D3-B135-4A9AE401840E}" presName="parSpace" presStyleCnt="0"/>
+      <dgm:spPr/>
+    </dgm:pt>
+    <dgm:pt modelId="{927287C2-A3D7-40DA-9CC5-879018D16C6C}" type="pres">
+      <dgm:prSet presAssocID="{3F8A6D25-EC33-4E79-9F36-36771A974919}" presName="parTxOnly" presStyleLbl="node1" presStyleIdx="1" presStyleCnt="4">
+        <dgm:presLayoutVars>
+          <dgm:bulletEnabled val="1"/>
+        </dgm:presLayoutVars>
+      </dgm:prSet>
+      <dgm:spPr>
+        <a:xfrm>
+          <a:off x="1913731" y="226207"/>
+          <a:ext cx="2389187" cy="955675"/>
+        </a:xfrm>
+        <a:prstGeom prst="chevron">
+          <a:avLst/>
+        </a:prstGeom>
+      </dgm:spPr>
+    </dgm:pt>
+    <dgm:pt modelId="{D7399875-5945-4082-A56B-0967B2FF1CAA}" type="pres">
+      <dgm:prSet presAssocID="{F5C31149-F876-40A6-9FD4-9FC1A73D7103}" presName="parSpace" presStyleCnt="0"/>
+      <dgm:spPr/>
+    </dgm:pt>
+    <dgm:pt modelId="{0FFC9F85-D342-4563-A0C2-89C6B83FD375}" type="pres">
+      <dgm:prSet presAssocID="{2A8D39A9-50C8-4D4F-B033-79DECE006E66}" presName="parTxOnly" presStyleLbl="node1" presStyleIdx="2" presStyleCnt="4">
+        <dgm:presLayoutVars>
+          <dgm:bulletEnabled val="1"/>
+        </dgm:presLayoutVars>
+      </dgm:prSet>
+      <dgm:spPr/>
+    </dgm:pt>
+    <dgm:pt modelId="{00AD2CC1-E211-4CFF-A9B2-67FC64D14459}" type="pres">
+      <dgm:prSet presAssocID="{55984B9E-0D3F-4FAD-8385-14CE83ECD63D}" presName="parSpace" presStyleCnt="0"/>
+      <dgm:spPr/>
+    </dgm:pt>
+    <dgm:pt modelId="{903FC15E-8A12-4ACF-90BF-441209C11D87}" type="pres">
+      <dgm:prSet presAssocID="{6D71B52B-3920-4F69-82CF-D2F6B276680D}" presName="parTxOnly" presStyleLbl="node1" presStyleIdx="3" presStyleCnt="4">
+        <dgm:presLayoutVars>
+          <dgm:bulletEnabled val="1"/>
+        </dgm:presLayoutVars>
+      </dgm:prSet>
+      <dgm:spPr/>
+    </dgm:pt>
+  </dgm:ptLst>
+  <dgm:cxnLst>
+    <dgm:cxn modelId="{347BB41C-FC86-4550-A2CB-D58B80B9751F}" type="presOf" srcId="{2A8D39A9-50C8-4D4F-B033-79DECE006E66}" destId="{0FFC9F85-D342-4563-A0C2-89C6B83FD375}" srcOrd="0" destOrd="0" presId="urn:microsoft.com/office/officeart/2005/8/layout/hChevron3"/>
+    <dgm:cxn modelId="{92E5502B-D54D-4966-9E24-506A6D560BD2}" srcId="{1BAF38FA-668C-42FF-833B-8125D0660C5A}" destId="{6D71B52B-3920-4F69-82CF-D2F6B276680D}" srcOrd="3" destOrd="0" parTransId="{D523D338-016A-4C79-9BD8-F4C65FDC3E4A}" sibTransId="{CD4D0C60-FE61-48F8-A8F6-566EF2190D5C}"/>
+    <dgm:cxn modelId="{CFE9B22D-431F-42D5-A9DD-A34070B50E6D}" srcId="{1BAF38FA-668C-42FF-833B-8125D0660C5A}" destId="{02F2DEB5-04B2-43B0-AE1F-484092092F8C}" srcOrd="0" destOrd="0" parTransId="{086CFFA7-5016-4BB1-BF31-ADB78F91B03E}" sibTransId="{98B402DD-A062-43D3-B135-4A9AE401840E}"/>
+    <dgm:cxn modelId="{7E7A1337-859F-4F61-9A78-82F7E8764017}" type="presOf" srcId="{3F8A6D25-EC33-4E79-9F36-36771A974919}" destId="{927287C2-A3D7-40DA-9CC5-879018D16C6C}" srcOrd="0" destOrd="0" presId="urn:microsoft.com/office/officeart/2005/8/layout/hChevron3"/>
+    <dgm:cxn modelId="{C8B7E64E-D047-4A1C-842A-C4653D06E0DB}" type="presOf" srcId="{1BAF38FA-668C-42FF-833B-8125D0660C5A}" destId="{CDD65885-70A5-408A-AD16-60B5296FD84F}" srcOrd="0" destOrd="0" presId="urn:microsoft.com/office/officeart/2005/8/layout/hChevron3"/>
+    <dgm:cxn modelId="{69FDE357-9944-440F-9DEB-FDD0AD8A9BFE}" type="presOf" srcId="{6D71B52B-3920-4F69-82CF-D2F6B276680D}" destId="{903FC15E-8A12-4ACF-90BF-441209C11D87}" srcOrd="0" destOrd="0" presId="urn:microsoft.com/office/officeart/2005/8/layout/hChevron3"/>
+    <dgm:cxn modelId="{2667F885-9801-44B0-94AB-28C9292F3E74}" srcId="{1BAF38FA-668C-42FF-833B-8125D0660C5A}" destId="{2A8D39A9-50C8-4D4F-B033-79DECE006E66}" srcOrd="2" destOrd="0" parTransId="{315C08A7-84C9-4B75-B41E-C170BAF53261}" sibTransId="{55984B9E-0D3F-4FAD-8385-14CE83ECD63D}"/>
+    <dgm:cxn modelId="{0C42CAF2-971C-4068-B645-A373CE11E869}" srcId="{1BAF38FA-668C-42FF-833B-8125D0660C5A}" destId="{3F8A6D25-EC33-4E79-9F36-36771A974919}" srcOrd="1" destOrd="0" parTransId="{2214299D-707F-429C-A23D-9EE2F39CF74A}" sibTransId="{F5C31149-F876-40A6-9FD4-9FC1A73D7103}"/>
+    <dgm:cxn modelId="{3020AFFF-29FB-4253-9067-BC7D344E83A9}" type="presOf" srcId="{02F2DEB5-04B2-43B0-AE1F-484092092F8C}" destId="{3B3B9CF9-ACCC-4AAF-B159-A5ECCE9F91FA}" srcOrd="0" destOrd="0" presId="urn:microsoft.com/office/officeart/2005/8/layout/hChevron3"/>
+    <dgm:cxn modelId="{E191ADB3-48DE-4471-9D7B-B06436C72291}" type="presParOf" srcId="{CDD65885-70A5-408A-AD16-60B5296FD84F}" destId="{3B3B9CF9-ACCC-4AAF-B159-A5ECCE9F91FA}" srcOrd="0" destOrd="0" presId="urn:microsoft.com/office/officeart/2005/8/layout/hChevron3"/>
+    <dgm:cxn modelId="{F6ECF3E2-766C-40B1-9FEF-D2B9A3751F52}" type="presParOf" srcId="{CDD65885-70A5-408A-AD16-60B5296FD84F}" destId="{5EA737B2-FAEA-4E29-B7AB-D4AF56C6722A}" srcOrd="1" destOrd="0" presId="urn:microsoft.com/office/officeart/2005/8/layout/hChevron3"/>
+    <dgm:cxn modelId="{5F4A39DD-EE71-415A-B0B3-627A8BABEDC4}" type="presParOf" srcId="{CDD65885-70A5-408A-AD16-60B5296FD84F}" destId="{927287C2-A3D7-40DA-9CC5-879018D16C6C}" srcOrd="2" destOrd="0" presId="urn:microsoft.com/office/officeart/2005/8/layout/hChevron3"/>
+    <dgm:cxn modelId="{4E7C4957-7013-4E83-83C2-B10253353E78}" type="presParOf" srcId="{CDD65885-70A5-408A-AD16-60B5296FD84F}" destId="{D7399875-5945-4082-A56B-0967B2FF1CAA}" srcOrd="3" destOrd="0" presId="urn:microsoft.com/office/officeart/2005/8/layout/hChevron3"/>
+    <dgm:cxn modelId="{FB86EB6A-5434-47EA-AB12-3A0CDAB33EE4}" type="presParOf" srcId="{CDD65885-70A5-408A-AD16-60B5296FD84F}" destId="{0FFC9F85-D342-4563-A0C2-89C6B83FD375}" srcOrd="4" destOrd="0" presId="urn:microsoft.com/office/officeart/2005/8/layout/hChevron3"/>
+    <dgm:cxn modelId="{78C80DD3-464A-4A52-99A1-54586C54E2F3}" type="presParOf" srcId="{CDD65885-70A5-408A-AD16-60B5296FD84F}" destId="{00AD2CC1-E211-4CFF-A9B2-67FC64D14459}" srcOrd="5" destOrd="0" presId="urn:microsoft.com/office/officeart/2005/8/layout/hChevron3"/>
+    <dgm:cxn modelId="{6ACBF150-7D73-4DED-A989-4E37B02A320F}" type="presParOf" srcId="{CDD65885-70A5-408A-AD16-60B5296FD84F}" destId="{903FC15E-8A12-4ACF-90BF-441209C11D87}" srcOrd="6" destOrd="0" presId="urn:microsoft.com/office/officeart/2005/8/layout/hChevron3"/>
+  </dgm:cxnLst>
+  <dgm:bg/>
+  <dgm:whole>
+    <a:ln>
+      <a:noFill/>
+    </a:ln>
+  </dgm:whole>
+  <dgm:extLst>
+    <a:ext uri="http://schemas.microsoft.com/office/drawing/2008/diagram">
+      <dsp:dataModelExt xmlns:dsp="http://schemas.microsoft.com/office/drawing/2008/diagram" relId="rId9" minVer="http://schemas.openxmlformats.org/drawingml/2006/diagram"/>
+    </a:ext>
+  </dgm:extLst>
+</dgm:dataModel>
+</file>
+
+<file path=ppt/diagrams/data3.xml><?xml version="1.0" encoding="utf-8"?>
 <dgm:dataModel xmlns:dgm="http://schemas.openxmlformats.org/drawingml/2006/diagram" xmlns:a="http://schemas.openxmlformats.org/drawingml/2006/main">
   <dgm:ptLst>
     <dgm:pt modelId="{1BAF38FA-668C-42FF-833B-8125D0660C5A}" type="doc">
@@ -3059,6 +4118,303 @@
 </dsp:drawing>
 </file>
 
+<file path=ppt/diagrams/drawing3.xml><?xml version="1.0" encoding="utf-8"?>
+<dsp:drawing xmlns:dgm="http://schemas.openxmlformats.org/drawingml/2006/diagram" xmlns:dsp="http://schemas.microsoft.com/office/drawing/2008/diagram" xmlns:a="http://schemas.openxmlformats.org/drawingml/2006/main">
+  <dsp:spTree>
+    <dsp:nvGrpSpPr>
+      <dsp:cNvPr id="0" name=""/>
+      <dsp:cNvGrpSpPr/>
+    </dsp:nvGrpSpPr>
+    <dsp:grpSpPr/>
+    <dsp:sp modelId="{3B3B9CF9-ACCC-4AAF-B159-A5ECCE9F91FA}">
+      <dsp:nvSpPr>
+        <dsp:cNvPr id="0" name=""/>
+        <dsp:cNvSpPr/>
+      </dsp:nvSpPr>
+      <dsp:spPr>
+        <a:xfrm>
+          <a:off x="2381" y="226207"/>
+          <a:ext cx="2389187" cy="955675"/>
+        </a:xfrm>
+        <a:prstGeom prst="homePlate">
+          <a:avLst/>
+        </a:prstGeom>
+        <a:solidFill>
+          <a:schemeClr val="accent1">
+            <a:hueOff val="0"/>
+            <a:satOff val="0"/>
+            <a:lumOff val="0"/>
+            <a:alphaOff val="0"/>
+          </a:schemeClr>
+        </a:solidFill>
+        <a:ln w="19050" cap="rnd" cmpd="sng" algn="ctr">
+          <a:solidFill>
+            <a:schemeClr val="accent6">
+              <a:lumMod val="75000"/>
+            </a:schemeClr>
+          </a:solidFill>
+          <a:prstDash val="solid"/>
+        </a:ln>
+        <a:effectLst/>
+      </dsp:spPr>
+      <dsp:style>
+        <a:lnRef idx="2">
+          <a:scrgbClr r="0" g="0" b="0"/>
+        </a:lnRef>
+        <a:fillRef idx="1">
+          <a:scrgbClr r="0" g="0" b="0"/>
+        </a:fillRef>
+        <a:effectRef idx="0">
+          <a:scrgbClr r="0" g="0" b="0"/>
+        </a:effectRef>
+        <a:fontRef idx="minor">
+          <a:schemeClr val="lt1"/>
+        </a:fontRef>
+      </dsp:style>
+      <dsp:txBody>
+        <a:bodyPr spcFirstLastPara="0" vert="horz" wrap="square" lIns="261366" tIns="130683" rIns="65342" bIns="130683" numCol="1" spcCol="1270" anchor="ctr" anchorCtr="0">
+          <a:noAutofit/>
+        </a:bodyPr>
+        <a:lstStyle/>
+        <a:p>
+          <a:pPr marL="0" lvl="0" indent="0" algn="ctr" defTabSz="2178050">
+            <a:lnSpc>
+              <a:spcPct val="90000"/>
+            </a:lnSpc>
+            <a:spcBef>
+              <a:spcPct val="0"/>
+            </a:spcBef>
+            <a:spcAft>
+              <a:spcPct val="35000"/>
+            </a:spcAft>
+            <a:buNone/>
+          </a:pPr>
+          <a:endParaRPr lang="en-US" sz="4900" kern="1200"/>
+        </a:p>
+      </dsp:txBody>
+      <dsp:txXfrm>
+        <a:off x="2381" y="226207"/>
+        <a:ext cx="2150268" cy="955675"/>
+      </dsp:txXfrm>
+    </dsp:sp>
+    <dsp:sp modelId="{927287C2-A3D7-40DA-9CC5-879018D16C6C}">
+      <dsp:nvSpPr>
+        <dsp:cNvPr id="0" name=""/>
+        <dsp:cNvSpPr/>
+      </dsp:nvSpPr>
+      <dsp:spPr>
+        <a:xfrm>
+          <a:off x="1913731" y="226207"/>
+          <a:ext cx="2389187" cy="955675"/>
+        </a:xfrm>
+        <a:prstGeom prst="chevron">
+          <a:avLst/>
+        </a:prstGeom>
+        <a:solidFill>
+          <a:srgbClr val="ACD433">
+            <a:hueOff val="0"/>
+            <a:satOff val="0"/>
+            <a:lumOff val="0"/>
+            <a:alphaOff val="0"/>
+          </a:srgbClr>
+        </a:solidFill>
+        <a:ln w="19050" cap="rnd" cmpd="sng" algn="ctr">
+          <a:solidFill>
+            <a:schemeClr val="accent6">
+              <a:lumMod val="75000"/>
+            </a:schemeClr>
+          </a:solidFill>
+          <a:prstDash val="solid"/>
+        </a:ln>
+        <a:effectLst/>
+      </dsp:spPr>
+      <dsp:style>
+        <a:lnRef idx="2">
+          <a:scrgbClr r="0" g="0" b="0"/>
+        </a:lnRef>
+        <a:fillRef idx="1">
+          <a:scrgbClr r="0" g="0" b="0"/>
+        </a:fillRef>
+        <a:effectRef idx="0">
+          <a:scrgbClr r="0" g="0" b="0"/>
+        </a:effectRef>
+        <a:fontRef idx="minor">
+          <a:schemeClr val="lt1"/>
+        </a:fontRef>
+      </dsp:style>
+      <dsp:txBody>
+        <a:bodyPr spcFirstLastPara="0" vert="horz" wrap="square" lIns="261366" tIns="130683" rIns="65342" bIns="130683" numCol="1" spcCol="1270" anchor="ctr" anchorCtr="0">
+          <a:noAutofit/>
+        </a:bodyPr>
+        <a:lstStyle/>
+        <a:p>
+          <a:pPr marL="0" lvl="0" indent="0" algn="ctr" defTabSz="2178050">
+            <a:lnSpc>
+              <a:spcPct val="90000"/>
+            </a:lnSpc>
+            <a:spcBef>
+              <a:spcPct val="0"/>
+            </a:spcBef>
+            <a:spcAft>
+              <a:spcPct val="35000"/>
+            </a:spcAft>
+            <a:buNone/>
+          </a:pPr>
+          <a:endParaRPr lang="en-US" sz="4900" kern="1200" dirty="0">
+            <a:solidFill>
+              <a:prstClr val="white"/>
+            </a:solidFill>
+            <a:latin typeface="Century Gothic" panose="020B0502020202020204"/>
+            <a:ea typeface="+mn-ea"/>
+            <a:cs typeface="+mn-cs"/>
+          </a:endParaRPr>
+        </a:p>
+      </dsp:txBody>
+      <dsp:txXfrm>
+        <a:off x="2391569" y="226207"/>
+        <a:ext cx="1433512" cy="955675"/>
+      </dsp:txXfrm>
+    </dsp:sp>
+    <dsp:sp modelId="{0FFC9F85-D342-4563-A0C2-89C6B83FD375}">
+      <dsp:nvSpPr>
+        <dsp:cNvPr id="0" name=""/>
+        <dsp:cNvSpPr/>
+      </dsp:nvSpPr>
+      <dsp:spPr>
+        <a:xfrm>
+          <a:off x="3825081" y="226207"/>
+          <a:ext cx="2389187" cy="955675"/>
+        </a:xfrm>
+        <a:prstGeom prst="chevron">
+          <a:avLst/>
+        </a:prstGeom>
+        <a:solidFill>
+          <a:schemeClr val="tx1">
+            <a:lumMod val="95000"/>
+          </a:schemeClr>
+        </a:solidFill>
+        <a:ln w="19050" cap="rnd" cmpd="sng" algn="ctr">
+          <a:solidFill>
+            <a:schemeClr val="accent6">
+              <a:lumMod val="75000"/>
+            </a:schemeClr>
+          </a:solidFill>
+          <a:prstDash val="solid"/>
+        </a:ln>
+        <a:effectLst/>
+      </dsp:spPr>
+      <dsp:style>
+        <a:lnRef idx="2">
+          <a:scrgbClr r="0" g="0" b="0"/>
+        </a:lnRef>
+        <a:fillRef idx="1">
+          <a:scrgbClr r="0" g="0" b="0"/>
+        </a:fillRef>
+        <a:effectRef idx="0">
+          <a:scrgbClr r="0" g="0" b="0"/>
+        </a:effectRef>
+        <a:fontRef idx="minor">
+          <a:schemeClr val="lt1"/>
+        </a:fontRef>
+      </dsp:style>
+      <dsp:txBody>
+        <a:bodyPr spcFirstLastPara="0" vert="horz" wrap="square" lIns="196025" tIns="130683" rIns="65342" bIns="130683" numCol="1" spcCol="1270" anchor="ctr" anchorCtr="0">
+          <a:noAutofit/>
+        </a:bodyPr>
+        <a:lstStyle/>
+        <a:p>
+          <a:pPr marL="0" lvl="0" indent="0" algn="ctr" defTabSz="2178050">
+            <a:lnSpc>
+              <a:spcPct val="90000"/>
+            </a:lnSpc>
+            <a:spcBef>
+              <a:spcPct val="0"/>
+            </a:spcBef>
+            <a:spcAft>
+              <a:spcPct val="35000"/>
+            </a:spcAft>
+            <a:buNone/>
+          </a:pPr>
+          <a:endParaRPr lang="en-US" sz="4900" kern="1200" dirty="0"/>
+        </a:p>
+      </dsp:txBody>
+      <dsp:txXfrm>
+        <a:off x="4302919" y="226207"/>
+        <a:ext cx="1433512" cy="955675"/>
+      </dsp:txXfrm>
+    </dsp:sp>
+    <dsp:sp modelId="{903FC15E-8A12-4ACF-90BF-441209C11D87}">
+      <dsp:nvSpPr>
+        <dsp:cNvPr id="0" name=""/>
+        <dsp:cNvSpPr/>
+      </dsp:nvSpPr>
+      <dsp:spPr>
+        <a:xfrm>
+          <a:off x="5736431" y="226207"/>
+          <a:ext cx="2389187" cy="955675"/>
+        </a:xfrm>
+        <a:prstGeom prst="chevron">
+          <a:avLst/>
+        </a:prstGeom>
+        <a:solidFill>
+          <a:schemeClr val="tx1">
+            <a:lumMod val="95000"/>
+          </a:schemeClr>
+        </a:solidFill>
+        <a:ln w="19050" cap="rnd" cmpd="sng" algn="ctr">
+          <a:solidFill>
+            <a:schemeClr val="accent6">
+              <a:lumMod val="75000"/>
+            </a:schemeClr>
+          </a:solidFill>
+          <a:prstDash val="solid"/>
+        </a:ln>
+        <a:effectLst/>
+      </dsp:spPr>
+      <dsp:style>
+        <a:lnRef idx="2">
+          <a:scrgbClr r="0" g="0" b="0"/>
+        </a:lnRef>
+        <a:fillRef idx="1">
+          <a:scrgbClr r="0" g="0" b="0"/>
+        </a:fillRef>
+        <a:effectRef idx="0">
+          <a:scrgbClr r="0" g="0" b="0"/>
+        </a:effectRef>
+        <a:fontRef idx="minor">
+          <a:schemeClr val="lt1"/>
+        </a:fontRef>
+      </dsp:style>
+      <dsp:txBody>
+        <a:bodyPr spcFirstLastPara="0" vert="horz" wrap="square" lIns="196025" tIns="130683" rIns="65342" bIns="130683" numCol="1" spcCol="1270" anchor="ctr" anchorCtr="0">
+          <a:noAutofit/>
+        </a:bodyPr>
+        <a:lstStyle/>
+        <a:p>
+          <a:pPr marL="0" lvl="0" indent="0" algn="ctr" defTabSz="2178050">
+            <a:lnSpc>
+              <a:spcPct val="90000"/>
+            </a:lnSpc>
+            <a:spcBef>
+              <a:spcPct val="0"/>
+            </a:spcBef>
+            <a:spcAft>
+              <a:spcPct val="35000"/>
+            </a:spcAft>
+            <a:buNone/>
+          </a:pPr>
+          <a:endParaRPr lang="en-US" sz="4900" kern="1200" dirty="0"/>
+        </a:p>
+      </dsp:txBody>
+      <dsp:txXfrm>
+        <a:off x="6214269" y="226207"/>
+        <a:ext cx="1433512" cy="955675"/>
+      </dsp:txXfrm>
+    </dsp:sp>
+  </dsp:spTree>
+</dsp:drawing>
+</file>
+
 <file path=ppt/diagrams/layout1.xml><?xml version="1.0" encoding="utf-8"?>
 <dgm:layoutDef xmlns:dgm="http://schemas.openxmlformats.org/drawingml/2006/diagram" xmlns:a="http://schemas.openxmlformats.org/drawingml/2006/main" uniqueId="urn:microsoft.com/office/officeart/2005/8/layout/hChevron3">
   <dgm:title val=""/>
@@ -3603,6 +4959,278 @@
 </dgm:layoutDef>
 </file>
 
+<file path=ppt/diagrams/layout3.xml><?xml version="1.0" encoding="utf-8"?>
+<dgm:layoutDef xmlns:dgm="http://schemas.openxmlformats.org/drawingml/2006/diagram" xmlns:a="http://schemas.openxmlformats.org/drawingml/2006/main" uniqueId="urn:microsoft.com/office/officeart/2005/8/layout/hChevron3">
+  <dgm:title val=""/>
+  <dgm:desc val=""/>
+  <dgm:catLst>
+    <dgm:cat type="process" pri="10000"/>
+  </dgm:catLst>
+  <dgm:sampData useDef="1">
+    <dgm:dataModel>
+      <dgm:ptLst/>
+      <dgm:bg/>
+      <dgm:whole/>
+    </dgm:dataModel>
+  </dgm:sampData>
+  <dgm:styleData>
+    <dgm:dataModel>
+      <dgm:ptLst>
+        <dgm:pt modelId="0" type="doc"/>
+        <dgm:pt modelId="1"/>
+        <dgm:pt modelId="2"/>
+      </dgm:ptLst>
+      <dgm:cxnLst>
+        <dgm:cxn modelId="3" srcId="0" destId="1" srcOrd="0" destOrd="0"/>
+        <dgm:cxn modelId="4" srcId="0" destId="2" srcOrd="1" destOrd="0"/>
+      </dgm:cxnLst>
+      <dgm:bg/>
+      <dgm:whole/>
+    </dgm:dataModel>
+  </dgm:styleData>
+  <dgm:clrData>
+    <dgm:dataModel>
+      <dgm:ptLst>
+        <dgm:pt modelId="0" type="doc"/>
+        <dgm:pt modelId="1"/>
+        <dgm:pt modelId="2"/>
+        <dgm:pt modelId="3"/>
+        <dgm:pt modelId="4"/>
+      </dgm:ptLst>
+      <dgm:cxnLst>
+        <dgm:cxn modelId="5" srcId="0" destId="1" srcOrd="0" destOrd="0"/>
+        <dgm:cxn modelId="6" srcId="0" destId="2" srcOrd="1" destOrd="0"/>
+        <dgm:cxn modelId="7" srcId="0" destId="3" srcOrd="2" destOrd="0"/>
+        <dgm:cxn modelId="8" srcId="0" destId="4" srcOrd="3" destOrd="0"/>
+      </dgm:cxnLst>
+      <dgm:bg/>
+      <dgm:whole/>
+    </dgm:dataModel>
+  </dgm:clrData>
+  <dgm:layoutNode name="Name0">
+    <dgm:varLst>
+      <dgm:dir/>
+      <dgm:resizeHandles val="exact"/>
+    </dgm:varLst>
+    <dgm:choose name="Name1">
+      <dgm:if name="Name2" func="var" arg="dir" op="equ" val="norm">
+        <dgm:alg type="lin"/>
+      </dgm:if>
+      <dgm:else name="Name3">
+        <dgm:alg type="lin">
+          <dgm:param type="linDir" val="fromR"/>
+        </dgm:alg>
+      </dgm:else>
+    </dgm:choose>
+    <dgm:shape xmlns:r="http://schemas.openxmlformats.org/officeDocument/2006/relationships" r:blip="">
+      <dgm:adjLst/>
+    </dgm:shape>
+    <dgm:presOf/>
+    <dgm:choose name="Name4">
+      <dgm:if name="Name5" axis="root des" func="maxDepth" op="gte" val="2">
+        <dgm:constrLst>
+          <dgm:constr type="w" for="ch" forName="parAndChTx" refType="w"/>
+          <dgm:constr type="primFontSz" for="ch" ptType="node" op="equ"/>
+          <dgm:constr type="w" for="ch" forName="parAndChSpace" refType="w" refFor="ch" refForName="parAndChTx" fact="-0.2"/>
+          <dgm:constr type="w" for="ch" ptType="sibTrans" op="equ"/>
+        </dgm:constrLst>
+        <dgm:ruleLst/>
+        <dgm:forEach name="Name6" axis="ch" ptType="node">
+          <dgm:layoutNode name="parAndChTx">
+            <dgm:varLst>
+              <dgm:bulletEnabled val="1"/>
+            </dgm:varLst>
+            <dgm:alg type="tx"/>
+            <dgm:choose name="Name7">
+              <dgm:if name="Name8" func="var" arg="dir" op="equ" val="norm">
+                <dgm:choose name="Name9">
+                  <dgm:if name="Name10" axis="self" ptType="node" func="pos" op="equ" val="1">
+                    <dgm:shape xmlns:r="http://schemas.openxmlformats.org/officeDocument/2006/relationships" type="homePlate" r:blip="">
+                      <dgm:adjLst>
+                        <dgm:adj idx="1" val="0.25"/>
+                      </dgm:adjLst>
+                    </dgm:shape>
+                    <dgm:presOf axis="desOrSelf" ptType="node"/>
+                    <dgm:constrLst>
+                      <dgm:constr type="h" refType="w" op="equ" fact="0.8"/>
+                      <dgm:constr type="primFontSz" val="65"/>
+                      <dgm:constr type="tMarg" refType="primFontSz" fact="0.2"/>
+                      <dgm:constr type="bMarg" refType="primFontSz" fact="0.2"/>
+                      <dgm:constr type="lMarg" refType="w" fact="0.1"/>
+                      <dgm:constr type="rMarg" refType="w" fact="0.4"/>
+                    </dgm:constrLst>
+                  </dgm:if>
+                  <dgm:else name="Name11">
+                    <dgm:shape xmlns:r="http://schemas.openxmlformats.org/officeDocument/2006/relationships" type="chevron" r:blip="">
+                      <dgm:adjLst>
+                        <dgm:adj idx="1" val="0.25"/>
+                      </dgm:adjLst>
+                    </dgm:shape>
+                    <dgm:presOf axis="desOrSelf" ptType="node"/>
+                    <dgm:constrLst>
+                      <dgm:constr type="h" refType="w" op="equ" fact="0.8"/>
+                      <dgm:constr type="primFontSz" val="65"/>
+                      <dgm:constr type="tMarg" refType="primFontSz" fact="0.2"/>
+                      <dgm:constr type="bMarg" refType="primFontSz" fact="0.2"/>
+                      <dgm:constr type="lMarg" refType="w" fact="0.1"/>
+                      <dgm:constr type="rMarg" refType="w" fact="0.1"/>
+                    </dgm:constrLst>
+                  </dgm:else>
+                </dgm:choose>
+              </dgm:if>
+              <dgm:else name="Name12">
+                <dgm:choose name="Name13">
+                  <dgm:if name="Name14" axis="self" ptType="node" func="pos" op="equ" val="1">
+                    <dgm:shape xmlns:r="http://schemas.openxmlformats.org/officeDocument/2006/relationships" rot="180" type="homePlate" r:blip="">
+                      <dgm:adjLst>
+                        <dgm:adj idx="1" val="0.25"/>
+                      </dgm:adjLst>
+                    </dgm:shape>
+                    <dgm:presOf axis="desOrSelf" ptType="node"/>
+                    <dgm:constrLst>
+                      <dgm:constr type="h" refType="w" op="equ" fact="0.8"/>
+                      <dgm:constr type="primFontSz" val="65"/>
+                      <dgm:constr type="tMarg" refType="primFontSz" fact="0.2"/>
+                      <dgm:constr type="bMarg" refType="primFontSz" fact="0.2"/>
+                      <dgm:constr type="lMarg" refType="w" fact="0.4"/>
+                      <dgm:constr type="rMarg" refType="w" fact="0.1"/>
+                    </dgm:constrLst>
+                  </dgm:if>
+                  <dgm:else name="Name15">
+                    <dgm:shape xmlns:r="http://schemas.openxmlformats.org/officeDocument/2006/relationships" rot="180" type="chevron" r:blip="">
+                      <dgm:adjLst>
+                        <dgm:adj idx="1" val="0.25"/>
+                      </dgm:adjLst>
+                    </dgm:shape>
+                    <dgm:presOf axis="desOrSelf" ptType="node"/>
+                    <dgm:constrLst>
+                      <dgm:constr type="h" refType="w" op="equ" fact="0.8"/>
+                      <dgm:constr type="primFontSz" val="65"/>
+                      <dgm:constr type="tMarg" refType="primFontSz" fact="0.2"/>
+                      <dgm:constr type="bMarg" refType="primFontSz" fact="0.2"/>
+                      <dgm:constr type="lMarg" refType="w" fact="0.1"/>
+                      <dgm:constr type="rMarg" refType="w" fact="0.1"/>
+                    </dgm:constrLst>
+                  </dgm:else>
+                </dgm:choose>
+              </dgm:else>
+            </dgm:choose>
+            <dgm:ruleLst>
+              <dgm:rule type="primFontSz" val="5" fact="NaN" max="NaN"/>
+            </dgm:ruleLst>
+          </dgm:layoutNode>
+          <dgm:forEach name="Name16" axis="followSib" ptType="sibTrans" cnt="1">
+            <dgm:layoutNode name="parAndChSpace">
+              <dgm:alg type="sp"/>
+              <dgm:shape xmlns:r="http://schemas.openxmlformats.org/officeDocument/2006/relationships" r:blip="">
+                <dgm:adjLst/>
+              </dgm:shape>
+              <dgm:presOf/>
+              <dgm:constrLst/>
+              <dgm:ruleLst/>
+            </dgm:layoutNode>
+          </dgm:forEach>
+        </dgm:forEach>
+      </dgm:if>
+      <dgm:else name="Name17">
+        <dgm:constrLst>
+          <dgm:constr type="w" for="ch" forName="parTxOnly" refType="w"/>
+          <dgm:constr type="primFontSz" for="ch" ptType="node" op="equ"/>
+          <dgm:constr type="w" for="ch" forName="parSpace" refType="w" refFor="ch" refForName="parTxOnly" fact="-0.2"/>
+          <dgm:constr type="w" for="ch" ptType="sibTrans" op="equ"/>
+        </dgm:constrLst>
+        <dgm:ruleLst/>
+        <dgm:forEach name="Name18" axis="ch" ptType="node">
+          <dgm:layoutNode name="parTxOnly">
+            <dgm:varLst>
+              <dgm:bulletEnabled val="1"/>
+            </dgm:varLst>
+            <dgm:alg type="tx"/>
+            <dgm:presOf axis="desOrSelf" ptType="node"/>
+            <dgm:choose name="Name19">
+              <dgm:if name="Name20" func="var" arg="dir" op="equ" val="norm">
+                <dgm:choose name="Name21">
+                  <dgm:if name="Name22" axis="self" ptType="node" func="pos" op="equ" val="1">
+                    <dgm:shape xmlns:r="http://schemas.openxmlformats.org/officeDocument/2006/relationships" type="homePlate" r:blip="">
+                      <dgm:adjLst/>
+                    </dgm:shape>
+                    <dgm:constrLst>
+                      <dgm:constr type="h" refType="w" op="equ" fact="0.4"/>
+                      <dgm:constr type="primFontSz" val="65"/>
+                      <dgm:constr type="tMarg" refType="primFontSz" fact="0.21"/>
+                      <dgm:constr type="bMarg" refType="primFontSz" fact="0.21"/>
+                      <dgm:constr type="lMarg" refType="primFontSz" fact="0.42"/>
+                      <dgm:constr type="rMarg" refType="primFontSz" fact="0.105"/>
+                    </dgm:constrLst>
+                  </dgm:if>
+                  <dgm:else name="Name23">
+                    <dgm:shape xmlns:r="http://schemas.openxmlformats.org/officeDocument/2006/relationships" type="chevron" r:blip="">
+                      <dgm:adjLst/>
+                    </dgm:shape>
+                    <dgm:constrLst>
+                      <dgm:constr type="h" refType="w" op="equ" fact="0.4"/>
+                      <dgm:constr type="primFontSz" val="65"/>
+                      <dgm:constr type="tMarg" refType="primFontSz" fact="0.21"/>
+                      <dgm:constr type="bMarg" refType="primFontSz" fact="0.21"/>
+                      <dgm:constr type="lMarg" refType="primFontSz" fact="0.315"/>
+                      <dgm:constr type="rMarg" refType="primFontSz" fact="0.105"/>
+                    </dgm:constrLst>
+                  </dgm:else>
+                </dgm:choose>
+              </dgm:if>
+              <dgm:else name="Name24">
+                <dgm:choose name="Name25">
+                  <dgm:if name="Name26" axis="self" ptType="node" func="pos" op="equ" val="1">
+                    <dgm:shape xmlns:r="http://schemas.openxmlformats.org/officeDocument/2006/relationships" rot="180" type="homePlate" r:blip="">
+                      <dgm:adjLst/>
+                    </dgm:shape>
+                    <dgm:constrLst>
+                      <dgm:constr type="h" refType="w" op="equ" fact="0.4"/>
+                      <dgm:constr type="primFontSz" val="65"/>
+                      <dgm:constr type="tMarg" refType="primFontSz" fact="0.21"/>
+                      <dgm:constr type="bMarg" refType="primFontSz" fact="0.21"/>
+                      <dgm:constr type="lMarg" refType="primFontSz" fact="0.105"/>
+                      <dgm:constr type="rMarg" refType="primFontSz" fact="0.42"/>
+                    </dgm:constrLst>
+                  </dgm:if>
+                  <dgm:else name="Name27">
+                    <dgm:shape xmlns:r="http://schemas.openxmlformats.org/officeDocument/2006/relationships" rot="180" type="chevron" r:blip="">
+                      <dgm:adjLst/>
+                    </dgm:shape>
+                    <dgm:constrLst>
+                      <dgm:constr type="h" refType="w" op="equ" fact="0.4"/>
+                      <dgm:constr type="primFontSz" val="65"/>
+                      <dgm:constr type="tMarg" refType="primFontSz" fact="0.21"/>
+                      <dgm:constr type="bMarg" refType="primFontSz" fact="0.21"/>
+                      <dgm:constr type="lMarg" refType="primFontSz" fact="0.105"/>
+                      <dgm:constr type="rMarg" refType="primFontSz" fact="0.315"/>
+                    </dgm:constrLst>
+                  </dgm:else>
+                </dgm:choose>
+              </dgm:else>
+            </dgm:choose>
+            <dgm:ruleLst>
+              <dgm:rule type="primFontSz" val="5" fact="NaN" max="NaN"/>
+            </dgm:ruleLst>
+          </dgm:layoutNode>
+          <dgm:forEach name="Name28" axis="followSib" ptType="sibTrans" cnt="1">
+            <dgm:layoutNode name="parSpace">
+              <dgm:alg type="sp"/>
+              <dgm:shape xmlns:r="http://schemas.openxmlformats.org/officeDocument/2006/relationships" r:blip="">
+                <dgm:adjLst/>
+              </dgm:shape>
+              <dgm:presOf/>
+              <dgm:constrLst/>
+              <dgm:ruleLst/>
+            </dgm:layoutNode>
+          </dgm:forEach>
+        </dgm:forEach>
+      </dgm:else>
+    </dgm:choose>
+  </dgm:layoutNode>
+</dgm:layoutDef>
+</file>
+
 <file path=ppt/diagrams/quickStyle1.xml><?xml version="1.0" encoding="utf-8"?>
 <dgm:styleDef xmlns:dgm="http://schemas.openxmlformats.org/drawingml/2006/diagram" xmlns:a="http://schemas.openxmlformats.org/drawingml/2006/main" uniqueId="urn:microsoft.com/office/officeart/2005/8/quickstyle/3d2">
   <dgm:title val=""/>
@@ -4866,6 +6494,1040 @@
 </file>
 
 <file path=ppt/diagrams/quickStyle2.xml><?xml version="1.0" encoding="utf-8"?>
+<dgm:styleDef xmlns:dgm="http://schemas.openxmlformats.org/drawingml/2006/diagram" xmlns:a="http://schemas.openxmlformats.org/drawingml/2006/main" uniqueId="urn:microsoft.com/office/officeart/2005/8/quickstyle/simple1">
+  <dgm:title val=""/>
+  <dgm:desc val=""/>
+  <dgm:catLst>
+    <dgm:cat type="simple" pri="10100"/>
+  </dgm:catLst>
+  <dgm:scene3d>
+    <a:camera prst="orthographicFront"/>
+    <a:lightRig rig="threePt" dir="t"/>
+  </dgm:scene3d>
+  <dgm:styleLbl name="node0">
+    <dgm:scene3d>
+      <a:camera prst="orthographicFront"/>
+      <a:lightRig rig="threePt" dir="t"/>
+    </dgm:scene3d>
+    <dgm:sp3d/>
+    <dgm:txPr/>
+    <dgm:style>
+      <a:lnRef idx="2">
+        <a:scrgbClr r="0" g="0" b="0"/>
+      </a:lnRef>
+      <a:fillRef idx="1">
+        <a:scrgbClr r="0" g="0" b="0"/>
+      </a:fillRef>
+      <a:effectRef idx="0">
+        <a:scrgbClr r="0" g="0" b="0"/>
+      </a:effectRef>
+      <a:fontRef idx="minor">
+        <a:schemeClr val="lt1"/>
+      </a:fontRef>
+    </dgm:style>
+  </dgm:styleLbl>
+  <dgm:styleLbl name="lnNode1">
+    <dgm:scene3d>
+      <a:camera prst="orthographicFront"/>
+      <a:lightRig rig="threePt" dir="t"/>
+    </dgm:scene3d>
+    <dgm:sp3d/>
+    <dgm:txPr/>
+    <dgm:style>
+      <a:lnRef idx="2">
+        <a:scrgbClr r="0" g="0" b="0"/>
+      </a:lnRef>
+      <a:fillRef idx="1">
+        <a:scrgbClr r="0" g="0" b="0"/>
+      </a:fillRef>
+      <a:effectRef idx="0">
+        <a:scrgbClr r="0" g="0" b="0"/>
+      </a:effectRef>
+      <a:fontRef idx="minor">
+        <a:schemeClr val="lt1"/>
+      </a:fontRef>
+    </dgm:style>
+  </dgm:styleLbl>
+  <dgm:styleLbl name="vennNode1">
+    <dgm:scene3d>
+      <a:camera prst="orthographicFront"/>
+      <a:lightRig rig="threePt" dir="t"/>
+    </dgm:scene3d>
+    <dgm:sp3d/>
+    <dgm:txPr/>
+    <dgm:style>
+      <a:lnRef idx="2">
+        <a:scrgbClr r="0" g="0" b="0"/>
+      </a:lnRef>
+      <a:fillRef idx="1">
+        <a:scrgbClr r="0" g="0" b="0"/>
+      </a:fillRef>
+      <a:effectRef idx="0">
+        <a:scrgbClr r="0" g="0" b="0"/>
+      </a:effectRef>
+      <a:fontRef idx="minor">
+        <a:schemeClr val="tx1"/>
+      </a:fontRef>
+    </dgm:style>
+  </dgm:styleLbl>
+  <dgm:styleLbl name="alignNode1">
+    <dgm:scene3d>
+      <a:camera prst="orthographicFront"/>
+      <a:lightRig rig="threePt" dir="t"/>
+    </dgm:scene3d>
+    <dgm:sp3d/>
+    <dgm:txPr/>
+    <dgm:style>
+      <a:lnRef idx="2">
+        <a:scrgbClr r="0" g="0" b="0"/>
+      </a:lnRef>
+      <a:fillRef idx="1">
+        <a:scrgbClr r="0" g="0" b="0"/>
+      </a:fillRef>
+      <a:effectRef idx="0">
+        <a:scrgbClr r="0" g="0" b="0"/>
+      </a:effectRef>
+      <a:fontRef idx="minor">
+        <a:schemeClr val="lt1"/>
+      </a:fontRef>
+    </dgm:style>
+  </dgm:styleLbl>
+  <dgm:styleLbl name="node1">
+    <dgm:scene3d>
+      <a:camera prst="orthographicFront"/>
+      <a:lightRig rig="threePt" dir="t"/>
+    </dgm:scene3d>
+    <dgm:sp3d/>
+    <dgm:txPr/>
+    <dgm:style>
+      <a:lnRef idx="2">
+        <a:scrgbClr r="0" g="0" b="0"/>
+      </a:lnRef>
+      <a:fillRef idx="1">
+        <a:scrgbClr r="0" g="0" b="0"/>
+      </a:fillRef>
+      <a:effectRef idx="0">
+        <a:scrgbClr r="0" g="0" b="0"/>
+      </a:effectRef>
+      <a:fontRef idx="minor">
+        <a:schemeClr val="lt1"/>
+      </a:fontRef>
+    </dgm:style>
+  </dgm:styleLbl>
+  <dgm:styleLbl name="node2">
+    <dgm:scene3d>
+      <a:camera prst="orthographicFront"/>
+      <a:lightRig rig="threePt" dir="t"/>
+    </dgm:scene3d>
+    <dgm:sp3d/>
+    <dgm:txPr/>
+    <dgm:style>
+      <a:lnRef idx="2">
+        <a:scrgbClr r="0" g="0" b="0"/>
+      </a:lnRef>
+      <a:fillRef idx="1">
+        <a:scrgbClr r="0" g="0" b="0"/>
+      </a:fillRef>
+      <a:effectRef idx="0">
+        <a:scrgbClr r="0" g="0" b="0"/>
+      </a:effectRef>
+      <a:fontRef idx="minor">
+        <a:schemeClr val="lt1"/>
+      </a:fontRef>
+    </dgm:style>
+  </dgm:styleLbl>
+  <dgm:styleLbl name="node3">
+    <dgm:scene3d>
+      <a:camera prst="orthographicFront"/>
+      <a:lightRig rig="threePt" dir="t"/>
+    </dgm:scene3d>
+    <dgm:sp3d/>
+    <dgm:txPr/>
+    <dgm:style>
+      <a:lnRef idx="2">
+        <a:scrgbClr r="0" g="0" b="0"/>
+      </a:lnRef>
+      <a:fillRef idx="1">
+        <a:scrgbClr r="0" g="0" b="0"/>
+      </a:fillRef>
+      <a:effectRef idx="0">
+        <a:scrgbClr r="0" g="0" b="0"/>
+      </a:effectRef>
+      <a:fontRef idx="minor">
+        <a:schemeClr val="lt1"/>
+      </a:fontRef>
+    </dgm:style>
+  </dgm:styleLbl>
+  <dgm:styleLbl name="node4">
+    <dgm:scene3d>
+      <a:camera prst="orthographicFront"/>
+      <a:lightRig rig="threePt" dir="t"/>
+    </dgm:scene3d>
+    <dgm:sp3d/>
+    <dgm:txPr/>
+    <dgm:style>
+      <a:lnRef idx="2">
+        <a:scrgbClr r="0" g="0" b="0"/>
+      </a:lnRef>
+      <a:fillRef idx="1">
+        <a:scrgbClr r="0" g="0" b="0"/>
+      </a:fillRef>
+      <a:effectRef idx="0">
+        <a:scrgbClr r="0" g="0" b="0"/>
+      </a:effectRef>
+      <a:fontRef idx="minor">
+        <a:schemeClr val="lt1"/>
+      </a:fontRef>
+    </dgm:style>
+  </dgm:styleLbl>
+  <dgm:styleLbl name="fgImgPlace1">
+    <dgm:scene3d>
+      <a:camera prst="orthographicFront"/>
+      <a:lightRig rig="threePt" dir="t"/>
+    </dgm:scene3d>
+    <dgm:sp3d/>
+    <dgm:txPr/>
+    <dgm:style>
+      <a:lnRef idx="2">
+        <a:scrgbClr r="0" g="0" b="0"/>
+      </a:lnRef>
+      <a:fillRef idx="1">
+        <a:scrgbClr r="0" g="0" b="0"/>
+      </a:fillRef>
+      <a:effectRef idx="0">
+        <a:scrgbClr r="0" g="0" b="0"/>
+      </a:effectRef>
+      <a:fontRef idx="minor"/>
+    </dgm:style>
+  </dgm:styleLbl>
+  <dgm:styleLbl name="alignImgPlace1">
+    <dgm:scene3d>
+      <a:camera prst="orthographicFront"/>
+      <a:lightRig rig="threePt" dir="t"/>
+    </dgm:scene3d>
+    <dgm:sp3d/>
+    <dgm:txPr/>
+    <dgm:style>
+      <a:lnRef idx="2">
+        <a:scrgbClr r="0" g="0" b="0"/>
+      </a:lnRef>
+      <a:fillRef idx="1">
+        <a:scrgbClr r="0" g="0" b="0"/>
+      </a:fillRef>
+      <a:effectRef idx="0">
+        <a:scrgbClr r="0" g="0" b="0"/>
+      </a:effectRef>
+      <a:fontRef idx="minor"/>
+    </dgm:style>
+  </dgm:styleLbl>
+  <dgm:styleLbl name="bgImgPlace1">
+    <dgm:scene3d>
+      <a:camera prst="orthographicFront"/>
+      <a:lightRig rig="threePt" dir="t"/>
+    </dgm:scene3d>
+    <dgm:sp3d/>
+    <dgm:txPr/>
+    <dgm:style>
+      <a:lnRef idx="2">
+        <a:scrgbClr r="0" g="0" b="0"/>
+      </a:lnRef>
+      <a:fillRef idx="1">
+        <a:scrgbClr r="0" g="0" b="0"/>
+      </a:fillRef>
+      <a:effectRef idx="0">
+        <a:scrgbClr r="0" g="0" b="0"/>
+      </a:effectRef>
+      <a:fontRef idx="minor"/>
+    </dgm:style>
+  </dgm:styleLbl>
+  <dgm:styleLbl name="sibTrans2D1">
+    <dgm:scene3d>
+      <a:camera prst="orthographicFront"/>
+      <a:lightRig rig="threePt" dir="t"/>
+    </dgm:scene3d>
+    <dgm:sp3d/>
+    <dgm:txPr/>
+    <dgm:style>
+      <a:lnRef idx="0">
+        <a:scrgbClr r="0" g="0" b="0"/>
+      </a:lnRef>
+      <a:fillRef idx="1">
+        <a:scrgbClr r="0" g="0" b="0"/>
+      </a:fillRef>
+      <a:effectRef idx="0">
+        <a:scrgbClr r="0" g="0" b="0"/>
+      </a:effectRef>
+      <a:fontRef idx="minor">
+        <a:schemeClr val="lt1"/>
+      </a:fontRef>
+    </dgm:style>
+  </dgm:styleLbl>
+  <dgm:styleLbl name="fgSibTrans2D1">
+    <dgm:scene3d>
+      <a:camera prst="orthographicFront"/>
+      <a:lightRig rig="threePt" dir="t"/>
+    </dgm:scene3d>
+    <dgm:sp3d/>
+    <dgm:txPr/>
+    <dgm:style>
+      <a:lnRef idx="0">
+        <a:scrgbClr r="0" g="0" b="0"/>
+      </a:lnRef>
+      <a:fillRef idx="1">
+        <a:scrgbClr r="0" g="0" b="0"/>
+      </a:fillRef>
+      <a:effectRef idx="0">
+        <a:scrgbClr r="0" g="0" b="0"/>
+      </a:effectRef>
+      <a:fontRef idx="minor">
+        <a:schemeClr val="lt1"/>
+      </a:fontRef>
+    </dgm:style>
+  </dgm:styleLbl>
+  <dgm:styleLbl name="bgSibTrans2D1">
+    <dgm:scene3d>
+      <a:camera prst="orthographicFront"/>
+      <a:lightRig rig="threePt" dir="t"/>
+    </dgm:scene3d>
+    <dgm:sp3d/>
+    <dgm:txPr/>
+    <dgm:style>
+      <a:lnRef idx="0">
+        <a:scrgbClr r="0" g="0" b="0"/>
+      </a:lnRef>
+      <a:fillRef idx="1">
+        <a:scrgbClr r="0" g="0" b="0"/>
+      </a:fillRef>
+      <a:effectRef idx="0">
+        <a:scrgbClr r="0" g="0" b="0"/>
+      </a:effectRef>
+      <a:fontRef idx="minor">
+        <a:schemeClr val="lt1"/>
+      </a:fontRef>
+    </dgm:style>
+  </dgm:styleLbl>
+  <dgm:styleLbl name="sibTrans1D1">
+    <dgm:scene3d>
+      <a:camera prst="orthographicFront"/>
+      <a:lightRig rig="threePt" dir="t"/>
+    </dgm:scene3d>
+    <dgm:sp3d/>
+    <dgm:txPr/>
+    <dgm:style>
+      <a:lnRef idx="1">
+        <a:scrgbClr r="0" g="0" b="0"/>
+      </a:lnRef>
+      <a:fillRef idx="0">
+        <a:scrgbClr r="0" g="0" b="0"/>
+      </a:fillRef>
+      <a:effectRef idx="0">
+        <a:scrgbClr r="0" g="0" b="0"/>
+      </a:effectRef>
+      <a:fontRef idx="minor"/>
+    </dgm:style>
+  </dgm:styleLbl>
+  <dgm:styleLbl name="callout">
+    <dgm:scene3d>
+      <a:camera prst="orthographicFront"/>
+      <a:lightRig rig="threePt" dir="t"/>
+    </dgm:scene3d>
+    <dgm:sp3d/>
+    <dgm:txPr/>
+    <dgm:style>
+      <a:lnRef idx="2">
+        <a:scrgbClr r="0" g="0" b="0"/>
+      </a:lnRef>
+      <a:fillRef idx="1">
+        <a:scrgbClr r="0" g="0" b="0"/>
+      </a:fillRef>
+      <a:effectRef idx="0">
+        <a:scrgbClr r="0" g="0" b="0"/>
+      </a:effectRef>
+      <a:fontRef idx="minor"/>
+    </dgm:style>
+  </dgm:styleLbl>
+  <dgm:styleLbl name="asst0">
+    <dgm:scene3d>
+      <a:camera prst="orthographicFront"/>
+      <a:lightRig rig="threePt" dir="t"/>
+    </dgm:scene3d>
+    <dgm:sp3d/>
+    <dgm:txPr/>
+    <dgm:style>
+      <a:lnRef idx="2">
+        <a:scrgbClr r="0" g="0" b="0"/>
+      </a:lnRef>
+      <a:fillRef idx="1">
+        <a:scrgbClr r="0" g="0" b="0"/>
+      </a:fillRef>
+      <a:effectRef idx="0">
+        <a:scrgbClr r="0" g="0" b="0"/>
+      </a:effectRef>
+      <a:fontRef idx="minor">
+        <a:schemeClr val="lt1"/>
+      </a:fontRef>
+    </dgm:style>
+  </dgm:styleLbl>
+  <dgm:styleLbl name="asst1">
+    <dgm:scene3d>
+      <a:camera prst="orthographicFront"/>
+      <a:lightRig rig="threePt" dir="t"/>
+    </dgm:scene3d>
+    <dgm:sp3d/>
+    <dgm:txPr/>
+    <dgm:style>
+      <a:lnRef idx="2">
+        <a:scrgbClr r="0" g="0" b="0"/>
+      </a:lnRef>
+      <a:fillRef idx="1">
+        <a:scrgbClr r="0" g="0" b="0"/>
+      </a:fillRef>
+      <a:effectRef idx="0">
+        <a:scrgbClr r="0" g="0" b="0"/>
+      </a:effectRef>
+      <a:fontRef idx="minor">
+        <a:schemeClr val="lt1"/>
+      </a:fontRef>
+    </dgm:style>
+  </dgm:styleLbl>
+  <dgm:styleLbl name="asst2">
+    <dgm:scene3d>
+      <a:camera prst="orthographicFront"/>
+      <a:lightRig rig="threePt" dir="t"/>
+    </dgm:scene3d>
+    <dgm:sp3d/>
+    <dgm:txPr/>
+    <dgm:style>
+      <a:lnRef idx="2">
+        <a:scrgbClr r="0" g="0" b="0"/>
+      </a:lnRef>
+      <a:fillRef idx="1">
+        <a:scrgbClr r="0" g="0" b="0"/>
+      </a:fillRef>
+      <a:effectRef idx="0">
+        <a:scrgbClr r="0" g="0" b="0"/>
+      </a:effectRef>
+      <a:fontRef idx="minor">
+        <a:schemeClr val="lt1"/>
+      </a:fontRef>
+    </dgm:style>
+  </dgm:styleLbl>
+  <dgm:styleLbl name="asst3">
+    <dgm:scene3d>
+      <a:camera prst="orthographicFront"/>
+      <a:lightRig rig="threePt" dir="t"/>
+    </dgm:scene3d>
+    <dgm:sp3d/>
+    <dgm:txPr/>
+    <dgm:style>
+      <a:lnRef idx="2">
+        <a:scrgbClr r="0" g="0" b="0"/>
+      </a:lnRef>
+      <a:fillRef idx="1">
+        <a:scrgbClr r="0" g="0" b="0"/>
+      </a:fillRef>
+      <a:effectRef idx="0">
+        <a:scrgbClr r="0" g="0" b="0"/>
+      </a:effectRef>
+      <a:fontRef idx="minor">
+        <a:schemeClr val="lt1"/>
+      </a:fontRef>
+    </dgm:style>
+  </dgm:styleLbl>
+  <dgm:styleLbl name="asst4">
+    <dgm:scene3d>
+      <a:camera prst="orthographicFront"/>
+      <a:lightRig rig="threePt" dir="t"/>
+    </dgm:scene3d>
+    <dgm:sp3d/>
+    <dgm:txPr/>
+    <dgm:style>
+      <a:lnRef idx="2">
+        <a:scrgbClr r="0" g="0" b="0"/>
+      </a:lnRef>
+      <a:fillRef idx="1">
+        <a:scrgbClr r="0" g="0" b="0"/>
+      </a:fillRef>
+      <a:effectRef idx="0">
+        <a:scrgbClr r="0" g="0" b="0"/>
+      </a:effectRef>
+      <a:fontRef idx="minor">
+        <a:schemeClr val="lt1"/>
+      </a:fontRef>
+    </dgm:style>
+  </dgm:styleLbl>
+  <dgm:styleLbl name="parChTrans2D1">
+    <dgm:scene3d>
+      <a:camera prst="orthographicFront"/>
+      <a:lightRig rig="threePt" dir="t"/>
+    </dgm:scene3d>
+    <dgm:sp3d/>
+    <dgm:txPr/>
+    <dgm:style>
+      <a:lnRef idx="2">
+        <a:scrgbClr r="0" g="0" b="0"/>
+      </a:lnRef>
+      <a:fillRef idx="1">
+        <a:scrgbClr r="0" g="0" b="0"/>
+      </a:fillRef>
+      <a:effectRef idx="0">
+        <a:scrgbClr r="0" g="0" b="0"/>
+      </a:effectRef>
+      <a:fontRef idx="minor">
+        <a:schemeClr val="lt1"/>
+      </a:fontRef>
+    </dgm:style>
+  </dgm:styleLbl>
+  <dgm:styleLbl name="parChTrans2D2">
+    <dgm:scene3d>
+      <a:camera prst="orthographicFront"/>
+      <a:lightRig rig="threePt" dir="t"/>
+    </dgm:scene3d>
+    <dgm:sp3d/>
+    <dgm:txPr/>
+    <dgm:style>
+      <a:lnRef idx="2">
+        <a:scrgbClr r="0" g="0" b="0"/>
+      </a:lnRef>
+      <a:fillRef idx="1">
+        <a:scrgbClr r="0" g="0" b="0"/>
+      </a:fillRef>
+      <a:effectRef idx="0">
+        <a:scrgbClr r="0" g="0" b="0"/>
+      </a:effectRef>
+      <a:fontRef idx="minor">
+        <a:schemeClr val="lt1"/>
+      </a:fontRef>
+    </dgm:style>
+  </dgm:styleLbl>
+  <dgm:styleLbl name="parChTrans2D3">
+    <dgm:scene3d>
+      <a:camera prst="orthographicFront"/>
+      <a:lightRig rig="threePt" dir="t"/>
+    </dgm:scene3d>
+    <dgm:sp3d/>
+    <dgm:txPr/>
+    <dgm:style>
+      <a:lnRef idx="2">
+        <a:scrgbClr r="0" g="0" b="0"/>
+      </a:lnRef>
+      <a:fillRef idx="1">
+        <a:scrgbClr r="0" g="0" b="0"/>
+      </a:fillRef>
+      <a:effectRef idx="0">
+        <a:scrgbClr r="0" g="0" b="0"/>
+      </a:effectRef>
+      <a:fontRef idx="minor">
+        <a:schemeClr val="lt1"/>
+      </a:fontRef>
+    </dgm:style>
+  </dgm:styleLbl>
+  <dgm:styleLbl name="parChTrans2D4">
+    <dgm:scene3d>
+      <a:camera prst="orthographicFront"/>
+      <a:lightRig rig="threePt" dir="t"/>
+    </dgm:scene3d>
+    <dgm:sp3d/>
+    <dgm:txPr/>
+    <dgm:style>
+      <a:lnRef idx="2">
+        <a:scrgbClr r="0" g="0" b="0"/>
+      </a:lnRef>
+      <a:fillRef idx="1">
+        <a:scrgbClr r="0" g="0" b="0"/>
+      </a:fillRef>
+      <a:effectRef idx="0">
+        <a:scrgbClr r="0" g="0" b="0"/>
+      </a:effectRef>
+      <a:fontRef idx="minor">
+        <a:schemeClr val="lt1"/>
+      </a:fontRef>
+    </dgm:style>
+  </dgm:styleLbl>
+  <dgm:styleLbl name="parChTrans1D1">
+    <dgm:scene3d>
+      <a:camera prst="orthographicFront"/>
+      <a:lightRig rig="threePt" dir="t"/>
+    </dgm:scene3d>
+    <dgm:sp3d/>
+    <dgm:txPr/>
+    <dgm:style>
+      <a:lnRef idx="2">
+        <a:scrgbClr r="0" g="0" b="0"/>
+      </a:lnRef>
+      <a:fillRef idx="0">
+        <a:scrgbClr r="0" g="0" b="0"/>
+      </a:fillRef>
+      <a:effectRef idx="0">
+        <a:scrgbClr r="0" g="0" b="0"/>
+      </a:effectRef>
+      <a:fontRef idx="minor"/>
+    </dgm:style>
+  </dgm:styleLbl>
+  <dgm:styleLbl name="parChTrans1D2">
+    <dgm:scene3d>
+      <a:camera prst="orthographicFront"/>
+      <a:lightRig rig="threePt" dir="t"/>
+    </dgm:scene3d>
+    <dgm:sp3d/>
+    <dgm:txPr/>
+    <dgm:style>
+      <a:lnRef idx="2">
+        <a:scrgbClr r="0" g="0" b="0"/>
+      </a:lnRef>
+      <a:fillRef idx="0">
+        <a:scrgbClr r="0" g="0" b="0"/>
+      </a:fillRef>
+      <a:effectRef idx="0">
+        <a:scrgbClr r="0" g="0" b="0"/>
+      </a:effectRef>
+      <a:fontRef idx="minor"/>
+    </dgm:style>
+  </dgm:styleLbl>
+  <dgm:styleLbl name="parChTrans1D3">
+    <dgm:scene3d>
+      <a:camera prst="orthographicFront"/>
+      <a:lightRig rig="threePt" dir="t"/>
+    </dgm:scene3d>
+    <dgm:sp3d/>
+    <dgm:txPr/>
+    <dgm:style>
+      <a:lnRef idx="2">
+        <a:scrgbClr r="0" g="0" b="0"/>
+      </a:lnRef>
+      <a:fillRef idx="0">
+        <a:scrgbClr r="0" g="0" b="0"/>
+      </a:fillRef>
+      <a:effectRef idx="0">
+        <a:scrgbClr r="0" g="0" b="0"/>
+      </a:effectRef>
+      <a:fontRef idx="minor"/>
+    </dgm:style>
+  </dgm:styleLbl>
+  <dgm:styleLbl name="parChTrans1D4">
+    <dgm:scene3d>
+      <a:camera prst="orthographicFront"/>
+      <a:lightRig rig="threePt" dir="t"/>
+    </dgm:scene3d>
+    <dgm:sp3d/>
+    <dgm:txPr/>
+    <dgm:style>
+      <a:lnRef idx="2">
+        <a:scrgbClr r="0" g="0" b="0"/>
+      </a:lnRef>
+      <a:fillRef idx="0">
+        <a:scrgbClr r="0" g="0" b="0"/>
+      </a:fillRef>
+      <a:effectRef idx="0">
+        <a:scrgbClr r="0" g="0" b="0"/>
+      </a:effectRef>
+      <a:fontRef idx="minor"/>
+    </dgm:style>
+  </dgm:styleLbl>
+  <dgm:styleLbl name="fgAcc1">
+    <dgm:scene3d>
+      <a:camera prst="orthographicFront"/>
+      <a:lightRig rig="threePt" dir="t"/>
+    </dgm:scene3d>
+    <dgm:sp3d/>
+    <dgm:txPr/>
+    <dgm:style>
+      <a:lnRef idx="2">
+        <a:scrgbClr r="0" g="0" b="0"/>
+      </a:lnRef>
+      <a:fillRef idx="1">
+        <a:scrgbClr r="0" g="0" b="0"/>
+      </a:fillRef>
+      <a:effectRef idx="0">
+        <a:scrgbClr r="0" g="0" b="0"/>
+      </a:effectRef>
+      <a:fontRef idx="minor"/>
+    </dgm:style>
+  </dgm:styleLbl>
+  <dgm:styleLbl name="conFgAcc1">
+    <dgm:scene3d>
+      <a:camera prst="orthographicFront"/>
+      <a:lightRig rig="threePt" dir="t"/>
+    </dgm:scene3d>
+    <dgm:sp3d/>
+    <dgm:txPr/>
+    <dgm:style>
+      <a:lnRef idx="2">
+        <a:scrgbClr r="0" g="0" b="0"/>
+      </a:lnRef>
+      <a:fillRef idx="1">
+        <a:scrgbClr r="0" g="0" b="0"/>
+      </a:fillRef>
+      <a:effectRef idx="0">
+        <a:scrgbClr r="0" g="0" b="0"/>
+      </a:effectRef>
+      <a:fontRef idx="minor"/>
+    </dgm:style>
+  </dgm:styleLbl>
+  <dgm:styleLbl name="alignAcc1">
+    <dgm:scene3d>
+      <a:camera prst="orthographicFront"/>
+      <a:lightRig rig="threePt" dir="t"/>
+    </dgm:scene3d>
+    <dgm:sp3d/>
+    <dgm:txPr/>
+    <dgm:style>
+      <a:lnRef idx="2">
+        <a:scrgbClr r="0" g="0" b="0"/>
+      </a:lnRef>
+      <a:fillRef idx="1">
+        <a:scrgbClr r="0" g="0" b="0"/>
+      </a:fillRef>
+      <a:effectRef idx="0">
+        <a:scrgbClr r="0" g="0" b="0"/>
+      </a:effectRef>
+      <a:fontRef idx="minor"/>
+    </dgm:style>
+  </dgm:styleLbl>
+  <dgm:styleLbl name="trAlignAcc1">
+    <dgm:scene3d>
+      <a:camera prst="orthographicFront"/>
+      <a:lightRig rig="threePt" dir="t"/>
+    </dgm:scene3d>
+    <dgm:sp3d/>
+    <dgm:txPr/>
+    <dgm:style>
+      <a:lnRef idx="1">
+        <a:scrgbClr r="0" g="0" b="0"/>
+      </a:lnRef>
+      <a:fillRef idx="1">
+        <a:scrgbClr r="0" g="0" b="0"/>
+      </a:fillRef>
+      <a:effectRef idx="0">
+        <a:scrgbClr r="0" g="0" b="0"/>
+      </a:effectRef>
+      <a:fontRef idx="minor"/>
+    </dgm:style>
+  </dgm:styleLbl>
+  <dgm:styleLbl name="bgAcc1">
+    <dgm:scene3d>
+      <a:camera prst="orthographicFront"/>
+      <a:lightRig rig="threePt" dir="t"/>
+    </dgm:scene3d>
+    <dgm:sp3d/>
+    <dgm:txPr/>
+    <dgm:style>
+      <a:lnRef idx="2">
+        <a:scrgbClr r="0" g="0" b="0"/>
+      </a:lnRef>
+      <a:fillRef idx="1">
+        <a:scrgbClr r="0" g="0" b="0"/>
+      </a:fillRef>
+      <a:effectRef idx="0">
+        <a:scrgbClr r="0" g="0" b="0"/>
+      </a:effectRef>
+      <a:fontRef idx="minor"/>
+    </dgm:style>
+  </dgm:styleLbl>
+  <dgm:styleLbl name="solidFgAcc1">
+    <dgm:scene3d>
+      <a:camera prst="orthographicFront"/>
+      <a:lightRig rig="threePt" dir="t"/>
+    </dgm:scene3d>
+    <dgm:sp3d/>
+    <dgm:txPr/>
+    <dgm:style>
+      <a:lnRef idx="2">
+        <a:scrgbClr r="0" g="0" b="0"/>
+      </a:lnRef>
+      <a:fillRef idx="1">
+        <a:scrgbClr r="0" g="0" b="0"/>
+      </a:fillRef>
+      <a:effectRef idx="0">
+        <a:scrgbClr r="0" g="0" b="0"/>
+      </a:effectRef>
+      <a:fontRef idx="minor"/>
+    </dgm:style>
+  </dgm:styleLbl>
+  <dgm:styleLbl name="solidAlignAcc1">
+    <dgm:scene3d>
+      <a:camera prst="orthographicFront"/>
+      <a:lightRig rig="threePt" dir="t"/>
+    </dgm:scene3d>
+    <dgm:sp3d/>
+    <dgm:txPr/>
+    <dgm:style>
+      <a:lnRef idx="2">
+        <a:scrgbClr r="0" g="0" b="0"/>
+      </a:lnRef>
+      <a:fillRef idx="1">
+        <a:scrgbClr r="0" g="0" b="0"/>
+      </a:fillRef>
+      <a:effectRef idx="0">
+        <a:scrgbClr r="0" g="0" b="0"/>
+      </a:effectRef>
+      <a:fontRef idx="minor"/>
+    </dgm:style>
+  </dgm:styleLbl>
+  <dgm:styleLbl name="solidBgAcc1">
+    <dgm:scene3d>
+      <a:camera prst="orthographicFront"/>
+      <a:lightRig rig="threePt" dir="t"/>
+    </dgm:scene3d>
+    <dgm:sp3d/>
+    <dgm:txPr/>
+    <dgm:style>
+      <a:lnRef idx="2">
+        <a:scrgbClr r="0" g="0" b="0"/>
+      </a:lnRef>
+      <a:fillRef idx="1">
+        <a:scrgbClr r="0" g="0" b="0"/>
+      </a:fillRef>
+      <a:effectRef idx="0">
+        <a:scrgbClr r="0" g="0" b="0"/>
+      </a:effectRef>
+      <a:fontRef idx="minor"/>
+    </dgm:style>
+  </dgm:styleLbl>
+  <dgm:styleLbl name="fgAccFollowNode1">
+    <dgm:scene3d>
+      <a:camera prst="orthographicFront"/>
+      <a:lightRig rig="threePt" dir="t"/>
+    </dgm:scene3d>
+    <dgm:sp3d/>
+    <dgm:txPr/>
+    <dgm:style>
+      <a:lnRef idx="2">
+        <a:scrgbClr r="0" g="0" b="0"/>
+      </a:lnRef>
+      <a:fillRef idx="1">
+        <a:scrgbClr r="0" g="0" b="0"/>
+      </a:fillRef>
+      <a:effectRef idx="0">
+        <a:scrgbClr r="0" g="0" b="0"/>
+      </a:effectRef>
+      <a:fontRef idx="minor"/>
+    </dgm:style>
+  </dgm:styleLbl>
+  <dgm:styleLbl name="alignAccFollowNode1">
+    <dgm:scene3d>
+      <a:camera prst="orthographicFront"/>
+      <a:lightRig rig="threePt" dir="t"/>
+    </dgm:scene3d>
+    <dgm:sp3d/>
+    <dgm:txPr/>
+    <dgm:style>
+      <a:lnRef idx="2">
+        <a:scrgbClr r="0" g="0" b="0"/>
+      </a:lnRef>
+      <a:fillRef idx="1">
+        <a:scrgbClr r="0" g="0" b="0"/>
+      </a:fillRef>
+      <a:effectRef idx="0">
+        <a:scrgbClr r="0" g="0" b="0"/>
+      </a:effectRef>
+      <a:fontRef idx="minor"/>
+    </dgm:style>
+  </dgm:styleLbl>
+  <dgm:styleLbl name="bgAccFollowNode1">
+    <dgm:scene3d>
+      <a:camera prst="orthographicFront"/>
+      <a:lightRig rig="threePt" dir="t"/>
+    </dgm:scene3d>
+    <dgm:sp3d/>
+    <dgm:txPr/>
+    <dgm:style>
+      <a:lnRef idx="2">
+        <a:scrgbClr r="0" g="0" b="0"/>
+      </a:lnRef>
+      <a:fillRef idx="1">
+        <a:scrgbClr r="0" g="0" b="0"/>
+      </a:fillRef>
+      <a:effectRef idx="0">
+        <a:scrgbClr r="0" g="0" b="0"/>
+      </a:effectRef>
+      <a:fontRef idx="minor"/>
+    </dgm:style>
+  </dgm:styleLbl>
+  <dgm:styleLbl name="fgAcc0">
+    <dgm:scene3d>
+      <a:camera prst="orthographicFront"/>
+      <a:lightRig rig="threePt" dir="t"/>
+    </dgm:scene3d>
+    <dgm:sp3d/>
+    <dgm:txPr/>
+    <dgm:style>
+      <a:lnRef idx="2">
+        <a:scrgbClr r="0" g="0" b="0"/>
+      </a:lnRef>
+      <a:fillRef idx="1">
+        <a:scrgbClr r="0" g="0" b="0"/>
+      </a:fillRef>
+      <a:effectRef idx="0">
+        <a:scrgbClr r="0" g="0" b="0"/>
+      </a:effectRef>
+      <a:fontRef idx="minor"/>
+    </dgm:style>
+  </dgm:styleLbl>
+  <dgm:styleLbl name="fgAcc2">
+    <dgm:scene3d>
+      <a:camera prst="orthographicFront"/>
+      <a:lightRig rig="threePt" dir="t"/>
+    </dgm:scene3d>
+    <dgm:sp3d/>
+    <dgm:txPr/>
+    <dgm:style>
+      <a:lnRef idx="2">
+        <a:scrgbClr r="0" g="0" b="0"/>
+      </a:lnRef>
+      <a:fillRef idx="1">
+        <a:scrgbClr r="0" g="0" b="0"/>
+      </a:fillRef>
+      <a:effectRef idx="0">
+        <a:scrgbClr r="0" g="0" b="0"/>
+      </a:effectRef>
+      <a:fontRef idx="minor"/>
+    </dgm:style>
+  </dgm:styleLbl>
+  <dgm:styleLbl name="fgAcc3">
+    <dgm:scene3d>
+      <a:camera prst="orthographicFront"/>
+      <a:lightRig rig="threePt" dir="t"/>
+    </dgm:scene3d>
+    <dgm:sp3d/>
+    <dgm:txPr/>
+    <dgm:style>
+      <a:lnRef idx="2">
+        <a:scrgbClr r="0" g="0" b="0"/>
+      </a:lnRef>
+      <a:fillRef idx="1">
+        <a:scrgbClr r="0" g="0" b="0"/>
+      </a:fillRef>
+      <a:effectRef idx="0">
+        <a:scrgbClr r="0" g="0" b="0"/>
+      </a:effectRef>
+      <a:fontRef idx="minor"/>
+    </dgm:style>
+  </dgm:styleLbl>
+  <dgm:styleLbl name="fgAcc4">
+    <dgm:scene3d>
+      <a:camera prst="orthographicFront"/>
+      <a:lightRig rig="threePt" dir="t"/>
+    </dgm:scene3d>
+    <dgm:sp3d/>
+    <dgm:txPr/>
+    <dgm:style>
+      <a:lnRef idx="2">
+        <a:scrgbClr r="0" g="0" b="0"/>
+      </a:lnRef>
+      <a:fillRef idx="1">
+        <a:scrgbClr r="0" g="0" b="0"/>
+      </a:fillRef>
+      <a:effectRef idx="0">
+        <a:scrgbClr r="0" g="0" b="0"/>
+      </a:effectRef>
+      <a:fontRef idx="minor"/>
+    </dgm:style>
+  </dgm:styleLbl>
+  <dgm:styleLbl name="bgShp">
+    <dgm:scene3d>
+      <a:camera prst="orthographicFront"/>
+      <a:lightRig rig="threePt" dir="t"/>
+    </dgm:scene3d>
+    <dgm:sp3d/>
+    <dgm:txPr/>
+    <dgm:style>
+      <a:lnRef idx="0">
+        <a:scrgbClr r="0" g="0" b="0"/>
+      </a:lnRef>
+      <a:fillRef idx="1">
+        <a:scrgbClr r="0" g="0" b="0"/>
+      </a:fillRef>
+      <a:effectRef idx="0">
+        <a:scrgbClr r="0" g="0" b="0"/>
+      </a:effectRef>
+      <a:fontRef idx="minor"/>
+    </dgm:style>
+  </dgm:styleLbl>
+  <dgm:styleLbl name="dkBgShp">
+    <dgm:scene3d>
+      <a:camera prst="orthographicFront"/>
+      <a:lightRig rig="threePt" dir="t"/>
+    </dgm:scene3d>
+    <dgm:sp3d/>
+    <dgm:txPr/>
+    <dgm:style>
+      <a:lnRef idx="0">
+        <a:scrgbClr r="0" g="0" b="0"/>
+      </a:lnRef>
+      <a:fillRef idx="1">
+        <a:scrgbClr r="0" g="0" b="0"/>
+      </a:fillRef>
+      <a:effectRef idx="0">
+        <a:scrgbClr r="0" g="0" b="0"/>
+      </a:effectRef>
+      <a:fontRef idx="minor"/>
+    </dgm:style>
+  </dgm:styleLbl>
+  <dgm:styleLbl name="trBgShp">
+    <dgm:scene3d>
+      <a:camera prst="orthographicFront"/>
+      <a:lightRig rig="threePt" dir="t"/>
+    </dgm:scene3d>
+    <dgm:sp3d/>
+    <dgm:txPr/>
+    <dgm:style>
+      <a:lnRef idx="0">
+        <a:scrgbClr r="0" g="0" b="0"/>
+      </a:lnRef>
+      <a:fillRef idx="1">
+        <a:scrgbClr r="0" g="0" b="0"/>
+      </a:fillRef>
+      <a:effectRef idx="0">
+        <a:scrgbClr r="0" g="0" b="0"/>
+      </a:effectRef>
+      <a:fontRef idx="minor"/>
+    </dgm:style>
+  </dgm:styleLbl>
+  <dgm:styleLbl name="fgShp">
+    <dgm:scene3d>
+      <a:camera prst="orthographicFront"/>
+      <a:lightRig rig="threePt" dir="t"/>
+    </dgm:scene3d>
+    <dgm:sp3d/>
+    <dgm:txPr/>
+    <dgm:style>
+      <a:lnRef idx="2">
+        <a:scrgbClr r="0" g="0" b="0"/>
+      </a:lnRef>
+      <a:fillRef idx="1">
+        <a:scrgbClr r="0" g="0" b="0"/>
+      </a:fillRef>
+      <a:effectRef idx="0">
+        <a:scrgbClr r="0" g="0" b="0"/>
+      </a:effectRef>
+      <a:fontRef idx="minor"/>
+    </dgm:style>
+  </dgm:styleLbl>
+  <dgm:styleLbl name="revTx">
+    <dgm:scene3d>
+      <a:camera prst="orthographicFront"/>
+      <a:lightRig rig="threePt" dir="t"/>
+    </dgm:scene3d>
+    <dgm:sp3d/>
+    <dgm:txPr/>
+    <dgm:style>
+      <a:lnRef idx="0">
+        <a:scrgbClr r="0" g="0" b="0"/>
+      </a:lnRef>
+      <a:fillRef idx="0">
+        <a:scrgbClr r="0" g="0" b="0"/>
+      </a:fillRef>
+      <a:effectRef idx="0">
+        <a:scrgbClr r="0" g="0" b="0"/>
+      </a:effectRef>
+      <a:fontRef idx="minor"/>
+    </dgm:style>
+  </dgm:styleLbl>
+</dgm:styleDef>
+</file>
+
+<file path=ppt/diagrams/quickStyle3.xml><?xml version="1.0" encoding="utf-8"?>
 <dgm:styleDef xmlns:dgm="http://schemas.openxmlformats.org/drawingml/2006/diagram" xmlns:a="http://schemas.openxmlformats.org/drawingml/2006/main" uniqueId="urn:microsoft.com/office/officeart/2005/8/quickstyle/simple1">
   <dgm:title val=""/>
   <dgm:desc val=""/>
@@ -6944,6 +9606,114 @@
     <p:extLst>
       <p:ext uri="{BB962C8B-B14F-4D97-AF65-F5344CB8AC3E}">
         <p14:creationId xmlns:p14="http://schemas.microsoft.com/office/powerpoint/2010/main" val="2206855608"/>
+      </p:ext>
+    </p:extLst>
+  </p:cSld>
+  <p:clrMapOvr>
+    <a:masterClrMapping/>
+  </p:clrMapOvr>
+</p:notes>
+</file>
+
+<file path=ppt/notesSlides/notesSlide6.xml><?xml version="1.0" encoding="utf-8"?>
+<p:notes xmlns:a="http://schemas.openxmlformats.org/drawingml/2006/main" xmlns:r="http://schemas.openxmlformats.org/officeDocument/2006/relationships" xmlns:p="http://schemas.openxmlformats.org/presentationml/2006/main">
+  <p:cSld>
+    <p:spTree>
+      <p:nvGrpSpPr>
+        <p:cNvPr id="1" name="">
+          <a:extLst>
+            <a:ext uri="{FF2B5EF4-FFF2-40B4-BE49-F238E27FC236}">
+              <a16:creationId xmlns:a16="http://schemas.microsoft.com/office/drawing/2014/main" id="{CC92FA0D-0222-ECB5-4EEC-A6F98D9220D8}"/>
+            </a:ext>
+          </a:extLst>
+        </p:cNvPr>
+        <p:cNvGrpSpPr/>
+        <p:nvPr/>
+      </p:nvGrpSpPr>
+      <p:grpSpPr>
+        <a:xfrm>
+          <a:off x="0" y="0"/>
+          <a:ext cx="0" cy="0"/>
+          <a:chOff x="0" y="0"/>
+          <a:chExt cx="0" cy="0"/>
+        </a:xfrm>
+      </p:grpSpPr>
+      <p:sp>
+        <p:nvSpPr>
+          <p:cNvPr id="2" name="Slide Image Placeholder 1">
+            <a:extLst>
+              <a:ext uri="{FF2B5EF4-FFF2-40B4-BE49-F238E27FC236}">
+                <a16:creationId xmlns:a16="http://schemas.microsoft.com/office/drawing/2014/main" id="{78E3CA61-C078-B0F9-5D5C-538F58DF3472}"/>
+              </a:ext>
+            </a:extLst>
+          </p:cNvPr>
+          <p:cNvSpPr>
+            <a:spLocks noGrp="1" noRot="1" noChangeAspect="1"/>
+          </p:cNvSpPr>
+          <p:nvPr>
+            <p:ph type="sldImg"/>
+          </p:nvPr>
+        </p:nvSpPr>
+        <p:spPr/>
+      </p:sp>
+      <p:sp>
+        <p:nvSpPr>
+          <p:cNvPr id="3" name="Notes Placeholder 2">
+            <a:extLst>
+              <a:ext uri="{FF2B5EF4-FFF2-40B4-BE49-F238E27FC236}">
+                <a16:creationId xmlns:a16="http://schemas.microsoft.com/office/drawing/2014/main" id="{86328CB7-DB05-40F8-BAD4-4098275D7AF4}"/>
+              </a:ext>
+            </a:extLst>
+          </p:cNvPr>
+          <p:cNvSpPr>
+            <a:spLocks noGrp="1"/>
+          </p:cNvSpPr>
+          <p:nvPr>
+            <p:ph type="body" idx="1"/>
+          </p:nvPr>
+        </p:nvSpPr>
+        <p:spPr/>
+        <p:txBody>
+          <a:bodyPr/>
+          <a:lstStyle/>
+          <a:p>
+            <a:endParaRPr lang="en-US" dirty="0"/>
+          </a:p>
+        </p:txBody>
+      </p:sp>
+      <p:sp>
+        <p:nvSpPr>
+          <p:cNvPr id="4" name="Slide Number Placeholder 3">
+            <a:extLst>
+              <a:ext uri="{FF2B5EF4-FFF2-40B4-BE49-F238E27FC236}">
+                <a16:creationId xmlns:a16="http://schemas.microsoft.com/office/drawing/2014/main" id="{56F40C18-A1F7-9F81-2FAD-19698786A1E4}"/>
+              </a:ext>
+            </a:extLst>
+          </p:cNvPr>
+          <p:cNvSpPr>
+            <a:spLocks noGrp="1"/>
+          </p:cNvSpPr>
+          <p:nvPr>
+            <p:ph type="sldNum" sz="quarter" idx="5"/>
+          </p:nvPr>
+        </p:nvSpPr>
+        <p:spPr/>
+        <p:txBody>
+          <a:bodyPr/>
+          <a:lstStyle/>
+          <a:p>
+            <a:fld id="{EE000EEB-8338-48D7-8EE8-EE0082EF7602}" type="slidenum">
+              <a:rPr lang="en-US" smtClean="0"/>
+              <a:t>6</a:t>
+            </a:fld>
+            <a:endParaRPr lang="en-US" dirty="0"/>
+          </a:p>
+        </p:txBody>
+      </p:sp>
+    </p:spTree>
+    <p:extLst>
+      <p:ext uri="{BB962C8B-B14F-4D97-AF65-F5344CB8AC3E}">
+        <p14:creationId xmlns:p14="http://schemas.microsoft.com/office/powerpoint/2010/main" val="2231218762"/>
       </p:ext>
     </p:extLst>
   </p:cSld>
@@ -14925,6 +17695,276 @@
 </p:sld>
 </file>
 
+<file path=ppt/slides/slide6.xml><?xml version="1.0" encoding="utf-8"?>
+<p:sld xmlns:a="http://schemas.openxmlformats.org/drawingml/2006/main" xmlns:r="http://schemas.openxmlformats.org/officeDocument/2006/relationships" xmlns:p="http://schemas.openxmlformats.org/presentationml/2006/main">
+  <p:cSld>
+    <p:spTree>
+      <p:nvGrpSpPr>
+        <p:cNvPr id="1" name="">
+          <a:extLst>
+            <a:ext uri="{FF2B5EF4-FFF2-40B4-BE49-F238E27FC236}">
+              <a16:creationId xmlns:a16="http://schemas.microsoft.com/office/drawing/2014/main" id="{0726B810-4562-CF05-B49F-67ABC0BABEC8}"/>
+            </a:ext>
+          </a:extLst>
+        </p:cNvPr>
+        <p:cNvGrpSpPr/>
+        <p:nvPr/>
+      </p:nvGrpSpPr>
+      <p:grpSpPr>
+        <a:xfrm>
+          <a:off x="0" y="0"/>
+          <a:ext cx="0" cy="0"/>
+          <a:chOff x="0" y="0"/>
+          <a:chExt cx="0" cy="0"/>
+        </a:xfrm>
+      </p:grpSpPr>
+      <p:pic>
+        <p:nvPicPr>
+          <p:cNvPr id="5" name="Picture 4" descr="chain links">
+            <a:extLst>
+              <a:ext uri="{FF2B5EF4-FFF2-40B4-BE49-F238E27FC236}">
+                <a16:creationId xmlns:a16="http://schemas.microsoft.com/office/drawing/2014/main" id="{8EF47FAB-57E5-5509-2F6F-13A5EFC047C5}"/>
+              </a:ext>
+            </a:extLst>
+          </p:cNvPr>
+          <p:cNvPicPr>
+            <a:picLocks noChangeAspect="1"/>
+          </p:cNvPicPr>
+          <p:nvPr/>
+        </p:nvPicPr>
+        <p:blipFill rotWithShape="1">
+          <a:blip r:embed="rId3">
+            <a:duotone>
+              <a:prstClr val="black"/>
+              <a:schemeClr val="accent5">
+                <a:tint val="45000"/>
+                <a:satMod val="400000"/>
+              </a:schemeClr>
+            </a:duotone>
+            <a:alphaModFix amt="25000"/>
+          </a:blip>
+          <a:srcRect t="23391" r="9091"/>
+          <a:stretch/>
+        </p:blipFill>
+        <p:spPr>
+          <a:xfrm>
+            <a:off x="0" y="10"/>
+            <a:ext cx="12191980" cy="6857990"/>
+          </a:xfrm>
+          <a:prstGeom prst="rect">
+            <a:avLst/>
+          </a:prstGeom>
+        </p:spPr>
+      </p:pic>
+      <p:pic>
+        <p:nvPicPr>
+          <p:cNvPr id="14" name="Picture 13" descr="A group of cubes with a symbol and a blue light&#10;&#10;AI-generated content may be incorrect.">
+            <a:extLst>
+              <a:ext uri="{FF2B5EF4-FFF2-40B4-BE49-F238E27FC236}">
+                <a16:creationId xmlns:a16="http://schemas.microsoft.com/office/drawing/2014/main" id="{4264879D-64EC-50FB-0155-E6162B487321}"/>
+              </a:ext>
+            </a:extLst>
+          </p:cNvPr>
+          <p:cNvPicPr>
+            <a:picLocks noChangeAspect="1"/>
+          </p:cNvPicPr>
+          <p:nvPr/>
+        </p:nvPicPr>
+        <p:blipFill>
+          <a:blip r:embed="rId4"/>
+          <a:stretch>
+            <a:fillRect/>
+          </a:stretch>
+        </p:blipFill>
+        <p:spPr>
+          <a:xfrm>
+            <a:off x="765928" y="0"/>
+            <a:ext cx="10660144" cy="6858000"/>
+          </a:xfrm>
+          <a:prstGeom prst="rect">
+            <a:avLst/>
+          </a:prstGeom>
+        </p:spPr>
+      </p:pic>
+      <p:graphicFrame>
+        <p:nvGraphicFramePr>
+          <p:cNvPr id="17" name="Diagram 16">
+            <a:extLst>
+              <a:ext uri="{FF2B5EF4-FFF2-40B4-BE49-F238E27FC236}">
+                <a16:creationId xmlns:a16="http://schemas.microsoft.com/office/drawing/2014/main" id="{0A1C6F39-AB7F-24BB-C13F-038A22768E44}"/>
+              </a:ext>
+            </a:extLst>
+          </p:cNvPr>
+          <p:cNvGraphicFramePr/>
+          <p:nvPr/>
+        </p:nvGraphicFramePr>
+        <p:xfrm>
+          <a:off x="2220891" y="4632111"/>
+          <a:ext cx="8128000" cy="1408090"/>
+        </p:xfrm>
+        <a:graphic>
+          <a:graphicData uri="http://schemas.openxmlformats.org/drawingml/2006/diagram">
+            <dgm:relIds xmlns:dgm="http://schemas.openxmlformats.org/drawingml/2006/diagram" xmlns:r="http://schemas.openxmlformats.org/officeDocument/2006/relationships" r:dm="rId5" r:lo="rId6" r:qs="rId7" r:cs="rId8"/>
+          </a:graphicData>
+        </a:graphic>
+      </p:graphicFrame>
+      <p:pic>
+        <p:nvPicPr>
+          <p:cNvPr id="19" name="Picture 18" descr="A blue circle with a black background&#10;&#10;AI-generated content may be incorrect.">
+            <a:extLst>
+              <a:ext uri="{FF2B5EF4-FFF2-40B4-BE49-F238E27FC236}">
+                <a16:creationId xmlns:a16="http://schemas.microsoft.com/office/drawing/2014/main" id="{B3D76C5A-794C-B75A-F7F6-D467E2DE1E72}"/>
+              </a:ext>
+            </a:extLst>
+          </p:cNvPr>
+          <p:cNvPicPr>
+            <a:picLocks noChangeAspect="1"/>
+          </p:cNvPicPr>
+          <p:nvPr/>
+        </p:nvPicPr>
+        <p:blipFill>
+          <a:blip r:embed="rId10"/>
+          <a:stretch>
+            <a:fillRect/>
+          </a:stretch>
+        </p:blipFill>
+        <p:spPr>
+          <a:xfrm>
+            <a:off x="2769171" y="4926207"/>
+            <a:ext cx="858165" cy="776435"/>
+          </a:xfrm>
+          <a:prstGeom prst="roundRect">
+            <a:avLst>
+              <a:gd name="adj" fmla="val 16667"/>
+            </a:avLst>
+          </a:prstGeom>
+          <a:ln>
+            <a:noFill/>
+          </a:ln>
+          <a:effectLst>
+            <a:outerShdw blurRad="152400" dist="12000" dir="900000" sy="98000" kx="110000" ky="200000" algn="tl" rotWithShape="0">
+              <a:srgbClr val="000000">
+                <a:alpha val="30000"/>
+              </a:srgbClr>
+            </a:outerShdw>
+          </a:effectLst>
+          <a:scene3d>
+            <a:camera prst="perspectiveRelaxed">
+              <a:rot lat="19800000" lon="1200000" rev="20820000"/>
+            </a:camera>
+            <a:lightRig rig="threePt" dir="t"/>
+          </a:scene3d>
+          <a:sp3d contourW="6350" prstMaterial="matte">
+            <a:bevelT w="101600" h="101600"/>
+            <a:contourClr>
+              <a:srgbClr val="969696"/>
+            </a:contourClr>
+          </a:sp3d>
+        </p:spPr>
+      </p:pic>
+      <p:pic>
+        <p:nvPicPr>
+          <p:cNvPr id="3" name="Picture 2" descr="A white circle with a blue circle with a blue circle with a blue circle with a white circle with a blue circle with a blue circle with a white circle with a blue circle with a blue circle&#10;&#10;AI-generated content may be incorrect.">
+            <a:extLst>
+              <a:ext uri="{FF2B5EF4-FFF2-40B4-BE49-F238E27FC236}">
+                <a16:creationId xmlns:a16="http://schemas.microsoft.com/office/drawing/2014/main" id="{43EA67BE-A6E0-F223-488F-A69FA8DA51D0}"/>
+              </a:ext>
+            </a:extLst>
+          </p:cNvPr>
+          <p:cNvPicPr>
+            <a:picLocks noChangeAspect="1"/>
+          </p:cNvPicPr>
+          <p:nvPr/>
+        </p:nvPicPr>
+        <p:blipFill>
+          <a:blip r:embed="rId11"/>
+          <a:stretch>
+            <a:fillRect/>
+          </a:stretch>
+        </p:blipFill>
+        <p:spPr>
+          <a:xfrm>
+            <a:off x="2827177" y="270455"/>
+            <a:ext cx="6915427" cy="4172765"/>
+          </a:xfrm>
+          <a:prstGeom prst="rect">
+            <a:avLst/>
+          </a:prstGeom>
+          <a:ln>
+            <a:noFill/>
+          </a:ln>
+          <a:effectLst>
+            <a:softEdge rad="112500"/>
+          </a:effectLst>
+        </p:spPr>
+      </p:pic>
+      <p:pic>
+        <p:nvPicPr>
+          <p:cNvPr id="4" name="Picture 3">
+            <a:extLst>
+              <a:ext uri="{FF2B5EF4-FFF2-40B4-BE49-F238E27FC236}">
+                <a16:creationId xmlns:a16="http://schemas.microsoft.com/office/drawing/2014/main" id="{38488C7E-C6CD-C64C-01FB-EB48AD553995}"/>
+              </a:ext>
+            </a:extLst>
+          </p:cNvPr>
+          <p:cNvPicPr>
+            <a:picLocks noChangeAspect="1"/>
+          </p:cNvPicPr>
+          <p:nvPr/>
+        </p:nvPicPr>
+        <p:blipFill>
+          <a:blip r:embed="rId12"/>
+          <a:stretch>
+            <a:fillRect/>
+          </a:stretch>
+        </p:blipFill>
+        <p:spPr>
+          <a:xfrm>
+            <a:off x="4928061" y="4926207"/>
+            <a:ext cx="778462" cy="776435"/>
+          </a:xfrm>
+          <a:prstGeom prst="roundRect">
+            <a:avLst>
+              <a:gd name="adj" fmla="val 16667"/>
+            </a:avLst>
+          </a:prstGeom>
+          <a:ln>
+            <a:noFill/>
+          </a:ln>
+          <a:effectLst>
+            <a:outerShdw blurRad="152400" dist="12000" dir="900000" sy="98000" kx="110000" ky="200000" algn="tl" rotWithShape="0">
+              <a:srgbClr val="000000">
+                <a:alpha val="30000"/>
+              </a:srgbClr>
+            </a:outerShdw>
+          </a:effectLst>
+          <a:scene3d>
+            <a:camera prst="perspectiveRelaxed">
+              <a:rot lat="19800000" lon="1200000" rev="20820000"/>
+            </a:camera>
+            <a:lightRig rig="threePt" dir="t"/>
+          </a:scene3d>
+          <a:sp3d contourW="6350" prstMaterial="matte">
+            <a:bevelT w="101600" h="101600"/>
+            <a:contourClr>
+              <a:srgbClr val="969696"/>
+            </a:contourClr>
+          </a:sp3d>
+        </p:spPr>
+      </p:pic>
+    </p:spTree>
+    <p:extLst>
+      <p:ext uri="{BB962C8B-B14F-4D97-AF65-F5344CB8AC3E}">
+        <p14:creationId xmlns:p14="http://schemas.microsoft.com/office/powerpoint/2010/main" val="1150308760"/>
+      </p:ext>
+    </p:extLst>
+  </p:cSld>
+  <p:clrMapOvr>
+    <a:masterClrMapping/>
+  </p:clrMapOvr>
+</p:sld>
+</file>
+
 <file path=ppt/theme/theme1.xml><?xml version="1.0" encoding="utf-8"?>
 <a:theme xmlns:a="http://schemas.openxmlformats.org/drawingml/2006/main" name="Ion">
   <a:themeElements>

--- a/learn_nextjs/2_App_Router/App_Router.pptx
+++ b/learn_nextjs/2_App_Router/App_Router.pptx
@@ -16786,41 +16786,18 @@
         </p:blipFill>
         <p:spPr>
           <a:xfrm>
-            <a:off x="10078948" y="5619964"/>
-            <a:ext cx="2150828" cy="988692"/>
+            <a:off x="10672842" y="271032"/>
+            <a:ext cx="1420028" cy="652758"/>
           </a:xfrm>
           <a:prstGeom prst="rect">
             <a:avLst/>
           </a:prstGeom>
-          <a:solidFill>
-            <a:srgbClr val="FFFFFF">
-              <a:shade val="85000"/>
-            </a:srgbClr>
-          </a:solidFill>
-          <a:ln w="190500" cap="rnd">
-            <a:solidFill>
-              <a:srgbClr val="FFFFFF"/>
-            </a:solidFill>
+          <a:ln>
+            <a:noFill/>
           </a:ln>
           <a:effectLst>
-            <a:outerShdw blurRad="36195" dist="12700" dir="11400000" algn="tl" rotWithShape="0">
-              <a:srgbClr val="000000">
-                <a:alpha val="33000"/>
-              </a:srgbClr>
-            </a:outerShdw>
+            <a:softEdge rad="112500"/>
           </a:effectLst>
-          <a:scene3d>
-            <a:camera prst="perspectiveContrastingLeftFacing">
-              <a:rot lat="540000" lon="2100000" rev="0"/>
-            </a:camera>
-            <a:lightRig rig="soft" dir="t"/>
-          </a:scene3d>
-          <a:sp3d contourW="12700" prstMaterial="matte">
-            <a:bevelT w="63500" h="50800"/>
-            <a:contourClr>
-              <a:srgbClr val="C0C0C0"/>
-            </a:contourClr>
-          </a:sp3d>
         </p:spPr>
       </p:pic>
       <p:sp>
@@ -17270,7 +17247,7 @@
             <a:pPr algn="ctr"/>
             <a:r>
               <a:rPr lang="en-US" sz="11500" b="1" dirty="0"/>
-              <a:t>01</a:t>
+              <a:t>02</a:t>
             </a:r>
           </a:p>
         </p:txBody>
@@ -17311,65 +17288,6 @@
           </a:effectLst>
         </p:spPr>
       </p:pic>
-      <p:pic>
-        <p:nvPicPr>
-          <p:cNvPr id="10" name="Picture 9">
-            <a:extLst>
-              <a:ext uri="{FF2B5EF4-FFF2-40B4-BE49-F238E27FC236}">
-                <a16:creationId xmlns:a16="http://schemas.microsoft.com/office/drawing/2014/main" id="{3A60BBC2-DFE3-3D7D-77C2-E41099BA84A4}"/>
-              </a:ext>
-            </a:extLst>
-          </p:cNvPr>
-          <p:cNvPicPr>
-            <a:picLocks noChangeAspect="1"/>
-          </p:cNvPicPr>
-          <p:nvPr/>
-        </p:nvPicPr>
-        <p:blipFill>
-          <a:blip r:embed="rId5"/>
-          <a:stretch>
-            <a:fillRect/>
-          </a:stretch>
-        </p:blipFill>
-        <p:spPr>
-          <a:xfrm>
-            <a:off x="10078948" y="5619964"/>
-            <a:ext cx="2150828" cy="988692"/>
-          </a:xfrm>
-          <a:prstGeom prst="rect">
-            <a:avLst/>
-          </a:prstGeom>
-          <a:solidFill>
-            <a:srgbClr val="FFFFFF">
-              <a:shade val="85000"/>
-            </a:srgbClr>
-          </a:solidFill>
-          <a:ln w="190500" cap="rnd">
-            <a:solidFill>
-              <a:srgbClr val="FFFFFF"/>
-            </a:solidFill>
-          </a:ln>
-          <a:effectLst>
-            <a:outerShdw blurRad="36195" dist="12700" dir="11400000" algn="tl" rotWithShape="0">
-              <a:srgbClr val="000000">
-                <a:alpha val="33000"/>
-              </a:srgbClr>
-            </a:outerShdw>
-          </a:effectLst>
-          <a:scene3d>
-            <a:camera prst="perspectiveContrastingLeftFacing">
-              <a:rot lat="540000" lon="2100000" rev="0"/>
-            </a:camera>
-            <a:lightRig rig="soft" dir="t"/>
-          </a:scene3d>
-          <a:sp3d contourW="12700" prstMaterial="matte">
-            <a:bevelT w="63500" h="50800"/>
-            <a:contourClr>
-              <a:srgbClr val="C0C0C0"/>
-            </a:contourClr>
-          </a:sp3d>
-        </p:spPr>
-      </p:pic>
       <p:sp>
         <p:nvSpPr>
           <p:cNvPr id="2" name="Title 1">
@@ -17406,6 +17324,42 @@
           </a:p>
         </p:txBody>
       </p:sp>
+      <p:pic>
+        <p:nvPicPr>
+          <p:cNvPr id="6" name="Picture 5">
+            <a:extLst>
+              <a:ext uri="{FF2B5EF4-FFF2-40B4-BE49-F238E27FC236}">
+                <a16:creationId xmlns:a16="http://schemas.microsoft.com/office/drawing/2014/main" id="{49F8B7B5-A8A7-DB73-DCAB-0B3D45EC4F81}"/>
+              </a:ext>
+            </a:extLst>
+          </p:cNvPr>
+          <p:cNvPicPr>
+            <a:picLocks noChangeAspect="1"/>
+          </p:cNvPicPr>
+          <p:nvPr/>
+        </p:nvPicPr>
+        <p:blipFill>
+          <a:blip r:embed="rId5"/>
+          <a:stretch>
+            <a:fillRect/>
+          </a:stretch>
+        </p:blipFill>
+        <p:spPr>
+          <a:xfrm>
+            <a:off x="10672842" y="271032"/>
+            <a:ext cx="1420028" cy="652758"/>
+          </a:xfrm>
+          <a:prstGeom prst="rect">
+            <a:avLst/>
+          </a:prstGeom>
+          <a:ln>
+            <a:noFill/>
+          </a:ln>
+          <a:effectLst>
+            <a:softEdge rad="112500"/>
+          </a:effectLst>
+        </p:spPr>
+      </p:pic>
     </p:spTree>
     <p:extLst>
       <p:ext uri="{BB962C8B-B14F-4D97-AF65-F5344CB8AC3E}">

--- a/learn_nextjs/2_App_Router/App_Router.pptx
+++ b/learn_nextjs/2_App_Router/App_Router.pptx
@@ -5,18 +5,21 @@
     <p:sldMasterId id="2147483648" r:id="rId4"/>
   </p:sldMasterIdLst>
   <p:notesMasterIdLst>
-    <p:notesMasterId r:id="rId11"/>
+    <p:notesMasterId r:id="rId14"/>
   </p:notesMasterIdLst>
   <p:handoutMasterIdLst>
-    <p:handoutMasterId r:id="rId12"/>
+    <p:handoutMasterId r:id="rId15"/>
   </p:handoutMasterIdLst>
   <p:sldIdLst>
     <p:sldId id="276" r:id="rId5"/>
     <p:sldId id="256" r:id="rId6"/>
     <p:sldId id="257" r:id="rId7"/>
     <p:sldId id="277" r:id="rId8"/>
-    <p:sldId id="270" r:id="rId9"/>
-    <p:sldId id="278" r:id="rId10"/>
+    <p:sldId id="279" r:id="rId9"/>
+    <p:sldId id="280" r:id="rId10"/>
+    <p:sldId id="281" r:id="rId11"/>
+    <p:sldId id="270" r:id="rId12"/>
+    <p:sldId id="278" r:id="rId13"/>
   </p:sldIdLst>
   <p:sldSz cx="12192000" cy="6858000"/>
   <p:notesSz cx="6858000" cy="9144000"/>
@@ -116,6 +119,27 @@
     </a:lvl9pPr>
   </p:defaultTextStyle>
   <p:extLst>
+    <p:ext uri="{521415D9-36F7-43E2-AB2F-B90AF26B5E84}">
+      <p14:sectionLst xmlns:p14="http://schemas.microsoft.com/office/powerpoint/2010/main">
+        <p14:section name="Default Section" id="{73B54AF1-1929-468D-B83B-1A6CC1CC4014}">
+          <p14:sldIdLst>
+            <p14:sldId id="276"/>
+            <p14:sldId id="256"/>
+            <p14:sldId id="257"/>
+          </p14:sldIdLst>
+        </p14:section>
+        <p14:section name="ch02" id="{183771B2-5637-4FA6-AC98-3591E6F98168}">
+          <p14:sldIdLst>
+            <p14:sldId id="277"/>
+            <p14:sldId id="279"/>
+            <p14:sldId id="280"/>
+            <p14:sldId id="281"/>
+            <p14:sldId id="270"/>
+            <p14:sldId id="278"/>
+          </p14:sldIdLst>
+        </p14:section>
+      </p14:sectionLst>
+    </p:ext>
     <p:ext uri="{EFAFB233-063F-42B5-8137-9DF3F51BA10A}">
       <p15:sldGuideLst xmlns:p15="http://schemas.microsoft.com/office/powerpoint/2012/main">
         <p15:guide id="1" orient="horz" pos="2160" userDrawn="1">
@@ -9139,6 +9163,13 @@
           </p:nvPr>
         </p:nvSpPr>
         <p:spPr/>
+        <p:txBody>
+          <a:bodyPr/>
+          <a:lstStyle/>
+          <a:p>
+            <a:endParaRPr lang="en-US"/>
+          </a:p>
+        </p:txBody>
       </p:sp>
       <p:sp>
         <p:nvSpPr>
@@ -9235,6 +9266,13 @@
           </p:nvPr>
         </p:nvSpPr>
         <p:spPr/>
+        <p:txBody>
+          <a:bodyPr/>
+          <a:lstStyle/>
+          <a:p>
+            <a:endParaRPr lang="en-US"/>
+          </a:p>
+        </p:txBody>
       </p:sp>
       <p:sp>
         <p:nvSpPr>
@@ -9331,6 +9369,13 @@
           </p:nvPr>
         </p:nvSpPr>
         <p:spPr/>
+        <p:txBody>
+          <a:bodyPr/>
+          <a:lstStyle/>
+          <a:p>
+            <a:endParaRPr lang="en-US"/>
+          </a:p>
+        </p:txBody>
       </p:sp>
       <p:sp>
         <p:nvSpPr>
@@ -9439,6 +9484,13 @@
           </p:nvPr>
         </p:nvSpPr>
         <p:spPr/>
+        <p:txBody>
+          <a:bodyPr/>
+          <a:lstStyle/>
+          <a:p>
+            <a:endParaRPr lang="en-US"/>
+          </a:p>
+        </p:txBody>
       </p:sp>
       <p:sp>
         <p:nvSpPr>
@@ -9515,6 +9567,351 @@
         <p:cNvPr id="1" name="">
           <a:extLst>
             <a:ext uri="{FF2B5EF4-FFF2-40B4-BE49-F238E27FC236}">
+              <a16:creationId xmlns:a16="http://schemas.microsoft.com/office/drawing/2014/main" id="{BD448BF3-7D55-946D-2A38-6FA62022A4CA}"/>
+            </a:ext>
+          </a:extLst>
+        </p:cNvPr>
+        <p:cNvGrpSpPr/>
+        <p:nvPr/>
+      </p:nvGrpSpPr>
+      <p:grpSpPr>
+        <a:xfrm>
+          <a:off x="0" y="0"/>
+          <a:ext cx="0" cy="0"/>
+          <a:chOff x="0" y="0"/>
+          <a:chExt cx="0" cy="0"/>
+        </a:xfrm>
+      </p:grpSpPr>
+      <p:sp>
+        <p:nvSpPr>
+          <p:cNvPr id="2" name="Slide Image Placeholder 1">
+            <a:extLst>
+              <a:ext uri="{FF2B5EF4-FFF2-40B4-BE49-F238E27FC236}">
+                <a16:creationId xmlns:a16="http://schemas.microsoft.com/office/drawing/2014/main" id="{FAD80E88-DA87-84B0-427A-52DF4360B350}"/>
+              </a:ext>
+            </a:extLst>
+          </p:cNvPr>
+          <p:cNvSpPr>
+            <a:spLocks noGrp="1" noRot="1" noChangeAspect="1"/>
+          </p:cNvSpPr>
+          <p:nvPr>
+            <p:ph type="sldImg"/>
+          </p:nvPr>
+        </p:nvSpPr>
+        <p:spPr/>
+        <p:txBody>
+          <a:bodyPr/>
+          <a:lstStyle/>
+          <a:p>
+            <a:endParaRPr lang="en-US"/>
+          </a:p>
+        </p:txBody>
+      </p:sp>
+      <p:sp>
+        <p:nvSpPr>
+          <p:cNvPr id="3" name="Notes Placeholder 2">
+            <a:extLst>
+              <a:ext uri="{FF2B5EF4-FFF2-40B4-BE49-F238E27FC236}">
+                <a16:creationId xmlns:a16="http://schemas.microsoft.com/office/drawing/2014/main" id="{8F5F4067-426D-9A2F-3106-E19C968F057F}"/>
+              </a:ext>
+            </a:extLst>
+          </p:cNvPr>
+          <p:cNvSpPr>
+            <a:spLocks noGrp="1"/>
+          </p:cNvSpPr>
+          <p:nvPr>
+            <p:ph type="body" idx="1"/>
+          </p:nvPr>
+        </p:nvSpPr>
+        <p:spPr/>
+        <p:txBody>
+          <a:bodyPr/>
+          <a:lstStyle/>
+          <a:p>
+            <a:endParaRPr lang="en-US" dirty="0"/>
+          </a:p>
+        </p:txBody>
+      </p:sp>
+      <p:sp>
+        <p:nvSpPr>
+          <p:cNvPr id="4" name="Slide Number Placeholder 3">
+            <a:extLst>
+              <a:ext uri="{FF2B5EF4-FFF2-40B4-BE49-F238E27FC236}">
+                <a16:creationId xmlns:a16="http://schemas.microsoft.com/office/drawing/2014/main" id="{E3050E66-3458-C586-C359-A1BB8D086663}"/>
+              </a:ext>
+            </a:extLst>
+          </p:cNvPr>
+          <p:cNvSpPr>
+            <a:spLocks noGrp="1"/>
+          </p:cNvSpPr>
+          <p:nvPr>
+            <p:ph type="sldNum" sz="quarter" idx="5"/>
+          </p:nvPr>
+        </p:nvSpPr>
+        <p:spPr/>
+        <p:txBody>
+          <a:bodyPr/>
+          <a:lstStyle/>
+          <a:p>
+            <a:fld id="{EE000EEB-8338-48D7-8EE8-EE0082EF7602}" type="slidenum">
+              <a:rPr lang="en-US" smtClean="0"/>
+              <a:t>5</a:t>
+            </a:fld>
+            <a:endParaRPr lang="en-US" dirty="0"/>
+          </a:p>
+        </p:txBody>
+      </p:sp>
+    </p:spTree>
+    <p:extLst>
+      <p:ext uri="{BB962C8B-B14F-4D97-AF65-F5344CB8AC3E}">
+        <p14:creationId xmlns:p14="http://schemas.microsoft.com/office/powerpoint/2010/main" val="726952184"/>
+      </p:ext>
+    </p:extLst>
+  </p:cSld>
+  <p:clrMapOvr>
+    <a:masterClrMapping/>
+  </p:clrMapOvr>
+</p:notes>
+</file>
+
+<file path=ppt/notesSlides/notesSlide6.xml><?xml version="1.0" encoding="utf-8"?>
+<p:notes xmlns:a="http://schemas.openxmlformats.org/drawingml/2006/main" xmlns:r="http://schemas.openxmlformats.org/officeDocument/2006/relationships" xmlns:p="http://schemas.openxmlformats.org/presentationml/2006/main">
+  <p:cSld>
+    <p:spTree>
+      <p:nvGrpSpPr>
+        <p:cNvPr id="1" name="">
+          <a:extLst>
+            <a:ext uri="{FF2B5EF4-FFF2-40B4-BE49-F238E27FC236}">
+              <a16:creationId xmlns:a16="http://schemas.microsoft.com/office/drawing/2014/main" id="{763E0E6B-5336-9EE4-FD58-79070128FC55}"/>
+            </a:ext>
+          </a:extLst>
+        </p:cNvPr>
+        <p:cNvGrpSpPr/>
+        <p:nvPr/>
+      </p:nvGrpSpPr>
+      <p:grpSpPr>
+        <a:xfrm>
+          <a:off x="0" y="0"/>
+          <a:ext cx="0" cy="0"/>
+          <a:chOff x="0" y="0"/>
+          <a:chExt cx="0" cy="0"/>
+        </a:xfrm>
+      </p:grpSpPr>
+      <p:sp>
+        <p:nvSpPr>
+          <p:cNvPr id="2" name="Slide Image Placeholder 1">
+            <a:extLst>
+              <a:ext uri="{FF2B5EF4-FFF2-40B4-BE49-F238E27FC236}">
+                <a16:creationId xmlns:a16="http://schemas.microsoft.com/office/drawing/2014/main" id="{FB802AAC-169C-67F7-F3B5-82E749D93167}"/>
+              </a:ext>
+            </a:extLst>
+          </p:cNvPr>
+          <p:cNvSpPr>
+            <a:spLocks noGrp="1" noRot="1" noChangeAspect="1"/>
+          </p:cNvSpPr>
+          <p:nvPr>
+            <p:ph type="sldImg"/>
+          </p:nvPr>
+        </p:nvSpPr>
+        <p:spPr/>
+        <p:txBody>
+          <a:bodyPr/>
+          <a:lstStyle/>
+          <a:p>
+            <a:endParaRPr lang="en-US"/>
+          </a:p>
+        </p:txBody>
+      </p:sp>
+      <p:sp>
+        <p:nvSpPr>
+          <p:cNvPr id="3" name="Notes Placeholder 2">
+            <a:extLst>
+              <a:ext uri="{FF2B5EF4-FFF2-40B4-BE49-F238E27FC236}">
+                <a16:creationId xmlns:a16="http://schemas.microsoft.com/office/drawing/2014/main" id="{305B978D-1809-DB72-3387-43F038176E5E}"/>
+              </a:ext>
+            </a:extLst>
+          </p:cNvPr>
+          <p:cNvSpPr>
+            <a:spLocks noGrp="1"/>
+          </p:cNvSpPr>
+          <p:nvPr>
+            <p:ph type="body" idx="1"/>
+          </p:nvPr>
+        </p:nvSpPr>
+        <p:spPr/>
+        <p:txBody>
+          <a:bodyPr/>
+          <a:lstStyle/>
+          <a:p>
+            <a:endParaRPr lang="en-US" dirty="0"/>
+          </a:p>
+        </p:txBody>
+      </p:sp>
+      <p:sp>
+        <p:nvSpPr>
+          <p:cNvPr id="4" name="Slide Number Placeholder 3">
+            <a:extLst>
+              <a:ext uri="{FF2B5EF4-FFF2-40B4-BE49-F238E27FC236}">
+                <a16:creationId xmlns:a16="http://schemas.microsoft.com/office/drawing/2014/main" id="{E7D94F55-A3B3-A2D5-68D9-7E2A15D862CC}"/>
+              </a:ext>
+            </a:extLst>
+          </p:cNvPr>
+          <p:cNvSpPr>
+            <a:spLocks noGrp="1"/>
+          </p:cNvSpPr>
+          <p:nvPr>
+            <p:ph type="sldNum" sz="quarter" idx="5"/>
+          </p:nvPr>
+        </p:nvSpPr>
+        <p:spPr/>
+        <p:txBody>
+          <a:bodyPr/>
+          <a:lstStyle/>
+          <a:p>
+            <a:fld id="{EE000EEB-8338-48D7-8EE8-EE0082EF7602}" type="slidenum">
+              <a:rPr lang="en-US" smtClean="0"/>
+              <a:t>6</a:t>
+            </a:fld>
+            <a:endParaRPr lang="en-US" dirty="0"/>
+          </a:p>
+        </p:txBody>
+      </p:sp>
+    </p:spTree>
+    <p:extLst>
+      <p:ext uri="{BB962C8B-B14F-4D97-AF65-F5344CB8AC3E}">
+        <p14:creationId xmlns:p14="http://schemas.microsoft.com/office/powerpoint/2010/main" val="2651690017"/>
+      </p:ext>
+    </p:extLst>
+  </p:cSld>
+  <p:clrMapOvr>
+    <a:masterClrMapping/>
+  </p:clrMapOvr>
+</p:notes>
+</file>
+
+<file path=ppt/notesSlides/notesSlide7.xml><?xml version="1.0" encoding="utf-8"?>
+<p:notes xmlns:a="http://schemas.openxmlformats.org/drawingml/2006/main" xmlns:r="http://schemas.openxmlformats.org/officeDocument/2006/relationships" xmlns:p="http://schemas.openxmlformats.org/presentationml/2006/main">
+  <p:cSld>
+    <p:spTree>
+      <p:nvGrpSpPr>
+        <p:cNvPr id="1" name="">
+          <a:extLst>
+            <a:ext uri="{FF2B5EF4-FFF2-40B4-BE49-F238E27FC236}">
+              <a16:creationId xmlns:a16="http://schemas.microsoft.com/office/drawing/2014/main" id="{87FD386A-5926-5EC1-FFCA-98C8843C709D}"/>
+            </a:ext>
+          </a:extLst>
+        </p:cNvPr>
+        <p:cNvGrpSpPr/>
+        <p:nvPr/>
+      </p:nvGrpSpPr>
+      <p:grpSpPr>
+        <a:xfrm>
+          <a:off x="0" y="0"/>
+          <a:ext cx="0" cy="0"/>
+          <a:chOff x="0" y="0"/>
+          <a:chExt cx="0" cy="0"/>
+        </a:xfrm>
+      </p:grpSpPr>
+      <p:sp>
+        <p:nvSpPr>
+          <p:cNvPr id="2" name="Slide Image Placeholder 1">
+            <a:extLst>
+              <a:ext uri="{FF2B5EF4-FFF2-40B4-BE49-F238E27FC236}">
+                <a16:creationId xmlns:a16="http://schemas.microsoft.com/office/drawing/2014/main" id="{335D1AFB-06B3-DB71-7E5F-B1AB111CFE57}"/>
+              </a:ext>
+            </a:extLst>
+          </p:cNvPr>
+          <p:cNvSpPr>
+            <a:spLocks noGrp="1" noRot="1" noChangeAspect="1"/>
+          </p:cNvSpPr>
+          <p:nvPr>
+            <p:ph type="sldImg"/>
+          </p:nvPr>
+        </p:nvSpPr>
+        <p:spPr/>
+        <p:txBody>
+          <a:bodyPr/>
+          <a:lstStyle/>
+          <a:p>
+            <a:endParaRPr lang="en-US"/>
+          </a:p>
+        </p:txBody>
+      </p:sp>
+      <p:sp>
+        <p:nvSpPr>
+          <p:cNvPr id="3" name="Notes Placeholder 2">
+            <a:extLst>
+              <a:ext uri="{FF2B5EF4-FFF2-40B4-BE49-F238E27FC236}">
+                <a16:creationId xmlns:a16="http://schemas.microsoft.com/office/drawing/2014/main" id="{C042ACEE-C7E0-67AE-EE2D-ABDC604D4871}"/>
+              </a:ext>
+            </a:extLst>
+          </p:cNvPr>
+          <p:cNvSpPr>
+            <a:spLocks noGrp="1"/>
+          </p:cNvSpPr>
+          <p:nvPr>
+            <p:ph type="body" idx="1"/>
+          </p:nvPr>
+        </p:nvSpPr>
+        <p:spPr/>
+        <p:txBody>
+          <a:bodyPr/>
+          <a:lstStyle/>
+          <a:p>
+            <a:endParaRPr lang="en-US" dirty="0"/>
+          </a:p>
+        </p:txBody>
+      </p:sp>
+      <p:sp>
+        <p:nvSpPr>
+          <p:cNvPr id="4" name="Slide Number Placeholder 3">
+            <a:extLst>
+              <a:ext uri="{FF2B5EF4-FFF2-40B4-BE49-F238E27FC236}">
+                <a16:creationId xmlns:a16="http://schemas.microsoft.com/office/drawing/2014/main" id="{1F86565A-7C7D-4162-BE31-CBE1309BF374}"/>
+              </a:ext>
+            </a:extLst>
+          </p:cNvPr>
+          <p:cNvSpPr>
+            <a:spLocks noGrp="1"/>
+          </p:cNvSpPr>
+          <p:nvPr>
+            <p:ph type="sldNum" sz="quarter" idx="5"/>
+          </p:nvPr>
+        </p:nvSpPr>
+        <p:spPr/>
+        <p:txBody>
+          <a:bodyPr/>
+          <a:lstStyle/>
+          <a:p>
+            <a:fld id="{EE000EEB-8338-48D7-8EE8-EE0082EF7602}" type="slidenum">
+              <a:rPr lang="en-US" smtClean="0"/>
+              <a:t>7</a:t>
+            </a:fld>
+            <a:endParaRPr lang="en-US" dirty="0"/>
+          </a:p>
+        </p:txBody>
+      </p:sp>
+    </p:spTree>
+    <p:extLst>
+      <p:ext uri="{BB962C8B-B14F-4D97-AF65-F5344CB8AC3E}">
+        <p14:creationId xmlns:p14="http://schemas.microsoft.com/office/powerpoint/2010/main" val="3753786653"/>
+      </p:ext>
+    </p:extLst>
+  </p:cSld>
+  <p:clrMapOvr>
+    <a:masterClrMapping/>
+  </p:clrMapOvr>
+</p:notes>
+</file>
+
+<file path=ppt/notesSlides/notesSlide8.xml><?xml version="1.0" encoding="utf-8"?>
+<p:notes xmlns:a="http://schemas.openxmlformats.org/drawingml/2006/main" xmlns:r="http://schemas.openxmlformats.org/officeDocument/2006/relationships" xmlns:p="http://schemas.openxmlformats.org/presentationml/2006/main">
+  <p:cSld>
+    <p:spTree>
+      <p:nvGrpSpPr>
+        <p:cNvPr id="1" name="">
+          <a:extLst>
+            <a:ext uri="{FF2B5EF4-FFF2-40B4-BE49-F238E27FC236}">
               <a16:creationId xmlns:a16="http://schemas.microsoft.com/office/drawing/2014/main" id="{451F58EE-9F16-565C-5074-55CD7D9CF36C}"/>
             </a:ext>
           </a:extLst>
@@ -9547,6 +9944,13 @@
           </p:nvPr>
         </p:nvSpPr>
         <p:spPr/>
+        <p:txBody>
+          <a:bodyPr/>
+          <a:lstStyle/>
+          <a:p>
+            <a:endParaRPr lang="en-US"/>
+          </a:p>
+        </p:txBody>
       </p:sp>
       <p:sp>
         <p:nvSpPr>
@@ -9596,7 +10000,7 @@
           <a:p>
             <a:fld id="{EE000EEB-8338-48D7-8EE8-EE0082EF7602}" type="slidenum">
               <a:rPr lang="en-US" smtClean="0"/>
-              <a:t>5</a:t>
+              <a:t>8</a:t>
             </a:fld>
             <a:endParaRPr lang="en-US" dirty="0"/>
           </a:p>
@@ -9615,7 +10019,7 @@
 </p:notes>
 </file>
 
-<file path=ppt/notesSlides/notesSlide6.xml><?xml version="1.0" encoding="utf-8"?>
+<file path=ppt/notesSlides/notesSlide9.xml><?xml version="1.0" encoding="utf-8"?>
 <p:notes xmlns:a="http://schemas.openxmlformats.org/drawingml/2006/main" xmlns:r="http://schemas.openxmlformats.org/officeDocument/2006/relationships" xmlns:p="http://schemas.openxmlformats.org/presentationml/2006/main">
   <p:cSld>
     <p:spTree>
@@ -9655,6 +10059,13 @@
           </p:nvPr>
         </p:nvSpPr>
         <p:spPr/>
+        <p:txBody>
+          <a:bodyPr/>
+          <a:lstStyle/>
+          <a:p>
+            <a:endParaRPr lang="en-US"/>
+          </a:p>
+        </p:txBody>
       </p:sp>
       <p:sp>
         <p:nvSpPr>
@@ -9704,7 +10115,7 @@
           <a:p>
             <a:fld id="{EE000EEB-8338-48D7-8EE8-EE0082EF7602}" type="slidenum">
               <a:rPr lang="en-US" smtClean="0"/>
-              <a:t>6</a:t>
+              <a:t>9</a:t>
             </a:fld>
             <a:endParaRPr lang="en-US" dirty="0"/>
           </a:p>
@@ -16982,7 +17393,7 @@
         </p:nvSpPr>
         <p:spPr>
           <a:xfrm>
-            <a:off x="5065159" y="1398922"/>
+            <a:off x="5065159" y="1232245"/>
             <a:ext cx="7011227" cy="788415"/>
           </a:xfrm>
         </p:spPr>
@@ -17360,6 +17771,312 @@
           </a:effectLst>
         </p:spPr>
       </p:pic>
+      <p:sp>
+        <p:nvSpPr>
+          <p:cNvPr id="9" name="Subtitle 2">
+            <a:extLst>
+              <a:ext uri="{FF2B5EF4-FFF2-40B4-BE49-F238E27FC236}">
+                <a16:creationId xmlns:a16="http://schemas.microsoft.com/office/drawing/2014/main" id="{A704D4BF-320A-8C89-7582-602EC2A8D83E}"/>
+              </a:ext>
+            </a:extLst>
+          </p:cNvPr>
+          <p:cNvSpPr txBox="1">
+            <a:spLocks/>
+          </p:cNvSpPr>
+          <p:nvPr/>
+        </p:nvSpPr>
+        <p:spPr>
+          <a:xfrm>
+            <a:off x="5065158" y="1867230"/>
+            <a:ext cx="7011227" cy="788415"/>
+          </a:xfrm>
+          <a:prstGeom prst="rect">
+            <a:avLst/>
+          </a:prstGeom>
+        </p:spPr>
+        <p:txBody>
+          <a:bodyPr vert="horz" lIns="91440" tIns="45720" rIns="91440" bIns="45720" rtlCol="0" anchor="t">
+            <a:normAutofit/>
+          </a:bodyPr>
+          <a:lstStyle>
+            <a:lvl1pPr marL="0" indent="0" algn="l" defTabSz="457200" rtl="0" eaLnBrk="1" latinLnBrk="0" hangingPunct="1">
+              <a:spcBef>
+                <a:spcPts val="1000"/>
+              </a:spcBef>
+              <a:spcAft>
+                <a:spcPts val="0"/>
+              </a:spcAft>
+              <a:buClr>
+                <a:schemeClr val="accent1"/>
+              </a:buClr>
+              <a:buSzPct val="80000"/>
+              <a:buFont typeface="Wingdings 3" charset="2"/>
+              <a:buNone/>
+              <a:defRPr sz="2000" b="0" i="0" kern="1200" cap="all">
+                <a:solidFill>
+                  <a:schemeClr val="accent1"/>
+                </a:solidFill>
+                <a:latin typeface="+mj-lt"/>
+                <a:ea typeface="+mj-ea"/>
+                <a:cs typeface="+mj-cs"/>
+              </a:defRPr>
+            </a:lvl1pPr>
+            <a:lvl2pPr marL="457200" indent="0" algn="ctr" defTabSz="457200" rtl="0" eaLnBrk="1" latinLnBrk="0" hangingPunct="1">
+              <a:spcBef>
+                <a:spcPts val="1000"/>
+              </a:spcBef>
+              <a:spcAft>
+                <a:spcPts val="0"/>
+              </a:spcAft>
+              <a:buClr>
+                <a:schemeClr val="accent1"/>
+              </a:buClr>
+              <a:buSzPct val="80000"/>
+              <a:buFont typeface="Wingdings 3" charset="2"/>
+              <a:buNone/>
+              <a:defRPr sz="1800" b="0" i="0" kern="1200">
+                <a:solidFill>
+                  <a:schemeClr val="tx1">
+                    <a:tint val="75000"/>
+                  </a:schemeClr>
+                </a:solidFill>
+                <a:latin typeface="+mj-lt"/>
+                <a:ea typeface="+mj-ea"/>
+                <a:cs typeface="+mj-cs"/>
+              </a:defRPr>
+            </a:lvl2pPr>
+            <a:lvl3pPr marL="914400" indent="0" algn="ctr" defTabSz="457200" rtl="0" eaLnBrk="1" latinLnBrk="0" hangingPunct="1">
+              <a:spcBef>
+                <a:spcPts val="1000"/>
+              </a:spcBef>
+              <a:spcAft>
+                <a:spcPts val="0"/>
+              </a:spcAft>
+              <a:buClr>
+                <a:schemeClr val="accent1"/>
+              </a:buClr>
+              <a:buSzPct val="80000"/>
+              <a:buFont typeface="Wingdings 3" charset="2"/>
+              <a:buNone/>
+              <a:defRPr sz="1600" b="0" i="0" kern="1200">
+                <a:solidFill>
+                  <a:schemeClr val="tx1">
+                    <a:tint val="75000"/>
+                  </a:schemeClr>
+                </a:solidFill>
+                <a:latin typeface="+mj-lt"/>
+                <a:ea typeface="+mj-ea"/>
+                <a:cs typeface="+mj-cs"/>
+              </a:defRPr>
+            </a:lvl3pPr>
+            <a:lvl4pPr marL="1371600" indent="0" algn="ctr" defTabSz="457200" rtl="0" eaLnBrk="1" latinLnBrk="0" hangingPunct="1">
+              <a:spcBef>
+                <a:spcPts val="1000"/>
+              </a:spcBef>
+              <a:spcAft>
+                <a:spcPts val="0"/>
+              </a:spcAft>
+              <a:buClr>
+                <a:schemeClr val="accent1"/>
+              </a:buClr>
+              <a:buSzPct val="80000"/>
+              <a:buFont typeface="Wingdings 3" charset="2"/>
+              <a:buNone/>
+              <a:defRPr sz="1400" b="0" i="0" kern="1200">
+                <a:solidFill>
+                  <a:schemeClr val="tx1">
+                    <a:tint val="75000"/>
+                  </a:schemeClr>
+                </a:solidFill>
+                <a:latin typeface="+mj-lt"/>
+                <a:ea typeface="+mj-ea"/>
+                <a:cs typeface="+mj-cs"/>
+              </a:defRPr>
+            </a:lvl4pPr>
+            <a:lvl5pPr marL="1828800" indent="0" algn="ctr" defTabSz="457200" rtl="0" eaLnBrk="1" latinLnBrk="0" hangingPunct="1">
+              <a:spcBef>
+                <a:spcPts val="1000"/>
+              </a:spcBef>
+              <a:spcAft>
+                <a:spcPts val="0"/>
+              </a:spcAft>
+              <a:buClr>
+                <a:schemeClr val="accent1"/>
+              </a:buClr>
+              <a:buSzPct val="80000"/>
+              <a:buFont typeface="Wingdings 3" charset="2"/>
+              <a:buNone/>
+              <a:defRPr sz="1400" b="0" i="0" kern="1200">
+                <a:solidFill>
+                  <a:schemeClr val="tx1">
+                    <a:tint val="75000"/>
+                  </a:schemeClr>
+                </a:solidFill>
+                <a:latin typeface="+mj-lt"/>
+                <a:ea typeface="+mj-ea"/>
+                <a:cs typeface="+mj-cs"/>
+              </a:defRPr>
+            </a:lvl5pPr>
+            <a:lvl6pPr marL="2286000" indent="0" algn="ctr" defTabSz="457200" rtl="0" eaLnBrk="1" latinLnBrk="0" hangingPunct="1">
+              <a:spcBef>
+                <a:spcPts val="1000"/>
+              </a:spcBef>
+              <a:spcAft>
+                <a:spcPts val="0"/>
+              </a:spcAft>
+              <a:buClr>
+                <a:schemeClr val="accent1"/>
+              </a:buClr>
+              <a:buSzPct val="80000"/>
+              <a:buFont typeface="Wingdings 3" charset="2"/>
+              <a:buNone/>
+              <a:defRPr sz="1400" b="0" i="0" kern="1200">
+                <a:solidFill>
+                  <a:schemeClr val="tx1">
+                    <a:tint val="75000"/>
+                  </a:schemeClr>
+                </a:solidFill>
+                <a:latin typeface="+mj-lt"/>
+                <a:ea typeface="+mj-ea"/>
+                <a:cs typeface="+mj-cs"/>
+              </a:defRPr>
+            </a:lvl6pPr>
+            <a:lvl7pPr marL="2743200" indent="0" algn="ctr" defTabSz="457200" rtl="0" eaLnBrk="1" latinLnBrk="0" hangingPunct="1">
+              <a:spcBef>
+                <a:spcPts val="1000"/>
+              </a:spcBef>
+              <a:spcAft>
+                <a:spcPts val="0"/>
+              </a:spcAft>
+              <a:buClr>
+                <a:schemeClr val="accent1"/>
+              </a:buClr>
+              <a:buSzPct val="80000"/>
+              <a:buFont typeface="Wingdings 3" charset="2"/>
+              <a:buNone/>
+              <a:defRPr sz="1400" b="0" i="0" kern="1200">
+                <a:solidFill>
+                  <a:schemeClr val="tx1">
+                    <a:tint val="75000"/>
+                  </a:schemeClr>
+                </a:solidFill>
+                <a:latin typeface="+mj-lt"/>
+                <a:ea typeface="+mj-ea"/>
+                <a:cs typeface="+mj-cs"/>
+              </a:defRPr>
+            </a:lvl7pPr>
+            <a:lvl8pPr marL="3200400" indent="0" algn="ctr" defTabSz="457200" rtl="0" eaLnBrk="1" latinLnBrk="0" hangingPunct="1">
+              <a:spcBef>
+                <a:spcPts val="1000"/>
+              </a:spcBef>
+              <a:spcAft>
+                <a:spcPts val="0"/>
+              </a:spcAft>
+              <a:buClr>
+                <a:schemeClr val="accent1"/>
+              </a:buClr>
+              <a:buSzPct val="80000"/>
+              <a:buFont typeface="Wingdings 3" charset="2"/>
+              <a:buNone/>
+              <a:defRPr sz="1400" b="0" i="0" kern="1200">
+                <a:solidFill>
+                  <a:schemeClr val="tx1">
+                    <a:tint val="75000"/>
+                  </a:schemeClr>
+                </a:solidFill>
+                <a:latin typeface="+mj-lt"/>
+                <a:ea typeface="+mj-ea"/>
+                <a:cs typeface="+mj-cs"/>
+              </a:defRPr>
+            </a:lvl8pPr>
+            <a:lvl9pPr marL="3657600" indent="0" algn="ctr" defTabSz="457200" rtl="0" eaLnBrk="1" latinLnBrk="0" hangingPunct="1">
+              <a:spcBef>
+                <a:spcPts val="1000"/>
+              </a:spcBef>
+              <a:spcAft>
+                <a:spcPts val="0"/>
+              </a:spcAft>
+              <a:buClr>
+                <a:schemeClr val="accent1"/>
+              </a:buClr>
+              <a:buSzPct val="80000"/>
+              <a:buFont typeface="Wingdings 3" charset="2"/>
+              <a:buNone/>
+              <a:defRPr sz="1400" b="0" i="0" kern="1200">
+                <a:solidFill>
+                  <a:schemeClr val="tx1">
+                    <a:tint val="75000"/>
+                  </a:schemeClr>
+                </a:solidFill>
+                <a:latin typeface="+mj-lt"/>
+                <a:ea typeface="+mj-ea"/>
+                <a:cs typeface="+mj-cs"/>
+              </a:defRPr>
+            </a:lvl9pPr>
+          </a:lstStyle>
+          <a:p>
+            <a:r>
+              <a:rPr lang="en-US" altLang="zh-CN" sz="3600" b="1" cap="none" dirty="0"/>
+              <a:t>2.1 Globel Styles</a:t>
+            </a:r>
+            <a:endParaRPr lang="en-US" sz="3600" b="1" cap="none" dirty="0"/>
+          </a:p>
+        </p:txBody>
+      </p:sp>
+      <p:pic>
+        <p:nvPicPr>
+          <p:cNvPr id="12" name="Picture 11">
+            <a:extLst>
+              <a:ext uri="{FF2B5EF4-FFF2-40B4-BE49-F238E27FC236}">
+                <a16:creationId xmlns:a16="http://schemas.microsoft.com/office/drawing/2014/main" id="{87FDF704-36C0-034F-B653-38B926449E15}"/>
+              </a:ext>
+            </a:extLst>
+          </p:cNvPr>
+          <p:cNvPicPr>
+            <a:picLocks noChangeAspect="1"/>
+          </p:cNvPicPr>
+          <p:nvPr/>
+        </p:nvPicPr>
+        <p:blipFill>
+          <a:blip r:embed="rId6"/>
+          <a:stretch>
+            <a:fillRect/>
+          </a:stretch>
+        </p:blipFill>
+        <p:spPr>
+          <a:xfrm>
+            <a:off x="869451" y="2085204"/>
+            <a:ext cx="8791735" cy="4469707"/>
+          </a:xfrm>
+          <a:prstGeom prst="roundRect">
+            <a:avLst>
+              <a:gd name="adj" fmla="val 16667"/>
+            </a:avLst>
+          </a:prstGeom>
+          <a:ln>
+            <a:noFill/>
+          </a:ln>
+          <a:effectLst>
+            <a:outerShdw blurRad="152400" dist="12000" dir="900000" sy="98000" kx="110000" ky="200000" algn="tl" rotWithShape="0">
+              <a:srgbClr val="000000">
+                <a:alpha val="30000"/>
+              </a:srgbClr>
+            </a:outerShdw>
+          </a:effectLst>
+          <a:scene3d>
+            <a:camera prst="perspectiveRelaxed">
+              <a:rot lat="19800000" lon="1200000" rev="20820000"/>
+            </a:camera>
+            <a:lightRig rig="threePt" dir="t"/>
+          </a:scene3d>
+          <a:sp3d contourW="6350" prstMaterial="matte">
+            <a:bevelT w="101600" h="101600"/>
+            <a:contourClr>
+              <a:srgbClr val="969696"/>
+            </a:contourClr>
+          </a:sp3d>
+        </p:spPr>
+      </p:pic>
     </p:spTree>
     <p:extLst>
       <p:ext uri="{BB962C8B-B14F-4D97-AF65-F5344CB8AC3E}">
@@ -17374,6 +18091,2485 @@
 </file>
 
 <file path=ppt/slides/slide5.xml><?xml version="1.0" encoding="utf-8"?>
+<p:sld xmlns:a="http://schemas.openxmlformats.org/drawingml/2006/main" xmlns:r="http://schemas.openxmlformats.org/officeDocument/2006/relationships" xmlns:p="http://schemas.openxmlformats.org/presentationml/2006/main">
+  <p:cSld>
+    <p:spTree>
+      <p:nvGrpSpPr>
+        <p:cNvPr id="1" name="">
+          <a:extLst>
+            <a:ext uri="{FF2B5EF4-FFF2-40B4-BE49-F238E27FC236}">
+              <a16:creationId xmlns:a16="http://schemas.microsoft.com/office/drawing/2014/main" id="{CB2D7F5D-112C-A5D1-4AD7-A119240CE894}"/>
+            </a:ext>
+          </a:extLst>
+        </p:cNvPr>
+        <p:cNvGrpSpPr/>
+        <p:nvPr/>
+      </p:nvGrpSpPr>
+      <p:grpSpPr>
+        <a:xfrm>
+          <a:off x="0" y="0"/>
+          <a:ext cx="0" cy="0"/>
+          <a:chOff x="0" y="0"/>
+          <a:chExt cx="0" cy="0"/>
+        </a:xfrm>
+      </p:grpSpPr>
+      <p:pic>
+        <p:nvPicPr>
+          <p:cNvPr id="5" name="Picture 4" descr="chain links">
+            <a:extLst>
+              <a:ext uri="{FF2B5EF4-FFF2-40B4-BE49-F238E27FC236}">
+                <a16:creationId xmlns:a16="http://schemas.microsoft.com/office/drawing/2014/main" id="{39791686-926D-C9D9-D280-2FAD6B8DC2A5}"/>
+              </a:ext>
+            </a:extLst>
+          </p:cNvPr>
+          <p:cNvPicPr>
+            <a:picLocks noChangeAspect="1"/>
+          </p:cNvPicPr>
+          <p:nvPr/>
+        </p:nvPicPr>
+        <p:blipFill rotWithShape="1">
+          <a:blip r:embed="rId3">
+            <a:duotone>
+              <a:prstClr val="black"/>
+              <a:schemeClr val="accent5">
+                <a:tint val="45000"/>
+                <a:satMod val="400000"/>
+              </a:schemeClr>
+            </a:duotone>
+            <a:alphaModFix amt="25000"/>
+          </a:blip>
+          <a:srcRect t="23391" r="9091"/>
+          <a:stretch/>
+        </p:blipFill>
+        <p:spPr>
+          <a:xfrm>
+            <a:off x="0" y="10"/>
+            <a:ext cx="12191980" cy="6857990"/>
+          </a:xfrm>
+          <a:prstGeom prst="rect">
+            <a:avLst/>
+          </a:prstGeom>
+        </p:spPr>
+      </p:pic>
+      <p:sp>
+        <p:nvSpPr>
+          <p:cNvPr id="3" name="Subtitle 2">
+            <a:extLst>
+              <a:ext uri="{FF2B5EF4-FFF2-40B4-BE49-F238E27FC236}">
+                <a16:creationId xmlns:a16="http://schemas.microsoft.com/office/drawing/2014/main" id="{2339533F-7929-2E03-C687-75058A5A713B}"/>
+              </a:ext>
+            </a:extLst>
+          </p:cNvPr>
+          <p:cNvSpPr>
+            <a:spLocks noGrp="1"/>
+          </p:cNvSpPr>
+          <p:nvPr>
+            <p:ph type="subTitle" idx="1"/>
+          </p:nvPr>
+        </p:nvSpPr>
+        <p:spPr>
+          <a:xfrm>
+            <a:off x="5065159" y="1232245"/>
+            <a:ext cx="7011227" cy="788415"/>
+          </a:xfrm>
+        </p:spPr>
+        <p:txBody>
+          <a:bodyPr>
+            <a:normAutofit lnSpcReduction="10000"/>
+          </a:bodyPr>
+          <a:lstStyle/>
+          <a:p>
+            <a:r>
+              <a:rPr lang="en-US" altLang="zh-CN" sz="4800" b="1" dirty="0"/>
+              <a:t>2. CSS Styling</a:t>
+            </a:r>
+            <a:endParaRPr lang="en-US" sz="4800" b="1" dirty="0"/>
+          </a:p>
+        </p:txBody>
+      </p:sp>
+      <p:sp>
+        <p:nvSpPr>
+          <p:cNvPr id="7" name="Subtitle 2">
+            <a:extLst>
+              <a:ext uri="{FF2B5EF4-FFF2-40B4-BE49-F238E27FC236}">
+                <a16:creationId xmlns:a16="http://schemas.microsoft.com/office/drawing/2014/main" id="{0CB51FE9-5463-78B5-81E6-CC41835F64C0}"/>
+              </a:ext>
+            </a:extLst>
+          </p:cNvPr>
+          <p:cNvSpPr txBox="1">
+            <a:spLocks/>
+          </p:cNvSpPr>
+          <p:nvPr/>
+        </p:nvSpPr>
+        <p:spPr>
+          <a:xfrm>
+            <a:off x="8570773" y="2419"/>
+            <a:ext cx="2102069" cy="1447801"/>
+          </a:xfrm>
+          <a:prstGeom prst="rect">
+            <a:avLst/>
+          </a:prstGeom>
+        </p:spPr>
+        <p:txBody>
+          <a:bodyPr vert="horz" lIns="91440" tIns="45720" rIns="91440" bIns="45720" rtlCol="0" anchor="ctr">
+            <a:normAutofit fontScale="92500" lnSpcReduction="20000"/>
+          </a:bodyPr>
+          <a:lstStyle>
+            <a:lvl1pPr marL="0" indent="0" algn="l" defTabSz="457200" rtl="0" eaLnBrk="1" latinLnBrk="0" hangingPunct="1">
+              <a:spcBef>
+                <a:spcPts val="1000"/>
+              </a:spcBef>
+              <a:spcAft>
+                <a:spcPts val="0"/>
+              </a:spcAft>
+              <a:buClr>
+                <a:schemeClr val="accent1"/>
+              </a:buClr>
+              <a:buSzPct val="80000"/>
+              <a:buFont typeface="Wingdings 3" charset="2"/>
+              <a:buNone/>
+              <a:defRPr sz="2000" b="0" i="0" kern="1200" cap="all">
+                <a:solidFill>
+                  <a:schemeClr val="accent1"/>
+                </a:solidFill>
+                <a:latin typeface="+mj-lt"/>
+                <a:ea typeface="+mj-ea"/>
+                <a:cs typeface="+mj-cs"/>
+              </a:defRPr>
+            </a:lvl1pPr>
+            <a:lvl2pPr marL="457200" indent="0" algn="ctr" defTabSz="457200" rtl="0" eaLnBrk="1" latinLnBrk="0" hangingPunct="1">
+              <a:spcBef>
+                <a:spcPts val="1000"/>
+              </a:spcBef>
+              <a:spcAft>
+                <a:spcPts val="0"/>
+              </a:spcAft>
+              <a:buClr>
+                <a:schemeClr val="accent1"/>
+              </a:buClr>
+              <a:buSzPct val="80000"/>
+              <a:buFont typeface="Wingdings 3" charset="2"/>
+              <a:buNone/>
+              <a:defRPr sz="1800" b="0" i="0" kern="1200">
+                <a:solidFill>
+                  <a:schemeClr val="tx1">
+                    <a:tint val="75000"/>
+                  </a:schemeClr>
+                </a:solidFill>
+                <a:latin typeface="+mj-lt"/>
+                <a:ea typeface="+mj-ea"/>
+                <a:cs typeface="+mj-cs"/>
+              </a:defRPr>
+            </a:lvl2pPr>
+            <a:lvl3pPr marL="914400" indent="0" algn="ctr" defTabSz="457200" rtl="0" eaLnBrk="1" latinLnBrk="0" hangingPunct="1">
+              <a:spcBef>
+                <a:spcPts val="1000"/>
+              </a:spcBef>
+              <a:spcAft>
+                <a:spcPts val="0"/>
+              </a:spcAft>
+              <a:buClr>
+                <a:schemeClr val="accent1"/>
+              </a:buClr>
+              <a:buSzPct val="80000"/>
+              <a:buFont typeface="Wingdings 3" charset="2"/>
+              <a:buNone/>
+              <a:defRPr sz="1600" b="0" i="0" kern="1200">
+                <a:solidFill>
+                  <a:schemeClr val="tx1">
+                    <a:tint val="75000"/>
+                  </a:schemeClr>
+                </a:solidFill>
+                <a:latin typeface="+mj-lt"/>
+                <a:ea typeface="+mj-ea"/>
+                <a:cs typeface="+mj-cs"/>
+              </a:defRPr>
+            </a:lvl3pPr>
+            <a:lvl4pPr marL="1371600" indent="0" algn="ctr" defTabSz="457200" rtl="0" eaLnBrk="1" latinLnBrk="0" hangingPunct="1">
+              <a:spcBef>
+                <a:spcPts val="1000"/>
+              </a:spcBef>
+              <a:spcAft>
+                <a:spcPts val="0"/>
+              </a:spcAft>
+              <a:buClr>
+                <a:schemeClr val="accent1"/>
+              </a:buClr>
+              <a:buSzPct val="80000"/>
+              <a:buFont typeface="Wingdings 3" charset="2"/>
+              <a:buNone/>
+              <a:defRPr sz="1400" b="0" i="0" kern="1200">
+                <a:solidFill>
+                  <a:schemeClr val="tx1">
+                    <a:tint val="75000"/>
+                  </a:schemeClr>
+                </a:solidFill>
+                <a:latin typeface="+mj-lt"/>
+                <a:ea typeface="+mj-ea"/>
+                <a:cs typeface="+mj-cs"/>
+              </a:defRPr>
+            </a:lvl4pPr>
+            <a:lvl5pPr marL="1828800" indent="0" algn="ctr" defTabSz="457200" rtl="0" eaLnBrk="1" latinLnBrk="0" hangingPunct="1">
+              <a:spcBef>
+                <a:spcPts val="1000"/>
+              </a:spcBef>
+              <a:spcAft>
+                <a:spcPts val="0"/>
+              </a:spcAft>
+              <a:buClr>
+                <a:schemeClr val="accent1"/>
+              </a:buClr>
+              <a:buSzPct val="80000"/>
+              <a:buFont typeface="Wingdings 3" charset="2"/>
+              <a:buNone/>
+              <a:defRPr sz="1400" b="0" i="0" kern="1200">
+                <a:solidFill>
+                  <a:schemeClr val="tx1">
+                    <a:tint val="75000"/>
+                  </a:schemeClr>
+                </a:solidFill>
+                <a:latin typeface="+mj-lt"/>
+                <a:ea typeface="+mj-ea"/>
+                <a:cs typeface="+mj-cs"/>
+              </a:defRPr>
+            </a:lvl5pPr>
+            <a:lvl6pPr marL="2286000" indent="0" algn="ctr" defTabSz="457200" rtl="0" eaLnBrk="1" latinLnBrk="0" hangingPunct="1">
+              <a:spcBef>
+                <a:spcPts val="1000"/>
+              </a:spcBef>
+              <a:spcAft>
+                <a:spcPts val="0"/>
+              </a:spcAft>
+              <a:buClr>
+                <a:schemeClr val="accent1"/>
+              </a:buClr>
+              <a:buSzPct val="80000"/>
+              <a:buFont typeface="Wingdings 3" charset="2"/>
+              <a:buNone/>
+              <a:defRPr sz="1400" b="0" i="0" kern="1200">
+                <a:solidFill>
+                  <a:schemeClr val="tx1">
+                    <a:tint val="75000"/>
+                  </a:schemeClr>
+                </a:solidFill>
+                <a:latin typeface="+mj-lt"/>
+                <a:ea typeface="+mj-ea"/>
+                <a:cs typeface="+mj-cs"/>
+              </a:defRPr>
+            </a:lvl6pPr>
+            <a:lvl7pPr marL="2743200" indent="0" algn="ctr" defTabSz="457200" rtl="0" eaLnBrk="1" latinLnBrk="0" hangingPunct="1">
+              <a:spcBef>
+                <a:spcPts val="1000"/>
+              </a:spcBef>
+              <a:spcAft>
+                <a:spcPts val="0"/>
+              </a:spcAft>
+              <a:buClr>
+                <a:schemeClr val="accent1"/>
+              </a:buClr>
+              <a:buSzPct val="80000"/>
+              <a:buFont typeface="Wingdings 3" charset="2"/>
+              <a:buNone/>
+              <a:defRPr sz="1400" b="0" i="0" kern="1200">
+                <a:solidFill>
+                  <a:schemeClr val="tx1">
+                    <a:tint val="75000"/>
+                  </a:schemeClr>
+                </a:solidFill>
+                <a:latin typeface="+mj-lt"/>
+                <a:ea typeface="+mj-ea"/>
+                <a:cs typeface="+mj-cs"/>
+              </a:defRPr>
+            </a:lvl7pPr>
+            <a:lvl8pPr marL="3200400" indent="0" algn="ctr" defTabSz="457200" rtl="0" eaLnBrk="1" latinLnBrk="0" hangingPunct="1">
+              <a:spcBef>
+                <a:spcPts val="1000"/>
+              </a:spcBef>
+              <a:spcAft>
+                <a:spcPts val="0"/>
+              </a:spcAft>
+              <a:buClr>
+                <a:schemeClr val="accent1"/>
+              </a:buClr>
+              <a:buSzPct val="80000"/>
+              <a:buFont typeface="Wingdings 3" charset="2"/>
+              <a:buNone/>
+              <a:defRPr sz="1400" b="0" i="0" kern="1200">
+                <a:solidFill>
+                  <a:schemeClr val="tx1">
+                    <a:tint val="75000"/>
+                  </a:schemeClr>
+                </a:solidFill>
+                <a:latin typeface="+mj-lt"/>
+                <a:ea typeface="+mj-ea"/>
+                <a:cs typeface="+mj-cs"/>
+              </a:defRPr>
+            </a:lvl8pPr>
+            <a:lvl9pPr marL="3657600" indent="0" algn="ctr" defTabSz="457200" rtl="0" eaLnBrk="1" latinLnBrk="0" hangingPunct="1">
+              <a:spcBef>
+                <a:spcPts val="1000"/>
+              </a:spcBef>
+              <a:spcAft>
+                <a:spcPts val="0"/>
+              </a:spcAft>
+              <a:buClr>
+                <a:schemeClr val="accent1"/>
+              </a:buClr>
+              <a:buSzPct val="80000"/>
+              <a:buFont typeface="Wingdings 3" charset="2"/>
+              <a:buNone/>
+              <a:defRPr sz="1400" b="0" i="0" kern="1200">
+                <a:solidFill>
+                  <a:schemeClr val="tx1">
+                    <a:tint val="75000"/>
+                  </a:schemeClr>
+                </a:solidFill>
+                <a:latin typeface="+mj-lt"/>
+                <a:ea typeface="+mj-ea"/>
+                <a:cs typeface="+mj-cs"/>
+              </a:defRPr>
+            </a:lvl9pPr>
+          </a:lstStyle>
+          <a:p>
+            <a:pPr algn="ctr"/>
+            <a:r>
+              <a:rPr lang="en-US" sz="11500" b="1" dirty="0"/>
+              <a:t>03</a:t>
+            </a:r>
+          </a:p>
+        </p:txBody>
+      </p:sp>
+      <p:pic>
+        <p:nvPicPr>
+          <p:cNvPr id="4" name="Picture 3">
+            <a:extLst>
+              <a:ext uri="{FF2B5EF4-FFF2-40B4-BE49-F238E27FC236}">
+                <a16:creationId xmlns:a16="http://schemas.microsoft.com/office/drawing/2014/main" id="{7F09F5D7-4772-9A1C-9DCE-03FC8BB033CF}"/>
+              </a:ext>
+            </a:extLst>
+          </p:cNvPr>
+          <p:cNvPicPr>
+            <a:picLocks noChangeAspect="1"/>
+          </p:cNvPicPr>
+          <p:nvPr/>
+        </p:nvPicPr>
+        <p:blipFill>
+          <a:blip r:embed="rId4"/>
+          <a:stretch>
+            <a:fillRect/>
+          </a:stretch>
+        </p:blipFill>
+        <p:spPr>
+          <a:xfrm>
+            <a:off x="0" y="0"/>
+            <a:ext cx="5065160" cy="3226085"/>
+          </a:xfrm>
+          <a:prstGeom prst="rect">
+            <a:avLst/>
+          </a:prstGeom>
+          <a:ln>
+            <a:noFill/>
+          </a:ln>
+          <a:effectLst>
+            <a:softEdge rad="112500"/>
+          </a:effectLst>
+        </p:spPr>
+      </p:pic>
+      <p:sp>
+        <p:nvSpPr>
+          <p:cNvPr id="2" name="Title 1">
+            <a:extLst>
+              <a:ext uri="{FF2B5EF4-FFF2-40B4-BE49-F238E27FC236}">
+                <a16:creationId xmlns:a16="http://schemas.microsoft.com/office/drawing/2014/main" id="{51C5E21B-63AB-6CD6-6259-426E0B6F76FA}"/>
+              </a:ext>
+            </a:extLst>
+          </p:cNvPr>
+          <p:cNvSpPr>
+            <a:spLocks noGrp="1"/>
+          </p:cNvSpPr>
+          <p:nvPr>
+            <p:ph type="ctrTitle"/>
+          </p:nvPr>
+        </p:nvSpPr>
+        <p:spPr>
+          <a:xfrm>
+            <a:off x="4011986" y="30293"/>
+            <a:ext cx="4741596" cy="1266497"/>
+          </a:xfrm>
+        </p:spPr>
+        <p:txBody>
+          <a:bodyPr anchor="ctr">
+            <a:normAutofit/>
+          </a:bodyPr>
+          <a:lstStyle/>
+          <a:p>
+            <a:r>
+              <a:rPr lang="en-US" sz="6000" b="1" dirty="0"/>
+              <a:t>App Router</a:t>
+            </a:r>
+            <a:endParaRPr lang="ru-RU" sz="6000" b="1" dirty="0"/>
+          </a:p>
+        </p:txBody>
+      </p:sp>
+      <p:pic>
+        <p:nvPicPr>
+          <p:cNvPr id="6" name="Picture 5">
+            <a:extLst>
+              <a:ext uri="{FF2B5EF4-FFF2-40B4-BE49-F238E27FC236}">
+                <a16:creationId xmlns:a16="http://schemas.microsoft.com/office/drawing/2014/main" id="{6997958C-F8F5-D599-5614-7A4CCCBC4DA8}"/>
+              </a:ext>
+            </a:extLst>
+          </p:cNvPr>
+          <p:cNvPicPr>
+            <a:picLocks noChangeAspect="1"/>
+          </p:cNvPicPr>
+          <p:nvPr/>
+        </p:nvPicPr>
+        <p:blipFill>
+          <a:blip r:embed="rId5"/>
+          <a:stretch>
+            <a:fillRect/>
+          </a:stretch>
+        </p:blipFill>
+        <p:spPr>
+          <a:xfrm>
+            <a:off x="10672842" y="271032"/>
+            <a:ext cx="1420028" cy="652758"/>
+          </a:xfrm>
+          <a:prstGeom prst="rect">
+            <a:avLst/>
+          </a:prstGeom>
+          <a:ln>
+            <a:noFill/>
+          </a:ln>
+          <a:effectLst>
+            <a:softEdge rad="112500"/>
+          </a:effectLst>
+        </p:spPr>
+      </p:pic>
+      <p:sp>
+        <p:nvSpPr>
+          <p:cNvPr id="9" name="Subtitle 2">
+            <a:extLst>
+              <a:ext uri="{FF2B5EF4-FFF2-40B4-BE49-F238E27FC236}">
+                <a16:creationId xmlns:a16="http://schemas.microsoft.com/office/drawing/2014/main" id="{70CBA3DF-866B-94F6-94C3-B4899C4BD690}"/>
+              </a:ext>
+            </a:extLst>
+          </p:cNvPr>
+          <p:cNvSpPr txBox="1">
+            <a:spLocks/>
+          </p:cNvSpPr>
+          <p:nvPr/>
+        </p:nvSpPr>
+        <p:spPr>
+          <a:xfrm>
+            <a:off x="5065158" y="1867230"/>
+            <a:ext cx="7011227" cy="788415"/>
+          </a:xfrm>
+          <a:prstGeom prst="rect">
+            <a:avLst/>
+          </a:prstGeom>
+        </p:spPr>
+        <p:txBody>
+          <a:bodyPr vert="horz" lIns="91440" tIns="45720" rIns="91440" bIns="45720" rtlCol="0" anchor="t">
+            <a:normAutofit/>
+          </a:bodyPr>
+          <a:lstStyle>
+            <a:lvl1pPr marL="0" indent="0" algn="l" defTabSz="457200" rtl="0" eaLnBrk="1" latinLnBrk="0" hangingPunct="1">
+              <a:spcBef>
+                <a:spcPts val="1000"/>
+              </a:spcBef>
+              <a:spcAft>
+                <a:spcPts val="0"/>
+              </a:spcAft>
+              <a:buClr>
+                <a:schemeClr val="accent1"/>
+              </a:buClr>
+              <a:buSzPct val="80000"/>
+              <a:buFont typeface="Wingdings 3" charset="2"/>
+              <a:buNone/>
+              <a:defRPr sz="2000" b="0" i="0" kern="1200" cap="all">
+                <a:solidFill>
+                  <a:schemeClr val="accent1"/>
+                </a:solidFill>
+                <a:latin typeface="+mj-lt"/>
+                <a:ea typeface="+mj-ea"/>
+                <a:cs typeface="+mj-cs"/>
+              </a:defRPr>
+            </a:lvl1pPr>
+            <a:lvl2pPr marL="457200" indent="0" algn="ctr" defTabSz="457200" rtl="0" eaLnBrk="1" latinLnBrk="0" hangingPunct="1">
+              <a:spcBef>
+                <a:spcPts val="1000"/>
+              </a:spcBef>
+              <a:spcAft>
+                <a:spcPts val="0"/>
+              </a:spcAft>
+              <a:buClr>
+                <a:schemeClr val="accent1"/>
+              </a:buClr>
+              <a:buSzPct val="80000"/>
+              <a:buFont typeface="Wingdings 3" charset="2"/>
+              <a:buNone/>
+              <a:defRPr sz="1800" b="0" i="0" kern="1200">
+                <a:solidFill>
+                  <a:schemeClr val="tx1">
+                    <a:tint val="75000"/>
+                  </a:schemeClr>
+                </a:solidFill>
+                <a:latin typeface="+mj-lt"/>
+                <a:ea typeface="+mj-ea"/>
+                <a:cs typeface="+mj-cs"/>
+              </a:defRPr>
+            </a:lvl2pPr>
+            <a:lvl3pPr marL="914400" indent="0" algn="ctr" defTabSz="457200" rtl="0" eaLnBrk="1" latinLnBrk="0" hangingPunct="1">
+              <a:spcBef>
+                <a:spcPts val="1000"/>
+              </a:spcBef>
+              <a:spcAft>
+                <a:spcPts val="0"/>
+              </a:spcAft>
+              <a:buClr>
+                <a:schemeClr val="accent1"/>
+              </a:buClr>
+              <a:buSzPct val="80000"/>
+              <a:buFont typeface="Wingdings 3" charset="2"/>
+              <a:buNone/>
+              <a:defRPr sz="1600" b="0" i="0" kern="1200">
+                <a:solidFill>
+                  <a:schemeClr val="tx1">
+                    <a:tint val="75000"/>
+                  </a:schemeClr>
+                </a:solidFill>
+                <a:latin typeface="+mj-lt"/>
+                <a:ea typeface="+mj-ea"/>
+                <a:cs typeface="+mj-cs"/>
+              </a:defRPr>
+            </a:lvl3pPr>
+            <a:lvl4pPr marL="1371600" indent="0" algn="ctr" defTabSz="457200" rtl="0" eaLnBrk="1" latinLnBrk="0" hangingPunct="1">
+              <a:spcBef>
+                <a:spcPts val="1000"/>
+              </a:spcBef>
+              <a:spcAft>
+                <a:spcPts val="0"/>
+              </a:spcAft>
+              <a:buClr>
+                <a:schemeClr val="accent1"/>
+              </a:buClr>
+              <a:buSzPct val="80000"/>
+              <a:buFont typeface="Wingdings 3" charset="2"/>
+              <a:buNone/>
+              <a:defRPr sz="1400" b="0" i="0" kern="1200">
+                <a:solidFill>
+                  <a:schemeClr val="tx1">
+                    <a:tint val="75000"/>
+                  </a:schemeClr>
+                </a:solidFill>
+                <a:latin typeface="+mj-lt"/>
+                <a:ea typeface="+mj-ea"/>
+                <a:cs typeface="+mj-cs"/>
+              </a:defRPr>
+            </a:lvl4pPr>
+            <a:lvl5pPr marL="1828800" indent="0" algn="ctr" defTabSz="457200" rtl="0" eaLnBrk="1" latinLnBrk="0" hangingPunct="1">
+              <a:spcBef>
+                <a:spcPts val="1000"/>
+              </a:spcBef>
+              <a:spcAft>
+                <a:spcPts val="0"/>
+              </a:spcAft>
+              <a:buClr>
+                <a:schemeClr val="accent1"/>
+              </a:buClr>
+              <a:buSzPct val="80000"/>
+              <a:buFont typeface="Wingdings 3" charset="2"/>
+              <a:buNone/>
+              <a:defRPr sz="1400" b="0" i="0" kern="1200">
+                <a:solidFill>
+                  <a:schemeClr val="tx1">
+                    <a:tint val="75000"/>
+                  </a:schemeClr>
+                </a:solidFill>
+                <a:latin typeface="+mj-lt"/>
+                <a:ea typeface="+mj-ea"/>
+                <a:cs typeface="+mj-cs"/>
+              </a:defRPr>
+            </a:lvl5pPr>
+            <a:lvl6pPr marL="2286000" indent="0" algn="ctr" defTabSz="457200" rtl="0" eaLnBrk="1" latinLnBrk="0" hangingPunct="1">
+              <a:spcBef>
+                <a:spcPts val="1000"/>
+              </a:spcBef>
+              <a:spcAft>
+                <a:spcPts val="0"/>
+              </a:spcAft>
+              <a:buClr>
+                <a:schemeClr val="accent1"/>
+              </a:buClr>
+              <a:buSzPct val="80000"/>
+              <a:buFont typeface="Wingdings 3" charset="2"/>
+              <a:buNone/>
+              <a:defRPr sz="1400" b="0" i="0" kern="1200">
+                <a:solidFill>
+                  <a:schemeClr val="tx1">
+                    <a:tint val="75000"/>
+                  </a:schemeClr>
+                </a:solidFill>
+                <a:latin typeface="+mj-lt"/>
+                <a:ea typeface="+mj-ea"/>
+                <a:cs typeface="+mj-cs"/>
+              </a:defRPr>
+            </a:lvl6pPr>
+            <a:lvl7pPr marL="2743200" indent="0" algn="ctr" defTabSz="457200" rtl="0" eaLnBrk="1" latinLnBrk="0" hangingPunct="1">
+              <a:spcBef>
+                <a:spcPts val="1000"/>
+              </a:spcBef>
+              <a:spcAft>
+                <a:spcPts val="0"/>
+              </a:spcAft>
+              <a:buClr>
+                <a:schemeClr val="accent1"/>
+              </a:buClr>
+              <a:buSzPct val="80000"/>
+              <a:buFont typeface="Wingdings 3" charset="2"/>
+              <a:buNone/>
+              <a:defRPr sz="1400" b="0" i="0" kern="1200">
+                <a:solidFill>
+                  <a:schemeClr val="tx1">
+                    <a:tint val="75000"/>
+                  </a:schemeClr>
+                </a:solidFill>
+                <a:latin typeface="+mj-lt"/>
+                <a:ea typeface="+mj-ea"/>
+                <a:cs typeface="+mj-cs"/>
+              </a:defRPr>
+            </a:lvl7pPr>
+            <a:lvl8pPr marL="3200400" indent="0" algn="ctr" defTabSz="457200" rtl="0" eaLnBrk="1" latinLnBrk="0" hangingPunct="1">
+              <a:spcBef>
+                <a:spcPts val="1000"/>
+              </a:spcBef>
+              <a:spcAft>
+                <a:spcPts val="0"/>
+              </a:spcAft>
+              <a:buClr>
+                <a:schemeClr val="accent1"/>
+              </a:buClr>
+              <a:buSzPct val="80000"/>
+              <a:buFont typeface="Wingdings 3" charset="2"/>
+              <a:buNone/>
+              <a:defRPr sz="1400" b="0" i="0" kern="1200">
+                <a:solidFill>
+                  <a:schemeClr val="tx1">
+                    <a:tint val="75000"/>
+                  </a:schemeClr>
+                </a:solidFill>
+                <a:latin typeface="+mj-lt"/>
+                <a:ea typeface="+mj-ea"/>
+                <a:cs typeface="+mj-cs"/>
+              </a:defRPr>
+            </a:lvl8pPr>
+            <a:lvl9pPr marL="3657600" indent="0" algn="ctr" defTabSz="457200" rtl="0" eaLnBrk="1" latinLnBrk="0" hangingPunct="1">
+              <a:spcBef>
+                <a:spcPts val="1000"/>
+              </a:spcBef>
+              <a:spcAft>
+                <a:spcPts val="0"/>
+              </a:spcAft>
+              <a:buClr>
+                <a:schemeClr val="accent1"/>
+              </a:buClr>
+              <a:buSzPct val="80000"/>
+              <a:buFont typeface="Wingdings 3" charset="2"/>
+              <a:buNone/>
+              <a:defRPr sz="1400" b="0" i="0" kern="1200">
+                <a:solidFill>
+                  <a:schemeClr val="tx1">
+                    <a:tint val="75000"/>
+                  </a:schemeClr>
+                </a:solidFill>
+                <a:latin typeface="+mj-lt"/>
+                <a:ea typeface="+mj-ea"/>
+                <a:cs typeface="+mj-cs"/>
+              </a:defRPr>
+            </a:lvl9pPr>
+          </a:lstStyle>
+          <a:p>
+            <a:r>
+              <a:rPr lang="en-US" altLang="zh-CN" sz="3600" b="1" cap="none" dirty="0"/>
+              <a:t>2.2 Tailwind CSS</a:t>
+            </a:r>
+            <a:endParaRPr lang="en-US" sz="3600" b="1" cap="none" dirty="0"/>
+          </a:p>
+        </p:txBody>
+      </p:sp>
+      <p:pic>
+        <p:nvPicPr>
+          <p:cNvPr id="10" name="Picture 9">
+            <a:extLst>
+              <a:ext uri="{FF2B5EF4-FFF2-40B4-BE49-F238E27FC236}">
+                <a16:creationId xmlns:a16="http://schemas.microsoft.com/office/drawing/2014/main" id="{AABEB108-3635-0B85-682B-641562CA8D26}"/>
+              </a:ext>
+            </a:extLst>
+          </p:cNvPr>
+          <p:cNvPicPr>
+            <a:picLocks noChangeAspect="1"/>
+          </p:cNvPicPr>
+          <p:nvPr/>
+        </p:nvPicPr>
+        <p:blipFill>
+          <a:blip r:embed="rId6"/>
+          <a:stretch>
+            <a:fillRect/>
+          </a:stretch>
+        </p:blipFill>
+        <p:spPr>
+          <a:xfrm>
+            <a:off x="477054" y="2020660"/>
+            <a:ext cx="9256084" cy="4565075"/>
+          </a:xfrm>
+          <a:prstGeom prst="roundRect">
+            <a:avLst>
+              <a:gd name="adj" fmla="val 16667"/>
+            </a:avLst>
+          </a:prstGeom>
+          <a:ln>
+            <a:noFill/>
+          </a:ln>
+          <a:effectLst>
+            <a:outerShdw blurRad="152400" dist="12000" dir="900000" sy="98000" kx="110000" ky="200000" algn="tl" rotWithShape="0">
+              <a:srgbClr val="000000">
+                <a:alpha val="30000"/>
+              </a:srgbClr>
+            </a:outerShdw>
+          </a:effectLst>
+          <a:scene3d>
+            <a:camera prst="perspectiveRelaxed">
+              <a:rot lat="19800000" lon="1200000" rev="20820000"/>
+            </a:camera>
+            <a:lightRig rig="threePt" dir="t"/>
+          </a:scene3d>
+          <a:sp3d contourW="6350" prstMaterial="matte">
+            <a:bevelT w="101600" h="101600"/>
+            <a:contourClr>
+              <a:srgbClr val="969696"/>
+            </a:contourClr>
+          </a:sp3d>
+        </p:spPr>
+      </p:pic>
+      <p:pic>
+        <p:nvPicPr>
+          <p:cNvPr id="13" name="Picture 12">
+            <a:extLst>
+              <a:ext uri="{FF2B5EF4-FFF2-40B4-BE49-F238E27FC236}">
+                <a16:creationId xmlns:a16="http://schemas.microsoft.com/office/drawing/2014/main" id="{03BA96C6-3A2F-5C16-E2F8-A194220F5F6A}"/>
+              </a:ext>
+            </a:extLst>
+          </p:cNvPr>
+          <p:cNvPicPr>
+            <a:picLocks noChangeAspect="1"/>
+          </p:cNvPicPr>
+          <p:nvPr/>
+        </p:nvPicPr>
+        <p:blipFill>
+          <a:blip r:embed="rId7"/>
+          <a:stretch>
+            <a:fillRect/>
+          </a:stretch>
+        </p:blipFill>
+        <p:spPr>
+          <a:xfrm>
+            <a:off x="8748339" y="2473419"/>
+            <a:ext cx="2923705" cy="788415"/>
+          </a:xfrm>
+          <a:prstGeom prst="roundRect">
+            <a:avLst>
+              <a:gd name="adj" fmla="val 8594"/>
+            </a:avLst>
+          </a:prstGeom>
+          <a:solidFill>
+            <a:srgbClr val="FFFFFF">
+              <a:shade val="85000"/>
+            </a:srgbClr>
+          </a:solidFill>
+          <a:ln>
+            <a:noFill/>
+          </a:ln>
+          <a:effectLst>
+            <a:reflection blurRad="12700" stA="38000" endPos="28000" dist="5000" dir="5400000" sy="-100000" algn="bl" rotWithShape="0"/>
+          </a:effectLst>
+        </p:spPr>
+      </p:pic>
+    </p:spTree>
+    <p:extLst>
+      <p:ext uri="{BB962C8B-B14F-4D97-AF65-F5344CB8AC3E}">
+        <p14:creationId xmlns:p14="http://schemas.microsoft.com/office/powerpoint/2010/main" val="4033491782"/>
+      </p:ext>
+    </p:extLst>
+  </p:cSld>
+  <p:clrMapOvr>
+    <a:masterClrMapping/>
+  </p:clrMapOvr>
+</p:sld>
+</file>
+
+<file path=ppt/slides/slide6.xml><?xml version="1.0" encoding="utf-8"?>
+<p:sld xmlns:a="http://schemas.openxmlformats.org/drawingml/2006/main" xmlns:r="http://schemas.openxmlformats.org/officeDocument/2006/relationships" xmlns:p="http://schemas.openxmlformats.org/presentationml/2006/main">
+  <p:cSld>
+    <p:spTree>
+      <p:nvGrpSpPr>
+        <p:cNvPr id="1" name="">
+          <a:extLst>
+            <a:ext uri="{FF2B5EF4-FFF2-40B4-BE49-F238E27FC236}">
+              <a16:creationId xmlns:a16="http://schemas.microsoft.com/office/drawing/2014/main" id="{E494EE4C-2170-01C1-B0EF-CEFB195EC303}"/>
+            </a:ext>
+          </a:extLst>
+        </p:cNvPr>
+        <p:cNvGrpSpPr/>
+        <p:nvPr/>
+      </p:nvGrpSpPr>
+      <p:grpSpPr>
+        <a:xfrm>
+          <a:off x="0" y="0"/>
+          <a:ext cx="0" cy="0"/>
+          <a:chOff x="0" y="0"/>
+          <a:chExt cx="0" cy="0"/>
+        </a:xfrm>
+      </p:grpSpPr>
+      <p:pic>
+        <p:nvPicPr>
+          <p:cNvPr id="14" name="Picture 13" descr="chain links">
+            <a:extLst>
+              <a:ext uri="{FF2B5EF4-FFF2-40B4-BE49-F238E27FC236}">
+                <a16:creationId xmlns:a16="http://schemas.microsoft.com/office/drawing/2014/main" id="{E69F5743-F0DD-69FE-6008-A2C6A5299ABF}"/>
+              </a:ext>
+            </a:extLst>
+          </p:cNvPr>
+          <p:cNvPicPr>
+            <a:picLocks noChangeAspect="1"/>
+          </p:cNvPicPr>
+          <p:nvPr/>
+        </p:nvPicPr>
+        <p:blipFill rotWithShape="1">
+          <a:blip r:embed="rId3">
+            <a:duotone>
+              <a:prstClr val="black"/>
+              <a:schemeClr val="accent5">
+                <a:tint val="45000"/>
+                <a:satMod val="400000"/>
+              </a:schemeClr>
+            </a:duotone>
+            <a:alphaModFix amt="25000"/>
+          </a:blip>
+          <a:srcRect t="23391" r="9091"/>
+          <a:stretch/>
+        </p:blipFill>
+        <p:spPr>
+          <a:xfrm>
+            <a:off x="23993" y="10"/>
+            <a:ext cx="12191980" cy="6857990"/>
+          </a:xfrm>
+          <a:prstGeom prst="rect">
+            <a:avLst/>
+          </a:prstGeom>
+        </p:spPr>
+      </p:pic>
+      <p:pic>
+        <p:nvPicPr>
+          <p:cNvPr id="5" name="Picture 4" descr="chain links">
+            <a:extLst>
+              <a:ext uri="{FF2B5EF4-FFF2-40B4-BE49-F238E27FC236}">
+                <a16:creationId xmlns:a16="http://schemas.microsoft.com/office/drawing/2014/main" id="{9F849B3F-308D-D020-EDD5-597BEB6225A1}"/>
+              </a:ext>
+            </a:extLst>
+          </p:cNvPr>
+          <p:cNvPicPr>
+            <a:picLocks noChangeAspect="1"/>
+          </p:cNvPicPr>
+          <p:nvPr/>
+        </p:nvPicPr>
+        <p:blipFill rotWithShape="1">
+          <a:blip r:embed="rId3">
+            <a:duotone>
+              <a:prstClr val="black"/>
+              <a:schemeClr val="accent5">
+                <a:tint val="45000"/>
+                <a:satMod val="400000"/>
+              </a:schemeClr>
+            </a:duotone>
+            <a:alphaModFix amt="25000"/>
+          </a:blip>
+          <a:srcRect t="23391" r="9091"/>
+          <a:stretch/>
+        </p:blipFill>
+        <p:spPr>
+          <a:xfrm>
+            <a:off x="0" y="10"/>
+            <a:ext cx="12191980" cy="6857990"/>
+          </a:xfrm>
+          <a:prstGeom prst="rect">
+            <a:avLst/>
+          </a:prstGeom>
+        </p:spPr>
+      </p:pic>
+      <p:sp>
+        <p:nvSpPr>
+          <p:cNvPr id="3" name="Subtitle 2">
+            <a:extLst>
+              <a:ext uri="{FF2B5EF4-FFF2-40B4-BE49-F238E27FC236}">
+                <a16:creationId xmlns:a16="http://schemas.microsoft.com/office/drawing/2014/main" id="{CB7D1C94-555F-5A47-9C2B-C1B1E07075E1}"/>
+              </a:ext>
+            </a:extLst>
+          </p:cNvPr>
+          <p:cNvSpPr>
+            <a:spLocks noGrp="1"/>
+          </p:cNvSpPr>
+          <p:nvPr>
+            <p:ph type="subTitle" idx="1"/>
+          </p:nvPr>
+        </p:nvSpPr>
+        <p:spPr>
+          <a:xfrm>
+            <a:off x="5065159" y="1232245"/>
+            <a:ext cx="7011227" cy="788415"/>
+          </a:xfrm>
+        </p:spPr>
+        <p:txBody>
+          <a:bodyPr>
+            <a:normAutofit lnSpcReduction="10000"/>
+          </a:bodyPr>
+          <a:lstStyle/>
+          <a:p>
+            <a:r>
+              <a:rPr lang="en-US" altLang="zh-CN" sz="4800" b="1" dirty="0"/>
+              <a:t>2. CSS Styling</a:t>
+            </a:r>
+            <a:endParaRPr lang="en-US" sz="4800" b="1" dirty="0"/>
+          </a:p>
+        </p:txBody>
+      </p:sp>
+      <p:sp>
+        <p:nvSpPr>
+          <p:cNvPr id="7" name="Subtitle 2">
+            <a:extLst>
+              <a:ext uri="{FF2B5EF4-FFF2-40B4-BE49-F238E27FC236}">
+                <a16:creationId xmlns:a16="http://schemas.microsoft.com/office/drawing/2014/main" id="{F638F180-1322-0B14-CBDF-3725E3FC736E}"/>
+              </a:ext>
+            </a:extLst>
+          </p:cNvPr>
+          <p:cNvSpPr txBox="1">
+            <a:spLocks/>
+          </p:cNvSpPr>
+          <p:nvPr/>
+        </p:nvSpPr>
+        <p:spPr>
+          <a:xfrm>
+            <a:off x="8570773" y="2419"/>
+            <a:ext cx="2102069" cy="1447801"/>
+          </a:xfrm>
+          <a:prstGeom prst="rect">
+            <a:avLst/>
+          </a:prstGeom>
+        </p:spPr>
+        <p:txBody>
+          <a:bodyPr vert="horz" lIns="91440" tIns="45720" rIns="91440" bIns="45720" rtlCol="0" anchor="ctr">
+            <a:normAutofit fontScale="92500" lnSpcReduction="20000"/>
+          </a:bodyPr>
+          <a:lstStyle>
+            <a:lvl1pPr marL="0" indent="0" algn="l" defTabSz="457200" rtl="0" eaLnBrk="1" latinLnBrk="0" hangingPunct="1">
+              <a:spcBef>
+                <a:spcPts val="1000"/>
+              </a:spcBef>
+              <a:spcAft>
+                <a:spcPts val="0"/>
+              </a:spcAft>
+              <a:buClr>
+                <a:schemeClr val="accent1"/>
+              </a:buClr>
+              <a:buSzPct val="80000"/>
+              <a:buFont typeface="Wingdings 3" charset="2"/>
+              <a:buNone/>
+              <a:defRPr sz="2000" b="0" i="0" kern="1200" cap="all">
+                <a:solidFill>
+                  <a:schemeClr val="accent1"/>
+                </a:solidFill>
+                <a:latin typeface="+mj-lt"/>
+                <a:ea typeface="+mj-ea"/>
+                <a:cs typeface="+mj-cs"/>
+              </a:defRPr>
+            </a:lvl1pPr>
+            <a:lvl2pPr marL="457200" indent="0" algn="ctr" defTabSz="457200" rtl="0" eaLnBrk="1" latinLnBrk="0" hangingPunct="1">
+              <a:spcBef>
+                <a:spcPts val="1000"/>
+              </a:spcBef>
+              <a:spcAft>
+                <a:spcPts val="0"/>
+              </a:spcAft>
+              <a:buClr>
+                <a:schemeClr val="accent1"/>
+              </a:buClr>
+              <a:buSzPct val="80000"/>
+              <a:buFont typeface="Wingdings 3" charset="2"/>
+              <a:buNone/>
+              <a:defRPr sz="1800" b="0" i="0" kern="1200">
+                <a:solidFill>
+                  <a:schemeClr val="tx1">
+                    <a:tint val="75000"/>
+                  </a:schemeClr>
+                </a:solidFill>
+                <a:latin typeface="+mj-lt"/>
+                <a:ea typeface="+mj-ea"/>
+                <a:cs typeface="+mj-cs"/>
+              </a:defRPr>
+            </a:lvl2pPr>
+            <a:lvl3pPr marL="914400" indent="0" algn="ctr" defTabSz="457200" rtl="0" eaLnBrk="1" latinLnBrk="0" hangingPunct="1">
+              <a:spcBef>
+                <a:spcPts val="1000"/>
+              </a:spcBef>
+              <a:spcAft>
+                <a:spcPts val="0"/>
+              </a:spcAft>
+              <a:buClr>
+                <a:schemeClr val="accent1"/>
+              </a:buClr>
+              <a:buSzPct val="80000"/>
+              <a:buFont typeface="Wingdings 3" charset="2"/>
+              <a:buNone/>
+              <a:defRPr sz="1600" b="0" i="0" kern="1200">
+                <a:solidFill>
+                  <a:schemeClr val="tx1">
+                    <a:tint val="75000"/>
+                  </a:schemeClr>
+                </a:solidFill>
+                <a:latin typeface="+mj-lt"/>
+                <a:ea typeface="+mj-ea"/>
+                <a:cs typeface="+mj-cs"/>
+              </a:defRPr>
+            </a:lvl3pPr>
+            <a:lvl4pPr marL="1371600" indent="0" algn="ctr" defTabSz="457200" rtl="0" eaLnBrk="1" latinLnBrk="0" hangingPunct="1">
+              <a:spcBef>
+                <a:spcPts val="1000"/>
+              </a:spcBef>
+              <a:spcAft>
+                <a:spcPts val="0"/>
+              </a:spcAft>
+              <a:buClr>
+                <a:schemeClr val="accent1"/>
+              </a:buClr>
+              <a:buSzPct val="80000"/>
+              <a:buFont typeface="Wingdings 3" charset="2"/>
+              <a:buNone/>
+              <a:defRPr sz="1400" b="0" i="0" kern="1200">
+                <a:solidFill>
+                  <a:schemeClr val="tx1">
+                    <a:tint val="75000"/>
+                  </a:schemeClr>
+                </a:solidFill>
+                <a:latin typeface="+mj-lt"/>
+                <a:ea typeface="+mj-ea"/>
+                <a:cs typeface="+mj-cs"/>
+              </a:defRPr>
+            </a:lvl4pPr>
+            <a:lvl5pPr marL="1828800" indent="0" algn="ctr" defTabSz="457200" rtl="0" eaLnBrk="1" latinLnBrk="0" hangingPunct="1">
+              <a:spcBef>
+                <a:spcPts val="1000"/>
+              </a:spcBef>
+              <a:spcAft>
+                <a:spcPts val="0"/>
+              </a:spcAft>
+              <a:buClr>
+                <a:schemeClr val="accent1"/>
+              </a:buClr>
+              <a:buSzPct val="80000"/>
+              <a:buFont typeface="Wingdings 3" charset="2"/>
+              <a:buNone/>
+              <a:defRPr sz="1400" b="0" i="0" kern="1200">
+                <a:solidFill>
+                  <a:schemeClr val="tx1">
+                    <a:tint val="75000"/>
+                  </a:schemeClr>
+                </a:solidFill>
+                <a:latin typeface="+mj-lt"/>
+                <a:ea typeface="+mj-ea"/>
+                <a:cs typeface="+mj-cs"/>
+              </a:defRPr>
+            </a:lvl5pPr>
+            <a:lvl6pPr marL="2286000" indent="0" algn="ctr" defTabSz="457200" rtl="0" eaLnBrk="1" latinLnBrk="0" hangingPunct="1">
+              <a:spcBef>
+                <a:spcPts val="1000"/>
+              </a:spcBef>
+              <a:spcAft>
+                <a:spcPts val="0"/>
+              </a:spcAft>
+              <a:buClr>
+                <a:schemeClr val="accent1"/>
+              </a:buClr>
+              <a:buSzPct val="80000"/>
+              <a:buFont typeface="Wingdings 3" charset="2"/>
+              <a:buNone/>
+              <a:defRPr sz="1400" b="0" i="0" kern="1200">
+                <a:solidFill>
+                  <a:schemeClr val="tx1">
+                    <a:tint val="75000"/>
+                  </a:schemeClr>
+                </a:solidFill>
+                <a:latin typeface="+mj-lt"/>
+                <a:ea typeface="+mj-ea"/>
+                <a:cs typeface="+mj-cs"/>
+              </a:defRPr>
+            </a:lvl6pPr>
+            <a:lvl7pPr marL="2743200" indent="0" algn="ctr" defTabSz="457200" rtl="0" eaLnBrk="1" latinLnBrk="0" hangingPunct="1">
+              <a:spcBef>
+                <a:spcPts val="1000"/>
+              </a:spcBef>
+              <a:spcAft>
+                <a:spcPts val="0"/>
+              </a:spcAft>
+              <a:buClr>
+                <a:schemeClr val="accent1"/>
+              </a:buClr>
+              <a:buSzPct val="80000"/>
+              <a:buFont typeface="Wingdings 3" charset="2"/>
+              <a:buNone/>
+              <a:defRPr sz="1400" b="0" i="0" kern="1200">
+                <a:solidFill>
+                  <a:schemeClr val="tx1">
+                    <a:tint val="75000"/>
+                  </a:schemeClr>
+                </a:solidFill>
+                <a:latin typeface="+mj-lt"/>
+                <a:ea typeface="+mj-ea"/>
+                <a:cs typeface="+mj-cs"/>
+              </a:defRPr>
+            </a:lvl7pPr>
+            <a:lvl8pPr marL="3200400" indent="0" algn="ctr" defTabSz="457200" rtl="0" eaLnBrk="1" latinLnBrk="0" hangingPunct="1">
+              <a:spcBef>
+                <a:spcPts val="1000"/>
+              </a:spcBef>
+              <a:spcAft>
+                <a:spcPts val="0"/>
+              </a:spcAft>
+              <a:buClr>
+                <a:schemeClr val="accent1"/>
+              </a:buClr>
+              <a:buSzPct val="80000"/>
+              <a:buFont typeface="Wingdings 3" charset="2"/>
+              <a:buNone/>
+              <a:defRPr sz="1400" b="0" i="0" kern="1200">
+                <a:solidFill>
+                  <a:schemeClr val="tx1">
+                    <a:tint val="75000"/>
+                  </a:schemeClr>
+                </a:solidFill>
+                <a:latin typeface="+mj-lt"/>
+                <a:ea typeface="+mj-ea"/>
+                <a:cs typeface="+mj-cs"/>
+              </a:defRPr>
+            </a:lvl8pPr>
+            <a:lvl9pPr marL="3657600" indent="0" algn="ctr" defTabSz="457200" rtl="0" eaLnBrk="1" latinLnBrk="0" hangingPunct="1">
+              <a:spcBef>
+                <a:spcPts val="1000"/>
+              </a:spcBef>
+              <a:spcAft>
+                <a:spcPts val="0"/>
+              </a:spcAft>
+              <a:buClr>
+                <a:schemeClr val="accent1"/>
+              </a:buClr>
+              <a:buSzPct val="80000"/>
+              <a:buFont typeface="Wingdings 3" charset="2"/>
+              <a:buNone/>
+              <a:defRPr sz="1400" b="0" i="0" kern="1200">
+                <a:solidFill>
+                  <a:schemeClr val="tx1">
+                    <a:tint val="75000"/>
+                  </a:schemeClr>
+                </a:solidFill>
+                <a:latin typeface="+mj-lt"/>
+                <a:ea typeface="+mj-ea"/>
+                <a:cs typeface="+mj-cs"/>
+              </a:defRPr>
+            </a:lvl9pPr>
+          </a:lstStyle>
+          <a:p>
+            <a:pPr algn="ctr"/>
+            <a:r>
+              <a:rPr lang="en-US" sz="11500" b="1" dirty="0"/>
+              <a:t>04</a:t>
+            </a:r>
+          </a:p>
+        </p:txBody>
+      </p:sp>
+      <p:pic>
+        <p:nvPicPr>
+          <p:cNvPr id="4" name="Picture 3">
+            <a:extLst>
+              <a:ext uri="{FF2B5EF4-FFF2-40B4-BE49-F238E27FC236}">
+                <a16:creationId xmlns:a16="http://schemas.microsoft.com/office/drawing/2014/main" id="{3ED7E093-F018-EC0E-CF9A-52532814ACA7}"/>
+              </a:ext>
+            </a:extLst>
+          </p:cNvPr>
+          <p:cNvPicPr>
+            <a:picLocks noChangeAspect="1"/>
+          </p:cNvPicPr>
+          <p:nvPr/>
+        </p:nvPicPr>
+        <p:blipFill>
+          <a:blip r:embed="rId4"/>
+          <a:stretch>
+            <a:fillRect/>
+          </a:stretch>
+        </p:blipFill>
+        <p:spPr>
+          <a:xfrm>
+            <a:off x="0" y="0"/>
+            <a:ext cx="5065160" cy="3226085"/>
+          </a:xfrm>
+          <a:prstGeom prst="rect">
+            <a:avLst/>
+          </a:prstGeom>
+          <a:ln>
+            <a:noFill/>
+          </a:ln>
+          <a:effectLst>
+            <a:softEdge rad="112500"/>
+          </a:effectLst>
+        </p:spPr>
+      </p:pic>
+      <p:sp>
+        <p:nvSpPr>
+          <p:cNvPr id="2" name="Title 1">
+            <a:extLst>
+              <a:ext uri="{FF2B5EF4-FFF2-40B4-BE49-F238E27FC236}">
+                <a16:creationId xmlns:a16="http://schemas.microsoft.com/office/drawing/2014/main" id="{8A2D1822-ECD5-4B69-3B2A-043016FA3D82}"/>
+              </a:ext>
+            </a:extLst>
+          </p:cNvPr>
+          <p:cNvSpPr>
+            <a:spLocks noGrp="1"/>
+          </p:cNvSpPr>
+          <p:nvPr>
+            <p:ph type="ctrTitle"/>
+          </p:nvPr>
+        </p:nvSpPr>
+        <p:spPr>
+          <a:xfrm>
+            <a:off x="4011986" y="30293"/>
+            <a:ext cx="4741596" cy="1266497"/>
+          </a:xfrm>
+        </p:spPr>
+        <p:txBody>
+          <a:bodyPr anchor="ctr">
+            <a:normAutofit/>
+          </a:bodyPr>
+          <a:lstStyle/>
+          <a:p>
+            <a:r>
+              <a:rPr lang="en-US" sz="6000" b="1" dirty="0"/>
+              <a:t>App Router</a:t>
+            </a:r>
+            <a:endParaRPr lang="ru-RU" sz="6000" b="1" dirty="0"/>
+          </a:p>
+        </p:txBody>
+      </p:sp>
+      <p:pic>
+        <p:nvPicPr>
+          <p:cNvPr id="6" name="Picture 5">
+            <a:extLst>
+              <a:ext uri="{FF2B5EF4-FFF2-40B4-BE49-F238E27FC236}">
+                <a16:creationId xmlns:a16="http://schemas.microsoft.com/office/drawing/2014/main" id="{04BA5DE6-DB4B-8D2E-9615-8F523BC77ED3}"/>
+              </a:ext>
+            </a:extLst>
+          </p:cNvPr>
+          <p:cNvPicPr>
+            <a:picLocks noChangeAspect="1"/>
+          </p:cNvPicPr>
+          <p:nvPr/>
+        </p:nvPicPr>
+        <p:blipFill>
+          <a:blip r:embed="rId5"/>
+          <a:stretch>
+            <a:fillRect/>
+          </a:stretch>
+        </p:blipFill>
+        <p:spPr>
+          <a:xfrm>
+            <a:off x="10672842" y="271032"/>
+            <a:ext cx="1420028" cy="652758"/>
+          </a:xfrm>
+          <a:prstGeom prst="rect">
+            <a:avLst/>
+          </a:prstGeom>
+          <a:ln>
+            <a:noFill/>
+          </a:ln>
+          <a:effectLst>
+            <a:softEdge rad="112500"/>
+          </a:effectLst>
+        </p:spPr>
+      </p:pic>
+      <p:sp>
+        <p:nvSpPr>
+          <p:cNvPr id="9" name="Subtitle 2">
+            <a:extLst>
+              <a:ext uri="{FF2B5EF4-FFF2-40B4-BE49-F238E27FC236}">
+                <a16:creationId xmlns:a16="http://schemas.microsoft.com/office/drawing/2014/main" id="{AEFD86A6-46B5-8A26-873E-5688A5AD3D94}"/>
+              </a:ext>
+            </a:extLst>
+          </p:cNvPr>
+          <p:cNvSpPr txBox="1">
+            <a:spLocks/>
+          </p:cNvSpPr>
+          <p:nvPr/>
+        </p:nvSpPr>
+        <p:spPr>
+          <a:xfrm>
+            <a:off x="5065158" y="1867230"/>
+            <a:ext cx="7011227" cy="788415"/>
+          </a:xfrm>
+          <a:prstGeom prst="rect">
+            <a:avLst/>
+          </a:prstGeom>
+        </p:spPr>
+        <p:txBody>
+          <a:bodyPr vert="horz" lIns="91440" tIns="45720" rIns="91440" bIns="45720" rtlCol="0" anchor="t">
+            <a:normAutofit/>
+          </a:bodyPr>
+          <a:lstStyle>
+            <a:lvl1pPr marL="0" indent="0" algn="l" defTabSz="457200" rtl="0" eaLnBrk="1" latinLnBrk="0" hangingPunct="1">
+              <a:spcBef>
+                <a:spcPts val="1000"/>
+              </a:spcBef>
+              <a:spcAft>
+                <a:spcPts val="0"/>
+              </a:spcAft>
+              <a:buClr>
+                <a:schemeClr val="accent1"/>
+              </a:buClr>
+              <a:buSzPct val="80000"/>
+              <a:buFont typeface="Wingdings 3" charset="2"/>
+              <a:buNone/>
+              <a:defRPr sz="2000" b="0" i="0" kern="1200" cap="all">
+                <a:solidFill>
+                  <a:schemeClr val="accent1"/>
+                </a:solidFill>
+                <a:latin typeface="+mj-lt"/>
+                <a:ea typeface="+mj-ea"/>
+                <a:cs typeface="+mj-cs"/>
+              </a:defRPr>
+            </a:lvl1pPr>
+            <a:lvl2pPr marL="457200" indent="0" algn="ctr" defTabSz="457200" rtl="0" eaLnBrk="1" latinLnBrk="0" hangingPunct="1">
+              <a:spcBef>
+                <a:spcPts val="1000"/>
+              </a:spcBef>
+              <a:spcAft>
+                <a:spcPts val="0"/>
+              </a:spcAft>
+              <a:buClr>
+                <a:schemeClr val="accent1"/>
+              </a:buClr>
+              <a:buSzPct val="80000"/>
+              <a:buFont typeface="Wingdings 3" charset="2"/>
+              <a:buNone/>
+              <a:defRPr sz="1800" b="0" i="0" kern="1200">
+                <a:solidFill>
+                  <a:schemeClr val="tx1">
+                    <a:tint val="75000"/>
+                  </a:schemeClr>
+                </a:solidFill>
+                <a:latin typeface="+mj-lt"/>
+                <a:ea typeface="+mj-ea"/>
+                <a:cs typeface="+mj-cs"/>
+              </a:defRPr>
+            </a:lvl2pPr>
+            <a:lvl3pPr marL="914400" indent="0" algn="ctr" defTabSz="457200" rtl="0" eaLnBrk="1" latinLnBrk="0" hangingPunct="1">
+              <a:spcBef>
+                <a:spcPts val="1000"/>
+              </a:spcBef>
+              <a:spcAft>
+                <a:spcPts val="0"/>
+              </a:spcAft>
+              <a:buClr>
+                <a:schemeClr val="accent1"/>
+              </a:buClr>
+              <a:buSzPct val="80000"/>
+              <a:buFont typeface="Wingdings 3" charset="2"/>
+              <a:buNone/>
+              <a:defRPr sz="1600" b="0" i="0" kern="1200">
+                <a:solidFill>
+                  <a:schemeClr val="tx1">
+                    <a:tint val="75000"/>
+                  </a:schemeClr>
+                </a:solidFill>
+                <a:latin typeface="+mj-lt"/>
+                <a:ea typeface="+mj-ea"/>
+                <a:cs typeface="+mj-cs"/>
+              </a:defRPr>
+            </a:lvl3pPr>
+            <a:lvl4pPr marL="1371600" indent="0" algn="ctr" defTabSz="457200" rtl="0" eaLnBrk="1" latinLnBrk="0" hangingPunct="1">
+              <a:spcBef>
+                <a:spcPts val="1000"/>
+              </a:spcBef>
+              <a:spcAft>
+                <a:spcPts val="0"/>
+              </a:spcAft>
+              <a:buClr>
+                <a:schemeClr val="accent1"/>
+              </a:buClr>
+              <a:buSzPct val="80000"/>
+              <a:buFont typeface="Wingdings 3" charset="2"/>
+              <a:buNone/>
+              <a:defRPr sz="1400" b="0" i="0" kern="1200">
+                <a:solidFill>
+                  <a:schemeClr val="tx1">
+                    <a:tint val="75000"/>
+                  </a:schemeClr>
+                </a:solidFill>
+                <a:latin typeface="+mj-lt"/>
+                <a:ea typeface="+mj-ea"/>
+                <a:cs typeface="+mj-cs"/>
+              </a:defRPr>
+            </a:lvl4pPr>
+            <a:lvl5pPr marL="1828800" indent="0" algn="ctr" defTabSz="457200" rtl="0" eaLnBrk="1" latinLnBrk="0" hangingPunct="1">
+              <a:spcBef>
+                <a:spcPts val="1000"/>
+              </a:spcBef>
+              <a:spcAft>
+                <a:spcPts val="0"/>
+              </a:spcAft>
+              <a:buClr>
+                <a:schemeClr val="accent1"/>
+              </a:buClr>
+              <a:buSzPct val="80000"/>
+              <a:buFont typeface="Wingdings 3" charset="2"/>
+              <a:buNone/>
+              <a:defRPr sz="1400" b="0" i="0" kern="1200">
+                <a:solidFill>
+                  <a:schemeClr val="tx1">
+                    <a:tint val="75000"/>
+                  </a:schemeClr>
+                </a:solidFill>
+                <a:latin typeface="+mj-lt"/>
+                <a:ea typeface="+mj-ea"/>
+                <a:cs typeface="+mj-cs"/>
+              </a:defRPr>
+            </a:lvl5pPr>
+            <a:lvl6pPr marL="2286000" indent="0" algn="ctr" defTabSz="457200" rtl="0" eaLnBrk="1" latinLnBrk="0" hangingPunct="1">
+              <a:spcBef>
+                <a:spcPts val="1000"/>
+              </a:spcBef>
+              <a:spcAft>
+                <a:spcPts val="0"/>
+              </a:spcAft>
+              <a:buClr>
+                <a:schemeClr val="accent1"/>
+              </a:buClr>
+              <a:buSzPct val="80000"/>
+              <a:buFont typeface="Wingdings 3" charset="2"/>
+              <a:buNone/>
+              <a:defRPr sz="1400" b="0" i="0" kern="1200">
+                <a:solidFill>
+                  <a:schemeClr val="tx1">
+                    <a:tint val="75000"/>
+                  </a:schemeClr>
+                </a:solidFill>
+                <a:latin typeface="+mj-lt"/>
+                <a:ea typeface="+mj-ea"/>
+                <a:cs typeface="+mj-cs"/>
+              </a:defRPr>
+            </a:lvl6pPr>
+            <a:lvl7pPr marL="2743200" indent="0" algn="ctr" defTabSz="457200" rtl="0" eaLnBrk="1" latinLnBrk="0" hangingPunct="1">
+              <a:spcBef>
+                <a:spcPts val="1000"/>
+              </a:spcBef>
+              <a:spcAft>
+                <a:spcPts val="0"/>
+              </a:spcAft>
+              <a:buClr>
+                <a:schemeClr val="accent1"/>
+              </a:buClr>
+              <a:buSzPct val="80000"/>
+              <a:buFont typeface="Wingdings 3" charset="2"/>
+              <a:buNone/>
+              <a:defRPr sz="1400" b="0" i="0" kern="1200">
+                <a:solidFill>
+                  <a:schemeClr val="tx1">
+                    <a:tint val="75000"/>
+                  </a:schemeClr>
+                </a:solidFill>
+                <a:latin typeface="+mj-lt"/>
+                <a:ea typeface="+mj-ea"/>
+                <a:cs typeface="+mj-cs"/>
+              </a:defRPr>
+            </a:lvl7pPr>
+            <a:lvl8pPr marL="3200400" indent="0" algn="ctr" defTabSz="457200" rtl="0" eaLnBrk="1" latinLnBrk="0" hangingPunct="1">
+              <a:spcBef>
+                <a:spcPts val="1000"/>
+              </a:spcBef>
+              <a:spcAft>
+                <a:spcPts val="0"/>
+              </a:spcAft>
+              <a:buClr>
+                <a:schemeClr val="accent1"/>
+              </a:buClr>
+              <a:buSzPct val="80000"/>
+              <a:buFont typeface="Wingdings 3" charset="2"/>
+              <a:buNone/>
+              <a:defRPr sz="1400" b="0" i="0" kern="1200">
+                <a:solidFill>
+                  <a:schemeClr val="tx1">
+                    <a:tint val="75000"/>
+                  </a:schemeClr>
+                </a:solidFill>
+                <a:latin typeface="+mj-lt"/>
+                <a:ea typeface="+mj-ea"/>
+                <a:cs typeface="+mj-cs"/>
+              </a:defRPr>
+            </a:lvl8pPr>
+            <a:lvl9pPr marL="3657600" indent="0" algn="ctr" defTabSz="457200" rtl="0" eaLnBrk="1" latinLnBrk="0" hangingPunct="1">
+              <a:spcBef>
+                <a:spcPts val="1000"/>
+              </a:spcBef>
+              <a:spcAft>
+                <a:spcPts val="0"/>
+              </a:spcAft>
+              <a:buClr>
+                <a:schemeClr val="accent1"/>
+              </a:buClr>
+              <a:buSzPct val="80000"/>
+              <a:buFont typeface="Wingdings 3" charset="2"/>
+              <a:buNone/>
+              <a:defRPr sz="1400" b="0" i="0" kern="1200">
+                <a:solidFill>
+                  <a:schemeClr val="tx1">
+                    <a:tint val="75000"/>
+                  </a:schemeClr>
+                </a:solidFill>
+                <a:latin typeface="+mj-lt"/>
+                <a:ea typeface="+mj-ea"/>
+                <a:cs typeface="+mj-cs"/>
+              </a:defRPr>
+            </a:lvl9pPr>
+          </a:lstStyle>
+          <a:p>
+            <a:r>
+              <a:rPr lang="en-US" altLang="zh-CN" sz="3600" b="1" cap="none" dirty="0"/>
+              <a:t>2.3 CSS Modules</a:t>
+            </a:r>
+            <a:endParaRPr lang="en-US" sz="3600" b="1" cap="none" dirty="0"/>
+          </a:p>
+        </p:txBody>
+      </p:sp>
+      <p:pic>
+        <p:nvPicPr>
+          <p:cNvPr id="16" name="Picture 15">
+            <a:extLst>
+              <a:ext uri="{FF2B5EF4-FFF2-40B4-BE49-F238E27FC236}">
+                <a16:creationId xmlns:a16="http://schemas.microsoft.com/office/drawing/2014/main" id="{B28593E3-1C77-6CE6-348F-403C997BEB00}"/>
+              </a:ext>
+            </a:extLst>
+          </p:cNvPr>
+          <p:cNvPicPr>
+            <a:picLocks noChangeAspect="1"/>
+          </p:cNvPicPr>
+          <p:nvPr/>
+        </p:nvPicPr>
+        <p:blipFill>
+          <a:blip r:embed="rId6"/>
+          <a:stretch>
+            <a:fillRect/>
+          </a:stretch>
+        </p:blipFill>
+        <p:spPr>
+          <a:xfrm>
+            <a:off x="667006" y="1931775"/>
+            <a:ext cx="9165363" cy="4593050"/>
+          </a:xfrm>
+          <a:prstGeom prst="roundRect">
+            <a:avLst>
+              <a:gd name="adj" fmla="val 16667"/>
+            </a:avLst>
+          </a:prstGeom>
+          <a:ln>
+            <a:noFill/>
+          </a:ln>
+          <a:effectLst>
+            <a:outerShdw blurRad="152400" dist="12000" dir="900000" sy="98000" kx="110000" ky="200000" algn="tl" rotWithShape="0">
+              <a:srgbClr val="000000">
+                <a:alpha val="30000"/>
+              </a:srgbClr>
+            </a:outerShdw>
+          </a:effectLst>
+          <a:scene3d>
+            <a:camera prst="perspectiveRelaxed">
+              <a:rot lat="19800000" lon="1200000" rev="20820000"/>
+            </a:camera>
+            <a:lightRig rig="threePt" dir="t"/>
+          </a:scene3d>
+          <a:sp3d contourW="6350" prstMaterial="matte">
+            <a:bevelT w="101600" h="101600"/>
+            <a:contourClr>
+              <a:srgbClr val="969696"/>
+            </a:contourClr>
+          </a:sp3d>
+        </p:spPr>
+      </p:pic>
+    </p:spTree>
+    <p:extLst>
+      <p:ext uri="{BB962C8B-B14F-4D97-AF65-F5344CB8AC3E}">
+        <p14:creationId xmlns:p14="http://schemas.microsoft.com/office/powerpoint/2010/main" val="1634332005"/>
+      </p:ext>
+    </p:extLst>
+  </p:cSld>
+  <p:clrMapOvr>
+    <a:masterClrMapping/>
+  </p:clrMapOvr>
+</p:sld>
+</file>
+
+<file path=ppt/slides/slide7.xml><?xml version="1.0" encoding="utf-8"?>
+<p:sld xmlns:a="http://schemas.openxmlformats.org/drawingml/2006/main" xmlns:r="http://schemas.openxmlformats.org/officeDocument/2006/relationships" xmlns:p="http://schemas.openxmlformats.org/presentationml/2006/main">
+  <p:cSld>
+    <p:spTree>
+      <p:nvGrpSpPr>
+        <p:cNvPr id="1" name="">
+          <a:extLst>
+            <a:ext uri="{FF2B5EF4-FFF2-40B4-BE49-F238E27FC236}">
+              <a16:creationId xmlns:a16="http://schemas.microsoft.com/office/drawing/2014/main" id="{BE43F61A-45D3-F2AB-1EE1-0E94A4A22789}"/>
+            </a:ext>
+          </a:extLst>
+        </p:cNvPr>
+        <p:cNvGrpSpPr/>
+        <p:nvPr/>
+      </p:nvGrpSpPr>
+      <p:grpSpPr>
+        <a:xfrm>
+          <a:off x="0" y="0"/>
+          <a:ext cx="0" cy="0"/>
+          <a:chOff x="0" y="0"/>
+          <a:chExt cx="0" cy="0"/>
+        </a:xfrm>
+      </p:grpSpPr>
+      <p:pic>
+        <p:nvPicPr>
+          <p:cNvPr id="5" name="Picture 4" descr="chain links">
+            <a:extLst>
+              <a:ext uri="{FF2B5EF4-FFF2-40B4-BE49-F238E27FC236}">
+                <a16:creationId xmlns:a16="http://schemas.microsoft.com/office/drawing/2014/main" id="{A44D3A9E-51D4-C202-0196-70EEA9ED8CD5}"/>
+              </a:ext>
+            </a:extLst>
+          </p:cNvPr>
+          <p:cNvPicPr>
+            <a:picLocks noChangeAspect="1"/>
+          </p:cNvPicPr>
+          <p:nvPr/>
+        </p:nvPicPr>
+        <p:blipFill rotWithShape="1">
+          <a:blip r:embed="rId3">
+            <a:duotone>
+              <a:prstClr val="black"/>
+              <a:schemeClr val="accent5">
+                <a:tint val="45000"/>
+                <a:satMod val="400000"/>
+              </a:schemeClr>
+            </a:duotone>
+            <a:alphaModFix amt="25000"/>
+          </a:blip>
+          <a:srcRect t="23391" r="9091"/>
+          <a:stretch/>
+        </p:blipFill>
+        <p:spPr>
+          <a:xfrm>
+            <a:off x="0" y="10"/>
+            <a:ext cx="12191980" cy="6857990"/>
+          </a:xfrm>
+          <a:prstGeom prst="rect">
+            <a:avLst/>
+          </a:prstGeom>
+        </p:spPr>
+      </p:pic>
+      <p:sp>
+        <p:nvSpPr>
+          <p:cNvPr id="3" name="Subtitle 2">
+            <a:extLst>
+              <a:ext uri="{FF2B5EF4-FFF2-40B4-BE49-F238E27FC236}">
+                <a16:creationId xmlns:a16="http://schemas.microsoft.com/office/drawing/2014/main" id="{DE45AB62-977F-75BA-7E04-2DBFA36AD2A5}"/>
+              </a:ext>
+            </a:extLst>
+          </p:cNvPr>
+          <p:cNvSpPr>
+            <a:spLocks noGrp="1"/>
+          </p:cNvSpPr>
+          <p:nvPr>
+            <p:ph type="subTitle" idx="1"/>
+          </p:nvPr>
+        </p:nvSpPr>
+        <p:spPr>
+          <a:xfrm>
+            <a:off x="3896392" y="1083848"/>
+            <a:ext cx="7011227" cy="788415"/>
+          </a:xfrm>
+        </p:spPr>
+        <p:txBody>
+          <a:bodyPr>
+            <a:normAutofit lnSpcReduction="10000"/>
+          </a:bodyPr>
+          <a:lstStyle/>
+          <a:p>
+            <a:r>
+              <a:rPr lang="en-US" altLang="zh-CN" sz="4800" b="1" dirty="0"/>
+              <a:t>2. CSS Styling</a:t>
+            </a:r>
+            <a:endParaRPr lang="en-US" sz="4800" b="1" dirty="0"/>
+          </a:p>
+        </p:txBody>
+      </p:sp>
+      <p:sp>
+        <p:nvSpPr>
+          <p:cNvPr id="7" name="Subtitle 2">
+            <a:extLst>
+              <a:ext uri="{FF2B5EF4-FFF2-40B4-BE49-F238E27FC236}">
+                <a16:creationId xmlns:a16="http://schemas.microsoft.com/office/drawing/2014/main" id="{AF86997A-6C24-593A-4601-1BB6353F0D4F}"/>
+              </a:ext>
+            </a:extLst>
+          </p:cNvPr>
+          <p:cNvSpPr txBox="1">
+            <a:spLocks/>
+          </p:cNvSpPr>
+          <p:nvPr/>
+        </p:nvSpPr>
+        <p:spPr>
+          <a:xfrm>
+            <a:off x="8570773" y="2419"/>
+            <a:ext cx="2102069" cy="1447801"/>
+          </a:xfrm>
+          <a:prstGeom prst="rect">
+            <a:avLst/>
+          </a:prstGeom>
+        </p:spPr>
+        <p:txBody>
+          <a:bodyPr vert="horz" lIns="91440" tIns="45720" rIns="91440" bIns="45720" rtlCol="0" anchor="ctr">
+            <a:normAutofit fontScale="92500" lnSpcReduction="20000"/>
+          </a:bodyPr>
+          <a:lstStyle>
+            <a:lvl1pPr marL="0" indent="0" algn="l" defTabSz="457200" rtl="0" eaLnBrk="1" latinLnBrk="0" hangingPunct="1">
+              <a:spcBef>
+                <a:spcPts val="1000"/>
+              </a:spcBef>
+              <a:spcAft>
+                <a:spcPts val="0"/>
+              </a:spcAft>
+              <a:buClr>
+                <a:schemeClr val="accent1"/>
+              </a:buClr>
+              <a:buSzPct val="80000"/>
+              <a:buFont typeface="Wingdings 3" charset="2"/>
+              <a:buNone/>
+              <a:defRPr sz="2000" b="0" i="0" kern="1200" cap="all">
+                <a:solidFill>
+                  <a:schemeClr val="accent1"/>
+                </a:solidFill>
+                <a:latin typeface="+mj-lt"/>
+                <a:ea typeface="+mj-ea"/>
+                <a:cs typeface="+mj-cs"/>
+              </a:defRPr>
+            </a:lvl1pPr>
+            <a:lvl2pPr marL="457200" indent="0" algn="ctr" defTabSz="457200" rtl="0" eaLnBrk="1" latinLnBrk="0" hangingPunct="1">
+              <a:spcBef>
+                <a:spcPts val="1000"/>
+              </a:spcBef>
+              <a:spcAft>
+                <a:spcPts val="0"/>
+              </a:spcAft>
+              <a:buClr>
+                <a:schemeClr val="accent1"/>
+              </a:buClr>
+              <a:buSzPct val="80000"/>
+              <a:buFont typeface="Wingdings 3" charset="2"/>
+              <a:buNone/>
+              <a:defRPr sz="1800" b="0" i="0" kern="1200">
+                <a:solidFill>
+                  <a:schemeClr val="tx1">
+                    <a:tint val="75000"/>
+                  </a:schemeClr>
+                </a:solidFill>
+                <a:latin typeface="+mj-lt"/>
+                <a:ea typeface="+mj-ea"/>
+                <a:cs typeface="+mj-cs"/>
+              </a:defRPr>
+            </a:lvl2pPr>
+            <a:lvl3pPr marL="914400" indent="0" algn="ctr" defTabSz="457200" rtl="0" eaLnBrk="1" latinLnBrk="0" hangingPunct="1">
+              <a:spcBef>
+                <a:spcPts val="1000"/>
+              </a:spcBef>
+              <a:spcAft>
+                <a:spcPts val="0"/>
+              </a:spcAft>
+              <a:buClr>
+                <a:schemeClr val="accent1"/>
+              </a:buClr>
+              <a:buSzPct val="80000"/>
+              <a:buFont typeface="Wingdings 3" charset="2"/>
+              <a:buNone/>
+              <a:defRPr sz="1600" b="0" i="0" kern="1200">
+                <a:solidFill>
+                  <a:schemeClr val="tx1">
+                    <a:tint val="75000"/>
+                  </a:schemeClr>
+                </a:solidFill>
+                <a:latin typeface="+mj-lt"/>
+                <a:ea typeface="+mj-ea"/>
+                <a:cs typeface="+mj-cs"/>
+              </a:defRPr>
+            </a:lvl3pPr>
+            <a:lvl4pPr marL="1371600" indent="0" algn="ctr" defTabSz="457200" rtl="0" eaLnBrk="1" latinLnBrk="0" hangingPunct="1">
+              <a:spcBef>
+                <a:spcPts val="1000"/>
+              </a:spcBef>
+              <a:spcAft>
+                <a:spcPts val="0"/>
+              </a:spcAft>
+              <a:buClr>
+                <a:schemeClr val="accent1"/>
+              </a:buClr>
+              <a:buSzPct val="80000"/>
+              <a:buFont typeface="Wingdings 3" charset="2"/>
+              <a:buNone/>
+              <a:defRPr sz="1400" b="0" i="0" kern="1200">
+                <a:solidFill>
+                  <a:schemeClr val="tx1">
+                    <a:tint val="75000"/>
+                  </a:schemeClr>
+                </a:solidFill>
+                <a:latin typeface="+mj-lt"/>
+                <a:ea typeface="+mj-ea"/>
+                <a:cs typeface="+mj-cs"/>
+              </a:defRPr>
+            </a:lvl4pPr>
+            <a:lvl5pPr marL="1828800" indent="0" algn="ctr" defTabSz="457200" rtl="0" eaLnBrk="1" latinLnBrk="0" hangingPunct="1">
+              <a:spcBef>
+                <a:spcPts val="1000"/>
+              </a:spcBef>
+              <a:spcAft>
+                <a:spcPts val="0"/>
+              </a:spcAft>
+              <a:buClr>
+                <a:schemeClr val="accent1"/>
+              </a:buClr>
+              <a:buSzPct val="80000"/>
+              <a:buFont typeface="Wingdings 3" charset="2"/>
+              <a:buNone/>
+              <a:defRPr sz="1400" b="0" i="0" kern="1200">
+                <a:solidFill>
+                  <a:schemeClr val="tx1">
+                    <a:tint val="75000"/>
+                  </a:schemeClr>
+                </a:solidFill>
+                <a:latin typeface="+mj-lt"/>
+                <a:ea typeface="+mj-ea"/>
+                <a:cs typeface="+mj-cs"/>
+              </a:defRPr>
+            </a:lvl5pPr>
+            <a:lvl6pPr marL="2286000" indent="0" algn="ctr" defTabSz="457200" rtl="0" eaLnBrk="1" latinLnBrk="0" hangingPunct="1">
+              <a:spcBef>
+                <a:spcPts val="1000"/>
+              </a:spcBef>
+              <a:spcAft>
+                <a:spcPts val="0"/>
+              </a:spcAft>
+              <a:buClr>
+                <a:schemeClr val="accent1"/>
+              </a:buClr>
+              <a:buSzPct val="80000"/>
+              <a:buFont typeface="Wingdings 3" charset="2"/>
+              <a:buNone/>
+              <a:defRPr sz="1400" b="0" i="0" kern="1200">
+                <a:solidFill>
+                  <a:schemeClr val="tx1">
+                    <a:tint val="75000"/>
+                  </a:schemeClr>
+                </a:solidFill>
+                <a:latin typeface="+mj-lt"/>
+                <a:ea typeface="+mj-ea"/>
+                <a:cs typeface="+mj-cs"/>
+              </a:defRPr>
+            </a:lvl6pPr>
+            <a:lvl7pPr marL="2743200" indent="0" algn="ctr" defTabSz="457200" rtl="0" eaLnBrk="1" latinLnBrk="0" hangingPunct="1">
+              <a:spcBef>
+                <a:spcPts val="1000"/>
+              </a:spcBef>
+              <a:spcAft>
+                <a:spcPts val="0"/>
+              </a:spcAft>
+              <a:buClr>
+                <a:schemeClr val="accent1"/>
+              </a:buClr>
+              <a:buSzPct val="80000"/>
+              <a:buFont typeface="Wingdings 3" charset="2"/>
+              <a:buNone/>
+              <a:defRPr sz="1400" b="0" i="0" kern="1200">
+                <a:solidFill>
+                  <a:schemeClr val="tx1">
+                    <a:tint val="75000"/>
+                  </a:schemeClr>
+                </a:solidFill>
+                <a:latin typeface="+mj-lt"/>
+                <a:ea typeface="+mj-ea"/>
+                <a:cs typeface="+mj-cs"/>
+              </a:defRPr>
+            </a:lvl7pPr>
+            <a:lvl8pPr marL="3200400" indent="0" algn="ctr" defTabSz="457200" rtl="0" eaLnBrk="1" latinLnBrk="0" hangingPunct="1">
+              <a:spcBef>
+                <a:spcPts val="1000"/>
+              </a:spcBef>
+              <a:spcAft>
+                <a:spcPts val="0"/>
+              </a:spcAft>
+              <a:buClr>
+                <a:schemeClr val="accent1"/>
+              </a:buClr>
+              <a:buSzPct val="80000"/>
+              <a:buFont typeface="Wingdings 3" charset="2"/>
+              <a:buNone/>
+              <a:defRPr sz="1400" b="0" i="0" kern="1200">
+                <a:solidFill>
+                  <a:schemeClr val="tx1">
+                    <a:tint val="75000"/>
+                  </a:schemeClr>
+                </a:solidFill>
+                <a:latin typeface="+mj-lt"/>
+                <a:ea typeface="+mj-ea"/>
+                <a:cs typeface="+mj-cs"/>
+              </a:defRPr>
+            </a:lvl8pPr>
+            <a:lvl9pPr marL="3657600" indent="0" algn="ctr" defTabSz="457200" rtl="0" eaLnBrk="1" latinLnBrk="0" hangingPunct="1">
+              <a:spcBef>
+                <a:spcPts val="1000"/>
+              </a:spcBef>
+              <a:spcAft>
+                <a:spcPts val="0"/>
+              </a:spcAft>
+              <a:buClr>
+                <a:schemeClr val="accent1"/>
+              </a:buClr>
+              <a:buSzPct val="80000"/>
+              <a:buFont typeface="Wingdings 3" charset="2"/>
+              <a:buNone/>
+              <a:defRPr sz="1400" b="0" i="0" kern="1200">
+                <a:solidFill>
+                  <a:schemeClr val="tx1">
+                    <a:tint val="75000"/>
+                  </a:schemeClr>
+                </a:solidFill>
+                <a:latin typeface="+mj-lt"/>
+                <a:ea typeface="+mj-ea"/>
+                <a:cs typeface="+mj-cs"/>
+              </a:defRPr>
+            </a:lvl9pPr>
+          </a:lstStyle>
+          <a:p>
+            <a:pPr algn="ctr"/>
+            <a:r>
+              <a:rPr lang="en-US" sz="11500" b="1" dirty="0"/>
+              <a:t>05</a:t>
+            </a:r>
+          </a:p>
+        </p:txBody>
+      </p:sp>
+      <p:pic>
+        <p:nvPicPr>
+          <p:cNvPr id="4" name="Picture 3">
+            <a:extLst>
+              <a:ext uri="{FF2B5EF4-FFF2-40B4-BE49-F238E27FC236}">
+                <a16:creationId xmlns:a16="http://schemas.microsoft.com/office/drawing/2014/main" id="{77DF2B5B-E63F-6C61-F8B6-8AC0966A38F8}"/>
+              </a:ext>
+            </a:extLst>
+          </p:cNvPr>
+          <p:cNvPicPr>
+            <a:picLocks noChangeAspect="1"/>
+          </p:cNvPicPr>
+          <p:nvPr/>
+        </p:nvPicPr>
+        <p:blipFill>
+          <a:blip r:embed="rId4"/>
+          <a:stretch>
+            <a:fillRect/>
+          </a:stretch>
+        </p:blipFill>
+        <p:spPr>
+          <a:xfrm>
+            <a:off x="0" y="0"/>
+            <a:ext cx="3896391" cy="2481677"/>
+          </a:xfrm>
+          <a:prstGeom prst="rect">
+            <a:avLst/>
+          </a:prstGeom>
+          <a:ln>
+            <a:noFill/>
+          </a:ln>
+          <a:effectLst>
+            <a:softEdge rad="112500"/>
+          </a:effectLst>
+        </p:spPr>
+      </p:pic>
+      <p:sp>
+        <p:nvSpPr>
+          <p:cNvPr id="2" name="Title 1">
+            <a:extLst>
+              <a:ext uri="{FF2B5EF4-FFF2-40B4-BE49-F238E27FC236}">
+                <a16:creationId xmlns:a16="http://schemas.microsoft.com/office/drawing/2014/main" id="{BDCDCE82-856C-FF31-33BE-8D0576C34168}"/>
+              </a:ext>
+            </a:extLst>
+          </p:cNvPr>
+          <p:cNvSpPr>
+            <a:spLocks noGrp="1"/>
+          </p:cNvSpPr>
+          <p:nvPr>
+            <p:ph type="ctrTitle"/>
+          </p:nvPr>
+        </p:nvSpPr>
+        <p:spPr>
+          <a:xfrm>
+            <a:off x="3477730" y="50040"/>
+            <a:ext cx="4741596" cy="946553"/>
+          </a:xfrm>
+        </p:spPr>
+        <p:txBody>
+          <a:bodyPr anchor="ctr">
+            <a:normAutofit fontScale="90000"/>
+          </a:bodyPr>
+          <a:lstStyle/>
+          <a:p>
+            <a:r>
+              <a:rPr lang="en-US" sz="6000" b="1" dirty="0"/>
+              <a:t>App Router</a:t>
+            </a:r>
+            <a:endParaRPr lang="ru-RU" sz="6000" b="1" dirty="0"/>
+          </a:p>
+        </p:txBody>
+      </p:sp>
+      <p:pic>
+        <p:nvPicPr>
+          <p:cNvPr id="6" name="Picture 5">
+            <a:extLst>
+              <a:ext uri="{FF2B5EF4-FFF2-40B4-BE49-F238E27FC236}">
+                <a16:creationId xmlns:a16="http://schemas.microsoft.com/office/drawing/2014/main" id="{A77793B7-E623-C853-EBCB-0D6028B2A2C7}"/>
+              </a:ext>
+            </a:extLst>
+          </p:cNvPr>
+          <p:cNvPicPr>
+            <a:picLocks noChangeAspect="1"/>
+          </p:cNvPicPr>
+          <p:nvPr/>
+        </p:nvPicPr>
+        <p:blipFill>
+          <a:blip r:embed="rId5"/>
+          <a:stretch>
+            <a:fillRect/>
+          </a:stretch>
+        </p:blipFill>
+        <p:spPr>
+          <a:xfrm>
+            <a:off x="10672842" y="271032"/>
+            <a:ext cx="1420028" cy="652758"/>
+          </a:xfrm>
+          <a:prstGeom prst="rect">
+            <a:avLst/>
+          </a:prstGeom>
+          <a:ln>
+            <a:noFill/>
+          </a:ln>
+          <a:effectLst>
+            <a:softEdge rad="112500"/>
+          </a:effectLst>
+        </p:spPr>
+      </p:pic>
+      <p:sp>
+        <p:nvSpPr>
+          <p:cNvPr id="9" name="Subtitle 2">
+            <a:extLst>
+              <a:ext uri="{FF2B5EF4-FFF2-40B4-BE49-F238E27FC236}">
+                <a16:creationId xmlns:a16="http://schemas.microsoft.com/office/drawing/2014/main" id="{22BF4C81-9674-00DA-56EF-27988CAC0559}"/>
+              </a:ext>
+            </a:extLst>
+          </p:cNvPr>
+          <p:cNvSpPr txBox="1">
+            <a:spLocks/>
+          </p:cNvSpPr>
+          <p:nvPr/>
+        </p:nvSpPr>
+        <p:spPr>
+          <a:xfrm>
+            <a:off x="3896391" y="1718833"/>
+            <a:ext cx="7011227" cy="788415"/>
+          </a:xfrm>
+          <a:prstGeom prst="rect">
+            <a:avLst/>
+          </a:prstGeom>
+        </p:spPr>
+        <p:txBody>
+          <a:bodyPr vert="horz" lIns="91440" tIns="45720" rIns="91440" bIns="45720" rtlCol="0" anchor="t">
+            <a:normAutofit/>
+          </a:bodyPr>
+          <a:lstStyle>
+            <a:lvl1pPr marL="0" indent="0" algn="l" defTabSz="457200" rtl="0" eaLnBrk="1" latinLnBrk="0" hangingPunct="1">
+              <a:spcBef>
+                <a:spcPts val="1000"/>
+              </a:spcBef>
+              <a:spcAft>
+                <a:spcPts val="0"/>
+              </a:spcAft>
+              <a:buClr>
+                <a:schemeClr val="accent1"/>
+              </a:buClr>
+              <a:buSzPct val="80000"/>
+              <a:buFont typeface="Wingdings 3" charset="2"/>
+              <a:buNone/>
+              <a:defRPr sz="2000" b="0" i="0" kern="1200" cap="all">
+                <a:solidFill>
+                  <a:schemeClr val="accent1"/>
+                </a:solidFill>
+                <a:latin typeface="+mj-lt"/>
+                <a:ea typeface="+mj-ea"/>
+                <a:cs typeface="+mj-cs"/>
+              </a:defRPr>
+            </a:lvl1pPr>
+            <a:lvl2pPr marL="457200" indent="0" algn="ctr" defTabSz="457200" rtl="0" eaLnBrk="1" latinLnBrk="0" hangingPunct="1">
+              <a:spcBef>
+                <a:spcPts val="1000"/>
+              </a:spcBef>
+              <a:spcAft>
+                <a:spcPts val="0"/>
+              </a:spcAft>
+              <a:buClr>
+                <a:schemeClr val="accent1"/>
+              </a:buClr>
+              <a:buSzPct val="80000"/>
+              <a:buFont typeface="Wingdings 3" charset="2"/>
+              <a:buNone/>
+              <a:defRPr sz="1800" b="0" i="0" kern="1200">
+                <a:solidFill>
+                  <a:schemeClr val="tx1">
+                    <a:tint val="75000"/>
+                  </a:schemeClr>
+                </a:solidFill>
+                <a:latin typeface="+mj-lt"/>
+                <a:ea typeface="+mj-ea"/>
+                <a:cs typeface="+mj-cs"/>
+              </a:defRPr>
+            </a:lvl2pPr>
+            <a:lvl3pPr marL="914400" indent="0" algn="ctr" defTabSz="457200" rtl="0" eaLnBrk="1" latinLnBrk="0" hangingPunct="1">
+              <a:spcBef>
+                <a:spcPts val="1000"/>
+              </a:spcBef>
+              <a:spcAft>
+                <a:spcPts val="0"/>
+              </a:spcAft>
+              <a:buClr>
+                <a:schemeClr val="accent1"/>
+              </a:buClr>
+              <a:buSzPct val="80000"/>
+              <a:buFont typeface="Wingdings 3" charset="2"/>
+              <a:buNone/>
+              <a:defRPr sz="1600" b="0" i="0" kern="1200">
+                <a:solidFill>
+                  <a:schemeClr val="tx1">
+                    <a:tint val="75000"/>
+                  </a:schemeClr>
+                </a:solidFill>
+                <a:latin typeface="+mj-lt"/>
+                <a:ea typeface="+mj-ea"/>
+                <a:cs typeface="+mj-cs"/>
+              </a:defRPr>
+            </a:lvl3pPr>
+            <a:lvl4pPr marL="1371600" indent="0" algn="ctr" defTabSz="457200" rtl="0" eaLnBrk="1" latinLnBrk="0" hangingPunct="1">
+              <a:spcBef>
+                <a:spcPts val="1000"/>
+              </a:spcBef>
+              <a:spcAft>
+                <a:spcPts val="0"/>
+              </a:spcAft>
+              <a:buClr>
+                <a:schemeClr val="accent1"/>
+              </a:buClr>
+              <a:buSzPct val="80000"/>
+              <a:buFont typeface="Wingdings 3" charset="2"/>
+              <a:buNone/>
+              <a:defRPr sz="1400" b="0" i="0" kern="1200">
+                <a:solidFill>
+                  <a:schemeClr val="tx1">
+                    <a:tint val="75000"/>
+                  </a:schemeClr>
+                </a:solidFill>
+                <a:latin typeface="+mj-lt"/>
+                <a:ea typeface="+mj-ea"/>
+                <a:cs typeface="+mj-cs"/>
+              </a:defRPr>
+            </a:lvl4pPr>
+            <a:lvl5pPr marL="1828800" indent="0" algn="ctr" defTabSz="457200" rtl="0" eaLnBrk="1" latinLnBrk="0" hangingPunct="1">
+              <a:spcBef>
+                <a:spcPts val="1000"/>
+              </a:spcBef>
+              <a:spcAft>
+                <a:spcPts val="0"/>
+              </a:spcAft>
+              <a:buClr>
+                <a:schemeClr val="accent1"/>
+              </a:buClr>
+              <a:buSzPct val="80000"/>
+              <a:buFont typeface="Wingdings 3" charset="2"/>
+              <a:buNone/>
+              <a:defRPr sz="1400" b="0" i="0" kern="1200">
+                <a:solidFill>
+                  <a:schemeClr val="tx1">
+                    <a:tint val="75000"/>
+                  </a:schemeClr>
+                </a:solidFill>
+                <a:latin typeface="+mj-lt"/>
+                <a:ea typeface="+mj-ea"/>
+                <a:cs typeface="+mj-cs"/>
+              </a:defRPr>
+            </a:lvl5pPr>
+            <a:lvl6pPr marL="2286000" indent="0" algn="ctr" defTabSz="457200" rtl="0" eaLnBrk="1" latinLnBrk="0" hangingPunct="1">
+              <a:spcBef>
+                <a:spcPts val="1000"/>
+              </a:spcBef>
+              <a:spcAft>
+                <a:spcPts val="0"/>
+              </a:spcAft>
+              <a:buClr>
+                <a:schemeClr val="accent1"/>
+              </a:buClr>
+              <a:buSzPct val="80000"/>
+              <a:buFont typeface="Wingdings 3" charset="2"/>
+              <a:buNone/>
+              <a:defRPr sz="1400" b="0" i="0" kern="1200">
+                <a:solidFill>
+                  <a:schemeClr val="tx1">
+                    <a:tint val="75000"/>
+                  </a:schemeClr>
+                </a:solidFill>
+                <a:latin typeface="+mj-lt"/>
+                <a:ea typeface="+mj-ea"/>
+                <a:cs typeface="+mj-cs"/>
+              </a:defRPr>
+            </a:lvl6pPr>
+            <a:lvl7pPr marL="2743200" indent="0" algn="ctr" defTabSz="457200" rtl="0" eaLnBrk="1" latinLnBrk="0" hangingPunct="1">
+              <a:spcBef>
+                <a:spcPts val="1000"/>
+              </a:spcBef>
+              <a:spcAft>
+                <a:spcPts val="0"/>
+              </a:spcAft>
+              <a:buClr>
+                <a:schemeClr val="accent1"/>
+              </a:buClr>
+              <a:buSzPct val="80000"/>
+              <a:buFont typeface="Wingdings 3" charset="2"/>
+              <a:buNone/>
+              <a:defRPr sz="1400" b="0" i="0" kern="1200">
+                <a:solidFill>
+                  <a:schemeClr val="tx1">
+                    <a:tint val="75000"/>
+                  </a:schemeClr>
+                </a:solidFill>
+                <a:latin typeface="+mj-lt"/>
+                <a:ea typeface="+mj-ea"/>
+                <a:cs typeface="+mj-cs"/>
+              </a:defRPr>
+            </a:lvl7pPr>
+            <a:lvl8pPr marL="3200400" indent="0" algn="ctr" defTabSz="457200" rtl="0" eaLnBrk="1" latinLnBrk="0" hangingPunct="1">
+              <a:spcBef>
+                <a:spcPts val="1000"/>
+              </a:spcBef>
+              <a:spcAft>
+                <a:spcPts val="0"/>
+              </a:spcAft>
+              <a:buClr>
+                <a:schemeClr val="accent1"/>
+              </a:buClr>
+              <a:buSzPct val="80000"/>
+              <a:buFont typeface="Wingdings 3" charset="2"/>
+              <a:buNone/>
+              <a:defRPr sz="1400" b="0" i="0" kern="1200">
+                <a:solidFill>
+                  <a:schemeClr val="tx1">
+                    <a:tint val="75000"/>
+                  </a:schemeClr>
+                </a:solidFill>
+                <a:latin typeface="+mj-lt"/>
+                <a:ea typeface="+mj-ea"/>
+                <a:cs typeface="+mj-cs"/>
+              </a:defRPr>
+            </a:lvl8pPr>
+            <a:lvl9pPr marL="3657600" indent="0" algn="ctr" defTabSz="457200" rtl="0" eaLnBrk="1" latinLnBrk="0" hangingPunct="1">
+              <a:spcBef>
+                <a:spcPts val="1000"/>
+              </a:spcBef>
+              <a:spcAft>
+                <a:spcPts val="0"/>
+              </a:spcAft>
+              <a:buClr>
+                <a:schemeClr val="accent1"/>
+              </a:buClr>
+              <a:buSzPct val="80000"/>
+              <a:buFont typeface="Wingdings 3" charset="2"/>
+              <a:buNone/>
+              <a:defRPr sz="1400" b="0" i="0" kern="1200">
+                <a:solidFill>
+                  <a:schemeClr val="tx1">
+                    <a:tint val="75000"/>
+                  </a:schemeClr>
+                </a:solidFill>
+                <a:latin typeface="+mj-lt"/>
+                <a:ea typeface="+mj-ea"/>
+                <a:cs typeface="+mj-cs"/>
+              </a:defRPr>
+            </a:lvl9pPr>
+          </a:lstStyle>
+          <a:p>
+            <a:r>
+              <a:rPr lang="en-US" altLang="zh-CN" sz="3600" b="1" cap="none" dirty="0"/>
+              <a:t>2.4 “clsx”</a:t>
+            </a:r>
+            <a:r>
+              <a:rPr lang="zh-CN" altLang="en-US" sz="3600" b="1" cap="none" dirty="0"/>
+              <a:t> </a:t>
+            </a:r>
+            <a:r>
+              <a:rPr lang="en-US" altLang="zh-CN" sz="3600" b="1" cap="none" dirty="0"/>
+              <a:t>library 2.5 Others</a:t>
+            </a:r>
+            <a:endParaRPr lang="en-US" sz="3600" b="1" cap="none" dirty="0"/>
+          </a:p>
+        </p:txBody>
+      </p:sp>
+      <p:pic>
+        <p:nvPicPr>
+          <p:cNvPr id="14" name="Picture 13">
+            <a:extLst>
+              <a:ext uri="{FF2B5EF4-FFF2-40B4-BE49-F238E27FC236}">
+                <a16:creationId xmlns:a16="http://schemas.microsoft.com/office/drawing/2014/main" id="{39F4D782-CED4-BE94-48A9-8251E1B1439A}"/>
+              </a:ext>
+            </a:extLst>
+          </p:cNvPr>
+          <p:cNvPicPr>
+            <a:picLocks noChangeAspect="1"/>
+          </p:cNvPicPr>
+          <p:nvPr/>
+        </p:nvPicPr>
+        <p:blipFill>
+          <a:blip r:embed="rId6"/>
+          <a:stretch>
+            <a:fillRect/>
+          </a:stretch>
+        </p:blipFill>
+        <p:spPr>
+          <a:xfrm>
+            <a:off x="1585495" y="1851820"/>
+            <a:ext cx="9090839" cy="4682544"/>
+          </a:xfrm>
+          <a:prstGeom prst="roundRect">
+            <a:avLst>
+              <a:gd name="adj" fmla="val 16667"/>
+            </a:avLst>
+          </a:prstGeom>
+          <a:ln>
+            <a:noFill/>
+          </a:ln>
+          <a:effectLst>
+            <a:outerShdw blurRad="152400" dist="12000" dir="900000" sy="98000" kx="110000" ky="200000" algn="tl" rotWithShape="0">
+              <a:srgbClr val="000000">
+                <a:alpha val="30000"/>
+              </a:srgbClr>
+            </a:outerShdw>
+          </a:effectLst>
+          <a:scene3d>
+            <a:camera prst="perspectiveRelaxed">
+              <a:rot lat="19800000" lon="1200000" rev="20820000"/>
+            </a:camera>
+            <a:lightRig rig="threePt" dir="t"/>
+          </a:scene3d>
+          <a:sp3d contourW="6350" prstMaterial="matte">
+            <a:bevelT w="101600" h="101600"/>
+            <a:contourClr>
+              <a:srgbClr val="969696"/>
+            </a:contourClr>
+          </a:sp3d>
+        </p:spPr>
+      </p:pic>
+      <p:pic>
+        <p:nvPicPr>
+          <p:cNvPr id="11" name="Picture 10">
+            <a:extLst>
+              <a:ext uri="{FF2B5EF4-FFF2-40B4-BE49-F238E27FC236}">
+                <a16:creationId xmlns:a16="http://schemas.microsoft.com/office/drawing/2014/main" id="{F52666FD-A2EE-9D7E-5D14-ECFA46F3E1F6}"/>
+              </a:ext>
+            </a:extLst>
+          </p:cNvPr>
+          <p:cNvPicPr>
+            <a:picLocks noChangeAspect="1"/>
+          </p:cNvPicPr>
+          <p:nvPr/>
+        </p:nvPicPr>
+        <p:blipFill>
+          <a:blip r:embed="rId7"/>
+          <a:stretch>
+            <a:fillRect/>
+          </a:stretch>
+        </p:blipFill>
+        <p:spPr>
+          <a:xfrm>
+            <a:off x="870721" y="3707543"/>
+            <a:ext cx="3248478" cy="2534004"/>
+          </a:xfrm>
+          <a:prstGeom prst="rect">
+            <a:avLst/>
+          </a:prstGeom>
+          <a:solidFill>
+            <a:srgbClr val="FFFFFF">
+              <a:shade val="85000"/>
+            </a:srgbClr>
+          </a:solidFill>
+          <a:ln w="190500" cap="sq">
+            <a:solidFill>
+              <a:srgbClr val="FFFFFF"/>
+            </a:solidFill>
+            <a:miter lim="800000"/>
+          </a:ln>
+          <a:effectLst>
+            <a:outerShdw blurRad="65000" dist="50800" dir="12900000" kx="195000" ky="145000" algn="tl" rotWithShape="0">
+              <a:srgbClr val="000000">
+                <a:alpha val="30000"/>
+              </a:srgbClr>
+            </a:outerShdw>
+          </a:effectLst>
+          <a:scene3d>
+            <a:camera prst="orthographicFront">
+              <a:rot lat="0" lon="0" rev="360000"/>
+            </a:camera>
+            <a:lightRig rig="twoPt" dir="t">
+              <a:rot lat="0" lon="0" rev="7200000"/>
+            </a:lightRig>
+          </a:scene3d>
+          <a:sp3d contourW="12700">
+            <a:bevelT w="25400" h="19050"/>
+            <a:contourClr>
+              <a:srgbClr val="969696"/>
+            </a:contourClr>
+          </a:sp3d>
+        </p:spPr>
+      </p:pic>
+    </p:spTree>
+    <p:extLst>
+      <p:ext uri="{BB962C8B-B14F-4D97-AF65-F5344CB8AC3E}">
+        <p14:creationId xmlns:p14="http://schemas.microsoft.com/office/powerpoint/2010/main" val="2127612908"/>
+      </p:ext>
+    </p:extLst>
+  </p:cSld>
+  <p:clrMapOvr>
+    <a:masterClrMapping/>
+  </p:clrMapOvr>
+</p:sld>
+</file>
+
+<file path=ppt/slides/slide8.xml><?xml version="1.0" encoding="utf-8"?>
 <p:sld xmlns:a="http://schemas.openxmlformats.org/drawingml/2006/main" xmlns:r="http://schemas.openxmlformats.org/officeDocument/2006/relationships" xmlns:p="http://schemas.openxmlformats.org/presentationml/2006/main">
   <p:cSld>
     <p:spTree>
@@ -17649,7 +20845,7 @@
 </p:sld>
 </file>
 
-<file path=ppt/slides/slide6.xml><?xml version="1.0" encoding="utf-8"?>
+<file path=ppt/slides/slide9.xml><?xml version="1.0" encoding="utf-8"?>
 <p:sld xmlns:a="http://schemas.openxmlformats.org/drawingml/2006/main" xmlns:r="http://schemas.openxmlformats.org/officeDocument/2006/relationships" xmlns:p="http://schemas.openxmlformats.org/presentationml/2006/main">
   <p:cSld>
     <p:spTree>

--- a/learn_nextjs/2_App_Router/App_Router.pptx
+++ b/learn_nextjs/2_App_Router/App_Router.pptx
@@ -5,10 +5,10 @@
     <p:sldMasterId id="2147483648" r:id="rId4"/>
   </p:sldMasterIdLst>
   <p:notesMasterIdLst>
-    <p:notesMasterId r:id="rId18"/>
+    <p:notesMasterId r:id="rId20"/>
   </p:notesMasterIdLst>
   <p:handoutMasterIdLst>
-    <p:handoutMasterId r:id="rId19"/>
+    <p:handoutMasterId r:id="rId21"/>
   </p:handoutMasterIdLst>
   <p:sldIdLst>
     <p:sldId id="256" r:id="rId5"/>
@@ -21,9 +21,11 @@
     <p:sldId id="283" r:id="rId12"/>
     <p:sldId id="284" r:id="rId13"/>
     <p:sldId id="285" r:id="rId14"/>
-    <p:sldId id="276" r:id="rId15"/>
-    <p:sldId id="270" r:id="rId16"/>
-    <p:sldId id="278" r:id="rId17"/>
+    <p:sldId id="286" r:id="rId15"/>
+    <p:sldId id="287" r:id="rId16"/>
+    <p:sldId id="276" r:id="rId17"/>
+    <p:sldId id="270" r:id="rId18"/>
+    <p:sldId id="278" r:id="rId19"/>
   </p:sldIdLst>
   <p:sldSz cx="12192000" cy="6858000"/>
   <p:notesSz cx="6858000" cy="9144000"/>
@@ -145,6 +147,12 @@
             <p14:sldId id="283"/>
             <p14:sldId id="284"/>
             <p14:sldId id="285"/>
+          </p14:sldIdLst>
+        </p14:section>
+        <p14:section name="ch04" id="{DA200A39-2EB3-4544-863B-25110295633C}">
+          <p14:sldIdLst>
+            <p14:sldId id="286"/>
+            <p14:sldId id="287"/>
           </p14:sldIdLst>
         </p14:section>
         <p14:section name="covers" id="{E5823A51-8D0B-45F5-A8F0-5C43B5C81155}">
@@ -9353,6 +9361,236 @@
         <p:cNvPr id="1" name="">
           <a:extLst>
             <a:ext uri="{FF2B5EF4-FFF2-40B4-BE49-F238E27FC236}">
+              <a16:creationId xmlns:a16="http://schemas.microsoft.com/office/drawing/2014/main" id="{E5A6DBF1-5110-F0EB-0F9D-210E2AAAD02C}"/>
+            </a:ext>
+          </a:extLst>
+        </p:cNvPr>
+        <p:cNvGrpSpPr/>
+        <p:nvPr/>
+      </p:nvGrpSpPr>
+      <p:grpSpPr>
+        <a:xfrm>
+          <a:off x="0" y="0"/>
+          <a:ext cx="0" cy="0"/>
+          <a:chOff x="0" y="0"/>
+          <a:chExt cx="0" cy="0"/>
+        </a:xfrm>
+      </p:grpSpPr>
+      <p:sp>
+        <p:nvSpPr>
+          <p:cNvPr id="2" name="Slide Image Placeholder 1">
+            <a:extLst>
+              <a:ext uri="{FF2B5EF4-FFF2-40B4-BE49-F238E27FC236}">
+                <a16:creationId xmlns:a16="http://schemas.microsoft.com/office/drawing/2014/main" id="{89F47C3C-5CFC-0880-7D78-F8C22BB48094}"/>
+              </a:ext>
+            </a:extLst>
+          </p:cNvPr>
+          <p:cNvSpPr>
+            <a:spLocks noGrp="1" noRot="1" noChangeAspect="1"/>
+          </p:cNvSpPr>
+          <p:nvPr>
+            <p:ph type="sldImg"/>
+          </p:nvPr>
+        </p:nvSpPr>
+        <p:spPr/>
+        <p:txBody>
+          <a:bodyPr/>
+          <a:lstStyle/>
+          <a:p>
+            <a:endParaRPr lang="en-US"/>
+          </a:p>
+        </p:txBody>
+      </p:sp>
+      <p:sp>
+        <p:nvSpPr>
+          <p:cNvPr id="3" name="Notes Placeholder 2">
+            <a:extLst>
+              <a:ext uri="{FF2B5EF4-FFF2-40B4-BE49-F238E27FC236}">
+                <a16:creationId xmlns:a16="http://schemas.microsoft.com/office/drawing/2014/main" id="{33EBDDDD-C635-FF1D-1D25-526B3D9EE119}"/>
+              </a:ext>
+            </a:extLst>
+          </p:cNvPr>
+          <p:cNvSpPr>
+            <a:spLocks noGrp="1"/>
+          </p:cNvSpPr>
+          <p:nvPr>
+            <p:ph type="body" idx="1"/>
+          </p:nvPr>
+        </p:nvSpPr>
+        <p:spPr/>
+        <p:txBody>
+          <a:bodyPr/>
+          <a:lstStyle/>
+          <a:p>
+            <a:endParaRPr lang="en-US" dirty="0"/>
+          </a:p>
+        </p:txBody>
+      </p:sp>
+      <p:sp>
+        <p:nvSpPr>
+          <p:cNvPr id="4" name="Slide Number Placeholder 3">
+            <a:extLst>
+              <a:ext uri="{FF2B5EF4-FFF2-40B4-BE49-F238E27FC236}">
+                <a16:creationId xmlns:a16="http://schemas.microsoft.com/office/drawing/2014/main" id="{2E9F539B-0BAA-2C03-1C24-46DCC02A4595}"/>
+              </a:ext>
+            </a:extLst>
+          </p:cNvPr>
+          <p:cNvSpPr>
+            <a:spLocks noGrp="1"/>
+          </p:cNvSpPr>
+          <p:nvPr>
+            <p:ph type="sldNum" sz="quarter" idx="5"/>
+          </p:nvPr>
+        </p:nvSpPr>
+        <p:spPr/>
+        <p:txBody>
+          <a:bodyPr/>
+          <a:lstStyle/>
+          <a:p>
+            <a:fld id="{EE000EEB-8338-48D7-8EE8-EE0082EF7602}" type="slidenum">
+              <a:rPr lang="en-US" smtClean="0"/>
+              <a:t>11</a:t>
+            </a:fld>
+            <a:endParaRPr lang="en-US" dirty="0"/>
+          </a:p>
+        </p:txBody>
+      </p:sp>
+    </p:spTree>
+    <p:extLst>
+      <p:ext uri="{BB962C8B-B14F-4D97-AF65-F5344CB8AC3E}">
+        <p14:creationId xmlns:p14="http://schemas.microsoft.com/office/powerpoint/2010/main" val="1957792089"/>
+      </p:ext>
+    </p:extLst>
+  </p:cSld>
+  <p:clrMapOvr>
+    <a:masterClrMapping/>
+  </p:clrMapOvr>
+</p:notes>
+</file>
+
+<file path=ppt/notesSlides/notesSlide12.xml><?xml version="1.0" encoding="utf-8"?>
+<p:notes xmlns:a="http://schemas.openxmlformats.org/drawingml/2006/main" xmlns:r="http://schemas.openxmlformats.org/officeDocument/2006/relationships" xmlns:p="http://schemas.openxmlformats.org/presentationml/2006/main">
+  <p:cSld>
+    <p:spTree>
+      <p:nvGrpSpPr>
+        <p:cNvPr id="1" name="">
+          <a:extLst>
+            <a:ext uri="{FF2B5EF4-FFF2-40B4-BE49-F238E27FC236}">
+              <a16:creationId xmlns:a16="http://schemas.microsoft.com/office/drawing/2014/main" id="{0E139B7C-16FD-4238-95AA-78ED20F87D61}"/>
+            </a:ext>
+          </a:extLst>
+        </p:cNvPr>
+        <p:cNvGrpSpPr/>
+        <p:nvPr/>
+      </p:nvGrpSpPr>
+      <p:grpSpPr>
+        <a:xfrm>
+          <a:off x="0" y="0"/>
+          <a:ext cx="0" cy="0"/>
+          <a:chOff x="0" y="0"/>
+          <a:chExt cx="0" cy="0"/>
+        </a:xfrm>
+      </p:grpSpPr>
+      <p:sp>
+        <p:nvSpPr>
+          <p:cNvPr id="2" name="Slide Image Placeholder 1">
+            <a:extLst>
+              <a:ext uri="{FF2B5EF4-FFF2-40B4-BE49-F238E27FC236}">
+                <a16:creationId xmlns:a16="http://schemas.microsoft.com/office/drawing/2014/main" id="{4C706064-BE4E-9382-071B-6B673AE97713}"/>
+              </a:ext>
+            </a:extLst>
+          </p:cNvPr>
+          <p:cNvSpPr>
+            <a:spLocks noGrp="1" noRot="1" noChangeAspect="1"/>
+          </p:cNvSpPr>
+          <p:nvPr>
+            <p:ph type="sldImg"/>
+          </p:nvPr>
+        </p:nvSpPr>
+        <p:spPr/>
+        <p:txBody>
+          <a:bodyPr/>
+          <a:lstStyle/>
+          <a:p>
+            <a:endParaRPr lang="en-US"/>
+          </a:p>
+        </p:txBody>
+      </p:sp>
+      <p:sp>
+        <p:nvSpPr>
+          <p:cNvPr id="3" name="Notes Placeholder 2">
+            <a:extLst>
+              <a:ext uri="{FF2B5EF4-FFF2-40B4-BE49-F238E27FC236}">
+                <a16:creationId xmlns:a16="http://schemas.microsoft.com/office/drawing/2014/main" id="{DE0DD57D-532E-C53A-AE10-10C8CE27EC73}"/>
+              </a:ext>
+            </a:extLst>
+          </p:cNvPr>
+          <p:cNvSpPr>
+            <a:spLocks noGrp="1"/>
+          </p:cNvSpPr>
+          <p:nvPr>
+            <p:ph type="body" idx="1"/>
+          </p:nvPr>
+        </p:nvSpPr>
+        <p:spPr/>
+        <p:txBody>
+          <a:bodyPr/>
+          <a:lstStyle/>
+          <a:p>
+            <a:endParaRPr lang="en-US" dirty="0"/>
+          </a:p>
+        </p:txBody>
+      </p:sp>
+      <p:sp>
+        <p:nvSpPr>
+          <p:cNvPr id="4" name="Slide Number Placeholder 3">
+            <a:extLst>
+              <a:ext uri="{FF2B5EF4-FFF2-40B4-BE49-F238E27FC236}">
+                <a16:creationId xmlns:a16="http://schemas.microsoft.com/office/drawing/2014/main" id="{F434D50B-EDB1-5D0F-C3D3-4699A93BA90A}"/>
+              </a:ext>
+            </a:extLst>
+          </p:cNvPr>
+          <p:cNvSpPr>
+            <a:spLocks noGrp="1"/>
+          </p:cNvSpPr>
+          <p:nvPr>
+            <p:ph type="sldNum" sz="quarter" idx="5"/>
+          </p:nvPr>
+        </p:nvSpPr>
+        <p:spPr/>
+        <p:txBody>
+          <a:bodyPr/>
+          <a:lstStyle/>
+          <a:p>
+            <a:fld id="{EE000EEB-8338-48D7-8EE8-EE0082EF7602}" type="slidenum">
+              <a:rPr lang="en-US" smtClean="0"/>
+              <a:t>12</a:t>
+            </a:fld>
+            <a:endParaRPr lang="en-US" dirty="0"/>
+          </a:p>
+        </p:txBody>
+      </p:sp>
+    </p:spTree>
+    <p:extLst>
+      <p:ext uri="{BB962C8B-B14F-4D97-AF65-F5344CB8AC3E}">
+        <p14:creationId xmlns:p14="http://schemas.microsoft.com/office/powerpoint/2010/main" val="3170802394"/>
+      </p:ext>
+    </p:extLst>
+  </p:cSld>
+  <p:clrMapOvr>
+    <a:masterClrMapping/>
+  </p:clrMapOvr>
+</p:notes>
+</file>
+
+<file path=ppt/notesSlides/notesSlide13.xml><?xml version="1.0" encoding="utf-8"?>
+<p:notes xmlns:a="http://schemas.openxmlformats.org/drawingml/2006/main" xmlns:r="http://schemas.openxmlformats.org/officeDocument/2006/relationships" xmlns:p="http://schemas.openxmlformats.org/presentationml/2006/main">
+  <p:cSld>
+    <p:spTree>
+      <p:nvGrpSpPr>
+        <p:cNvPr id="1" name="">
+          <a:extLst>
+            <a:ext uri="{FF2B5EF4-FFF2-40B4-BE49-F238E27FC236}">
               <a16:creationId xmlns:a16="http://schemas.microsoft.com/office/drawing/2014/main" id="{4EAC7126-4785-6F23-806A-94F4FA0E0FC3}"/>
             </a:ext>
           </a:extLst>
@@ -9441,7 +9679,7 @@
           <a:p>
             <a:fld id="{EE000EEB-8338-48D7-8EE8-EE0082EF7602}" type="slidenum">
               <a:rPr lang="en-US" smtClean="0"/>
-              <a:t>11</a:t>
+              <a:t>13</a:t>
             </a:fld>
             <a:endParaRPr lang="en-US" dirty="0"/>
           </a:p>
@@ -9460,7 +9698,7 @@
 </p:notes>
 </file>
 
-<file path=ppt/notesSlides/notesSlide12.xml><?xml version="1.0" encoding="utf-8"?>
+<file path=ppt/notesSlides/notesSlide14.xml><?xml version="1.0" encoding="utf-8"?>
 <p:notes xmlns:a="http://schemas.openxmlformats.org/drawingml/2006/main" xmlns:r="http://schemas.openxmlformats.org/officeDocument/2006/relationships" xmlns:p="http://schemas.openxmlformats.org/presentationml/2006/main">
   <p:cSld>
     <p:spTree>
@@ -9556,7 +9794,7 @@
           <a:p>
             <a:fld id="{EE000EEB-8338-48D7-8EE8-EE0082EF7602}" type="slidenum">
               <a:rPr lang="en-US" smtClean="0"/>
-              <a:t>12</a:t>
+              <a:t>14</a:t>
             </a:fld>
             <a:endParaRPr lang="en-US" dirty="0"/>
           </a:p>
@@ -9575,7 +9813,7 @@
 </p:notes>
 </file>
 
-<file path=ppt/notesSlides/notesSlide13.xml><?xml version="1.0" encoding="utf-8"?>
+<file path=ppt/notesSlides/notesSlide15.xml><?xml version="1.0" encoding="utf-8"?>
 <p:notes xmlns:a="http://schemas.openxmlformats.org/drawingml/2006/main" xmlns:r="http://schemas.openxmlformats.org/officeDocument/2006/relationships" xmlns:p="http://schemas.openxmlformats.org/presentationml/2006/main">
   <p:cSld>
     <p:spTree>
@@ -9671,7 +9909,7 @@
           <a:p>
             <a:fld id="{EE000EEB-8338-48D7-8EE8-EE0082EF7602}" type="slidenum">
               <a:rPr lang="en-US" smtClean="0"/>
-              <a:t>13</a:t>
+              <a:t>15</a:t>
             </a:fld>
             <a:endParaRPr lang="en-US" dirty="0"/>
           </a:p>
@@ -17876,6 +18114,1602 @@
         <p:cNvPr id="1" name="">
           <a:extLst>
             <a:ext uri="{FF2B5EF4-FFF2-40B4-BE49-F238E27FC236}">
+              <a16:creationId xmlns:a16="http://schemas.microsoft.com/office/drawing/2014/main" id="{A3D9B44A-D612-91F2-AF55-D3CB44B5FC28}"/>
+            </a:ext>
+          </a:extLst>
+        </p:cNvPr>
+        <p:cNvGrpSpPr/>
+        <p:nvPr/>
+      </p:nvGrpSpPr>
+      <p:grpSpPr>
+        <a:xfrm>
+          <a:off x="0" y="0"/>
+          <a:ext cx="0" cy="0"/>
+          <a:chOff x="0" y="0"/>
+          <a:chExt cx="0" cy="0"/>
+        </a:xfrm>
+      </p:grpSpPr>
+      <p:pic>
+        <p:nvPicPr>
+          <p:cNvPr id="5" name="Picture 4" descr="chain links">
+            <a:extLst>
+              <a:ext uri="{FF2B5EF4-FFF2-40B4-BE49-F238E27FC236}">
+                <a16:creationId xmlns:a16="http://schemas.microsoft.com/office/drawing/2014/main" id="{DB405EBA-B5D6-465D-D30A-BDB3F4EC267A}"/>
+              </a:ext>
+            </a:extLst>
+          </p:cNvPr>
+          <p:cNvPicPr>
+            <a:picLocks noChangeAspect="1"/>
+          </p:cNvPicPr>
+          <p:nvPr/>
+        </p:nvPicPr>
+        <p:blipFill rotWithShape="1">
+          <a:blip r:embed="rId3">
+            <a:duotone>
+              <a:prstClr val="black"/>
+              <a:schemeClr val="accent5">
+                <a:tint val="45000"/>
+                <a:satMod val="400000"/>
+              </a:schemeClr>
+            </a:duotone>
+            <a:alphaModFix amt="25000"/>
+          </a:blip>
+          <a:srcRect t="23391" r="9091"/>
+          <a:stretch/>
+        </p:blipFill>
+        <p:spPr>
+          <a:xfrm>
+            <a:off x="0" y="10"/>
+            <a:ext cx="12191980" cy="6857990"/>
+          </a:xfrm>
+          <a:prstGeom prst="rect">
+            <a:avLst/>
+          </a:prstGeom>
+        </p:spPr>
+      </p:pic>
+      <p:sp>
+        <p:nvSpPr>
+          <p:cNvPr id="7" name="Subtitle 2">
+            <a:extLst>
+              <a:ext uri="{FF2B5EF4-FFF2-40B4-BE49-F238E27FC236}">
+                <a16:creationId xmlns:a16="http://schemas.microsoft.com/office/drawing/2014/main" id="{0D9E6601-40E9-2E73-1FE4-62E49FC3CE57}"/>
+              </a:ext>
+            </a:extLst>
+          </p:cNvPr>
+          <p:cNvSpPr txBox="1">
+            <a:spLocks/>
+          </p:cNvSpPr>
+          <p:nvPr/>
+        </p:nvSpPr>
+        <p:spPr>
+          <a:xfrm>
+            <a:off x="8483689" y="2419"/>
+            <a:ext cx="2102069" cy="1447801"/>
+          </a:xfrm>
+          <a:prstGeom prst="rect">
+            <a:avLst/>
+          </a:prstGeom>
+        </p:spPr>
+        <p:txBody>
+          <a:bodyPr vert="horz" lIns="91440" tIns="45720" rIns="91440" bIns="45720" rtlCol="0" anchor="ctr">
+            <a:normAutofit fontScale="92500" lnSpcReduction="20000"/>
+          </a:bodyPr>
+          <a:lstStyle>
+            <a:lvl1pPr marL="0" indent="0" algn="l" defTabSz="457200" rtl="0" eaLnBrk="1" latinLnBrk="0" hangingPunct="1">
+              <a:spcBef>
+                <a:spcPts val="1000"/>
+              </a:spcBef>
+              <a:spcAft>
+                <a:spcPts val="0"/>
+              </a:spcAft>
+              <a:buClr>
+                <a:schemeClr val="accent1"/>
+              </a:buClr>
+              <a:buSzPct val="80000"/>
+              <a:buFont typeface="Wingdings 3" charset="2"/>
+              <a:buNone/>
+              <a:defRPr sz="2000" b="0" i="0" kern="1200" cap="all">
+                <a:solidFill>
+                  <a:schemeClr val="accent1"/>
+                </a:solidFill>
+                <a:latin typeface="+mj-lt"/>
+                <a:ea typeface="+mj-ea"/>
+                <a:cs typeface="+mj-cs"/>
+              </a:defRPr>
+            </a:lvl1pPr>
+            <a:lvl2pPr marL="457200" indent="0" algn="ctr" defTabSz="457200" rtl="0" eaLnBrk="1" latinLnBrk="0" hangingPunct="1">
+              <a:spcBef>
+                <a:spcPts val="1000"/>
+              </a:spcBef>
+              <a:spcAft>
+                <a:spcPts val="0"/>
+              </a:spcAft>
+              <a:buClr>
+                <a:schemeClr val="accent1"/>
+              </a:buClr>
+              <a:buSzPct val="80000"/>
+              <a:buFont typeface="Wingdings 3" charset="2"/>
+              <a:buNone/>
+              <a:defRPr sz="1800" b="0" i="0" kern="1200">
+                <a:solidFill>
+                  <a:schemeClr val="tx1">
+                    <a:tint val="75000"/>
+                  </a:schemeClr>
+                </a:solidFill>
+                <a:latin typeface="+mj-lt"/>
+                <a:ea typeface="+mj-ea"/>
+                <a:cs typeface="+mj-cs"/>
+              </a:defRPr>
+            </a:lvl2pPr>
+            <a:lvl3pPr marL="914400" indent="0" algn="ctr" defTabSz="457200" rtl="0" eaLnBrk="1" latinLnBrk="0" hangingPunct="1">
+              <a:spcBef>
+                <a:spcPts val="1000"/>
+              </a:spcBef>
+              <a:spcAft>
+                <a:spcPts val="0"/>
+              </a:spcAft>
+              <a:buClr>
+                <a:schemeClr val="accent1"/>
+              </a:buClr>
+              <a:buSzPct val="80000"/>
+              <a:buFont typeface="Wingdings 3" charset="2"/>
+              <a:buNone/>
+              <a:defRPr sz="1600" b="0" i="0" kern="1200">
+                <a:solidFill>
+                  <a:schemeClr val="tx1">
+                    <a:tint val="75000"/>
+                  </a:schemeClr>
+                </a:solidFill>
+                <a:latin typeface="+mj-lt"/>
+                <a:ea typeface="+mj-ea"/>
+                <a:cs typeface="+mj-cs"/>
+              </a:defRPr>
+            </a:lvl3pPr>
+            <a:lvl4pPr marL="1371600" indent="0" algn="ctr" defTabSz="457200" rtl="0" eaLnBrk="1" latinLnBrk="0" hangingPunct="1">
+              <a:spcBef>
+                <a:spcPts val="1000"/>
+              </a:spcBef>
+              <a:spcAft>
+                <a:spcPts val="0"/>
+              </a:spcAft>
+              <a:buClr>
+                <a:schemeClr val="accent1"/>
+              </a:buClr>
+              <a:buSzPct val="80000"/>
+              <a:buFont typeface="Wingdings 3" charset="2"/>
+              <a:buNone/>
+              <a:defRPr sz="1400" b="0" i="0" kern="1200">
+                <a:solidFill>
+                  <a:schemeClr val="tx1">
+                    <a:tint val="75000"/>
+                  </a:schemeClr>
+                </a:solidFill>
+                <a:latin typeface="+mj-lt"/>
+                <a:ea typeface="+mj-ea"/>
+                <a:cs typeface="+mj-cs"/>
+              </a:defRPr>
+            </a:lvl4pPr>
+            <a:lvl5pPr marL="1828800" indent="0" algn="ctr" defTabSz="457200" rtl="0" eaLnBrk="1" latinLnBrk="0" hangingPunct="1">
+              <a:spcBef>
+                <a:spcPts val="1000"/>
+              </a:spcBef>
+              <a:spcAft>
+                <a:spcPts val="0"/>
+              </a:spcAft>
+              <a:buClr>
+                <a:schemeClr val="accent1"/>
+              </a:buClr>
+              <a:buSzPct val="80000"/>
+              <a:buFont typeface="Wingdings 3" charset="2"/>
+              <a:buNone/>
+              <a:defRPr sz="1400" b="0" i="0" kern="1200">
+                <a:solidFill>
+                  <a:schemeClr val="tx1">
+                    <a:tint val="75000"/>
+                  </a:schemeClr>
+                </a:solidFill>
+                <a:latin typeface="+mj-lt"/>
+                <a:ea typeface="+mj-ea"/>
+                <a:cs typeface="+mj-cs"/>
+              </a:defRPr>
+            </a:lvl5pPr>
+            <a:lvl6pPr marL="2286000" indent="0" algn="ctr" defTabSz="457200" rtl="0" eaLnBrk="1" latinLnBrk="0" hangingPunct="1">
+              <a:spcBef>
+                <a:spcPts val="1000"/>
+              </a:spcBef>
+              <a:spcAft>
+                <a:spcPts val="0"/>
+              </a:spcAft>
+              <a:buClr>
+                <a:schemeClr val="accent1"/>
+              </a:buClr>
+              <a:buSzPct val="80000"/>
+              <a:buFont typeface="Wingdings 3" charset="2"/>
+              <a:buNone/>
+              <a:defRPr sz="1400" b="0" i="0" kern="1200">
+                <a:solidFill>
+                  <a:schemeClr val="tx1">
+                    <a:tint val="75000"/>
+                  </a:schemeClr>
+                </a:solidFill>
+                <a:latin typeface="+mj-lt"/>
+                <a:ea typeface="+mj-ea"/>
+                <a:cs typeface="+mj-cs"/>
+              </a:defRPr>
+            </a:lvl6pPr>
+            <a:lvl7pPr marL="2743200" indent="0" algn="ctr" defTabSz="457200" rtl="0" eaLnBrk="1" latinLnBrk="0" hangingPunct="1">
+              <a:spcBef>
+                <a:spcPts val="1000"/>
+              </a:spcBef>
+              <a:spcAft>
+                <a:spcPts val="0"/>
+              </a:spcAft>
+              <a:buClr>
+                <a:schemeClr val="accent1"/>
+              </a:buClr>
+              <a:buSzPct val="80000"/>
+              <a:buFont typeface="Wingdings 3" charset="2"/>
+              <a:buNone/>
+              <a:defRPr sz="1400" b="0" i="0" kern="1200">
+                <a:solidFill>
+                  <a:schemeClr val="tx1">
+                    <a:tint val="75000"/>
+                  </a:schemeClr>
+                </a:solidFill>
+                <a:latin typeface="+mj-lt"/>
+                <a:ea typeface="+mj-ea"/>
+                <a:cs typeface="+mj-cs"/>
+              </a:defRPr>
+            </a:lvl7pPr>
+            <a:lvl8pPr marL="3200400" indent="0" algn="ctr" defTabSz="457200" rtl="0" eaLnBrk="1" latinLnBrk="0" hangingPunct="1">
+              <a:spcBef>
+                <a:spcPts val="1000"/>
+              </a:spcBef>
+              <a:spcAft>
+                <a:spcPts val="0"/>
+              </a:spcAft>
+              <a:buClr>
+                <a:schemeClr val="accent1"/>
+              </a:buClr>
+              <a:buSzPct val="80000"/>
+              <a:buFont typeface="Wingdings 3" charset="2"/>
+              <a:buNone/>
+              <a:defRPr sz="1400" b="0" i="0" kern="1200">
+                <a:solidFill>
+                  <a:schemeClr val="tx1">
+                    <a:tint val="75000"/>
+                  </a:schemeClr>
+                </a:solidFill>
+                <a:latin typeface="+mj-lt"/>
+                <a:ea typeface="+mj-ea"/>
+                <a:cs typeface="+mj-cs"/>
+              </a:defRPr>
+            </a:lvl8pPr>
+            <a:lvl9pPr marL="3657600" indent="0" algn="ctr" defTabSz="457200" rtl="0" eaLnBrk="1" latinLnBrk="0" hangingPunct="1">
+              <a:spcBef>
+                <a:spcPts val="1000"/>
+              </a:spcBef>
+              <a:spcAft>
+                <a:spcPts val="0"/>
+              </a:spcAft>
+              <a:buClr>
+                <a:schemeClr val="accent1"/>
+              </a:buClr>
+              <a:buSzPct val="80000"/>
+              <a:buFont typeface="Wingdings 3" charset="2"/>
+              <a:buNone/>
+              <a:defRPr sz="1400" b="0" i="0" kern="1200">
+                <a:solidFill>
+                  <a:schemeClr val="tx1">
+                    <a:tint val="75000"/>
+                  </a:schemeClr>
+                </a:solidFill>
+                <a:latin typeface="+mj-lt"/>
+                <a:ea typeface="+mj-ea"/>
+                <a:cs typeface="+mj-cs"/>
+              </a:defRPr>
+            </a:lvl9pPr>
+          </a:lstStyle>
+          <a:p>
+            <a:pPr algn="ctr"/>
+            <a:r>
+              <a:rPr lang="en-US" sz="11500" b="1" dirty="0"/>
+              <a:t>10</a:t>
+            </a:r>
+          </a:p>
+        </p:txBody>
+      </p:sp>
+      <p:pic>
+        <p:nvPicPr>
+          <p:cNvPr id="4" name="Picture 3">
+            <a:extLst>
+              <a:ext uri="{FF2B5EF4-FFF2-40B4-BE49-F238E27FC236}">
+                <a16:creationId xmlns:a16="http://schemas.microsoft.com/office/drawing/2014/main" id="{FC4ED9AF-2A14-413F-9302-F65069C25934}"/>
+              </a:ext>
+            </a:extLst>
+          </p:cNvPr>
+          <p:cNvPicPr>
+            <a:picLocks noChangeAspect="1"/>
+          </p:cNvPicPr>
+          <p:nvPr/>
+        </p:nvPicPr>
+        <p:blipFill>
+          <a:blip r:embed="rId4"/>
+          <a:stretch>
+            <a:fillRect/>
+          </a:stretch>
+        </p:blipFill>
+        <p:spPr>
+          <a:xfrm>
+            <a:off x="0" y="0"/>
+            <a:ext cx="3896391" cy="2481677"/>
+          </a:xfrm>
+          <a:prstGeom prst="rect">
+            <a:avLst/>
+          </a:prstGeom>
+          <a:ln>
+            <a:noFill/>
+          </a:ln>
+          <a:effectLst>
+            <a:softEdge rad="112500"/>
+          </a:effectLst>
+        </p:spPr>
+      </p:pic>
+      <p:sp>
+        <p:nvSpPr>
+          <p:cNvPr id="2" name="Title 1">
+            <a:extLst>
+              <a:ext uri="{FF2B5EF4-FFF2-40B4-BE49-F238E27FC236}">
+                <a16:creationId xmlns:a16="http://schemas.microsoft.com/office/drawing/2014/main" id="{D2D72D5A-BA7E-B858-E1A1-29DDAD55B39D}"/>
+              </a:ext>
+            </a:extLst>
+          </p:cNvPr>
+          <p:cNvSpPr>
+            <a:spLocks noGrp="1"/>
+          </p:cNvSpPr>
+          <p:nvPr>
+            <p:ph type="ctrTitle"/>
+          </p:nvPr>
+        </p:nvSpPr>
+        <p:spPr>
+          <a:xfrm>
+            <a:off x="3477730" y="50040"/>
+            <a:ext cx="4741596" cy="946553"/>
+          </a:xfrm>
+        </p:spPr>
+        <p:txBody>
+          <a:bodyPr anchor="ctr">
+            <a:normAutofit fontScale="90000"/>
+          </a:bodyPr>
+          <a:lstStyle/>
+          <a:p>
+            <a:r>
+              <a:rPr lang="en-US" sz="6000" b="1" dirty="0"/>
+              <a:t>App Router</a:t>
+            </a:r>
+            <a:endParaRPr lang="ru-RU" sz="6000" b="1" dirty="0"/>
+          </a:p>
+        </p:txBody>
+      </p:sp>
+      <p:pic>
+        <p:nvPicPr>
+          <p:cNvPr id="6" name="Picture 5">
+            <a:extLst>
+              <a:ext uri="{FF2B5EF4-FFF2-40B4-BE49-F238E27FC236}">
+                <a16:creationId xmlns:a16="http://schemas.microsoft.com/office/drawing/2014/main" id="{B1978822-F247-F3D7-DB2A-90E9FCF202B4}"/>
+              </a:ext>
+            </a:extLst>
+          </p:cNvPr>
+          <p:cNvPicPr>
+            <a:picLocks noChangeAspect="1"/>
+          </p:cNvPicPr>
+          <p:nvPr/>
+        </p:nvPicPr>
+        <p:blipFill>
+          <a:blip r:embed="rId5"/>
+          <a:stretch>
+            <a:fillRect/>
+          </a:stretch>
+        </p:blipFill>
+        <p:spPr>
+          <a:xfrm>
+            <a:off x="10672842" y="271032"/>
+            <a:ext cx="1420028" cy="652758"/>
+          </a:xfrm>
+          <a:prstGeom prst="rect">
+            <a:avLst/>
+          </a:prstGeom>
+          <a:ln>
+            <a:noFill/>
+          </a:ln>
+          <a:effectLst>
+            <a:softEdge rad="112500"/>
+          </a:effectLst>
+        </p:spPr>
+      </p:pic>
+      <p:sp>
+        <p:nvSpPr>
+          <p:cNvPr id="9" name="Subtitle 2">
+            <a:extLst>
+              <a:ext uri="{FF2B5EF4-FFF2-40B4-BE49-F238E27FC236}">
+                <a16:creationId xmlns:a16="http://schemas.microsoft.com/office/drawing/2014/main" id="{A38BD9FC-69E1-8738-9E57-DF3C071FF351}"/>
+              </a:ext>
+            </a:extLst>
+          </p:cNvPr>
+          <p:cNvSpPr txBox="1">
+            <a:spLocks/>
+          </p:cNvSpPr>
+          <p:nvPr/>
+        </p:nvSpPr>
+        <p:spPr>
+          <a:xfrm>
+            <a:off x="3896391" y="1718833"/>
+            <a:ext cx="8196479" cy="788415"/>
+          </a:xfrm>
+          <a:prstGeom prst="rect">
+            <a:avLst/>
+          </a:prstGeom>
+        </p:spPr>
+        <p:txBody>
+          <a:bodyPr vert="horz" lIns="91440" tIns="45720" rIns="91440" bIns="45720" rtlCol="0" anchor="ctr">
+            <a:normAutofit/>
+          </a:bodyPr>
+          <a:lstStyle>
+            <a:lvl1pPr marL="0" indent="0" algn="l" defTabSz="457200" rtl="0" eaLnBrk="1" latinLnBrk="0" hangingPunct="1">
+              <a:spcBef>
+                <a:spcPts val="1000"/>
+              </a:spcBef>
+              <a:spcAft>
+                <a:spcPts val="0"/>
+              </a:spcAft>
+              <a:buClr>
+                <a:schemeClr val="accent1"/>
+              </a:buClr>
+              <a:buSzPct val="80000"/>
+              <a:buFont typeface="Wingdings 3" charset="2"/>
+              <a:buNone/>
+              <a:defRPr sz="2000" b="0" i="0" kern="1200" cap="all">
+                <a:solidFill>
+                  <a:schemeClr val="accent1"/>
+                </a:solidFill>
+                <a:latin typeface="+mj-lt"/>
+                <a:ea typeface="+mj-ea"/>
+                <a:cs typeface="+mj-cs"/>
+              </a:defRPr>
+            </a:lvl1pPr>
+            <a:lvl2pPr marL="457200" indent="0" algn="ctr" defTabSz="457200" rtl="0" eaLnBrk="1" latinLnBrk="0" hangingPunct="1">
+              <a:spcBef>
+                <a:spcPts val="1000"/>
+              </a:spcBef>
+              <a:spcAft>
+                <a:spcPts val="0"/>
+              </a:spcAft>
+              <a:buClr>
+                <a:schemeClr val="accent1"/>
+              </a:buClr>
+              <a:buSzPct val="80000"/>
+              <a:buFont typeface="Wingdings 3" charset="2"/>
+              <a:buNone/>
+              <a:defRPr sz="1800" b="0" i="0" kern="1200">
+                <a:solidFill>
+                  <a:schemeClr val="tx1">
+                    <a:tint val="75000"/>
+                  </a:schemeClr>
+                </a:solidFill>
+                <a:latin typeface="+mj-lt"/>
+                <a:ea typeface="+mj-ea"/>
+                <a:cs typeface="+mj-cs"/>
+              </a:defRPr>
+            </a:lvl2pPr>
+            <a:lvl3pPr marL="914400" indent="0" algn="ctr" defTabSz="457200" rtl="0" eaLnBrk="1" latinLnBrk="0" hangingPunct="1">
+              <a:spcBef>
+                <a:spcPts val="1000"/>
+              </a:spcBef>
+              <a:spcAft>
+                <a:spcPts val="0"/>
+              </a:spcAft>
+              <a:buClr>
+                <a:schemeClr val="accent1"/>
+              </a:buClr>
+              <a:buSzPct val="80000"/>
+              <a:buFont typeface="Wingdings 3" charset="2"/>
+              <a:buNone/>
+              <a:defRPr sz="1600" b="0" i="0" kern="1200">
+                <a:solidFill>
+                  <a:schemeClr val="tx1">
+                    <a:tint val="75000"/>
+                  </a:schemeClr>
+                </a:solidFill>
+                <a:latin typeface="+mj-lt"/>
+                <a:ea typeface="+mj-ea"/>
+                <a:cs typeface="+mj-cs"/>
+              </a:defRPr>
+            </a:lvl3pPr>
+            <a:lvl4pPr marL="1371600" indent="0" algn="ctr" defTabSz="457200" rtl="0" eaLnBrk="1" latinLnBrk="0" hangingPunct="1">
+              <a:spcBef>
+                <a:spcPts val="1000"/>
+              </a:spcBef>
+              <a:spcAft>
+                <a:spcPts val="0"/>
+              </a:spcAft>
+              <a:buClr>
+                <a:schemeClr val="accent1"/>
+              </a:buClr>
+              <a:buSzPct val="80000"/>
+              <a:buFont typeface="Wingdings 3" charset="2"/>
+              <a:buNone/>
+              <a:defRPr sz="1400" b="0" i="0" kern="1200">
+                <a:solidFill>
+                  <a:schemeClr val="tx1">
+                    <a:tint val="75000"/>
+                  </a:schemeClr>
+                </a:solidFill>
+                <a:latin typeface="+mj-lt"/>
+                <a:ea typeface="+mj-ea"/>
+                <a:cs typeface="+mj-cs"/>
+              </a:defRPr>
+            </a:lvl4pPr>
+            <a:lvl5pPr marL="1828800" indent="0" algn="ctr" defTabSz="457200" rtl="0" eaLnBrk="1" latinLnBrk="0" hangingPunct="1">
+              <a:spcBef>
+                <a:spcPts val="1000"/>
+              </a:spcBef>
+              <a:spcAft>
+                <a:spcPts val="0"/>
+              </a:spcAft>
+              <a:buClr>
+                <a:schemeClr val="accent1"/>
+              </a:buClr>
+              <a:buSzPct val="80000"/>
+              <a:buFont typeface="Wingdings 3" charset="2"/>
+              <a:buNone/>
+              <a:defRPr sz="1400" b="0" i="0" kern="1200">
+                <a:solidFill>
+                  <a:schemeClr val="tx1">
+                    <a:tint val="75000"/>
+                  </a:schemeClr>
+                </a:solidFill>
+                <a:latin typeface="+mj-lt"/>
+                <a:ea typeface="+mj-ea"/>
+                <a:cs typeface="+mj-cs"/>
+              </a:defRPr>
+            </a:lvl5pPr>
+            <a:lvl6pPr marL="2286000" indent="0" algn="ctr" defTabSz="457200" rtl="0" eaLnBrk="1" latinLnBrk="0" hangingPunct="1">
+              <a:spcBef>
+                <a:spcPts val="1000"/>
+              </a:spcBef>
+              <a:spcAft>
+                <a:spcPts val="0"/>
+              </a:spcAft>
+              <a:buClr>
+                <a:schemeClr val="accent1"/>
+              </a:buClr>
+              <a:buSzPct val="80000"/>
+              <a:buFont typeface="Wingdings 3" charset="2"/>
+              <a:buNone/>
+              <a:defRPr sz="1400" b="0" i="0" kern="1200">
+                <a:solidFill>
+                  <a:schemeClr val="tx1">
+                    <a:tint val="75000"/>
+                  </a:schemeClr>
+                </a:solidFill>
+                <a:latin typeface="+mj-lt"/>
+                <a:ea typeface="+mj-ea"/>
+                <a:cs typeface="+mj-cs"/>
+              </a:defRPr>
+            </a:lvl6pPr>
+            <a:lvl7pPr marL="2743200" indent="0" algn="ctr" defTabSz="457200" rtl="0" eaLnBrk="1" latinLnBrk="0" hangingPunct="1">
+              <a:spcBef>
+                <a:spcPts val="1000"/>
+              </a:spcBef>
+              <a:spcAft>
+                <a:spcPts val="0"/>
+              </a:spcAft>
+              <a:buClr>
+                <a:schemeClr val="accent1"/>
+              </a:buClr>
+              <a:buSzPct val="80000"/>
+              <a:buFont typeface="Wingdings 3" charset="2"/>
+              <a:buNone/>
+              <a:defRPr sz="1400" b="0" i="0" kern="1200">
+                <a:solidFill>
+                  <a:schemeClr val="tx1">
+                    <a:tint val="75000"/>
+                  </a:schemeClr>
+                </a:solidFill>
+                <a:latin typeface="+mj-lt"/>
+                <a:ea typeface="+mj-ea"/>
+                <a:cs typeface="+mj-cs"/>
+              </a:defRPr>
+            </a:lvl7pPr>
+            <a:lvl8pPr marL="3200400" indent="0" algn="ctr" defTabSz="457200" rtl="0" eaLnBrk="1" latinLnBrk="0" hangingPunct="1">
+              <a:spcBef>
+                <a:spcPts val="1000"/>
+              </a:spcBef>
+              <a:spcAft>
+                <a:spcPts val="0"/>
+              </a:spcAft>
+              <a:buClr>
+                <a:schemeClr val="accent1"/>
+              </a:buClr>
+              <a:buSzPct val="80000"/>
+              <a:buFont typeface="Wingdings 3" charset="2"/>
+              <a:buNone/>
+              <a:defRPr sz="1400" b="0" i="0" kern="1200">
+                <a:solidFill>
+                  <a:schemeClr val="tx1">
+                    <a:tint val="75000"/>
+                  </a:schemeClr>
+                </a:solidFill>
+                <a:latin typeface="+mj-lt"/>
+                <a:ea typeface="+mj-ea"/>
+                <a:cs typeface="+mj-cs"/>
+              </a:defRPr>
+            </a:lvl8pPr>
+            <a:lvl9pPr marL="3657600" indent="0" algn="ctr" defTabSz="457200" rtl="0" eaLnBrk="1" latinLnBrk="0" hangingPunct="1">
+              <a:spcBef>
+                <a:spcPts val="1000"/>
+              </a:spcBef>
+              <a:spcAft>
+                <a:spcPts val="0"/>
+              </a:spcAft>
+              <a:buClr>
+                <a:schemeClr val="accent1"/>
+              </a:buClr>
+              <a:buSzPct val="80000"/>
+              <a:buFont typeface="Wingdings 3" charset="2"/>
+              <a:buNone/>
+              <a:defRPr sz="1400" b="0" i="0" kern="1200">
+                <a:solidFill>
+                  <a:schemeClr val="tx1">
+                    <a:tint val="75000"/>
+                  </a:schemeClr>
+                </a:solidFill>
+                <a:latin typeface="+mj-lt"/>
+                <a:ea typeface="+mj-ea"/>
+                <a:cs typeface="+mj-cs"/>
+              </a:defRPr>
+            </a:lvl9pPr>
+          </a:lstStyle>
+          <a:p>
+            <a:r>
+              <a:rPr lang="en-US" altLang="zh-CN" sz="3600" b="1" cap="none" dirty="0"/>
+              <a:t>4.1 Nested routing 4.2 Create Page</a:t>
+            </a:r>
+            <a:endParaRPr lang="en-US" sz="3600" b="1" cap="none" dirty="0"/>
+          </a:p>
+        </p:txBody>
+      </p:sp>
+      <p:sp>
+        <p:nvSpPr>
+          <p:cNvPr id="3" name="Subtitle 2">
+            <a:extLst>
+              <a:ext uri="{FF2B5EF4-FFF2-40B4-BE49-F238E27FC236}">
+                <a16:creationId xmlns:a16="http://schemas.microsoft.com/office/drawing/2014/main" id="{DC9B72EA-518B-D665-C3CE-C0A6B371E87D}"/>
+              </a:ext>
+            </a:extLst>
+          </p:cNvPr>
+          <p:cNvSpPr>
+            <a:spLocks noGrp="1"/>
+          </p:cNvSpPr>
+          <p:nvPr>
+            <p:ph type="subTitle" idx="1"/>
+          </p:nvPr>
+        </p:nvSpPr>
+        <p:spPr>
+          <a:xfrm>
+            <a:off x="2685143" y="1083848"/>
+            <a:ext cx="9407727" cy="788415"/>
+          </a:xfrm>
+          <a:solidFill>
+            <a:schemeClr val="accent6">
+              <a:alpha val="50000"/>
+            </a:schemeClr>
+          </a:solidFill>
+          <a:ln>
+            <a:noFill/>
+          </a:ln>
+        </p:spPr>
+        <p:style>
+          <a:lnRef idx="0">
+            <a:scrgbClr r="0" g="0" b="0"/>
+          </a:lnRef>
+          <a:fillRef idx="0">
+            <a:scrgbClr r="0" g="0" b="0"/>
+          </a:fillRef>
+          <a:effectRef idx="0">
+            <a:scrgbClr r="0" g="0" b="0"/>
+          </a:effectRef>
+          <a:fontRef idx="minor">
+            <a:schemeClr val="lt1"/>
+          </a:fontRef>
+        </p:style>
+        <p:txBody>
+          <a:bodyPr anchor="ctr">
+            <a:normAutofit lnSpcReduction="10000"/>
+          </a:bodyPr>
+          <a:lstStyle/>
+          <a:p>
+            <a:r>
+              <a:rPr lang="en-US" altLang="zh-CN" sz="4800" b="1" dirty="0"/>
+              <a:t>4. Creating Layouts &amp; Pages</a:t>
+            </a:r>
+            <a:endParaRPr lang="en-US" sz="4800" b="1" dirty="0"/>
+          </a:p>
+        </p:txBody>
+      </p:sp>
+      <p:pic>
+        <p:nvPicPr>
+          <p:cNvPr id="10" name="Picture 9">
+            <a:extLst>
+              <a:ext uri="{FF2B5EF4-FFF2-40B4-BE49-F238E27FC236}">
+                <a16:creationId xmlns:a16="http://schemas.microsoft.com/office/drawing/2014/main" id="{C0212513-A107-6E25-1524-08799084458B}"/>
+              </a:ext>
+            </a:extLst>
+          </p:cNvPr>
+          <p:cNvPicPr>
+            <a:picLocks noChangeAspect="1"/>
+          </p:cNvPicPr>
+          <p:nvPr/>
+        </p:nvPicPr>
+        <p:blipFill>
+          <a:blip r:embed="rId6"/>
+          <a:stretch>
+            <a:fillRect/>
+          </a:stretch>
+        </p:blipFill>
+        <p:spPr>
+          <a:xfrm>
+            <a:off x="0" y="2085205"/>
+            <a:ext cx="10438544" cy="4217750"/>
+          </a:xfrm>
+          <a:prstGeom prst="roundRect">
+            <a:avLst>
+              <a:gd name="adj" fmla="val 16667"/>
+            </a:avLst>
+          </a:prstGeom>
+          <a:ln>
+            <a:noFill/>
+          </a:ln>
+          <a:effectLst>
+            <a:outerShdw blurRad="152400" dist="12000" dir="900000" sy="98000" kx="110000" ky="200000" algn="tl" rotWithShape="0">
+              <a:srgbClr val="000000">
+                <a:alpha val="30000"/>
+              </a:srgbClr>
+            </a:outerShdw>
+          </a:effectLst>
+          <a:scene3d>
+            <a:camera prst="perspectiveRelaxed">
+              <a:rot lat="19800000" lon="1200000" rev="20820000"/>
+            </a:camera>
+            <a:lightRig rig="threePt" dir="t"/>
+          </a:scene3d>
+          <a:sp3d contourW="6350" prstMaterial="matte">
+            <a:bevelT w="101600" h="101600"/>
+            <a:contourClr>
+              <a:srgbClr val="969696"/>
+            </a:contourClr>
+          </a:sp3d>
+        </p:spPr>
+      </p:pic>
+    </p:spTree>
+    <p:extLst>
+      <p:ext uri="{BB962C8B-B14F-4D97-AF65-F5344CB8AC3E}">
+        <p14:creationId xmlns:p14="http://schemas.microsoft.com/office/powerpoint/2010/main" val="1594957999"/>
+      </p:ext>
+    </p:extLst>
+  </p:cSld>
+  <p:clrMapOvr>
+    <a:masterClrMapping/>
+  </p:clrMapOvr>
+</p:sld>
+</file>
+
+<file path=ppt/slides/slide12.xml><?xml version="1.0" encoding="utf-8"?>
+<p:sld xmlns:a="http://schemas.openxmlformats.org/drawingml/2006/main" xmlns:r="http://schemas.openxmlformats.org/officeDocument/2006/relationships" xmlns:p="http://schemas.openxmlformats.org/presentationml/2006/main">
+  <p:cSld>
+    <p:spTree>
+      <p:nvGrpSpPr>
+        <p:cNvPr id="1" name="">
+          <a:extLst>
+            <a:ext uri="{FF2B5EF4-FFF2-40B4-BE49-F238E27FC236}">
+              <a16:creationId xmlns:a16="http://schemas.microsoft.com/office/drawing/2014/main" id="{C0BC64CD-BDA0-25A2-285F-5BBF5F9096C6}"/>
+            </a:ext>
+          </a:extLst>
+        </p:cNvPr>
+        <p:cNvGrpSpPr/>
+        <p:nvPr/>
+      </p:nvGrpSpPr>
+      <p:grpSpPr>
+        <a:xfrm>
+          <a:off x="0" y="0"/>
+          <a:ext cx="0" cy="0"/>
+          <a:chOff x="0" y="0"/>
+          <a:chExt cx="0" cy="0"/>
+        </a:xfrm>
+      </p:grpSpPr>
+      <p:pic>
+        <p:nvPicPr>
+          <p:cNvPr id="5" name="Picture 4" descr="chain links">
+            <a:extLst>
+              <a:ext uri="{FF2B5EF4-FFF2-40B4-BE49-F238E27FC236}">
+                <a16:creationId xmlns:a16="http://schemas.microsoft.com/office/drawing/2014/main" id="{A09DFD75-30F5-3447-FCE8-72E2B91625F9}"/>
+              </a:ext>
+            </a:extLst>
+          </p:cNvPr>
+          <p:cNvPicPr>
+            <a:picLocks noChangeAspect="1"/>
+          </p:cNvPicPr>
+          <p:nvPr/>
+        </p:nvPicPr>
+        <p:blipFill rotWithShape="1">
+          <a:blip r:embed="rId3">
+            <a:duotone>
+              <a:prstClr val="black"/>
+              <a:schemeClr val="accent5">
+                <a:tint val="45000"/>
+                <a:satMod val="400000"/>
+              </a:schemeClr>
+            </a:duotone>
+            <a:alphaModFix amt="25000"/>
+          </a:blip>
+          <a:srcRect t="23391" r="9091"/>
+          <a:stretch/>
+        </p:blipFill>
+        <p:spPr>
+          <a:xfrm>
+            <a:off x="0" y="10"/>
+            <a:ext cx="12191980" cy="6857990"/>
+          </a:xfrm>
+          <a:prstGeom prst="rect">
+            <a:avLst/>
+          </a:prstGeom>
+        </p:spPr>
+      </p:pic>
+      <p:sp>
+        <p:nvSpPr>
+          <p:cNvPr id="7" name="Subtitle 2">
+            <a:extLst>
+              <a:ext uri="{FF2B5EF4-FFF2-40B4-BE49-F238E27FC236}">
+                <a16:creationId xmlns:a16="http://schemas.microsoft.com/office/drawing/2014/main" id="{C3949CA5-CBEA-4668-F81D-7794D2D8B12D}"/>
+              </a:ext>
+            </a:extLst>
+          </p:cNvPr>
+          <p:cNvSpPr txBox="1">
+            <a:spLocks/>
+          </p:cNvSpPr>
+          <p:nvPr/>
+        </p:nvSpPr>
+        <p:spPr>
+          <a:xfrm>
+            <a:off x="8483689" y="2419"/>
+            <a:ext cx="2102069" cy="1447801"/>
+          </a:xfrm>
+          <a:prstGeom prst="rect">
+            <a:avLst/>
+          </a:prstGeom>
+        </p:spPr>
+        <p:txBody>
+          <a:bodyPr vert="horz" lIns="91440" tIns="45720" rIns="91440" bIns="45720" rtlCol="0" anchor="ctr">
+            <a:normAutofit fontScale="92500" lnSpcReduction="20000"/>
+          </a:bodyPr>
+          <a:lstStyle>
+            <a:lvl1pPr marL="0" indent="0" algn="l" defTabSz="457200" rtl="0" eaLnBrk="1" latinLnBrk="0" hangingPunct="1">
+              <a:spcBef>
+                <a:spcPts val="1000"/>
+              </a:spcBef>
+              <a:spcAft>
+                <a:spcPts val="0"/>
+              </a:spcAft>
+              <a:buClr>
+                <a:schemeClr val="accent1"/>
+              </a:buClr>
+              <a:buSzPct val="80000"/>
+              <a:buFont typeface="Wingdings 3" charset="2"/>
+              <a:buNone/>
+              <a:defRPr sz="2000" b="0" i="0" kern="1200" cap="all">
+                <a:solidFill>
+                  <a:schemeClr val="accent1"/>
+                </a:solidFill>
+                <a:latin typeface="+mj-lt"/>
+                <a:ea typeface="+mj-ea"/>
+                <a:cs typeface="+mj-cs"/>
+              </a:defRPr>
+            </a:lvl1pPr>
+            <a:lvl2pPr marL="457200" indent="0" algn="ctr" defTabSz="457200" rtl="0" eaLnBrk="1" latinLnBrk="0" hangingPunct="1">
+              <a:spcBef>
+                <a:spcPts val="1000"/>
+              </a:spcBef>
+              <a:spcAft>
+                <a:spcPts val="0"/>
+              </a:spcAft>
+              <a:buClr>
+                <a:schemeClr val="accent1"/>
+              </a:buClr>
+              <a:buSzPct val="80000"/>
+              <a:buFont typeface="Wingdings 3" charset="2"/>
+              <a:buNone/>
+              <a:defRPr sz="1800" b="0" i="0" kern="1200">
+                <a:solidFill>
+                  <a:schemeClr val="tx1">
+                    <a:tint val="75000"/>
+                  </a:schemeClr>
+                </a:solidFill>
+                <a:latin typeface="+mj-lt"/>
+                <a:ea typeface="+mj-ea"/>
+                <a:cs typeface="+mj-cs"/>
+              </a:defRPr>
+            </a:lvl2pPr>
+            <a:lvl3pPr marL="914400" indent="0" algn="ctr" defTabSz="457200" rtl="0" eaLnBrk="1" latinLnBrk="0" hangingPunct="1">
+              <a:spcBef>
+                <a:spcPts val="1000"/>
+              </a:spcBef>
+              <a:spcAft>
+                <a:spcPts val="0"/>
+              </a:spcAft>
+              <a:buClr>
+                <a:schemeClr val="accent1"/>
+              </a:buClr>
+              <a:buSzPct val="80000"/>
+              <a:buFont typeface="Wingdings 3" charset="2"/>
+              <a:buNone/>
+              <a:defRPr sz="1600" b="0" i="0" kern="1200">
+                <a:solidFill>
+                  <a:schemeClr val="tx1">
+                    <a:tint val="75000"/>
+                  </a:schemeClr>
+                </a:solidFill>
+                <a:latin typeface="+mj-lt"/>
+                <a:ea typeface="+mj-ea"/>
+                <a:cs typeface="+mj-cs"/>
+              </a:defRPr>
+            </a:lvl3pPr>
+            <a:lvl4pPr marL="1371600" indent="0" algn="ctr" defTabSz="457200" rtl="0" eaLnBrk="1" latinLnBrk="0" hangingPunct="1">
+              <a:spcBef>
+                <a:spcPts val="1000"/>
+              </a:spcBef>
+              <a:spcAft>
+                <a:spcPts val="0"/>
+              </a:spcAft>
+              <a:buClr>
+                <a:schemeClr val="accent1"/>
+              </a:buClr>
+              <a:buSzPct val="80000"/>
+              <a:buFont typeface="Wingdings 3" charset="2"/>
+              <a:buNone/>
+              <a:defRPr sz="1400" b="0" i="0" kern="1200">
+                <a:solidFill>
+                  <a:schemeClr val="tx1">
+                    <a:tint val="75000"/>
+                  </a:schemeClr>
+                </a:solidFill>
+                <a:latin typeface="+mj-lt"/>
+                <a:ea typeface="+mj-ea"/>
+                <a:cs typeface="+mj-cs"/>
+              </a:defRPr>
+            </a:lvl4pPr>
+            <a:lvl5pPr marL="1828800" indent="0" algn="ctr" defTabSz="457200" rtl="0" eaLnBrk="1" latinLnBrk="0" hangingPunct="1">
+              <a:spcBef>
+                <a:spcPts val="1000"/>
+              </a:spcBef>
+              <a:spcAft>
+                <a:spcPts val="0"/>
+              </a:spcAft>
+              <a:buClr>
+                <a:schemeClr val="accent1"/>
+              </a:buClr>
+              <a:buSzPct val="80000"/>
+              <a:buFont typeface="Wingdings 3" charset="2"/>
+              <a:buNone/>
+              <a:defRPr sz="1400" b="0" i="0" kern="1200">
+                <a:solidFill>
+                  <a:schemeClr val="tx1">
+                    <a:tint val="75000"/>
+                  </a:schemeClr>
+                </a:solidFill>
+                <a:latin typeface="+mj-lt"/>
+                <a:ea typeface="+mj-ea"/>
+                <a:cs typeface="+mj-cs"/>
+              </a:defRPr>
+            </a:lvl5pPr>
+            <a:lvl6pPr marL="2286000" indent="0" algn="ctr" defTabSz="457200" rtl="0" eaLnBrk="1" latinLnBrk="0" hangingPunct="1">
+              <a:spcBef>
+                <a:spcPts val="1000"/>
+              </a:spcBef>
+              <a:spcAft>
+                <a:spcPts val="0"/>
+              </a:spcAft>
+              <a:buClr>
+                <a:schemeClr val="accent1"/>
+              </a:buClr>
+              <a:buSzPct val="80000"/>
+              <a:buFont typeface="Wingdings 3" charset="2"/>
+              <a:buNone/>
+              <a:defRPr sz="1400" b="0" i="0" kern="1200">
+                <a:solidFill>
+                  <a:schemeClr val="tx1">
+                    <a:tint val="75000"/>
+                  </a:schemeClr>
+                </a:solidFill>
+                <a:latin typeface="+mj-lt"/>
+                <a:ea typeface="+mj-ea"/>
+                <a:cs typeface="+mj-cs"/>
+              </a:defRPr>
+            </a:lvl6pPr>
+            <a:lvl7pPr marL="2743200" indent="0" algn="ctr" defTabSz="457200" rtl="0" eaLnBrk="1" latinLnBrk="0" hangingPunct="1">
+              <a:spcBef>
+                <a:spcPts val="1000"/>
+              </a:spcBef>
+              <a:spcAft>
+                <a:spcPts val="0"/>
+              </a:spcAft>
+              <a:buClr>
+                <a:schemeClr val="accent1"/>
+              </a:buClr>
+              <a:buSzPct val="80000"/>
+              <a:buFont typeface="Wingdings 3" charset="2"/>
+              <a:buNone/>
+              <a:defRPr sz="1400" b="0" i="0" kern="1200">
+                <a:solidFill>
+                  <a:schemeClr val="tx1">
+                    <a:tint val="75000"/>
+                  </a:schemeClr>
+                </a:solidFill>
+                <a:latin typeface="+mj-lt"/>
+                <a:ea typeface="+mj-ea"/>
+                <a:cs typeface="+mj-cs"/>
+              </a:defRPr>
+            </a:lvl7pPr>
+            <a:lvl8pPr marL="3200400" indent="0" algn="ctr" defTabSz="457200" rtl="0" eaLnBrk="1" latinLnBrk="0" hangingPunct="1">
+              <a:spcBef>
+                <a:spcPts val="1000"/>
+              </a:spcBef>
+              <a:spcAft>
+                <a:spcPts val="0"/>
+              </a:spcAft>
+              <a:buClr>
+                <a:schemeClr val="accent1"/>
+              </a:buClr>
+              <a:buSzPct val="80000"/>
+              <a:buFont typeface="Wingdings 3" charset="2"/>
+              <a:buNone/>
+              <a:defRPr sz="1400" b="0" i="0" kern="1200">
+                <a:solidFill>
+                  <a:schemeClr val="tx1">
+                    <a:tint val="75000"/>
+                  </a:schemeClr>
+                </a:solidFill>
+                <a:latin typeface="+mj-lt"/>
+                <a:ea typeface="+mj-ea"/>
+                <a:cs typeface="+mj-cs"/>
+              </a:defRPr>
+            </a:lvl8pPr>
+            <a:lvl9pPr marL="3657600" indent="0" algn="ctr" defTabSz="457200" rtl="0" eaLnBrk="1" latinLnBrk="0" hangingPunct="1">
+              <a:spcBef>
+                <a:spcPts val="1000"/>
+              </a:spcBef>
+              <a:spcAft>
+                <a:spcPts val="0"/>
+              </a:spcAft>
+              <a:buClr>
+                <a:schemeClr val="accent1"/>
+              </a:buClr>
+              <a:buSzPct val="80000"/>
+              <a:buFont typeface="Wingdings 3" charset="2"/>
+              <a:buNone/>
+              <a:defRPr sz="1400" b="0" i="0" kern="1200">
+                <a:solidFill>
+                  <a:schemeClr val="tx1">
+                    <a:tint val="75000"/>
+                  </a:schemeClr>
+                </a:solidFill>
+                <a:latin typeface="+mj-lt"/>
+                <a:ea typeface="+mj-ea"/>
+                <a:cs typeface="+mj-cs"/>
+              </a:defRPr>
+            </a:lvl9pPr>
+          </a:lstStyle>
+          <a:p>
+            <a:pPr algn="ctr"/>
+            <a:r>
+              <a:rPr lang="en-US" sz="11500" b="1" dirty="0"/>
+              <a:t>11</a:t>
+            </a:r>
+          </a:p>
+        </p:txBody>
+      </p:sp>
+      <p:pic>
+        <p:nvPicPr>
+          <p:cNvPr id="4" name="Picture 3">
+            <a:extLst>
+              <a:ext uri="{FF2B5EF4-FFF2-40B4-BE49-F238E27FC236}">
+                <a16:creationId xmlns:a16="http://schemas.microsoft.com/office/drawing/2014/main" id="{F845DF9F-80F9-0591-A1FC-823799276C44}"/>
+              </a:ext>
+            </a:extLst>
+          </p:cNvPr>
+          <p:cNvPicPr>
+            <a:picLocks noChangeAspect="1"/>
+          </p:cNvPicPr>
+          <p:nvPr/>
+        </p:nvPicPr>
+        <p:blipFill>
+          <a:blip r:embed="rId4"/>
+          <a:stretch>
+            <a:fillRect/>
+          </a:stretch>
+        </p:blipFill>
+        <p:spPr>
+          <a:xfrm>
+            <a:off x="0" y="0"/>
+            <a:ext cx="3896391" cy="2481677"/>
+          </a:xfrm>
+          <a:prstGeom prst="rect">
+            <a:avLst/>
+          </a:prstGeom>
+          <a:ln>
+            <a:noFill/>
+          </a:ln>
+          <a:effectLst>
+            <a:softEdge rad="112500"/>
+          </a:effectLst>
+        </p:spPr>
+      </p:pic>
+      <p:sp>
+        <p:nvSpPr>
+          <p:cNvPr id="2" name="Title 1">
+            <a:extLst>
+              <a:ext uri="{FF2B5EF4-FFF2-40B4-BE49-F238E27FC236}">
+                <a16:creationId xmlns:a16="http://schemas.microsoft.com/office/drawing/2014/main" id="{9A0A1416-E466-3F6F-7390-27E66A55002A}"/>
+              </a:ext>
+            </a:extLst>
+          </p:cNvPr>
+          <p:cNvSpPr>
+            <a:spLocks noGrp="1"/>
+          </p:cNvSpPr>
+          <p:nvPr>
+            <p:ph type="ctrTitle"/>
+          </p:nvPr>
+        </p:nvSpPr>
+        <p:spPr>
+          <a:xfrm>
+            <a:off x="3477730" y="50040"/>
+            <a:ext cx="4741596" cy="946553"/>
+          </a:xfrm>
+        </p:spPr>
+        <p:txBody>
+          <a:bodyPr anchor="ctr">
+            <a:normAutofit fontScale="90000"/>
+          </a:bodyPr>
+          <a:lstStyle/>
+          <a:p>
+            <a:r>
+              <a:rPr lang="en-US" sz="6000" b="1" dirty="0"/>
+              <a:t>App Router</a:t>
+            </a:r>
+            <a:endParaRPr lang="ru-RU" sz="6000" b="1" dirty="0"/>
+          </a:p>
+        </p:txBody>
+      </p:sp>
+      <p:pic>
+        <p:nvPicPr>
+          <p:cNvPr id="6" name="Picture 5">
+            <a:extLst>
+              <a:ext uri="{FF2B5EF4-FFF2-40B4-BE49-F238E27FC236}">
+                <a16:creationId xmlns:a16="http://schemas.microsoft.com/office/drawing/2014/main" id="{0BB05E1F-2F1E-303F-3CBA-82B19F6D6B0F}"/>
+              </a:ext>
+            </a:extLst>
+          </p:cNvPr>
+          <p:cNvPicPr>
+            <a:picLocks noChangeAspect="1"/>
+          </p:cNvPicPr>
+          <p:nvPr/>
+        </p:nvPicPr>
+        <p:blipFill>
+          <a:blip r:embed="rId5"/>
+          <a:stretch>
+            <a:fillRect/>
+          </a:stretch>
+        </p:blipFill>
+        <p:spPr>
+          <a:xfrm>
+            <a:off x="10672842" y="271032"/>
+            <a:ext cx="1420028" cy="652758"/>
+          </a:xfrm>
+          <a:prstGeom prst="rect">
+            <a:avLst/>
+          </a:prstGeom>
+          <a:ln>
+            <a:noFill/>
+          </a:ln>
+          <a:effectLst>
+            <a:softEdge rad="112500"/>
+          </a:effectLst>
+        </p:spPr>
+      </p:pic>
+      <p:sp>
+        <p:nvSpPr>
+          <p:cNvPr id="9" name="Subtitle 2">
+            <a:extLst>
+              <a:ext uri="{FF2B5EF4-FFF2-40B4-BE49-F238E27FC236}">
+                <a16:creationId xmlns:a16="http://schemas.microsoft.com/office/drawing/2014/main" id="{114D7A56-65CB-A815-6E9D-2ED3BA1A3C3A}"/>
+              </a:ext>
+            </a:extLst>
+          </p:cNvPr>
+          <p:cNvSpPr txBox="1">
+            <a:spLocks/>
+          </p:cNvSpPr>
+          <p:nvPr/>
+        </p:nvSpPr>
+        <p:spPr>
+          <a:xfrm>
+            <a:off x="3896391" y="1718833"/>
+            <a:ext cx="8196479" cy="788415"/>
+          </a:xfrm>
+          <a:prstGeom prst="rect">
+            <a:avLst/>
+          </a:prstGeom>
+        </p:spPr>
+        <p:txBody>
+          <a:bodyPr vert="horz" lIns="91440" tIns="45720" rIns="91440" bIns="45720" rtlCol="0" anchor="ctr">
+            <a:normAutofit fontScale="92500"/>
+          </a:bodyPr>
+          <a:lstStyle>
+            <a:lvl1pPr marL="0" indent="0" algn="l" defTabSz="457200" rtl="0" eaLnBrk="1" latinLnBrk="0" hangingPunct="1">
+              <a:spcBef>
+                <a:spcPts val="1000"/>
+              </a:spcBef>
+              <a:spcAft>
+                <a:spcPts val="0"/>
+              </a:spcAft>
+              <a:buClr>
+                <a:schemeClr val="accent1"/>
+              </a:buClr>
+              <a:buSzPct val="80000"/>
+              <a:buFont typeface="Wingdings 3" charset="2"/>
+              <a:buNone/>
+              <a:defRPr sz="2000" b="0" i="0" kern="1200" cap="all">
+                <a:solidFill>
+                  <a:schemeClr val="accent1"/>
+                </a:solidFill>
+                <a:latin typeface="+mj-lt"/>
+                <a:ea typeface="+mj-ea"/>
+                <a:cs typeface="+mj-cs"/>
+              </a:defRPr>
+            </a:lvl1pPr>
+            <a:lvl2pPr marL="457200" indent="0" algn="ctr" defTabSz="457200" rtl="0" eaLnBrk="1" latinLnBrk="0" hangingPunct="1">
+              <a:spcBef>
+                <a:spcPts val="1000"/>
+              </a:spcBef>
+              <a:spcAft>
+                <a:spcPts val="0"/>
+              </a:spcAft>
+              <a:buClr>
+                <a:schemeClr val="accent1"/>
+              </a:buClr>
+              <a:buSzPct val="80000"/>
+              <a:buFont typeface="Wingdings 3" charset="2"/>
+              <a:buNone/>
+              <a:defRPr sz="1800" b="0" i="0" kern="1200">
+                <a:solidFill>
+                  <a:schemeClr val="tx1">
+                    <a:tint val="75000"/>
+                  </a:schemeClr>
+                </a:solidFill>
+                <a:latin typeface="+mj-lt"/>
+                <a:ea typeface="+mj-ea"/>
+                <a:cs typeface="+mj-cs"/>
+              </a:defRPr>
+            </a:lvl2pPr>
+            <a:lvl3pPr marL="914400" indent="0" algn="ctr" defTabSz="457200" rtl="0" eaLnBrk="1" latinLnBrk="0" hangingPunct="1">
+              <a:spcBef>
+                <a:spcPts val="1000"/>
+              </a:spcBef>
+              <a:spcAft>
+                <a:spcPts val="0"/>
+              </a:spcAft>
+              <a:buClr>
+                <a:schemeClr val="accent1"/>
+              </a:buClr>
+              <a:buSzPct val="80000"/>
+              <a:buFont typeface="Wingdings 3" charset="2"/>
+              <a:buNone/>
+              <a:defRPr sz="1600" b="0" i="0" kern="1200">
+                <a:solidFill>
+                  <a:schemeClr val="tx1">
+                    <a:tint val="75000"/>
+                  </a:schemeClr>
+                </a:solidFill>
+                <a:latin typeface="+mj-lt"/>
+                <a:ea typeface="+mj-ea"/>
+                <a:cs typeface="+mj-cs"/>
+              </a:defRPr>
+            </a:lvl3pPr>
+            <a:lvl4pPr marL="1371600" indent="0" algn="ctr" defTabSz="457200" rtl="0" eaLnBrk="1" latinLnBrk="0" hangingPunct="1">
+              <a:spcBef>
+                <a:spcPts val="1000"/>
+              </a:spcBef>
+              <a:spcAft>
+                <a:spcPts val="0"/>
+              </a:spcAft>
+              <a:buClr>
+                <a:schemeClr val="accent1"/>
+              </a:buClr>
+              <a:buSzPct val="80000"/>
+              <a:buFont typeface="Wingdings 3" charset="2"/>
+              <a:buNone/>
+              <a:defRPr sz="1400" b="0" i="0" kern="1200">
+                <a:solidFill>
+                  <a:schemeClr val="tx1">
+                    <a:tint val="75000"/>
+                  </a:schemeClr>
+                </a:solidFill>
+                <a:latin typeface="+mj-lt"/>
+                <a:ea typeface="+mj-ea"/>
+                <a:cs typeface="+mj-cs"/>
+              </a:defRPr>
+            </a:lvl4pPr>
+            <a:lvl5pPr marL="1828800" indent="0" algn="ctr" defTabSz="457200" rtl="0" eaLnBrk="1" latinLnBrk="0" hangingPunct="1">
+              <a:spcBef>
+                <a:spcPts val="1000"/>
+              </a:spcBef>
+              <a:spcAft>
+                <a:spcPts val="0"/>
+              </a:spcAft>
+              <a:buClr>
+                <a:schemeClr val="accent1"/>
+              </a:buClr>
+              <a:buSzPct val="80000"/>
+              <a:buFont typeface="Wingdings 3" charset="2"/>
+              <a:buNone/>
+              <a:defRPr sz="1400" b="0" i="0" kern="1200">
+                <a:solidFill>
+                  <a:schemeClr val="tx1">
+                    <a:tint val="75000"/>
+                  </a:schemeClr>
+                </a:solidFill>
+                <a:latin typeface="+mj-lt"/>
+                <a:ea typeface="+mj-ea"/>
+                <a:cs typeface="+mj-cs"/>
+              </a:defRPr>
+            </a:lvl5pPr>
+            <a:lvl6pPr marL="2286000" indent="0" algn="ctr" defTabSz="457200" rtl="0" eaLnBrk="1" latinLnBrk="0" hangingPunct="1">
+              <a:spcBef>
+                <a:spcPts val="1000"/>
+              </a:spcBef>
+              <a:spcAft>
+                <a:spcPts val="0"/>
+              </a:spcAft>
+              <a:buClr>
+                <a:schemeClr val="accent1"/>
+              </a:buClr>
+              <a:buSzPct val="80000"/>
+              <a:buFont typeface="Wingdings 3" charset="2"/>
+              <a:buNone/>
+              <a:defRPr sz="1400" b="0" i="0" kern="1200">
+                <a:solidFill>
+                  <a:schemeClr val="tx1">
+                    <a:tint val="75000"/>
+                  </a:schemeClr>
+                </a:solidFill>
+                <a:latin typeface="+mj-lt"/>
+                <a:ea typeface="+mj-ea"/>
+                <a:cs typeface="+mj-cs"/>
+              </a:defRPr>
+            </a:lvl6pPr>
+            <a:lvl7pPr marL="2743200" indent="0" algn="ctr" defTabSz="457200" rtl="0" eaLnBrk="1" latinLnBrk="0" hangingPunct="1">
+              <a:spcBef>
+                <a:spcPts val="1000"/>
+              </a:spcBef>
+              <a:spcAft>
+                <a:spcPts val="0"/>
+              </a:spcAft>
+              <a:buClr>
+                <a:schemeClr val="accent1"/>
+              </a:buClr>
+              <a:buSzPct val="80000"/>
+              <a:buFont typeface="Wingdings 3" charset="2"/>
+              <a:buNone/>
+              <a:defRPr sz="1400" b="0" i="0" kern="1200">
+                <a:solidFill>
+                  <a:schemeClr val="tx1">
+                    <a:tint val="75000"/>
+                  </a:schemeClr>
+                </a:solidFill>
+                <a:latin typeface="+mj-lt"/>
+                <a:ea typeface="+mj-ea"/>
+                <a:cs typeface="+mj-cs"/>
+              </a:defRPr>
+            </a:lvl7pPr>
+            <a:lvl8pPr marL="3200400" indent="0" algn="ctr" defTabSz="457200" rtl="0" eaLnBrk="1" latinLnBrk="0" hangingPunct="1">
+              <a:spcBef>
+                <a:spcPts val="1000"/>
+              </a:spcBef>
+              <a:spcAft>
+                <a:spcPts val="0"/>
+              </a:spcAft>
+              <a:buClr>
+                <a:schemeClr val="accent1"/>
+              </a:buClr>
+              <a:buSzPct val="80000"/>
+              <a:buFont typeface="Wingdings 3" charset="2"/>
+              <a:buNone/>
+              <a:defRPr sz="1400" b="0" i="0" kern="1200">
+                <a:solidFill>
+                  <a:schemeClr val="tx1">
+                    <a:tint val="75000"/>
+                  </a:schemeClr>
+                </a:solidFill>
+                <a:latin typeface="+mj-lt"/>
+                <a:ea typeface="+mj-ea"/>
+                <a:cs typeface="+mj-cs"/>
+              </a:defRPr>
+            </a:lvl8pPr>
+            <a:lvl9pPr marL="3657600" indent="0" algn="ctr" defTabSz="457200" rtl="0" eaLnBrk="1" latinLnBrk="0" hangingPunct="1">
+              <a:spcBef>
+                <a:spcPts val="1000"/>
+              </a:spcBef>
+              <a:spcAft>
+                <a:spcPts val="0"/>
+              </a:spcAft>
+              <a:buClr>
+                <a:schemeClr val="accent1"/>
+              </a:buClr>
+              <a:buSzPct val="80000"/>
+              <a:buFont typeface="Wingdings 3" charset="2"/>
+              <a:buNone/>
+              <a:defRPr sz="1400" b="0" i="0" kern="1200">
+                <a:solidFill>
+                  <a:schemeClr val="tx1">
+                    <a:tint val="75000"/>
+                  </a:schemeClr>
+                </a:solidFill>
+                <a:latin typeface="+mj-lt"/>
+                <a:ea typeface="+mj-ea"/>
+                <a:cs typeface="+mj-cs"/>
+              </a:defRPr>
+            </a:lvl9pPr>
+          </a:lstStyle>
+          <a:p>
+            <a:r>
+              <a:rPr lang="en-US" altLang="zh-CN" sz="3600" b="1" cap="none" dirty="0"/>
+              <a:t>4.3 Practice: Create Dashboard Page</a:t>
+            </a:r>
+            <a:endParaRPr lang="en-US" sz="3600" b="1" cap="none" dirty="0"/>
+          </a:p>
+        </p:txBody>
+      </p:sp>
+      <p:sp>
+        <p:nvSpPr>
+          <p:cNvPr id="3" name="Subtitle 2">
+            <a:extLst>
+              <a:ext uri="{FF2B5EF4-FFF2-40B4-BE49-F238E27FC236}">
+                <a16:creationId xmlns:a16="http://schemas.microsoft.com/office/drawing/2014/main" id="{53152ED4-8857-5CB9-87C7-8665BBDA2F07}"/>
+              </a:ext>
+            </a:extLst>
+          </p:cNvPr>
+          <p:cNvSpPr>
+            <a:spLocks noGrp="1"/>
+          </p:cNvSpPr>
+          <p:nvPr>
+            <p:ph type="subTitle" idx="1"/>
+          </p:nvPr>
+        </p:nvSpPr>
+        <p:spPr>
+          <a:xfrm>
+            <a:off x="2685143" y="1083848"/>
+            <a:ext cx="9407727" cy="788415"/>
+          </a:xfrm>
+          <a:solidFill>
+            <a:schemeClr val="accent6">
+              <a:alpha val="50000"/>
+            </a:schemeClr>
+          </a:solidFill>
+          <a:ln>
+            <a:noFill/>
+          </a:ln>
+        </p:spPr>
+        <p:style>
+          <a:lnRef idx="0">
+            <a:scrgbClr r="0" g="0" b="0"/>
+          </a:lnRef>
+          <a:fillRef idx="0">
+            <a:scrgbClr r="0" g="0" b="0"/>
+          </a:fillRef>
+          <a:effectRef idx="0">
+            <a:scrgbClr r="0" g="0" b="0"/>
+          </a:effectRef>
+          <a:fontRef idx="minor">
+            <a:schemeClr val="lt1"/>
+          </a:fontRef>
+        </p:style>
+        <p:txBody>
+          <a:bodyPr anchor="ctr">
+            <a:normAutofit lnSpcReduction="10000"/>
+          </a:bodyPr>
+          <a:lstStyle/>
+          <a:p>
+            <a:r>
+              <a:rPr lang="en-US" altLang="zh-CN" sz="4800" b="1" dirty="0"/>
+              <a:t>4. Creating Layouts &amp; Pages</a:t>
+            </a:r>
+            <a:endParaRPr lang="en-US" sz="4800" b="1" dirty="0"/>
+          </a:p>
+        </p:txBody>
+      </p:sp>
+      <p:pic>
+        <p:nvPicPr>
+          <p:cNvPr id="11" name="Picture 10">
+            <a:extLst>
+              <a:ext uri="{FF2B5EF4-FFF2-40B4-BE49-F238E27FC236}">
+                <a16:creationId xmlns:a16="http://schemas.microsoft.com/office/drawing/2014/main" id="{60A70EB5-18FC-7670-AAF7-8E99E5347CDE}"/>
+              </a:ext>
+            </a:extLst>
+          </p:cNvPr>
+          <p:cNvPicPr>
+            <a:picLocks noChangeAspect="1"/>
+          </p:cNvPicPr>
+          <p:nvPr/>
+        </p:nvPicPr>
+        <p:blipFill>
+          <a:blip r:embed="rId6"/>
+          <a:stretch>
+            <a:fillRect/>
+          </a:stretch>
+        </p:blipFill>
+        <p:spPr>
+          <a:xfrm>
+            <a:off x="-256854" y="1959518"/>
+            <a:ext cx="11003622" cy="4475680"/>
+          </a:xfrm>
+          <a:prstGeom prst="roundRect">
+            <a:avLst>
+              <a:gd name="adj" fmla="val 16667"/>
+            </a:avLst>
+          </a:prstGeom>
+          <a:ln>
+            <a:noFill/>
+          </a:ln>
+          <a:effectLst>
+            <a:outerShdw blurRad="152400" dist="12000" dir="900000" sy="98000" kx="110000" ky="200000" algn="tl" rotWithShape="0">
+              <a:srgbClr val="000000">
+                <a:alpha val="30000"/>
+              </a:srgbClr>
+            </a:outerShdw>
+          </a:effectLst>
+          <a:scene3d>
+            <a:camera prst="perspectiveRelaxed">
+              <a:rot lat="19800000" lon="1200000" rev="20820000"/>
+            </a:camera>
+            <a:lightRig rig="threePt" dir="t"/>
+          </a:scene3d>
+          <a:sp3d contourW="6350" prstMaterial="matte">
+            <a:bevelT w="101600" h="101600"/>
+            <a:contourClr>
+              <a:srgbClr val="969696"/>
+            </a:contourClr>
+          </a:sp3d>
+        </p:spPr>
+      </p:pic>
+    </p:spTree>
+    <p:extLst>
+      <p:ext uri="{BB962C8B-B14F-4D97-AF65-F5344CB8AC3E}">
+        <p14:creationId xmlns:p14="http://schemas.microsoft.com/office/powerpoint/2010/main" val="1645944159"/>
+      </p:ext>
+    </p:extLst>
+  </p:cSld>
+  <p:clrMapOvr>
+    <a:masterClrMapping/>
+  </p:clrMapOvr>
+</p:sld>
+</file>
+
+<file path=ppt/slides/slide13.xml><?xml version="1.0" encoding="utf-8"?>
+<p:sld xmlns:a="http://schemas.openxmlformats.org/drawingml/2006/main" xmlns:r="http://schemas.openxmlformats.org/officeDocument/2006/relationships" xmlns:p="http://schemas.openxmlformats.org/presentationml/2006/main">
+  <p:cSld>
+    <p:spTree>
+      <p:nvGrpSpPr>
+        <p:cNvPr id="1" name="">
+          <a:extLst>
+            <a:ext uri="{FF2B5EF4-FFF2-40B4-BE49-F238E27FC236}">
               <a16:creationId xmlns:a16="http://schemas.microsoft.com/office/drawing/2014/main" id="{0CC0224E-FBBF-DCF2-BCE0-F89D770B9121}"/>
             </a:ext>
           </a:extLst>
@@ -18042,7 +19876,7 @@
 </p:sld>
 </file>
 
-<file path=ppt/slides/slide12.xml><?xml version="1.0" encoding="utf-8"?>
+<file path=ppt/slides/slide14.xml><?xml version="1.0" encoding="utf-8"?>
 <p:sld xmlns:a="http://schemas.openxmlformats.org/drawingml/2006/main" xmlns:r="http://schemas.openxmlformats.org/officeDocument/2006/relationships" xmlns:p="http://schemas.openxmlformats.org/presentationml/2006/main">
   <p:cSld>
     <p:spTree>
@@ -18318,7 +20152,7 @@
 </p:sld>
 </file>
 
-<file path=ppt/slides/slide13.xml><?xml version="1.0" encoding="utf-8"?>
+<file path=ppt/slides/slide15.xml><?xml version="1.0" encoding="utf-8"?>
 <p:sld xmlns:a="http://schemas.openxmlformats.org/drawingml/2006/main" xmlns:r="http://schemas.openxmlformats.org/officeDocument/2006/relationships" xmlns:p="http://schemas.openxmlformats.org/presentationml/2006/main">
   <p:cSld>
     <p:spTree>
@@ -23130,6 +24964,49 @@
           </a:sp3d>
         </p:spPr>
       </p:pic>
+      <p:pic>
+        <p:nvPicPr>
+          <p:cNvPr id="13" name="Picture 12">
+            <a:extLst>
+              <a:ext uri="{FF2B5EF4-FFF2-40B4-BE49-F238E27FC236}">
+                <a16:creationId xmlns:a16="http://schemas.microsoft.com/office/drawing/2014/main" id="{358D16EE-D7D1-DADA-3694-B9B222B2E4DA}"/>
+              </a:ext>
+            </a:extLst>
+          </p:cNvPr>
+          <p:cNvPicPr>
+            <a:picLocks noChangeAspect="1"/>
+          </p:cNvPicPr>
+          <p:nvPr/>
+        </p:nvPicPr>
+        <p:blipFill>
+          <a:blip r:embed="rId7"/>
+          <a:stretch>
+            <a:fillRect/>
+          </a:stretch>
+        </p:blipFill>
+        <p:spPr>
+          <a:xfrm>
+            <a:off x="4501678" y="4418029"/>
+            <a:ext cx="5430008" cy="1876687"/>
+          </a:xfrm>
+          <a:prstGeom prst="roundRect">
+            <a:avLst>
+              <a:gd name="adj" fmla="val 8594"/>
+            </a:avLst>
+          </a:prstGeom>
+          <a:solidFill>
+            <a:srgbClr val="FFFFFF">
+              <a:shade val="85000"/>
+            </a:srgbClr>
+          </a:solidFill>
+          <a:ln>
+            <a:noFill/>
+          </a:ln>
+          <a:effectLst>
+            <a:reflection blurRad="12700" stA="38000" endPos="28000" dist="5000" dir="5400000" sy="-100000" algn="bl" rotWithShape="0"/>
+          </a:effectLst>
+        </p:spPr>
+      </p:pic>
     </p:spTree>
     <p:extLst>
       <p:ext uri="{BB962C8B-B14F-4D97-AF65-F5344CB8AC3E}">
@@ -24688,6 +26565,49 @@
               <a:srgbClr val="969696"/>
             </a:contourClr>
           </a:sp3d>
+        </p:spPr>
+      </p:pic>
+      <p:pic>
+        <p:nvPicPr>
+          <p:cNvPr id="13" name="Picture 12">
+            <a:extLst>
+              <a:ext uri="{FF2B5EF4-FFF2-40B4-BE49-F238E27FC236}">
+                <a16:creationId xmlns:a16="http://schemas.microsoft.com/office/drawing/2014/main" id="{BD850706-6935-27E6-BB44-BDDD1D94D1E4}"/>
+              </a:ext>
+            </a:extLst>
+          </p:cNvPr>
+          <p:cNvPicPr>
+            <a:picLocks noChangeAspect="1"/>
+          </p:cNvPicPr>
+          <p:nvPr/>
+        </p:nvPicPr>
+        <p:blipFill>
+          <a:blip r:embed="rId7"/>
+          <a:stretch>
+            <a:fillRect/>
+          </a:stretch>
+        </p:blipFill>
+        <p:spPr>
+          <a:xfrm>
+            <a:off x="6897144" y="4466756"/>
+            <a:ext cx="4239217" cy="1028844"/>
+          </a:xfrm>
+          <a:prstGeom prst="roundRect">
+            <a:avLst>
+              <a:gd name="adj" fmla="val 8594"/>
+            </a:avLst>
+          </a:prstGeom>
+          <a:solidFill>
+            <a:srgbClr val="FFFFFF">
+              <a:shade val="85000"/>
+            </a:srgbClr>
+          </a:solidFill>
+          <a:ln>
+            <a:noFill/>
+          </a:ln>
+          <a:effectLst>
+            <a:reflection blurRad="12700" stA="38000" endPos="28000" dist="5000" dir="5400000" sy="-100000" algn="bl" rotWithShape="0"/>
+          </a:effectLst>
         </p:spPr>
       </p:pic>
     </p:spTree>

--- a/learn_nextjs/2_App_Router/App_Router.pptx
+++ b/learn_nextjs/2_App_Router/App_Router.pptx
@@ -5,10 +5,10 @@
     <p:sldMasterId id="2147483648" r:id="rId4"/>
   </p:sldMasterIdLst>
   <p:notesMasterIdLst>
-    <p:notesMasterId r:id="rId20"/>
+    <p:notesMasterId r:id="rId25"/>
   </p:notesMasterIdLst>
   <p:handoutMasterIdLst>
-    <p:handoutMasterId r:id="rId21"/>
+    <p:handoutMasterId r:id="rId26"/>
   </p:handoutMasterIdLst>
   <p:sldIdLst>
     <p:sldId id="256" r:id="rId5"/>
@@ -23,9 +23,14 @@
     <p:sldId id="285" r:id="rId14"/>
     <p:sldId id="286" r:id="rId15"/>
     <p:sldId id="287" r:id="rId16"/>
-    <p:sldId id="276" r:id="rId17"/>
-    <p:sldId id="270" r:id="rId18"/>
-    <p:sldId id="278" r:id="rId19"/>
+    <p:sldId id="288" r:id="rId17"/>
+    <p:sldId id="289" r:id="rId18"/>
+    <p:sldId id="290" r:id="rId19"/>
+    <p:sldId id="291" r:id="rId20"/>
+    <p:sldId id="292" r:id="rId21"/>
+    <p:sldId id="276" r:id="rId22"/>
+    <p:sldId id="270" r:id="rId23"/>
+    <p:sldId id="278" r:id="rId24"/>
   </p:sldIdLst>
   <p:sldSz cx="12192000" cy="6858000"/>
   <p:notesSz cx="6858000" cy="9144000"/>
@@ -153,6 +158,19 @@
           <p14:sldIdLst>
             <p14:sldId id="286"/>
             <p14:sldId id="287"/>
+            <p14:sldId id="288"/>
+          </p14:sldIdLst>
+        </p14:section>
+        <p14:section name="ch05" id="{00A44908-D378-4093-81BB-8612BB603F83}">
+          <p14:sldIdLst>
+            <p14:sldId id="289"/>
+            <p14:sldId id="290"/>
+          </p14:sldIdLst>
+        </p14:section>
+        <p14:section name="ch06" id="{20A7F0C4-63B0-4E99-9132-E1B729ABB4A0}">
+          <p14:sldIdLst>
+            <p14:sldId id="291"/>
+            <p14:sldId id="292"/>
           </p14:sldIdLst>
         </p14:section>
         <p14:section name="covers" id="{E5823A51-8D0B-45F5-A8F0-5C43B5C81155}">
@@ -8703,7 +8721,7 @@
           <a:p>
             <a:fld id="{F6E59275-AFE1-4999-B78A-D0D76B9F2B0B}" type="datetimeFigureOut">
               <a:rPr lang="en-US" smtClean="0"/>
-              <a:t>1/24/2026</a:t>
+              <a:t>1/27/2026</a:t>
             </a:fld>
             <a:endParaRPr lang="en-US" dirty="0"/>
           </a:p>
@@ -8880,7 +8898,7 @@
           <a:p>
             <a:fld id="{B3EADD7A-FE61-48EE-BE0E-8546E5401374}" type="datetimeFigureOut">
               <a:rPr lang="en-US" smtClean="0"/>
-              <a:t>1/24/2026</a:t>
+              <a:t>1/27/2026</a:t>
             </a:fld>
             <a:endParaRPr lang="en-US" dirty="0"/>
           </a:p>
@@ -9591,6 +9609,581 @@
         <p:cNvPr id="1" name="">
           <a:extLst>
             <a:ext uri="{FF2B5EF4-FFF2-40B4-BE49-F238E27FC236}">
+              <a16:creationId xmlns:a16="http://schemas.microsoft.com/office/drawing/2014/main" id="{CF059164-3F7F-00DA-6ED2-B5D37341D8EE}"/>
+            </a:ext>
+          </a:extLst>
+        </p:cNvPr>
+        <p:cNvGrpSpPr/>
+        <p:nvPr/>
+      </p:nvGrpSpPr>
+      <p:grpSpPr>
+        <a:xfrm>
+          <a:off x="0" y="0"/>
+          <a:ext cx="0" cy="0"/>
+          <a:chOff x="0" y="0"/>
+          <a:chExt cx="0" cy="0"/>
+        </a:xfrm>
+      </p:grpSpPr>
+      <p:sp>
+        <p:nvSpPr>
+          <p:cNvPr id="2" name="Slide Image Placeholder 1">
+            <a:extLst>
+              <a:ext uri="{FF2B5EF4-FFF2-40B4-BE49-F238E27FC236}">
+                <a16:creationId xmlns:a16="http://schemas.microsoft.com/office/drawing/2014/main" id="{F8F40251-4F23-226F-6B58-E3804150D759}"/>
+              </a:ext>
+            </a:extLst>
+          </p:cNvPr>
+          <p:cNvSpPr>
+            <a:spLocks noGrp="1" noRot="1" noChangeAspect="1"/>
+          </p:cNvSpPr>
+          <p:nvPr>
+            <p:ph type="sldImg"/>
+          </p:nvPr>
+        </p:nvSpPr>
+        <p:spPr/>
+        <p:txBody>
+          <a:bodyPr/>
+          <a:lstStyle/>
+          <a:p>
+            <a:endParaRPr lang="en-US"/>
+          </a:p>
+        </p:txBody>
+      </p:sp>
+      <p:sp>
+        <p:nvSpPr>
+          <p:cNvPr id="3" name="Notes Placeholder 2">
+            <a:extLst>
+              <a:ext uri="{FF2B5EF4-FFF2-40B4-BE49-F238E27FC236}">
+                <a16:creationId xmlns:a16="http://schemas.microsoft.com/office/drawing/2014/main" id="{49BF0FFC-B77D-7699-EAD2-E2D91D9DDBC9}"/>
+              </a:ext>
+            </a:extLst>
+          </p:cNvPr>
+          <p:cNvSpPr>
+            <a:spLocks noGrp="1"/>
+          </p:cNvSpPr>
+          <p:nvPr>
+            <p:ph type="body" idx="1"/>
+          </p:nvPr>
+        </p:nvSpPr>
+        <p:spPr/>
+        <p:txBody>
+          <a:bodyPr/>
+          <a:lstStyle/>
+          <a:p>
+            <a:endParaRPr lang="en-US" dirty="0"/>
+          </a:p>
+        </p:txBody>
+      </p:sp>
+      <p:sp>
+        <p:nvSpPr>
+          <p:cNvPr id="4" name="Slide Number Placeholder 3">
+            <a:extLst>
+              <a:ext uri="{FF2B5EF4-FFF2-40B4-BE49-F238E27FC236}">
+                <a16:creationId xmlns:a16="http://schemas.microsoft.com/office/drawing/2014/main" id="{027F9631-241E-39A0-1AD0-7F7FD33B0A88}"/>
+              </a:ext>
+            </a:extLst>
+          </p:cNvPr>
+          <p:cNvSpPr>
+            <a:spLocks noGrp="1"/>
+          </p:cNvSpPr>
+          <p:nvPr>
+            <p:ph type="sldNum" sz="quarter" idx="5"/>
+          </p:nvPr>
+        </p:nvSpPr>
+        <p:spPr/>
+        <p:txBody>
+          <a:bodyPr/>
+          <a:lstStyle/>
+          <a:p>
+            <a:fld id="{EE000EEB-8338-48D7-8EE8-EE0082EF7602}" type="slidenum">
+              <a:rPr lang="en-US" smtClean="0"/>
+              <a:t>13</a:t>
+            </a:fld>
+            <a:endParaRPr lang="en-US" dirty="0"/>
+          </a:p>
+        </p:txBody>
+      </p:sp>
+    </p:spTree>
+    <p:extLst>
+      <p:ext uri="{BB962C8B-B14F-4D97-AF65-F5344CB8AC3E}">
+        <p14:creationId xmlns:p14="http://schemas.microsoft.com/office/powerpoint/2010/main" val="1170303081"/>
+      </p:ext>
+    </p:extLst>
+  </p:cSld>
+  <p:clrMapOvr>
+    <a:masterClrMapping/>
+  </p:clrMapOvr>
+</p:notes>
+</file>
+
+<file path=ppt/notesSlides/notesSlide14.xml><?xml version="1.0" encoding="utf-8"?>
+<p:notes xmlns:a="http://schemas.openxmlformats.org/drawingml/2006/main" xmlns:r="http://schemas.openxmlformats.org/officeDocument/2006/relationships" xmlns:p="http://schemas.openxmlformats.org/presentationml/2006/main">
+  <p:cSld>
+    <p:spTree>
+      <p:nvGrpSpPr>
+        <p:cNvPr id="1" name="">
+          <a:extLst>
+            <a:ext uri="{FF2B5EF4-FFF2-40B4-BE49-F238E27FC236}">
+              <a16:creationId xmlns:a16="http://schemas.microsoft.com/office/drawing/2014/main" id="{24CDD91E-C0EF-A2F0-9060-CB9F5B3D5C72}"/>
+            </a:ext>
+          </a:extLst>
+        </p:cNvPr>
+        <p:cNvGrpSpPr/>
+        <p:nvPr/>
+      </p:nvGrpSpPr>
+      <p:grpSpPr>
+        <a:xfrm>
+          <a:off x="0" y="0"/>
+          <a:ext cx="0" cy="0"/>
+          <a:chOff x="0" y="0"/>
+          <a:chExt cx="0" cy="0"/>
+        </a:xfrm>
+      </p:grpSpPr>
+      <p:sp>
+        <p:nvSpPr>
+          <p:cNvPr id="2" name="Slide Image Placeholder 1">
+            <a:extLst>
+              <a:ext uri="{FF2B5EF4-FFF2-40B4-BE49-F238E27FC236}">
+                <a16:creationId xmlns:a16="http://schemas.microsoft.com/office/drawing/2014/main" id="{0D13AC52-3F84-FF5F-028B-BA0566AF3FFA}"/>
+              </a:ext>
+            </a:extLst>
+          </p:cNvPr>
+          <p:cNvSpPr>
+            <a:spLocks noGrp="1" noRot="1" noChangeAspect="1"/>
+          </p:cNvSpPr>
+          <p:nvPr>
+            <p:ph type="sldImg"/>
+          </p:nvPr>
+        </p:nvSpPr>
+        <p:spPr/>
+        <p:txBody>
+          <a:bodyPr/>
+          <a:lstStyle/>
+          <a:p>
+            <a:endParaRPr lang="en-US"/>
+          </a:p>
+        </p:txBody>
+      </p:sp>
+      <p:sp>
+        <p:nvSpPr>
+          <p:cNvPr id="3" name="Notes Placeholder 2">
+            <a:extLst>
+              <a:ext uri="{FF2B5EF4-FFF2-40B4-BE49-F238E27FC236}">
+                <a16:creationId xmlns:a16="http://schemas.microsoft.com/office/drawing/2014/main" id="{D2FB30CD-FA2C-F018-23F4-A8F1E3CD1B17}"/>
+              </a:ext>
+            </a:extLst>
+          </p:cNvPr>
+          <p:cNvSpPr>
+            <a:spLocks noGrp="1"/>
+          </p:cNvSpPr>
+          <p:nvPr>
+            <p:ph type="body" idx="1"/>
+          </p:nvPr>
+        </p:nvSpPr>
+        <p:spPr/>
+        <p:txBody>
+          <a:bodyPr/>
+          <a:lstStyle/>
+          <a:p>
+            <a:endParaRPr lang="en-US" dirty="0"/>
+          </a:p>
+        </p:txBody>
+      </p:sp>
+      <p:sp>
+        <p:nvSpPr>
+          <p:cNvPr id="4" name="Slide Number Placeholder 3">
+            <a:extLst>
+              <a:ext uri="{FF2B5EF4-FFF2-40B4-BE49-F238E27FC236}">
+                <a16:creationId xmlns:a16="http://schemas.microsoft.com/office/drawing/2014/main" id="{707BB71A-6D04-119F-09C2-E1893335D291}"/>
+              </a:ext>
+            </a:extLst>
+          </p:cNvPr>
+          <p:cNvSpPr>
+            <a:spLocks noGrp="1"/>
+          </p:cNvSpPr>
+          <p:nvPr>
+            <p:ph type="sldNum" sz="quarter" idx="5"/>
+          </p:nvPr>
+        </p:nvSpPr>
+        <p:spPr/>
+        <p:txBody>
+          <a:bodyPr/>
+          <a:lstStyle/>
+          <a:p>
+            <a:fld id="{EE000EEB-8338-48D7-8EE8-EE0082EF7602}" type="slidenum">
+              <a:rPr lang="en-US" smtClean="0"/>
+              <a:t>14</a:t>
+            </a:fld>
+            <a:endParaRPr lang="en-US" dirty="0"/>
+          </a:p>
+        </p:txBody>
+      </p:sp>
+    </p:spTree>
+    <p:extLst>
+      <p:ext uri="{BB962C8B-B14F-4D97-AF65-F5344CB8AC3E}">
+        <p14:creationId xmlns:p14="http://schemas.microsoft.com/office/powerpoint/2010/main" val="1538737858"/>
+      </p:ext>
+    </p:extLst>
+  </p:cSld>
+  <p:clrMapOvr>
+    <a:masterClrMapping/>
+  </p:clrMapOvr>
+</p:notes>
+</file>
+
+<file path=ppt/notesSlides/notesSlide15.xml><?xml version="1.0" encoding="utf-8"?>
+<p:notes xmlns:a="http://schemas.openxmlformats.org/drawingml/2006/main" xmlns:r="http://schemas.openxmlformats.org/officeDocument/2006/relationships" xmlns:p="http://schemas.openxmlformats.org/presentationml/2006/main">
+  <p:cSld>
+    <p:spTree>
+      <p:nvGrpSpPr>
+        <p:cNvPr id="1" name="">
+          <a:extLst>
+            <a:ext uri="{FF2B5EF4-FFF2-40B4-BE49-F238E27FC236}">
+              <a16:creationId xmlns:a16="http://schemas.microsoft.com/office/drawing/2014/main" id="{9D7C608A-0FD8-F169-EDBF-12A2B8A11D18}"/>
+            </a:ext>
+          </a:extLst>
+        </p:cNvPr>
+        <p:cNvGrpSpPr/>
+        <p:nvPr/>
+      </p:nvGrpSpPr>
+      <p:grpSpPr>
+        <a:xfrm>
+          <a:off x="0" y="0"/>
+          <a:ext cx="0" cy="0"/>
+          <a:chOff x="0" y="0"/>
+          <a:chExt cx="0" cy="0"/>
+        </a:xfrm>
+      </p:grpSpPr>
+      <p:sp>
+        <p:nvSpPr>
+          <p:cNvPr id="2" name="Slide Image Placeholder 1">
+            <a:extLst>
+              <a:ext uri="{FF2B5EF4-FFF2-40B4-BE49-F238E27FC236}">
+                <a16:creationId xmlns:a16="http://schemas.microsoft.com/office/drawing/2014/main" id="{58D914FB-811F-A7D2-7D9D-95212C83A59D}"/>
+              </a:ext>
+            </a:extLst>
+          </p:cNvPr>
+          <p:cNvSpPr>
+            <a:spLocks noGrp="1" noRot="1" noChangeAspect="1"/>
+          </p:cNvSpPr>
+          <p:nvPr>
+            <p:ph type="sldImg"/>
+          </p:nvPr>
+        </p:nvSpPr>
+        <p:spPr/>
+        <p:txBody>
+          <a:bodyPr/>
+          <a:lstStyle/>
+          <a:p>
+            <a:endParaRPr lang="en-US"/>
+          </a:p>
+        </p:txBody>
+      </p:sp>
+      <p:sp>
+        <p:nvSpPr>
+          <p:cNvPr id="3" name="Notes Placeholder 2">
+            <a:extLst>
+              <a:ext uri="{FF2B5EF4-FFF2-40B4-BE49-F238E27FC236}">
+                <a16:creationId xmlns:a16="http://schemas.microsoft.com/office/drawing/2014/main" id="{BF61AED8-C368-E2DE-BC6C-003F2D70F0A3}"/>
+              </a:ext>
+            </a:extLst>
+          </p:cNvPr>
+          <p:cNvSpPr>
+            <a:spLocks noGrp="1"/>
+          </p:cNvSpPr>
+          <p:nvPr>
+            <p:ph type="body" idx="1"/>
+          </p:nvPr>
+        </p:nvSpPr>
+        <p:spPr/>
+        <p:txBody>
+          <a:bodyPr/>
+          <a:lstStyle/>
+          <a:p>
+            <a:endParaRPr lang="en-US" dirty="0"/>
+          </a:p>
+        </p:txBody>
+      </p:sp>
+      <p:sp>
+        <p:nvSpPr>
+          <p:cNvPr id="4" name="Slide Number Placeholder 3">
+            <a:extLst>
+              <a:ext uri="{FF2B5EF4-FFF2-40B4-BE49-F238E27FC236}">
+                <a16:creationId xmlns:a16="http://schemas.microsoft.com/office/drawing/2014/main" id="{9FA7DE4A-4490-028E-2A8D-B54E0086400F}"/>
+              </a:ext>
+            </a:extLst>
+          </p:cNvPr>
+          <p:cNvSpPr>
+            <a:spLocks noGrp="1"/>
+          </p:cNvSpPr>
+          <p:nvPr>
+            <p:ph type="sldNum" sz="quarter" idx="5"/>
+          </p:nvPr>
+        </p:nvSpPr>
+        <p:spPr/>
+        <p:txBody>
+          <a:bodyPr/>
+          <a:lstStyle/>
+          <a:p>
+            <a:fld id="{EE000EEB-8338-48D7-8EE8-EE0082EF7602}" type="slidenum">
+              <a:rPr lang="en-US" smtClean="0"/>
+              <a:t>15</a:t>
+            </a:fld>
+            <a:endParaRPr lang="en-US" dirty="0"/>
+          </a:p>
+        </p:txBody>
+      </p:sp>
+    </p:spTree>
+    <p:extLst>
+      <p:ext uri="{BB962C8B-B14F-4D97-AF65-F5344CB8AC3E}">
+        <p14:creationId xmlns:p14="http://schemas.microsoft.com/office/powerpoint/2010/main" val="404381941"/>
+      </p:ext>
+    </p:extLst>
+  </p:cSld>
+  <p:clrMapOvr>
+    <a:masterClrMapping/>
+  </p:clrMapOvr>
+</p:notes>
+</file>
+
+<file path=ppt/notesSlides/notesSlide16.xml><?xml version="1.0" encoding="utf-8"?>
+<p:notes xmlns:a="http://schemas.openxmlformats.org/drawingml/2006/main" xmlns:r="http://schemas.openxmlformats.org/officeDocument/2006/relationships" xmlns:p="http://schemas.openxmlformats.org/presentationml/2006/main">
+  <p:cSld>
+    <p:spTree>
+      <p:nvGrpSpPr>
+        <p:cNvPr id="1" name="">
+          <a:extLst>
+            <a:ext uri="{FF2B5EF4-FFF2-40B4-BE49-F238E27FC236}">
+              <a16:creationId xmlns:a16="http://schemas.microsoft.com/office/drawing/2014/main" id="{DD33EC1E-6479-D6BF-3DC4-6460B54E305E}"/>
+            </a:ext>
+          </a:extLst>
+        </p:cNvPr>
+        <p:cNvGrpSpPr/>
+        <p:nvPr/>
+      </p:nvGrpSpPr>
+      <p:grpSpPr>
+        <a:xfrm>
+          <a:off x="0" y="0"/>
+          <a:ext cx="0" cy="0"/>
+          <a:chOff x="0" y="0"/>
+          <a:chExt cx="0" cy="0"/>
+        </a:xfrm>
+      </p:grpSpPr>
+      <p:sp>
+        <p:nvSpPr>
+          <p:cNvPr id="2" name="Slide Image Placeholder 1">
+            <a:extLst>
+              <a:ext uri="{FF2B5EF4-FFF2-40B4-BE49-F238E27FC236}">
+                <a16:creationId xmlns:a16="http://schemas.microsoft.com/office/drawing/2014/main" id="{38656E63-F2FA-2E82-7C3A-F4A9D63EB6DB}"/>
+              </a:ext>
+            </a:extLst>
+          </p:cNvPr>
+          <p:cNvSpPr>
+            <a:spLocks noGrp="1" noRot="1" noChangeAspect="1"/>
+          </p:cNvSpPr>
+          <p:nvPr>
+            <p:ph type="sldImg"/>
+          </p:nvPr>
+        </p:nvSpPr>
+        <p:spPr/>
+        <p:txBody>
+          <a:bodyPr/>
+          <a:lstStyle/>
+          <a:p>
+            <a:endParaRPr lang="en-US"/>
+          </a:p>
+        </p:txBody>
+      </p:sp>
+      <p:sp>
+        <p:nvSpPr>
+          <p:cNvPr id="3" name="Notes Placeholder 2">
+            <a:extLst>
+              <a:ext uri="{FF2B5EF4-FFF2-40B4-BE49-F238E27FC236}">
+                <a16:creationId xmlns:a16="http://schemas.microsoft.com/office/drawing/2014/main" id="{18364853-D05D-34FC-46EF-2FFF2C36E391}"/>
+              </a:ext>
+            </a:extLst>
+          </p:cNvPr>
+          <p:cNvSpPr>
+            <a:spLocks noGrp="1"/>
+          </p:cNvSpPr>
+          <p:nvPr>
+            <p:ph type="body" idx="1"/>
+          </p:nvPr>
+        </p:nvSpPr>
+        <p:spPr/>
+        <p:txBody>
+          <a:bodyPr/>
+          <a:lstStyle/>
+          <a:p>
+            <a:endParaRPr lang="en-US" dirty="0"/>
+          </a:p>
+        </p:txBody>
+      </p:sp>
+      <p:sp>
+        <p:nvSpPr>
+          <p:cNvPr id="4" name="Slide Number Placeholder 3">
+            <a:extLst>
+              <a:ext uri="{FF2B5EF4-FFF2-40B4-BE49-F238E27FC236}">
+                <a16:creationId xmlns:a16="http://schemas.microsoft.com/office/drawing/2014/main" id="{787552A7-86C0-9463-5CD9-CEA4EFD2AC7E}"/>
+              </a:ext>
+            </a:extLst>
+          </p:cNvPr>
+          <p:cNvSpPr>
+            <a:spLocks noGrp="1"/>
+          </p:cNvSpPr>
+          <p:nvPr>
+            <p:ph type="sldNum" sz="quarter" idx="5"/>
+          </p:nvPr>
+        </p:nvSpPr>
+        <p:spPr/>
+        <p:txBody>
+          <a:bodyPr/>
+          <a:lstStyle/>
+          <a:p>
+            <a:fld id="{EE000EEB-8338-48D7-8EE8-EE0082EF7602}" type="slidenum">
+              <a:rPr lang="en-US" smtClean="0"/>
+              <a:t>16</a:t>
+            </a:fld>
+            <a:endParaRPr lang="en-US" dirty="0"/>
+          </a:p>
+        </p:txBody>
+      </p:sp>
+    </p:spTree>
+    <p:extLst>
+      <p:ext uri="{BB962C8B-B14F-4D97-AF65-F5344CB8AC3E}">
+        <p14:creationId xmlns:p14="http://schemas.microsoft.com/office/powerpoint/2010/main" val="3654342239"/>
+      </p:ext>
+    </p:extLst>
+  </p:cSld>
+  <p:clrMapOvr>
+    <a:masterClrMapping/>
+  </p:clrMapOvr>
+</p:notes>
+</file>
+
+<file path=ppt/notesSlides/notesSlide17.xml><?xml version="1.0" encoding="utf-8"?>
+<p:notes xmlns:a="http://schemas.openxmlformats.org/drawingml/2006/main" xmlns:r="http://schemas.openxmlformats.org/officeDocument/2006/relationships" xmlns:p="http://schemas.openxmlformats.org/presentationml/2006/main">
+  <p:cSld>
+    <p:spTree>
+      <p:nvGrpSpPr>
+        <p:cNvPr id="1" name="">
+          <a:extLst>
+            <a:ext uri="{FF2B5EF4-FFF2-40B4-BE49-F238E27FC236}">
+              <a16:creationId xmlns:a16="http://schemas.microsoft.com/office/drawing/2014/main" id="{41D58732-58D5-97DF-3BDD-38DED972399B}"/>
+            </a:ext>
+          </a:extLst>
+        </p:cNvPr>
+        <p:cNvGrpSpPr/>
+        <p:nvPr/>
+      </p:nvGrpSpPr>
+      <p:grpSpPr>
+        <a:xfrm>
+          <a:off x="0" y="0"/>
+          <a:ext cx="0" cy="0"/>
+          <a:chOff x="0" y="0"/>
+          <a:chExt cx="0" cy="0"/>
+        </a:xfrm>
+      </p:grpSpPr>
+      <p:sp>
+        <p:nvSpPr>
+          <p:cNvPr id="2" name="Slide Image Placeholder 1">
+            <a:extLst>
+              <a:ext uri="{FF2B5EF4-FFF2-40B4-BE49-F238E27FC236}">
+                <a16:creationId xmlns:a16="http://schemas.microsoft.com/office/drawing/2014/main" id="{0078E8E1-C66F-1FD0-E6B3-ED12F3C0767A}"/>
+              </a:ext>
+            </a:extLst>
+          </p:cNvPr>
+          <p:cNvSpPr>
+            <a:spLocks noGrp="1" noRot="1" noChangeAspect="1"/>
+          </p:cNvSpPr>
+          <p:nvPr>
+            <p:ph type="sldImg"/>
+          </p:nvPr>
+        </p:nvSpPr>
+        <p:spPr/>
+        <p:txBody>
+          <a:bodyPr/>
+          <a:lstStyle/>
+          <a:p>
+            <a:endParaRPr lang="en-US"/>
+          </a:p>
+        </p:txBody>
+      </p:sp>
+      <p:sp>
+        <p:nvSpPr>
+          <p:cNvPr id="3" name="Notes Placeholder 2">
+            <a:extLst>
+              <a:ext uri="{FF2B5EF4-FFF2-40B4-BE49-F238E27FC236}">
+                <a16:creationId xmlns:a16="http://schemas.microsoft.com/office/drawing/2014/main" id="{E434F0A9-8C93-9C1C-6C4B-9D79AF196F60}"/>
+              </a:ext>
+            </a:extLst>
+          </p:cNvPr>
+          <p:cNvSpPr>
+            <a:spLocks noGrp="1"/>
+          </p:cNvSpPr>
+          <p:nvPr>
+            <p:ph type="body" idx="1"/>
+          </p:nvPr>
+        </p:nvSpPr>
+        <p:spPr/>
+        <p:txBody>
+          <a:bodyPr/>
+          <a:lstStyle/>
+          <a:p>
+            <a:endParaRPr lang="en-US" dirty="0"/>
+          </a:p>
+        </p:txBody>
+      </p:sp>
+      <p:sp>
+        <p:nvSpPr>
+          <p:cNvPr id="4" name="Slide Number Placeholder 3">
+            <a:extLst>
+              <a:ext uri="{FF2B5EF4-FFF2-40B4-BE49-F238E27FC236}">
+                <a16:creationId xmlns:a16="http://schemas.microsoft.com/office/drawing/2014/main" id="{C1462A1B-C342-71A2-5079-DCCBF169DE82}"/>
+              </a:ext>
+            </a:extLst>
+          </p:cNvPr>
+          <p:cNvSpPr>
+            <a:spLocks noGrp="1"/>
+          </p:cNvSpPr>
+          <p:nvPr>
+            <p:ph type="sldNum" sz="quarter" idx="5"/>
+          </p:nvPr>
+        </p:nvSpPr>
+        <p:spPr/>
+        <p:txBody>
+          <a:bodyPr/>
+          <a:lstStyle/>
+          <a:p>
+            <a:fld id="{EE000EEB-8338-48D7-8EE8-EE0082EF7602}" type="slidenum">
+              <a:rPr lang="en-US" smtClean="0"/>
+              <a:t>17</a:t>
+            </a:fld>
+            <a:endParaRPr lang="en-US" dirty="0"/>
+          </a:p>
+        </p:txBody>
+      </p:sp>
+    </p:spTree>
+    <p:extLst>
+      <p:ext uri="{BB962C8B-B14F-4D97-AF65-F5344CB8AC3E}">
+        <p14:creationId xmlns:p14="http://schemas.microsoft.com/office/powerpoint/2010/main" val="577771953"/>
+      </p:ext>
+    </p:extLst>
+  </p:cSld>
+  <p:clrMapOvr>
+    <a:masterClrMapping/>
+  </p:clrMapOvr>
+</p:notes>
+</file>
+
+<file path=ppt/notesSlides/notesSlide18.xml><?xml version="1.0" encoding="utf-8"?>
+<p:notes xmlns:a="http://schemas.openxmlformats.org/drawingml/2006/main" xmlns:r="http://schemas.openxmlformats.org/officeDocument/2006/relationships" xmlns:p="http://schemas.openxmlformats.org/presentationml/2006/main">
+  <p:cSld>
+    <p:spTree>
+      <p:nvGrpSpPr>
+        <p:cNvPr id="1" name="">
+          <a:extLst>
+            <a:ext uri="{FF2B5EF4-FFF2-40B4-BE49-F238E27FC236}">
               <a16:creationId xmlns:a16="http://schemas.microsoft.com/office/drawing/2014/main" id="{4EAC7126-4785-6F23-806A-94F4FA0E0FC3}"/>
             </a:ext>
           </a:extLst>
@@ -9679,7 +10272,7 @@
           <a:p>
             <a:fld id="{EE000EEB-8338-48D7-8EE8-EE0082EF7602}" type="slidenum">
               <a:rPr lang="en-US" smtClean="0"/>
-              <a:t>13</a:t>
+              <a:t>18</a:t>
             </a:fld>
             <a:endParaRPr lang="en-US" dirty="0"/>
           </a:p>
@@ -9698,7 +10291,7 @@
 </p:notes>
 </file>
 
-<file path=ppt/notesSlides/notesSlide14.xml><?xml version="1.0" encoding="utf-8"?>
+<file path=ppt/notesSlides/notesSlide19.xml><?xml version="1.0" encoding="utf-8"?>
 <p:notes xmlns:a="http://schemas.openxmlformats.org/drawingml/2006/main" xmlns:r="http://schemas.openxmlformats.org/officeDocument/2006/relationships" xmlns:p="http://schemas.openxmlformats.org/presentationml/2006/main">
   <p:cSld>
     <p:spTree>
@@ -9794,7 +10387,7 @@
           <a:p>
             <a:fld id="{EE000EEB-8338-48D7-8EE8-EE0082EF7602}" type="slidenum">
               <a:rPr lang="en-US" smtClean="0"/>
-              <a:t>14</a:t>
+              <a:t>19</a:t>
             </a:fld>
             <a:endParaRPr lang="en-US" dirty="0"/>
           </a:p>
@@ -9804,121 +10397,6 @@
     <p:extLst>
       <p:ext uri="{BB962C8B-B14F-4D97-AF65-F5344CB8AC3E}">
         <p14:creationId xmlns:p14="http://schemas.microsoft.com/office/powerpoint/2010/main" val="2206855608"/>
-      </p:ext>
-    </p:extLst>
-  </p:cSld>
-  <p:clrMapOvr>
-    <a:masterClrMapping/>
-  </p:clrMapOvr>
-</p:notes>
-</file>
-
-<file path=ppt/notesSlides/notesSlide15.xml><?xml version="1.0" encoding="utf-8"?>
-<p:notes xmlns:a="http://schemas.openxmlformats.org/drawingml/2006/main" xmlns:r="http://schemas.openxmlformats.org/officeDocument/2006/relationships" xmlns:p="http://schemas.openxmlformats.org/presentationml/2006/main">
-  <p:cSld>
-    <p:spTree>
-      <p:nvGrpSpPr>
-        <p:cNvPr id="1" name="">
-          <a:extLst>
-            <a:ext uri="{FF2B5EF4-FFF2-40B4-BE49-F238E27FC236}">
-              <a16:creationId xmlns:a16="http://schemas.microsoft.com/office/drawing/2014/main" id="{CC92FA0D-0222-ECB5-4EEC-A6F98D9220D8}"/>
-            </a:ext>
-          </a:extLst>
-        </p:cNvPr>
-        <p:cNvGrpSpPr/>
-        <p:nvPr/>
-      </p:nvGrpSpPr>
-      <p:grpSpPr>
-        <a:xfrm>
-          <a:off x="0" y="0"/>
-          <a:ext cx="0" cy="0"/>
-          <a:chOff x="0" y="0"/>
-          <a:chExt cx="0" cy="0"/>
-        </a:xfrm>
-      </p:grpSpPr>
-      <p:sp>
-        <p:nvSpPr>
-          <p:cNvPr id="2" name="Slide Image Placeholder 1">
-            <a:extLst>
-              <a:ext uri="{FF2B5EF4-FFF2-40B4-BE49-F238E27FC236}">
-                <a16:creationId xmlns:a16="http://schemas.microsoft.com/office/drawing/2014/main" id="{78E3CA61-C078-B0F9-5D5C-538F58DF3472}"/>
-              </a:ext>
-            </a:extLst>
-          </p:cNvPr>
-          <p:cNvSpPr>
-            <a:spLocks noGrp="1" noRot="1" noChangeAspect="1"/>
-          </p:cNvSpPr>
-          <p:nvPr>
-            <p:ph type="sldImg"/>
-          </p:nvPr>
-        </p:nvSpPr>
-        <p:spPr/>
-        <p:txBody>
-          <a:bodyPr/>
-          <a:lstStyle/>
-          <a:p>
-            <a:endParaRPr lang="en-US"/>
-          </a:p>
-        </p:txBody>
-      </p:sp>
-      <p:sp>
-        <p:nvSpPr>
-          <p:cNvPr id="3" name="Notes Placeholder 2">
-            <a:extLst>
-              <a:ext uri="{FF2B5EF4-FFF2-40B4-BE49-F238E27FC236}">
-                <a16:creationId xmlns:a16="http://schemas.microsoft.com/office/drawing/2014/main" id="{86328CB7-DB05-40F8-BAD4-4098275D7AF4}"/>
-              </a:ext>
-            </a:extLst>
-          </p:cNvPr>
-          <p:cNvSpPr>
-            <a:spLocks noGrp="1"/>
-          </p:cNvSpPr>
-          <p:nvPr>
-            <p:ph type="body" idx="1"/>
-          </p:nvPr>
-        </p:nvSpPr>
-        <p:spPr/>
-        <p:txBody>
-          <a:bodyPr/>
-          <a:lstStyle/>
-          <a:p>
-            <a:endParaRPr lang="en-US" dirty="0"/>
-          </a:p>
-        </p:txBody>
-      </p:sp>
-      <p:sp>
-        <p:nvSpPr>
-          <p:cNvPr id="4" name="Slide Number Placeholder 3">
-            <a:extLst>
-              <a:ext uri="{FF2B5EF4-FFF2-40B4-BE49-F238E27FC236}">
-                <a16:creationId xmlns:a16="http://schemas.microsoft.com/office/drawing/2014/main" id="{56F40C18-A1F7-9F81-2FAD-19698786A1E4}"/>
-              </a:ext>
-            </a:extLst>
-          </p:cNvPr>
-          <p:cNvSpPr>
-            <a:spLocks noGrp="1"/>
-          </p:cNvSpPr>
-          <p:nvPr>
-            <p:ph type="sldNum" sz="quarter" idx="5"/>
-          </p:nvPr>
-        </p:nvSpPr>
-        <p:spPr/>
-        <p:txBody>
-          <a:bodyPr/>
-          <a:lstStyle/>
-          <a:p>
-            <a:fld id="{EE000EEB-8338-48D7-8EE8-EE0082EF7602}" type="slidenum">
-              <a:rPr lang="en-US" smtClean="0"/>
-              <a:t>15</a:t>
-            </a:fld>
-            <a:endParaRPr lang="en-US" dirty="0"/>
-          </a:p>
-        </p:txBody>
-      </p:sp>
-    </p:spTree>
-    <p:extLst>
-      <p:ext uri="{BB962C8B-B14F-4D97-AF65-F5344CB8AC3E}">
-        <p14:creationId xmlns:p14="http://schemas.microsoft.com/office/powerpoint/2010/main" val="2231218762"/>
       </p:ext>
     </p:extLst>
   </p:cSld>
@@ -10034,6 +10512,121 @@
     <p:extLst>
       <p:ext uri="{BB962C8B-B14F-4D97-AF65-F5344CB8AC3E}">
         <p14:creationId xmlns:p14="http://schemas.microsoft.com/office/powerpoint/2010/main" val="1232110598"/>
+      </p:ext>
+    </p:extLst>
+  </p:cSld>
+  <p:clrMapOvr>
+    <a:masterClrMapping/>
+  </p:clrMapOvr>
+</p:notes>
+</file>
+
+<file path=ppt/notesSlides/notesSlide20.xml><?xml version="1.0" encoding="utf-8"?>
+<p:notes xmlns:a="http://schemas.openxmlformats.org/drawingml/2006/main" xmlns:r="http://schemas.openxmlformats.org/officeDocument/2006/relationships" xmlns:p="http://schemas.openxmlformats.org/presentationml/2006/main">
+  <p:cSld>
+    <p:spTree>
+      <p:nvGrpSpPr>
+        <p:cNvPr id="1" name="">
+          <a:extLst>
+            <a:ext uri="{FF2B5EF4-FFF2-40B4-BE49-F238E27FC236}">
+              <a16:creationId xmlns:a16="http://schemas.microsoft.com/office/drawing/2014/main" id="{CC92FA0D-0222-ECB5-4EEC-A6F98D9220D8}"/>
+            </a:ext>
+          </a:extLst>
+        </p:cNvPr>
+        <p:cNvGrpSpPr/>
+        <p:nvPr/>
+      </p:nvGrpSpPr>
+      <p:grpSpPr>
+        <a:xfrm>
+          <a:off x="0" y="0"/>
+          <a:ext cx="0" cy="0"/>
+          <a:chOff x="0" y="0"/>
+          <a:chExt cx="0" cy="0"/>
+        </a:xfrm>
+      </p:grpSpPr>
+      <p:sp>
+        <p:nvSpPr>
+          <p:cNvPr id="2" name="Slide Image Placeholder 1">
+            <a:extLst>
+              <a:ext uri="{FF2B5EF4-FFF2-40B4-BE49-F238E27FC236}">
+                <a16:creationId xmlns:a16="http://schemas.microsoft.com/office/drawing/2014/main" id="{78E3CA61-C078-B0F9-5D5C-538F58DF3472}"/>
+              </a:ext>
+            </a:extLst>
+          </p:cNvPr>
+          <p:cNvSpPr>
+            <a:spLocks noGrp="1" noRot="1" noChangeAspect="1"/>
+          </p:cNvSpPr>
+          <p:nvPr>
+            <p:ph type="sldImg"/>
+          </p:nvPr>
+        </p:nvSpPr>
+        <p:spPr/>
+        <p:txBody>
+          <a:bodyPr/>
+          <a:lstStyle/>
+          <a:p>
+            <a:endParaRPr lang="en-US"/>
+          </a:p>
+        </p:txBody>
+      </p:sp>
+      <p:sp>
+        <p:nvSpPr>
+          <p:cNvPr id="3" name="Notes Placeholder 2">
+            <a:extLst>
+              <a:ext uri="{FF2B5EF4-FFF2-40B4-BE49-F238E27FC236}">
+                <a16:creationId xmlns:a16="http://schemas.microsoft.com/office/drawing/2014/main" id="{86328CB7-DB05-40F8-BAD4-4098275D7AF4}"/>
+              </a:ext>
+            </a:extLst>
+          </p:cNvPr>
+          <p:cNvSpPr>
+            <a:spLocks noGrp="1"/>
+          </p:cNvSpPr>
+          <p:nvPr>
+            <p:ph type="body" idx="1"/>
+          </p:nvPr>
+        </p:nvSpPr>
+        <p:spPr/>
+        <p:txBody>
+          <a:bodyPr/>
+          <a:lstStyle/>
+          <a:p>
+            <a:endParaRPr lang="en-US" dirty="0"/>
+          </a:p>
+        </p:txBody>
+      </p:sp>
+      <p:sp>
+        <p:nvSpPr>
+          <p:cNvPr id="4" name="Slide Number Placeholder 3">
+            <a:extLst>
+              <a:ext uri="{FF2B5EF4-FFF2-40B4-BE49-F238E27FC236}">
+                <a16:creationId xmlns:a16="http://schemas.microsoft.com/office/drawing/2014/main" id="{56F40C18-A1F7-9F81-2FAD-19698786A1E4}"/>
+              </a:ext>
+            </a:extLst>
+          </p:cNvPr>
+          <p:cNvSpPr>
+            <a:spLocks noGrp="1"/>
+          </p:cNvSpPr>
+          <p:nvPr>
+            <p:ph type="sldNum" sz="quarter" idx="5"/>
+          </p:nvPr>
+        </p:nvSpPr>
+        <p:spPr/>
+        <p:txBody>
+          <a:bodyPr/>
+          <a:lstStyle/>
+          <a:p>
+            <a:fld id="{EE000EEB-8338-48D7-8EE8-EE0082EF7602}" type="slidenum">
+              <a:rPr lang="en-US" smtClean="0"/>
+              <a:t>20</a:t>
+            </a:fld>
+            <a:endParaRPr lang="en-US" dirty="0"/>
+          </a:p>
+        </p:txBody>
+      </p:sp>
+    </p:spTree>
+    <p:extLst>
+      <p:ext uri="{BB962C8B-B14F-4D97-AF65-F5344CB8AC3E}">
+        <p14:creationId xmlns:p14="http://schemas.microsoft.com/office/powerpoint/2010/main" val="2231218762"/>
       </p:ext>
     </p:extLst>
   </p:cSld>
@@ -11031,7 +11624,7 @@
           <a:p>
             <a:fld id="{4AAD347D-5ACD-4C99-B74B-A9C85AD731AF}" type="datetimeFigureOut">
               <a:rPr lang="en-US" dirty="0"/>
-              <a:t>1/24/2026</a:t>
+              <a:t>1/27/2026</a:t>
             </a:fld>
             <a:endParaRPr lang="en-US" dirty="0"/>
           </a:p>
@@ -11301,7 +11894,7 @@
           <a:p>
             <a:fld id="{4509A250-FF31-4206-8172-F9D3106AACB1}" type="datetimeFigureOut">
               <a:rPr lang="en-US" dirty="0"/>
-              <a:t>1/24/2026</a:t>
+              <a:t>1/27/2026</a:t>
             </a:fld>
             <a:endParaRPr lang="en-US" dirty="0"/>
           </a:p>
@@ -11490,7 +12083,7 @@
           <a:p>
             <a:fld id="{4509A250-FF31-4206-8172-F9D3106AACB1}" type="datetimeFigureOut">
               <a:rPr lang="en-US" dirty="0"/>
-              <a:t>1/24/2026</a:t>
+              <a:t>1/27/2026</a:t>
             </a:fld>
             <a:endParaRPr lang="en-US" dirty="0"/>
           </a:p>
@@ -11753,7 +12346,7 @@
           <a:p>
             <a:fld id="{4509A250-FF31-4206-8172-F9D3106AACB1}" type="datetimeFigureOut">
               <a:rPr lang="en-US" dirty="0"/>
-              <a:t>1/24/2026</a:t>
+              <a:t>1/27/2026</a:t>
             </a:fld>
             <a:endParaRPr lang="en-US" dirty="0"/>
           </a:p>
@@ -12080,7 +12673,7 @@
           <a:p>
             <a:fld id="{4509A250-FF31-4206-8172-F9D3106AACB1}" type="datetimeFigureOut">
               <a:rPr lang="en-US" dirty="0"/>
-              <a:t>1/24/2026</a:t>
+              <a:t>1/27/2026</a:t>
             </a:fld>
             <a:endParaRPr lang="en-US" dirty="0"/>
           </a:p>
@@ -12685,7 +13278,7 @@
           <a:p>
             <a:fld id="{4509A250-FF31-4206-8172-F9D3106AACB1}" type="datetimeFigureOut">
               <a:rPr lang="en-US" dirty="0"/>
-              <a:t>1/24/2026</a:t>
+              <a:t>1/27/2026</a:t>
             </a:fld>
             <a:endParaRPr lang="en-US" dirty="0"/>
           </a:p>
@@ -13527,7 +14120,7 @@
           <a:p>
             <a:fld id="{4509A250-FF31-4206-8172-F9D3106AACB1}" type="datetimeFigureOut">
               <a:rPr lang="en-US" dirty="0"/>
-              <a:t>1/24/2026</a:t>
+              <a:t>1/27/2026</a:t>
             </a:fld>
             <a:endParaRPr lang="en-US" dirty="0"/>
           </a:p>
@@ -13692,7 +14285,7 @@
           <a:p>
             <a:fld id="{4509A250-FF31-4206-8172-F9D3106AACB1}" type="datetimeFigureOut">
               <a:rPr lang="en-US" dirty="0"/>
-              <a:t>1/24/2026</a:t>
+              <a:t>1/27/2026</a:t>
             </a:fld>
             <a:endParaRPr lang="en-US" dirty="0"/>
           </a:p>
@@ -13867,7 +14460,7 @@
           <a:p>
             <a:fld id="{4509A250-FF31-4206-8172-F9D3106AACB1}" type="datetimeFigureOut">
               <a:rPr lang="en-US" dirty="0"/>
-              <a:t>1/24/2026</a:t>
+              <a:t>1/27/2026</a:t>
             </a:fld>
             <a:endParaRPr lang="en-US" dirty="0"/>
           </a:p>
@@ -14032,7 +14625,7 @@
           <a:p>
             <a:fld id="{4509A250-FF31-4206-8172-F9D3106AACB1}" type="datetimeFigureOut">
               <a:rPr lang="en-US" dirty="0"/>
-              <a:t>1/24/2026</a:t>
+              <a:t>1/27/2026</a:t>
             </a:fld>
             <a:endParaRPr lang="en-US" dirty="0"/>
           </a:p>
@@ -14271,7 +14864,7 @@
           <a:p>
             <a:fld id="{4509A250-FF31-4206-8172-F9D3106AACB1}" type="datetimeFigureOut">
               <a:rPr lang="en-US" dirty="0"/>
-              <a:t>1/24/2026</a:t>
+              <a:t>1/27/2026</a:t>
             </a:fld>
             <a:endParaRPr lang="en-US" dirty="0"/>
           </a:p>
@@ -14558,7 +15151,7 @@
           <a:p>
             <a:fld id="{4509A250-FF31-4206-8172-F9D3106AACB1}" type="datetimeFigureOut">
               <a:rPr lang="en-US" dirty="0"/>
-              <a:t>1/24/2026</a:t>
+              <a:t>1/27/2026</a:t>
             </a:fld>
             <a:endParaRPr lang="en-US" dirty="0"/>
           </a:p>
@@ -14991,7 +15584,7 @@
           <a:p>
             <a:fld id="{4509A250-FF31-4206-8172-F9D3106AACB1}" type="datetimeFigureOut">
               <a:rPr lang="en-US" dirty="0"/>
-              <a:t>1/24/2026</a:t>
+              <a:t>1/27/2026</a:t>
             </a:fld>
             <a:endParaRPr lang="en-US" dirty="0"/>
           </a:p>
@@ -15104,7 +15697,7 @@
           <a:p>
             <a:fld id="{4509A250-FF31-4206-8172-F9D3106AACB1}" type="datetimeFigureOut">
               <a:rPr lang="en-US" dirty="0"/>
-              <a:t>1/24/2026</a:t>
+              <a:t>1/27/2026</a:t>
             </a:fld>
             <a:endParaRPr lang="en-US" dirty="0"/>
           </a:p>
@@ -15194,7 +15787,7 @@
           <a:p>
             <a:fld id="{4509A250-FF31-4206-8172-F9D3106AACB1}" type="datetimeFigureOut">
               <a:rPr lang="en-US" dirty="0"/>
-              <a:t>1/24/2026</a:t>
+              <a:t>1/27/2026</a:t>
             </a:fld>
             <a:endParaRPr lang="en-US" dirty="0"/>
           </a:p>
@@ -15468,7 +16061,7 @@
           <a:p>
             <a:fld id="{4509A250-FF31-4206-8172-F9D3106AACB1}" type="datetimeFigureOut">
               <a:rPr lang="en-US" dirty="0"/>
-              <a:t>1/24/2026</a:t>
+              <a:t>1/27/2026</a:t>
             </a:fld>
             <a:endParaRPr lang="en-US" dirty="0"/>
           </a:p>
@@ -15738,7 +16331,7 @@
           <a:p>
             <a:fld id="{4509A250-FF31-4206-8172-F9D3106AACB1}" type="datetimeFigureOut">
               <a:rPr lang="en-US" dirty="0"/>
-              <a:t>1/24/2026</a:t>
+              <a:t>1/27/2026</a:t>
             </a:fld>
             <a:endParaRPr lang="en-US" dirty="0"/>
           </a:p>
@@ -16176,7 +16769,7 @@
           <a:p>
             <a:fld id="{4509A250-FF31-4206-8172-F9D3106AACB1}" type="datetimeFigureOut">
               <a:rPr lang="en-US" dirty="0"/>
-              <a:t>1/24/2026</a:t>
+              <a:t>1/27/2026</a:t>
             </a:fld>
             <a:endParaRPr lang="en-US" dirty="0"/>
           </a:p>
@@ -19710,6 +20303,4213 @@
         <p:cNvPr id="1" name="">
           <a:extLst>
             <a:ext uri="{FF2B5EF4-FFF2-40B4-BE49-F238E27FC236}">
+              <a16:creationId xmlns:a16="http://schemas.microsoft.com/office/drawing/2014/main" id="{FEBC6ABF-C404-FFDF-B8A1-8BE0D4375675}"/>
+            </a:ext>
+          </a:extLst>
+        </p:cNvPr>
+        <p:cNvGrpSpPr/>
+        <p:nvPr/>
+      </p:nvGrpSpPr>
+      <p:grpSpPr>
+        <a:xfrm>
+          <a:off x="0" y="0"/>
+          <a:ext cx="0" cy="0"/>
+          <a:chOff x="0" y="0"/>
+          <a:chExt cx="0" cy="0"/>
+        </a:xfrm>
+      </p:grpSpPr>
+      <p:pic>
+        <p:nvPicPr>
+          <p:cNvPr id="5" name="Picture 4" descr="chain links">
+            <a:extLst>
+              <a:ext uri="{FF2B5EF4-FFF2-40B4-BE49-F238E27FC236}">
+                <a16:creationId xmlns:a16="http://schemas.microsoft.com/office/drawing/2014/main" id="{DD3EB650-D78F-3E4A-2131-50EA9F30DF9A}"/>
+              </a:ext>
+            </a:extLst>
+          </p:cNvPr>
+          <p:cNvPicPr>
+            <a:picLocks noChangeAspect="1"/>
+          </p:cNvPicPr>
+          <p:nvPr/>
+        </p:nvPicPr>
+        <p:blipFill rotWithShape="1">
+          <a:blip r:embed="rId3">
+            <a:duotone>
+              <a:prstClr val="black"/>
+              <a:schemeClr val="accent5">
+                <a:tint val="45000"/>
+                <a:satMod val="400000"/>
+              </a:schemeClr>
+            </a:duotone>
+            <a:alphaModFix amt="25000"/>
+          </a:blip>
+          <a:srcRect t="23391" r="9091"/>
+          <a:stretch/>
+        </p:blipFill>
+        <p:spPr>
+          <a:xfrm>
+            <a:off x="0" y="10"/>
+            <a:ext cx="12191980" cy="6857990"/>
+          </a:xfrm>
+          <a:prstGeom prst="rect">
+            <a:avLst/>
+          </a:prstGeom>
+        </p:spPr>
+      </p:pic>
+      <p:sp>
+        <p:nvSpPr>
+          <p:cNvPr id="7" name="Subtitle 2">
+            <a:extLst>
+              <a:ext uri="{FF2B5EF4-FFF2-40B4-BE49-F238E27FC236}">
+                <a16:creationId xmlns:a16="http://schemas.microsoft.com/office/drawing/2014/main" id="{AAF81C2A-10C0-E8DA-C56D-2C7608AFA5EA}"/>
+              </a:ext>
+            </a:extLst>
+          </p:cNvPr>
+          <p:cNvSpPr txBox="1">
+            <a:spLocks/>
+          </p:cNvSpPr>
+          <p:nvPr/>
+        </p:nvSpPr>
+        <p:spPr>
+          <a:xfrm>
+            <a:off x="8483689" y="2419"/>
+            <a:ext cx="2102069" cy="1447801"/>
+          </a:xfrm>
+          <a:prstGeom prst="rect">
+            <a:avLst/>
+          </a:prstGeom>
+        </p:spPr>
+        <p:txBody>
+          <a:bodyPr vert="horz" lIns="91440" tIns="45720" rIns="91440" bIns="45720" rtlCol="0" anchor="ctr">
+            <a:normAutofit fontScale="92500" lnSpcReduction="20000"/>
+          </a:bodyPr>
+          <a:lstStyle>
+            <a:lvl1pPr marL="0" indent="0" algn="l" defTabSz="457200" rtl="0" eaLnBrk="1" latinLnBrk="0" hangingPunct="1">
+              <a:spcBef>
+                <a:spcPts val="1000"/>
+              </a:spcBef>
+              <a:spcAft>
+                <a:spcPts val="0"/>
+              </a:spcAft>
+              <a:buClr>
+                <a:schemeClr val="accent1"/>
+              </a:buClr>
+              <a:buSzPct val="80000"/>
+              <a:buFont typeface="Wingdings 3" charset="2"/>
+              <a:buNone/>
+              <a:defRPr sz="2000" b="0" i="0" kern="1200" cap="all">
+                <a:solidFill>
+                  <a:schemeClr val="accent1"/>
+                </a:solidFill>
+                <a:latin typeface="+mj-lt"/>
+                <a:ea typeface="+mj-ea"/>
+                <a:cs typeface="+mj-cs"/>
+              </a:defRPr>
+            </a:lvl1pPr>
+            <a:lvl2pPr marL="457200" indent="0" algn="ctr" defTabSz="457200" rtl="0" eaLnBrk="1" latinLnBrk="0" hangingPunct="1">
+              <a:spcBef>
+                <a:spcPts val="1000"/>
+              </a:spcBef>
+              <a:spcAft>
+                <a:spcPts val="0"/>
+              </a:spcAft>
+              <a:buClr>
+                <a:schemeClr val="accent1"/>
+              </a:buClr>
+              <a:buSzPct val="80000"/>
+              <a:buFont typeface="Wingdings 3" charset="2"/>
+              <a:buNone/>
+              <a:defRPr sz="1800" b="0" i="0" kern="1200">
+                <a:solidFill>
+                  <a:schemeClr val="tx1">
+                    <a:tint val="75000"/>
+                  </a:schemeClr>
+                </a:solidFill>
+                <a:latin typeface="+mj-lt"/>
+                <a:ea typeface="+mj-ea"/>
+                <a:cs typeface="+mj-cs"/>
+              </a:defRPr>
+            </a:lvl2pPr>
+            <a:lvl3pPr marL="914400" indent="0" algn="ctr" defTabSz="457200" rtl="0" eaLnBrk="1" latinLnBrk="0" hangingPunct="1">
+              <a:spcBef>
+                <a:spcPts val="1000"/>
+              </a:spcBef>
+              <a:spcAft>
+                <a:spcPts val="0"/>
+              </a:spcAft>
+              <a:buClr>
+                <a:schemeClr val="accent1"/>
+              </a:buClr>
+              <a:buSzPct val="80000"/>
+              <a:buFont typeface="Wingdings 3" charset="2"/>
+              <a:buNone/>
+              <a:defRPr sz="1600" b="0" i="0" kern="1200">
+                <a:solidFill>
+                  <a:schemeClr val="tx1">
+                    <a:tint val="75000"/>
+                  </a:schemeClr>
+                </a:solidFill>
+                <a:latin typeface="+mj-lt"/>
+                <a:ea typeface="+mj-ea"/>
+                <a:cs typeface="+mj-cs"/>
+              </a:defRPr>
+            </a:lvl3pPr>
+            <a:lvl4pPr marL="1371600" indent="0" algn="ctr" defTabSz="457200" rtl="0" eaLnBrk="1" latinLnBrk="0" hangingPunct="1">
+              <a:spcBef>
+                <a:spcPts val="1000"/>
+              </a:spcBef>
+              <a:spcAft>
+                <a:spcPts val="0"/>
+              </a:spcAft>
+              <a:buClr>
+                <a:schemeClr val="accent1"/>
+              </a:buClr>
+              <a:buSzPct val="80000"/>
+              <a:buFont typeface="Wingdings 3" charset="2"/>
+              <a:buNone/>
+              <a:defRPr sz="1400" b="0" i="0" kern="1200">
+                <a:solidFill>
+                  <a:schemeClr val="tx1">
+                    <a:tint val="75000"/>
+                  </a:schemeClr>
+                </a:solidFill>
+                <a:latin typeface="+mj-lt"/>
+                <a:ea typeface="+mj-ea"/>
+                <a:cs typeface="+mj-cs"/>
+              </a:defRPr>
+            </a:lvl4pPr>
+            <a:lvl5pPr marL="1828800" indent="0" algn="ctr" defTabSz="457200" rtl="0" eaLnBrk="1" latinLnBrk="0" hangingPunct="1">
+              <a:spcBef>
+                <a:spcPts val="1000"/>
+              </a:spcBef>
+              <a:spcAft>
+                <a:spcPts val="0"/>
+              </a:spcAft>
+              <a:buClr>
+                <a:schemeClr val="accent1"/>
+              </a:buClr>
+              <a:buSzPct val="80000"/>
+              <a:buFont typeface="Wingdings 3" charset="2"/>
+              <a:buNone/>
+              <a:defRPr sz="1400" b="0" i="0" kern="1200">
+                <a:solidFill>
+                  <a:schemeClr val="tx1">
+                    <a:tint val="75000"/>
+                  </a:schemeClr>
+                </a:solidFill>
+                <a:latin typeface="+mj-lt"/>
+                <a:ea typeface="+mj-ea"/>
+                <a:cs typeface="+mj-cs"/>
+              </a:defRPr>
+            </a:lvl5pPr>
+            <a:lvl6pPr marL="2286000" indent="0" algn="ctr" defTabSz="457200" rtl="0" eaLnBrk="1" latinLnBrk="0" hangingPunct="1">
+              <a:spcBef>
+                <a:spcPts val="1000"/>
+              </a:spcBef>
+              <a:spcAft>
+                <a:spcPts val="0"/>
+              </a:spcAft>
+              <a:buClr>
+                <a:schemeClr val="accent1"/>
+              </a:buClr>
+              <a:buSzPct val="80000"/>
+              <a:buFont typeface="Wingdings 3" charset="2"/>
+              <a:buNone/>
+              <a:defRPr sz="1400" b="0" i="0" kern="1200">
+                <a:solidFill>
+                  <a:schemeClr val="tx1">
+                    <a:tint val="75000"/>
+                  </a:schemeClr>
+                </a:solidFill>
+                <a:latin typeface="+mj-lt"/>
+                <a:ea typeface="+mj-ea"/>
+                <a:cs typeface="+mj-cs"/>
+              </a:defRPr>
+            </a:lvl6pPr>
+            <a:lvl7pPr marL="2743200" indent="0" algn="ctr" defTabSz="457200" rtl="0" eaLnBrk="1" latinLnBrk="0" hangingPunct="1">
+              <a:spcBef>
+                <a:spcPts val="1000"/>
+              </a:spcBef>
+              <a:spcAft>
+                <a:spcPts val="0"/>
+              </a:spcAft>
+              <a:buClr>
+                <a:schemeClr val="accent1"/>
+              </a:buClr>
+              <a:buSzPct val="80000"/>
+              <a:buFont typeface="Wingdings 3" charset="2"/>
+              <a:buNone/>
+              <a:defRPr sz="1400" b="0" i="0" kern="1200">
+                <a:solidFill>
+                  <a:schemeClr val="tx1">
+                    <a:tint val="75000"/>
+                  </a:schemeClr>
+                </a:solidFill>
+                <a:latin typeface="+mj-lt"/>
+                <a:ea typeface="+mj-ea"/>
+                <a:cs typeface="+mj-cs"/>
+              </a:defRPr>
+            </a:lvl7pPr>
+            <a:lvl8pPr marL="3200400" indent="0" algn="ctr" defTabSz="457200" rtl="0" eaLnBrk="1" latinLnBrk="0" hangingPunct="1">
+              <a:spcBef>
+                <a:spcPts val="1000"/>
+              </a:spcBef>
+              <a:spcAft>
+                <a:spcPts val="0"/>
+              </a:spcAft>
+              <a:buClr>
+                <a:schemeClr val="accent1"/>
+              </a:buClr>
+              <a:buSzPct val="80000"/>
+              <a:buFont typeface="Wingdings 3" charset="2"/>
+              <a:buNone/>
+              <a:defRPr sz="1400" b="0" i="0" kern="1200">
+                <a:solidFill>
+                  <a:schemeClr val="tx1">
+                    <a:tint val="75000"/>
+                  </a:schemeClr>
+                </a:solidFill>
+                <a:latin typeface="+mj-lt"/>
+                <a:ea typeface="+mj-ea"/>
+                <a:cs typeface="+mj-cs"/>
+              </a:defRPr>
+            </a:lvl8pPr>
+            <a:lvl9pPr marL="3657600" indent="0" algn="ctr" defTabSz="457200" rtl="0" eaLnBrk="1" latinLnBrk="0" hangingPunct="1">
+              <a:spcBef>
+                <a:spcPts val="1000"/>
+              </a:spcBef>
+              <a:spcAft>
+                <a:spcPts val="0"/>
+              </a:spcAft>
+              <a:buClr>
+                <a:schemeClr val="accent1"/>
+              </a:buClr>
+              <a:buSzPct val="80000"/>
+              <a:buFont typeface="Wingdings 3" charset="2"/>
+              <a:buNone/>
+              <a:defRPr sz="1400" b="0" i="0" kern="1200">
+                <a:solidFill>
+                  <a:schemeClr val="tx1">
+                    <a:tint val="75000"/>
+                  </a:schemeClr>
+                </a:solidFill>
+                <a:latin typeface="+mj-lt"/>
+                <a:ea typeface="+mj-ea"/>
+                <a:cs typeface="+mj-cs"/>
+              </a:defRPr>
+            </a:lvl9pPr>
+          </a:lstStyle>
+          <a:p>
+            <a:pPr algn="ctr"/>
+            <a:r>
+              <a:rPr lang="en-US" sz="11500" b="1" dirty="0"/>
+              <a:t>12</a:t>
+            </a:r>
+          </a:p>
+        </p:txBody>
+      </p:sp>
+      <p:pic>
+        <p:nvPicPr>
+          <p:cNvPr id="4" name="Picture 3">
+            <a:extLst>
+              <a:ext uri="{FF2B5EF4-FFF2-40B4-BE49-F238E27FC236}">
+                <a16:creationId xmlns:a16="http://schemas.microsoft.com/office/drawing/2014/main" id="{3A59E6A6-1065-A9A6-1330-EB39D7B2C809}"/>
+              </a:ext>
+            </a:extLst>
+          </p:cNvPr>
+          <p:cNvPicPr>
+            <a:picLocks noChangeAspect="1"/>
+          </p:cNvPicPr>
+          <p:nvPr/>
+        </p:nvPicPr>
+        <p:blipFill>
+          <a:blip r:embed="rId4"/>
+          <a:stretch>
+            <a:fillRect/>
+          </a:stretch>
+        </p:blipFill>
+        <p:spPr>
+          <a:xfrm>
+            <a:off x="0" y="0"/>
+            <a:ext cx="3896391" cy="2481677"/>
+          </a:xfrm>
+          <a:prstGeom prst="rect">
+            <a:avLst/>
+          </a:prstGeom>
+          <a:ln>
+            <a:noFill/>
+          </a:ln>
+          <a:effectLst>
+            <a:softEdge rad="112500"/>
+          </a:effectLst>
+        </p:spPr>
+      </p:pic>
+      <p:sp>
+        <p:nvSpPr>
+          <p:cNvPr id="2" name="Title 1">
+            <a:extLst>
+              <a:ext uri="{FF2B5EF4-FFF2-40B4-BE49-F238E27FC236}">
+                <a16:creationId xmlns:a16="http://schemas.microsoft.com/office/drawing/2014/main" id="{4C300F1C-369E-E508-30A3-D3A9DB61BE32}"/>
+              </a:ext>
+            </a:extLst>
+          </p:cNvPr>
+          <p:cNvSpPr>
+            <a:spLocks noGrp="1"/>
+          </p:cNvSpPr>
+          <p:nvPr>
+            <p:ph type="ctrTitle"/>
+          </p:nvPr>
+        </p:nvSpPr>
+        <p:spPr>
+          <a:xfrm>
+            <a:off x="3477730" y="50040"/>
+            <a:ext cx="4741596" cy="946553"/>
+          </a:xfrm>
+        </p:spPr>
+        <p:txBody>
+          <a:bodyPr anchor="ctr">
+            <a:normAutofit fontScale="90000"/>
+          </a:bodyPr>
+          <a:lstStyle/>
+          <a:p>
+            <a:r>
+              <a:rPr lang="en-US" sz="6000" b="1" dirty="0"/>
+              <a:t>App Router</a:t>
+            </a:r>
+            <a:endParaRPr lang="ru-RU" sz="6000" b="1" dirty="0"/>
+          </a:p>
+        </p:txBody>
+      </p:sp>
+      <p:pic>
+        <p:nvPicPr>
+          <p:cNvPr id="6" name="Picture 5">
+            <a:extLst>
+              <a:ext uri="{FF2B5EF4-FFF2-40B4-BE49-F238E27FC236}">
+                <a16:creationId xmlns:a16="http://schemas.microsoft.com/office/drawing/2014/main" id="{AAF3FBE0-DF47-7302-97C7-E72DF9F39B22}"/>
+              </a:ext>
+            </a:extLst>
+          </p:cNvPr>
+          <p:cNvPicPr>
+            <a:picLocks noChangeAspect="1"/>
+          </p:cNvPicPr>
+          <p:nvPr/>
+        </p:nvPicPr>
+        <p:blipFill>
+          <a:blip r:embed="rId5"/>
+          <a:stretch>
+            <a:fillRect/>
+          </a:stretch>
+        </p:blipFill>
+        <p:spPr>
+          <a:xfrm>
+            <a:off x="10672842" y="271032"/>
+            <a:ext cx="1420028" cy="652758"/>
+          </a:xfrm>
+          <a:prstGeom prst="rect">
+            <a:avLst/>
+          </a:prstGeom>
+          <a:ln>
+            <a:noFill/>
+          </a:ln>
+          <a:effectLst>
+            <a:softEdge rad="112500"/>
+          </a:effectLst>
+        </p:spPr>
+      </p:pic>
+      <p:sp>
+        <p:nvSpPr>
+          <p:cNvPr id="3" name="Subtitle 2">
+            <a:extLst>
+              <a:ext uri="{FF2B5EF4-FFF2-40B4-BE49-F238E27FC236}">
+                <a16:creationId xmlns:a16="http://schemas.microsoft.com/office/drawing/2014/main" id="{44E3EB08-FE5B-9194-FBFE-C3172AEEFE98}"/>
+              </a:ext>
+            </a:extLst>
+          </p:cNvPr>
+          <p:cNvSpPr>
+            <a:spLocks noGrp="1"/>
+          </p:cNvSpPr>
+          <p:nvPr>
+            <p:ph type="subTitle" idx="1"/>
+          </p:nvPr>
+        </p:nvSpPr>
+        <p:spPr>
+          <a:xfrm>
+            <a:off x="2685143" y="1083848"/>
+            <a:ext cx="9407727" cy="788415"/>
+          </a:xfrm>
+          <a:solidFill>
+            <a:schemeClr val="accent6">
+              <a:alpha val="50000"/>
+            </a:schemeClr>
+          </a:solidFill>
+          <a:ln>
+            <a:noFill/>
+          </a:ln>
+        </p:spPr>
+        <p:style>
+          <a:lnRef idx="0">
+            <a:scrgbClr r="0" g="0" b="0"/>
+          </a:lnRef>
+          <a:fillRef idx="0">
+            <a:scrgbClr r="0" g="0" b="0"/>
+          </a:fillRef>
+          <a:effectRef idx="0">
+            <a:scrgbClr r="0" g="0" b="0"/>
+          </a:effectRef>
+          <a:fontRef idx="minor">
+            <a:schemeClr val="lt1"/>
+          </a:fontRef>
+        </p:style>
+        <p:txBody>
+          <a:bodyPr anchor="ctr">
+            <a:normAutofit lnSpcReduction="10000"/>
+          </a:bodyPr>
+          <a:lstStyle/>
+          <a:p>
+            <a:r>
+              <a:rPr lang="en-US" altLang="zh-CN" sz="4800" b="1" dirty="0"/>
+              <a:t>4. Creating Layouts &amp; Pages</a:t>
+            </a:r>
+            <a:endParaRPr lang="en-US" sz="4800" b="1" dirty="0"/>
+          </a:p>
+        </p:txBody>
+      </p:sp>
+      <p:pic>
+        <p:nvPicPr>
+          <p:cNvPr id="10" name="Picture 9">
+            <a:extLst>
+              <a:ext uri="{FF2B5EF4-FFF2-40B4-BE49-F238E27FC236}">
+                <a16:creationId xmlns:a16="http://schemas.microsoft.com/office/drawing/2014/main" id="{B877A86A-F0DA-6605-2EF3-9C33FC5938E2}"/>
+              </a:ext>
+            </a:extLst>
+          </p:cNvPr>
+          <p:cNvPicPr>
+            <a:picLocks noChangeAspect="1"/>
+          </p:cNvPicPr>
+          <p:nvPr/>
+        </p:nvPicPr>
+        <p:blipFill>
+          <a:blip r:embed="rId6"/>
+          <a:stretch>
+            <a:fillRect/>
+          </a:stretch>
+        </p:blipFill>
+        <p:spPr>
+          <a:xfrm>
+            <a:off x="0" y="2209961"/>
+            <a:ext cx="10585758" cy="4281584"/>
+          </a:xfrm>
+          <a:prstGeom prst="roundRect">
+            <a:avLst>
+              <a:gd name="adj" fmla="val 16667"/>
+            </a:avLst>
+          </a:prstGeom>
+          <a:ln>
+            <a:noFill/>
+          </a:ln>
+          <a:effectLst>
+            <a:outerShdw blurRad="152400" dist="12000" dir="900000" sy="98000" kx="110000" ky="200000" algn="tl" rotWithShape="0">
+              <a:srgbClr val="000000">
+                <a:alpha val="30000"/>
+              </a:srgbClr>
+            </a:outerShdw>
+          </a:effectLst>
+          <a:scene3d>
+            <a:camera prst="perspectiveRelaxed">
+              <a:rot lat="19800000" lon="1200000" rev="20820000"/>
+            </a:camera>
+            <a:lightRig rig="threePt" dir="t"/>
+          </a:scene3d>
+          <a:sp3d contourW="6350" prstMaterial="matte">
+            <a:bevelT w="101600" h="101600"/>
+            <a:contourClr>
+              <a:srgbClr val="969696"/>
+            </a:contourClr>
+          </a:sp3d>
+        </p:spPr>
+      </p:pic>
+      <p:sp>
+        <p:nvSpPr>
+          <p:cNvPr id="9" name="Subtitle 2">
+            <a:extLst>
+              <a:ext uri="{FF2B5EF4-FFF2-40B4-BE49-F238E27FC236}">
+                <a16:creationId xmlns:a16="http://schemas.microsoft.com/office/drawing/2014/main" id="{4AEF23AA-A95D-0376-7245-E7B460334D8C}"/>
+              </a:ext>
+            </a:extLst>
+          </p:cNvPr>
+          <p:cNvSpPr txBox="1">
+            <a:spLocks/>
+          </p:cNvSpPr>
+          <p:nvPr/>
+        </p:nvSpPr>
+        <p:spPr>
+          <a:xfrm>
+            <a:off x="3896391" y="1878488"/>
+            <a:ext cx="8196479" cy="1234859"/>
+          </a:xfrm>
+          <a:prstGeom prst="rect">
+            <a:avLst/>
+          </a:prstGeom>
+        </p:spPr>
+        <p:txBody>
+          <a:bodyPr vert="horz" lIns="91440" tIns="45720" rIns="91440" bIns="45720" rtlCol="0" anchor="ctr">
+            <a:normAutofit lnSpcReduction="10000"/>
+          </a:bodyPr>
+          <a:lstStyle>
+            <a:lvl1pPr marL="0" indent="0" algn="l" defTabSz="457200" rtl="0" eaLnBrk="1" latinLnBrk="0" hangingPunct="1">
+              <a:spcBef>
+                <a:spcPts val="1000"/>
+              </a:spcBef>
+              <a:spcAft>
+                <a:spcPts val="0"/>
+              </a:spcAft>
+              <a:buClr>
+                <a:schemeClr val="accent1"/>
+              </a:buClr>
+              <a:buSzPct val="80000"/>
+              <a:buFont typeface="Wingdings 3" charset="2"/>
+              <a:buNone/>
+              <a:defRPr sz="2000" b="0" i="0" kern="1200" cap="all">
+                <a:solidFill>
+                  <a:schemeClr val="accent1"/>
+                </a:solidFill>
+                <a:latin typeface="+mj-lt"/>
+                <a:ea typeface="+mj-ea"/>
+                <a:cs typeface="+mj-cs"/>
+              </a:defRPr>
+            </a:lvl1pPr>
+            <a:lvl2pPr marL="457200" indent="0" algn="ctr" defTabSz="457200" rtl="0" eaLnBrk="1" latinLnBrk="0" hangingPunct="1">
+              <a:spcBef>
+                <a:spcPts val="1000"/>
+              </a:spcBef>
+              <a:spcAft>
+                <a:spcPts val="0"/>
+              </a:spcAft>
+              <a:buClr>
+                <a:schemeClr val="accent1"/>
+              </a:buClr>
+              <a:buSzPct val="80000"/>
+              <a:buFont typeface="Wingdings 3" charset="2"/>
+              <a:buNone/>
+              <a:defRPr sz="1800" b="0" i="0" kern="1200">
+                <a:solidFill>
+                  <a:schemeClr val="tx1">
+                    <a:tint val="75000"/>
+                  </a:schemeClr>
+                </a:solidFill>
+                <a:latin typeface="+mj-lt"/>
+                <a:ea typeface="+mj-ea"/>
+                <a:cs typeface="+mj-cs"/>
+              </a:defRPr>
+            </a:lvl2pPr>
+            <a:lvl3pPr marL="914400" indent="0" algn="ctr" defTabSz="457200" rtl="0" eaLnBrk="1" latinLnBrk="0" hangingPunct="1">
+              <a:spcBef>
+                <a:spcPts val="1000"/>
+              </a:spcBef>
+              <a:spcAft>
+                <a:spcPts val="0"/>
+              </a:spcAft>
+              <a:buClr>
+                <a:schemeClr val="accent1"/>
+              </a:buClr>
+              <a:buSzPct val="80000"/>
+              <a:buFont typeface="Wingdings 3" charset="2"/>
+              <a:buNone/>
+              <a:defRPr sz="1600" b="0" i="0" kern="1200">
+                <a:solidFill>
+                  <a:schemeClr val="tx1">
+                    <a:tint val="75000"/>
+                  </a:schemeClr>
+                </a:solidFill>
+                <a:latin typeface="+mj-lt"/>
+                <a:ea typeface="+mj-ea"/>
+                <a:cs typeface="+mj-cs"/>
+              </a:defRPr>
+            </a:lvl3pPr>
+            <a:lvl4pPr marL="1371600" indent="0" algn="ctr" defTabSz="457200" rtl="0" eaLnBrk="1" latinLnBrk="0" hangingPunct="1">
+              <a:spcBef>
+                <a:spcPts val="1000"/>
+              </a:spcBef>
+              <a:spcAft>
+                <a:spcPts val="0"/>
+              </a:spcAft>
+              <a:buClr>
+                <a:schemeClr val="accent1"/>
+              </a:buClr>
+              <a:buSzPct val="80000"/>
+              <a:buFont typeface="Wingdings 3" charset="2"/>
+              <a:buNone/>
+              <a:defRPr sz="1400" b="0" i="0" kern="1200">
+                <a:solidFill>
+                  <a:schemeClr val="tx1">
+                    <a:tint val="75000"/>
+                  </a:schemeClr>
+                </a:solidFill>
+                <a:latin typeface="+mj-lt"/>
+                <a:ea typeface="+mj-ea"/>
+                <a:cs typeface="+mj-cs"/>
+              </a:defRPr>
+            </a:lvl4pPr>
+            <a:lvl5pPr marL="1828800" indent="0" algn="ctr" defTabSz="457200" rtl="0" eaLnBrk="1" latinLnBrk="0" hangingPunct="1">
+              <a:spcBef>
+                <a:spcPts val="1000"/>
+              </a:spcBef>
+              <a:spcAft>
+                <a:spcPts val="0"/>
+              </a:spcAft>
+              <a:buClr>
+                <a:schemeClr val="accent1"/>
+              </a:buClr>
+              <a:buSzPct val="80000"/>
+              <a:buFont typeface="Wingdings 3" charset="2"/>
+              <a:buNone/>
+              <a:defRPr sz="1400" b="0" i="0" kern="1200">
+                <a:solidFill>
+                  <a:schemeClr val="tx1">
+                    <a:tint val="75000"/>
+                  </a:schemeClr>
+                </a:solidFill>
+                <a:latin typeface="+mj-lt"/>
+                <a:ea typeface="+mj-ea"/>
+                <a:cs typeface="+mj-cs"/>
+              </a:defRPr>
+            </a:lvl5pPr>
+            <a:lvl6pPr marL="2286000" indent="0" algn="ctr" defTabSz="457200" rtl="0" eaLnBrk="1" latinLnBrk="0" hangingPunct="1">
+              <a:spcBef>
+                <a:spcPts val="1000"/>
+              </a:spcBef>
+              <a:spcAft>
+                <a:spcPts val="0"/>
+              </a:spcAft>
+              <a:buClr>
+                <a:schemeClr val="accent1"/>
+              </a:buClr>
+              <a:buSzPct val="80000"/>
+              <a:buFont typeface="Wingdings 3" charset="2"/>
+              <a:buNone/>
+              <a:defRPr sz="1400" b="0" i="0" kern="1200">
+                <a:solidFill>
+                  <a:schemeClr val="tx1">
+                    <a:tint val="75000"/>
+                  </a:schemeClr>
+                </a:solidFill>
+                <a:latin typeface="+mj-lt"/>
+                <a:ea typeface="+mj-ea"/>
+                <a:cs typeface="+mj-cs"/>
+              </a:defRPr>
+            </a:lvl6pPr>
+            <a:lvl7pPr marL="2743200" indent="0" algn="ctr" defTabSz="457200" rtl="0" eaLnBrk="1" latinLnBrk="0" hangingPunct="1">
+              <a:spcBef>
+                <a:spcPts val="1000"/>
+              </a:spcBef>
+              <a:spcAft>
+                <a:spcPts val="0"/>
+              </a:spcAft>
+              <a:buClr>
+                <a:schemeClr val="accent1"/>
+              </a:buClr>
+              <a:buSzPct val="80000"/>
+              <a:buFont typeface="Wingdings 3" charset="2"/>
+              <a:buNone/>
+              <a:defRPr sz="1400" b="0" i="0" kern="1200">
+                <a:solidFill>
+                  <a:schemeClr val="tx1">
+                    <a:tint val="75000"/>
+                  </a:schemeClr>
+                </a:solidFill>
+                <a:latin typeface="+mj-lt"/>
+                <a:ea typeface="+mj-ea"/>
+                <a:cs typeface="+mj-cs"/>
+              </a:defRPr>
+            </a:lvl7pPr>
+            <a:lvl8pPr marL="3200400" indent="0" algn="ctr" defTabSz="457200" rtl="0" eaLnBrk="1" latinLnBrk="0" hangingPunct="1">
+              <a:spcBef>
+                <a:spcPts val="1000"/>
+              </a:spcBef>
+              <a:spcAft>
+                <a:spcPts val="0"/>
+              </a:spcAft>
+              <a:buClr>
+                <a:schemeClr val="accent1"/>
+              </a:buClr>
+              <a:buSzPct val="80000"/>
+              <a:buFont typeface="Wingdings 3" charset="2"/>
+              <a:buNone/>
+              <a:defRPr sz="1400" b="0" i="0" kern="1200">
+                <a:solidFill>
+                  <a:schemeClr val="tx1">
+                    <a:tint val="75000"/>
+                  </a:schemeClr>
+                </a:solidFill>
+                <a:latin typeface="+mj-lt"/>
+                <a:ea typeface="+mj-ea"/>
+                <a:cs typeface="+mj-cs"/>
+              </a:defRPr>
+            </a:lvl8pPr>
+            <a:lvl9pPr marL="3657600" indent="0" algn="ctr" defTabSz="457200" rtl="0" eaLnBrk="1" latinLnBrk="0" hangingPunct="1">
+              <a:spcBef>
+                <a:spcPts val="1000"/>
+              </a:spcBef>
+              <a:spcAft>
+                <a:spcPts val="0"/>
+              </a:spcAft>
+              <a:buClr>
+                <a:schemeClr val="accent1"/>
+              </a:buClr>
+              <a:buSzPct val="80000"/>
+              <a:buFont typeface="Wingdings 3" charset="2"/>
+              <a:buNone/>
+              <a:defRPr sz="1400" b="0" i="0" kern="1200">
+                <a:solidFill>
+                  <a:schemeClr val="tx1">
+                    <a:tint val="75000"/>
+                  </a:schemeClr>
+                </a:solidFill>
+                <a:latin typeface="+mj-lt"/>
+                <a:ea typeface="+mj-ea"/>
+                <a:cs typeface="+mj-cs"/>
+              </a:defRPr>
+            </a:lvl9pPr>
+          </a:lstStyle>
+          <a:p>
+            <a:r>
+              <a:rPr lang="en-US" altLang="zh-CN" sz="3600" b="1" cap="none" dirty="0"/>
+              <a:t>4.4 Create Dashboard Layout &amp; </a:t>
+            </a:r>
+          </a:p>
+          <a:p>
+            <a:r>
+              <a:rPr lang="en-US" altLang="zh-CN" sz="3600" b="1" cap="none" dirty="0"/>
+              <a:t>4.5 Root Layout</a:t>
+            </a:r>
+            <a:endParaRPr lang="en-US" sz="3600" b="1" cap="none" dirty="0"/>
+          </a:p>
+        </p:txBody>
+      </p:sp>
+    </p:spTree>
+    <p:extLst>
+      <p:ext uri="{BB962C8B-B14F-4D97-AF65-F5344CB8AC3E}">
+        <p14:creationId xmlns:p14="http://schemas.microsoft.com/office/powerpoint/2010/main" val="4161633744"/>
+      </p:ext>
+    </p:extLst>
+  </p:cSld>
+  <p:clrMapOvr>
+    <a:masterClrMapping/>
+  </p:clrMapOvr>
+</p:sld>
+</file>
+
+<file path=ppt/slides/slide14.xml><?xml version="1.0" encoding="utf-8"?>
+<p:sld xmlns:a="http://schemas.openxmlformats.org/drawingml/2006/main" xmlns:r="http://schemas.openxmlformats.org/officeDocument/2006/relationships" xmlns:p="http://schemas.openxmlformats.org/presentationml/2006/main">
+  <p:cSld>
+    <p:spTree>
+      <p:nvGrpSpPr>
+        <p:cNvPr id="1" name="">
+          <a:extLst>
+            <a:ext uri="{FF2B5EF4-FFF2-40B4-BE49-F238E27FC236}">
+              <a16:creationId xmlns:a16="http://schemas.microsoft.com/office/drawing/2014/main" id="{8583AF3A-08F7-DF84-EECB-D0FE6D043BED}"/>
+            </a:ext>
+          </a:extLst>
+        </p:cNvPr>
+        <p:cNvGrpSpPr/>
+        <p:nvPr/>
+      </p:nvGrpSpPr>
+      <p:grpSpPr>
+        <a:xfrm>
+          <a:off x="0" y="0"/>
+          <a:ext cx="0" cy="0"/>
+          <a:chOff x="0" y="0"/>
+          <a:chExt cx="0" cy="0"/>
+        </a:xfrm>
+      </p:grpSpPr>
+      <p:pic>
+        <p:nvPicPr>
+          <p:cNvPr id="5" name="Picture 4" descr="chain links">
+            <a:extLst>
+              <a:ext uri="{FF2B5EF4-FFF2-40B4-BE49-F238E27FC236}">
+                <a16:creationId xmlns:a16="http://schemas.microsoft.com/office/drawing/2014/main" id="{8B4C7083-EBDE-D3FC-F5D8-8268AE35290B}"/>
+              </a:ext>
+            </a:extLst>
+          </p:cNvPr>
+          <p:cNvPicPr>
+            <a:picLocks noChangeAspect="1"/>
+          </p:cNvPicPr>
+          <p:nvPr/>
+        </p:nvPicPr>
+        <p:blipFill rotWithShape="1">
+          <a:blip r:embed="rId3">
+            <a:duotone>
+              <a:prstClr val="black"/>
+              <a:schemeClr val="accent5">
+                <a:tint val="45000"/>
+                <a:satMod val="400000"/>
+              </a:schemeClr>
+            </a:duotone>
+            <a:alphaModFix amt="25000"/>
+          </a:blip>
+          <a:srcRect t="23391" r="9091"/>
+          <a:stretch/>
+        </p:blipFill>
+        <p:spPr>
+          <a:xfrm>
+            <a:off x="0" y="10"/>
+            <a:ext cx="12191980" cy="6857990"/>
+          </a:xfrm>
+          <a:prstGeom prst="rect">
+            <a:avLst/>
+          </a:prstGeom>
+        </p:spPr>
+      </p:pic>
+      <p:sp>
+        <p:nvSpPr>
+          <p:cNvPr id="7" name="Subtitle 2">
+            <a:extLst>
+              <a:ext uri="{FF2B5EF4-FFF2-40B4-BE49-F238E27FC236}">
+                <a16:creationId xmlns:a16="http://schemas.microsoft.com/office/drawing/2014/main" id="{109BAEE5-00EE-AEDB-56A6-0CAE4FF82FD5}"/>
+              </a:ext>
+            </a:extLst>
+          </p:cNvPr>
+          <p:cNvSpPr txBox="1">
+            <a:spLocks/>
+          </p:cNvSpPr>
+          <p:nvPr/>
+        </p:nvSpPr>
+        <p:spPr>
+          <a:xfrm>
+            <a:off x="8483689" y="2419"/>
+            <a:ext cx="2102069" cy="1447801"/>
+          </a:xfrm>
+          <a:prstGeom prst="rect">
+            <a:avLst/>
+          </a:prstGeom>
+        </p:spPr>
+        <p:txBody>
+          <a:bodyPr vert="horz" lIns="91440" tIns="45720" rIns="91440" bIns="45720" rtlCol="0" anchor="ctr">
+            <a:normAutofit fontScale="92500" lnSpcReduction="20000"/>
+          </a:bodyPr>
+          <a:lstStyle>
+            <a:lvl1pPr marL="0" indent="0" algn="l" defTabSz="457200" rtl="0" eaLnBrk="1" latinLnBrk="0" hangingPunct="1">
+              <a:spcBef>
+                <a:spcPts val="1000"/>
+              </a:spcBef>
+              <a:spcAft>
+                <a:spcPts val="0"/>
+              </a:spcAft>
+              <a:buClr>
+                <a:schemeClr val="accent1"/>
+              </a:buClr>
+              <a:buSzPct val="80000"/>
+              <a:buFont typeface="Wingdings 3" charset="2"/>
+              <a:buNone/>
+              <a:defRPr sz="2000" b="0" i="0" kern="1200" cap="all">
+                <a:solidFill>
+                  <a:schemeClr val="accent1"/>
+                </a:solidFill>
+                <a:latin typeface="+mj-lt"/>
+                <a:ea typeface="+mj-ea"/>
+                <a:cs typeface="+mj-cs"/>
+              </a:defRPr>
+            </a:lvl1pPr>
+            <a:lvl2pPr marL="457200" indent="0" algn="ctr" defTabSz="457200" rtl="0" eaLnBrk="1" latinLnBrk="0" hangingPunct="1">
+              <a:spcBef>
+                <a:spcPts val="1000"/>
+              </a:spcBef>
+              <a:spcAft>
+                <a:spcPts val="0"/>
+              </a:spcAft>
+              <a:buClr>
+                <a:schemeClr val="accent1"/>
+              </a:buClr>
+              <a:buSzPct val="80000"/>
+              <a:buFont typeface="Wingdings 3" charset="2"/>
+              <a:buNone/>
+              <a:defRPr sz="1800" b="0" i="0" kern="1200">
+                <a:solidFill>
+                  <a:schemeClr val="tx1">
+                    <a:tint val="75000"/>
+                  </a:schemeClr>
+                </a:solidFill>
+                <a:latin typeface="+mj-lt"/>
+                <a:ea typeface="+mj-ea"/>
+                <a:cs typeface="+mj-cs"/>
+              </a:defRPr>
+            </a:lvl2pPr>
+            <a:lvl3pPr marL="914400" indent="0" algn="ctr" defTabSz="457200" rtl="0" eaLnBrk="1" latinLnBrk="0" hangingPunct="1">
+              <a:spcBef>
+                <a:spcPts val="1000"/>
+              </a:spcBef>
+              <a:spcAft>
+                <a:spcPts val="0"/>
+              </a:spcAft>
+              <a:buClr>
+                <a:schemeClr val="accent1"/>
+              </a:buClr>
+              <a:buSzPct val="80000"/>
+              <a:buFont typeface="Wingdings 3" charset="2"/>
+              <a:buNone/>
+              <a:defRPr sz="1600" b="0" i="0" kern="1200">
+                <a:solidFill>
+                  <a:schemeClr val="tx1">
+                    <a:tint val="75000"/>
+                  </a:schemeClr>
+                </a:solidFill>
+                <a:latin typeface="+mj-lt"/>
+                <a:ea typeface="+mj-ea"/>
+                <a:cs typeface="+mj-cs"/>
+              </a:defRPr>
+            </a:lvl3pPr>
+            <a:lvl4pPr marL="1371600" indent="0" algn="ctr" defTabSz="457200" rtl="0" eaLnBrk="1" latinLnBrk="0" hangingPunct="1">
+              <a:spcBef>
+                <a:spcPts val="1000"/>
+              </a:spcBef>
+              <a:spcAft>
+                <a:spcPts val="0"/>
+              </a:spcAft>
+              <a:buClr>
+                <a:schemeClr val="accent1"/>
+              </a:buClr>
+              <a:buSzPct val="80000"/>
+              <a:buFont typeface="Wingdings 3" charset="2"/>
+              <a:buNone/>
+              <a:defRPr sz="1400" b="0" i="0" kern="1200">
+                <a:solidFill>
+                  <a:schemeClr val="tx1">
+                    <a:tint val="75000"/>
+                  </a:schemeClr>
+                </a:solidFill>
+                <a:latin typeface="+mj-lt"/>
+                <a:ea typeface="+mj-ea"/>
+                <a:cs typeface="+mj-cs"/>
+              </a:defRPr>
+            </a:lvl4pPr>
+            <a:lvl5pPr marL="1828800" indent="0" algn="ctr" defTabSz="457200" rtl="0" eaLnBrk="1" latinLnBrk="0" hangingPunct="1">
+              <a:spcBef>
+                <a:spcPts val="1000"/>
+              </a:spcBef>
+              <a:spcAft>
+                <a:spcPts val="0"/>
+              </a:spcAft>
+              <a:buClr>
+                <a:schemeClr val="accent1"/>
+              </a:buClr>
+              <a:buSzPct val="80000"/>
+              <a:buFont typeface="Wingdings 3" charset="2"/>
+              <a:buNone/>
+              <a:defRPr sz="1400" b="0" i="0" kern="1200">
+                <a:solidFill>
+                  <a:schemeClr val="tx1">
+                    <a:tint val="75000"/>
+                  </a:schemeClr>
+                </a:solidFill>
+                <a:latin typeface="+mj-lt"/>
+                <a:ea typeface="+mj-ea"/>
+                <a:cs typeface="+mj-cs"/>
+              </a:defRPr>
+            </a:lvl5pPr>
+            <a:lvl6pPr marL="2286000" indent="0" algn="ctr" defTabSz="457200" rtl="0" eaLnBrk="1" latinLnBrk="0" hangingPunct="1">
+              <a:spcBef>
+                <a:spcPts val="1000"/>
+              </a:spcBef>
+              <a:spcAft>
+                <a:spcPts val="0"/>
+              </a:spcAft>
+              <a:buClr>
+                <a:schemeClr val="accent1"/>
+              </a:buClr>
+              <a:buSzPct val="80000"/>
+              <a:buFont typeface="Wingdings 3" charset="2"/>
+              <a:buNone/>
+              <a:defRPr sz="1400" b="0" i="0" kern="1200">
+                <a:solidFill>
+                  <a:schemeClr val="tx1">
+                    <a:tint val="75000"/>
+                  </a:schemeClr>
+                </a:solidFill>
+                <a:latin typeface="+mj-lt"/>
+                <a:ea typeface="+mj-ea"/>
+                <a:cs typeface="+mj-cs"/>
+              </a:defRPr>
+            </a:lvl6pPr>
+            <a:lvl7pPr marL="2743200" indent="0" algn="ctr" defTabSz="457200" rtl="0" eaLnBrk="1" latinLnBrk="0" hangingPunct="1">
+              <a:spcBef>
+                <a:spcPts val="1000"/>
+              </a:spcBef>
+              <a:spcAft>
+                <a:spcPts val="0"/>
+              </a:spcAft>
+              <a:buClr>
+                <a:schemeClr val="accent1"/>
+              </a:buClr>
+              <a:buSzPct val="80000"/>
+              <a:buFont typeface="Wingdings 3" charset="2"/>
+              <a:buNone/>
+              <a:defRPr sz="1400" b="0" i="0" kern="1200">
+                <a:solidFill>
+                  <a:schemeClr val="tx1">
+                    <a:tint val="75000"/>
+                  </a:schemeClr>
+                </a:solidFill>
+                <a:latin typeface="+mj-lt"/>
+                <a:ea typeface="+mj-ea"/>
+                <a:cs typeface="+mj-cs"/>
+              </a:defRPr>
+            </a:lvl7pPr>
+            <a:lvl8pPr marL="3200400" indent="0" algn="ctr" defTabSz="457200" rtl="0" eaLnBrk="1" latinLnBrk="0" hangingPunct="1">
+              <a:spcBef>
+                <a:spcPts val="1000"/>
+              </a:spcBef>
+              <a:spcAft>
+                <a:spcPts val="0"/>
+              </a:spcAft>
+              <a:buClr>
+                <a:schemeClr val="accent1"/>
+              </a:buClr>
+              <a:buSzPct val="80000"/>
+              <a:buFont typeface="Wingdings 3" charset="2"/>
+              <a:buNone/>
+              <a:defRPr sz="1400" b="0" i="0" kern="1200">
+                <a:solidFill>
+                  <a:schemeClr val="tx1">
+                    <a:tint val="75000"/>
+                  </a:schemeClr>
+                </a:solidFill>
+                <a:latin typeface="+mj-lt"/>
+                <a:ea typeface="+mj-ea"/>
+                <a:cs typeface="+mj-cs"/>
+              </a:defRPr>
+            </a:lvl8pPr>
+            <a:lvl9pPr marL="3657600" indent="0" algn="ctr" defTabSz="457200" rtl="0" eaLnBrk="1" latinLnBrk="0" hangingPunct="1">
+              <a:spcBef>
+                <a:spcPts val="1000"/>
+              </a:spcBef>
+              <a:spcAft>
+                <a:spcPts val="0"/>
+              </a:spcAft>
+              <a:buClr>
+                <a:schemeClr val="accent1"/>
+              </a:buClr>
+              <a:buSzPct val="80000"/>
+              <a:buFont typeface="Wingdings 3" charset="2"/>
+              <a:buNone/>
+              <a:defRPr sz="1400" b="0" i="0" kern="1200">
+                <a:solidFill>
+                  <a:schemeClr val="tx1">
+                    <a:tint val="75000"/>
+                  </a:schemeClr>
+                </a:solidFill>
+                <a:latin typeface="+mj-lt"/>
+                <a:ea typeface="+mj-ea"/>
+                <a:cs typeface="+mj-cs"/>
+              </a:defRPr>
+            </a:lvl9pPr>
+          </a:lstStyle>
+          <a:p>
+            <a:pPr algn="ctr"/>
+            <a:r>
+              <a:rPr lang="en-US" sz="11500" b="1" dirty="0"/>
+              <a:t>13</a:t>
+            </a:r>
+          </a:p>
+        </p:txBody>
+      </p:sp>
+      <p:pic>
+        <p:nvPicPr>
+          <p:cNvPr id="4" name="Picture 3">
+            <a:extLst>
+              <a:ext uri="{FF2B5EF4-FFF2-40B4-BE49-F238E27FC236}">
+                <a16:creationId xmlns:a16="http://schemas.microsoft.com/office/drawing/2014/main" id="{6925F4F5-DA53-959C-EFA5-ECCB3AF496E2}"/>
+              </a:ext>
+            </a:extLst>
+          </p:cNvPr>
+          <p:cNvPicPr>
+            <a:picLocks noChangeAspect="1"/>
+          </p:cNvPicPr>
+          <p:nvPr/>
+        </p:nvPicPr>
+        <p:blipFill>
+          <a:blip r:embed="rId4"/>
+          <a:stretch>
+            <a:fillRect/>
+          </a:stretch>
+        </p:blipFill>
+        <p:spPr>
+          <a:xfrm>
+            <a:off x="0" y="0"/>
+            <a:ext cx="3896391" cy="2481677"/>
+          </a:xfrm>
+          <a:prstGeom prst="rect">
+            <a:avLst/>
+          </a:prstGeom>
+          <a:ln>
+            <a:noFill/>
+          </a:ln>
+          <a:effectLst>
+            <a:softEdge rad="112500"/>
+          </a:effectLst>
+        </p:spPr>
+      </p:pic>
+      <p:sp>
+        <p:nvSpPr>
+          <p:cNvPr id="2" name="Title 1">
+            <a:extLst>
+              <a:ext uri="{FF2B5EF4-FFF2-40B4-BE49-F238E27FC236}">
+                <a16:creationId xmlns:a16="http://schemas.microsoft.com/office/drawing/2014/main" id="{82B4F268-76AB-B65C-EC2B-534FDE8E27CC}"/>
+              </a:ext>
+            </a:extLst>
+          </p:cNvPr>
+          <p:cNvSpPr>
+            <a:spLocks noGrp="1"/>
+          </p:cNvSpPr>
+          <p:nvPr>
+            <p:ph type="ctrTitle"/>
+          </p:nvPr>
+        </p:nvSpPr>
+        <p:spPr>
+          <a:xfrm>
+            <a:off x="3477730" y="50040"/>
+            <a:ext cx="4741596" cy="946553"/>
+          </a:xfrm>
+        </p:spPr>
+        <p:txBody>
+          <a:bodyPr anchor="ctr">
+            <a:normAutofit fontScale="90000"/>
+          </a:bodyPr>
+          <a:lstStyle/>
+          <a:p>
+            <a:r>
+              <a:rPr lang="en-US" sz="6000" b="1" dirty="0"/>
+              <a:t>App Router</a:t>
+            </a:r>
+            <a:endParaRPr lang="ru-RU" sz="6000" b="1" dirty="0"/>
+          </a:p>
+        </p:txBody>
+      </p:sp>
+      <p:pic>
+        <p:nvPicPr>
+          <p:cNvPr id="6" name="Picture 5">
+            <a:extLst>
+              <a:ext uri="{FF2B5EF4-FFF2-40B4-BE49-F238E27FC236}">
+                <a16:creationId xmlns:a16="http://schemas.microsoft.com/office/drawing/2014/main" id="{57440243-5E3B-2A20-81AB-5143DBB94127}"/>
+              </a:ext>
+            </a:extLst>
+          </p:cNvPr>
+          <p:cNvPicPr>
+            <a:picLocks noChangeAspect="1"/>
+          </p:cNvPicPr>
+          <p:nvPr/>
+        </p:nvPicPr>
+        <p:blipFill>
+          <a:blip r:embed="rId5"/>
+          <a:stretch>
+            <a:fillRect/>
+          </a:stretch>
+        </p:blipFill>
+        <p:spPr>
+          <a:xfrm>
+            <a:off x="10672842" y="271032"/>
+            <a:ext cx="1420028" cy="652758"/>
+          </a:xfrm>
+          <a:prstGeom prst="rect">
+            <a:avLst/>
+          </a:prstGeom>
+          <a:ln>
+            <a:noFill/>
+          </a:ln>
+          <a:effectLst>
+            <a:softEdge rad="112500"/>
+          </a:effectLst>
+        </p:spPr>
+      </p:pic>
+      <p:sp>
+        <p:nvSpPr>
+          <p:cNvPr id="9" name="Subtitle 2">
+            <a:extLst>
+              <a:ext uri="{FF2B5EF4-FFF2-40B4-BE49-F238E27FC236}">
+                <a16:creationId xmlns:a16="http://schemas.microsoft.com/office/drawing/2014/main" id="{77AEA444-2853-72DE-0DD1-848A0E6AEC88}"/>
+              </a:ext>
+            </a:extLst>
+          </p:cNvPr>
+          <p:cNvSpPr txBox="1">
+            <a:spLocks/>
+          </p:cNvSpPr>
+          <p:nvPr/>
+        </p:nvSpPr>
+        <p:spPr>
+          <a:xfrm>
+            <a:off x="3896391" y="1718833"/>
+            <a:ext cx="8196479" cy="788415"/>
+          </a:xfrm>
+          <a:prstGeom prst="rect">
+            <a:avLst/>
+          </a:prstGeom>
+        </p:spPr>
+        <p:txBody>
+          <a:bodyPr vert="horz" lIns="91440" tIns="45720" rIns="91440" bIns="45720" rtlCol="0" anchor="ctr">
+            <a:normAutofit/>
+          </a:bodyPr>
+          <a:lstStyle>
+            <a:lvl1pPr marL="0" indent="0" algn="l" defTabSz="457200" rtl="0" eaLnBrk="1" latinLnBrk="0" hangingPunct="1">
+              <a:spcBef>
+                <a:spcPts val="1000"/>
+              </a:spcBef>
+              <a:spcAft>
+                <a:spcPts val="0"/>
+              </a:spcAft>
+              <a:buClr>
+                <a:schemeClr val="accent1"/>
+              </a:buClr>
+              <a:buSzPct val="80000"/>
+              <a:buFont typeface="Wingdings 3" charset="2"/>
+              <a:buNone/>
+              <a:defRPr sz="2000" b="0" i="0" kern="1200" cap="all">
+                <a:solidFill>
+                  <a:schemeClr val="accent1"/>
+                </a:solidFill>
+                <a:latin typeface="+mj-lt"/>
+                <a:ea typeface="+mj-ea"/>
+                <a:cs typeface="+mj-cs"/>
+              </a:defRPr>
+            </a:lvl1pPr>
+            <a:lvl2pPr marL="457200" indent="0" algn="ctr" defTabSz="457200" rtl="0" eaLnBrk="1" latinLnBrk="0" hangingPunct="1">
+              <a:spcBef>
+                <a:spcPts val="1000"/>
+              </a:spcBef>
+              <a:spcAft>
+                <a:spcPts val="0"/>
+              </a:spcAft>
+              <a:buClr>
+                <a:schemeClr val="accent1"/>
+              </a:buClr>
+              <a:buSzPct val="80000"/>
+              <a:buFont typeface="Wingdings 3" charset="2"/>
+              <a:buNone/>
+              <a:defRPr sz="1800" b="0" i="0" kern="1200">
+                <a:solidFill>
+                  <a:schemeClr val="tx1">
+                    <a:tint val="75000"/>
+                  </a:schemeClr>
+                </a:solidFill>
+                <a:latin typeface="+mj-lt"/>
+                <a:ea typeface="+mj-ea"/>
+                <a:cs typeface="+mj-cs"/>
+              </a:defRPr>
+            </a:lvl2pPr>
+            <a:lvl3pPr marL="914400" indent="0" algn="ctr" defTabSz="457200" rtl="0" eaLnBrk="1" latinLnBrk="0" hangingPunct="1">
+              <a:spcBef>
+                <a:spcPts val="1000"/>
+              </a:spcBef>
+              <a:spcAft>
+                <a:spcPts val="0"/>
+              </a:spcAft>
+              <a:buClr>
+                <a:schemeClr val="accent1"/>
+              </a:buClr>
+              <a:buSzPct val="80000"/>
+              <a:buFont typeface="Wingdings 3" charset="2"/>
+              <a:buNone/>
+              <a:defRPr sz="1600" b="0" i="0" kern="1200">
+                <a:solidFill>
+                  <a:schemeClr val="tx1">
+                    <a:tint val="75000"/>
+                  </a:schemeClr>
+                </a:solidFill>
+                <a:latin typeface="+mj-lt"/>
+                <a:ea typeface="+mj-ea"/>
+                <a:cs typeface="+mj-cs"/>
+              </a:defRPr>
+            </a:lvl3pPr>
+            <a:lvl4pPr marL="1371600" indent="0" algn="ctr" defTabSz="457200" rtl="0" eaLnBrk="1" latinLnBrk="0" hangingPunct="1">
+              <a:spcBef>
+                <a:spcPts val="1000"/>
+              </a:spcBef>
+              <a:spcAft>
+                <a:spcPts val="0"/>
+              </a:spcAft>
+              <a:buClr>
+                <a:schemeClr val="accent1"/>
+              </a:buClr>
+              <a:buSzPct val="80000"/>
+              <a:buFont typeface="Wingdings 3" charset="2"/>
+              <a:buNone/>
+              <a:defRPr sz="1400" b="0" i="0" kern="1200">
+                <a:solidFill>
+                  <a:schemeClr val="tx1">
+                    <a:tint val="75000"/>
+                  </a:schemeClr>
+                </a:solidFill>
+                <a:latin typeface="+mj-lt"/>
+                <a:ea typeface="+mj-ea"/>
+                <a:cs typeface="+mj-cs"/>
+              </a:defRPr>
+            </a:lvl4pPr>
+            <a:lvl5pPr marL="1828800" indent="0" algn="ctr" defTabSz="457200" rtl="0" eaLnBrk="1" latinLnBrk="0" hangingPunct="1">
+              <a:spcBef>
+                <a:spcPts val="1000"/>
+              </a:spcBef>
+              <a:spcAft>
+                <a:spcPts val="0"/>
+              </a:spcAft>
+              <a:buClr>
+                <a:schemeClr val="accent1"/>
+              </a:buClr>
+              <a:buSzPct val="80000"/>
+              <a:buFont typeface="Wingdings 3" charset="2"/>
+              <a:buNone/>
+              <a:defRPr sz="1400" b="0" i="0" kern="1200">
+                <a:solidFill>
+                  <a:schemeClr val="tx1">
+                    <a:tint val="75000"/>
+                  </a:schemeClr>
+                </a:solidFill>
+                <a:latin typeface="+mj-lt"/>
+                <a:ea typeface="+mj-ea"/>
+                <a:cs typeface="+mj-cs"/>
+              </a:defRPr>
+            </a:lvl5pPr>
+            <a:lvl6pPr marL="2286000" indent="0" algn="ctr" defTabSz="457200" rtl="0" eaLnBrk="1" latinLnBrk="0" hangingPunct="1">
+              <a:spcBef>
+                <a:spcPts val="1000"/>
+              </a:spcBef>
+              <a:spcAft>
+                <a:spcPts val="0"/>
+              </a:spcAft>
+              <a:buClr>
+                <a:schemeClr val="accent1"/>
+              </a:buClr>
+              <a:buSzPct val="80000"/>
+              <a:buFont typeface="Wingdings 3" charset="2"/>
+              <a:buNone/>
+              <a:defRPr sz="1400" b="0" i="0" kern="1200">
+                <a:solidFill>
+                  <a:schemeClr val="tx1">
+                    <a:tint val="75000"/>
+                  </a:schemeClr>
+                </a:solidFill>
+                <a:latin typeface="+mj-lt"/>
+                <a:ea typeface="+mj-ea"/>
+                <a:cs typeface="+mj-cs"/>
+              </a:defRPr>
+            </a:lvl6pPr>
+            <a:lvl7pPr marL="2743200" indent="0" algn="ctr" defTabSz="457200" rtl="0" eaLnBrk="1" latinLnBrk="0" hangingPunct="1">
+              <a:spcBef>
+                <a:spcPts val="1000"/>
+              </a:spcBef>
+              <a:spcAft>
+                <a:spcPts val="0"/>
+              </a:spcAft>
+              <a:buClr>
+                <a:schemeClr val="accent1"/>
+              </a:buClr>
+              <a:buSzPct val="80000"/>
+              <a:buFont typeface="Wingdings 3" charset="2"/>
+              <a:buNone/>
+              <a:defRPr sz="1400" b="0" i="0" kern="1200">
+                <a:solidFill>
+                  <a:schemeClr val="tx1">
+                    <a:tint val="75000"/>
+                  </a:schemeClr>
+                </a:solidFill>
+                <a:latin typeface="+mj-lt"/>
+                <a:ea typeface="+mj-ea"/>
+                <a:cs typeface="+mj-cs"/>
+              </a:defRPr>
+            </a:lvl7pPr>
+            <a:lvl8pPr marL="3200400" indent="0" algn="ctr" defTabSz="457200" rtl="0" eaLnBrk="1" latinLnBrk="0" hangingPunct="1">
+              <a:spcBef>
+                <a:spcPts val="1000"/>
+              </a:spcBef>
+              <a:spcAft>
+                <a:spcPts val="0"/>
+              </a:spcAft>
+              <a:buClr>
+                <a:schemeClr val="accent1"/>
+              </a:buClr>
+              <a:buSzPct val="80000"/>
+              <a:buFont typeface="Wingdings 3" charset="2"/>
+              <a:buNone/>
+              <a:defRPr sz="1400" b="0" i="0" kern="1200">
+                <a:solidFill>
+                  <a:schemeClr val="tx1">
+                    <a:tint val="75000"/>
+                  </a:schemeClr>
+                </a:solidFill>
+                <a:latin typeface="+mj-lt"/>
+                <a:ea typeface="+mj-ea"/>
+                <a:cs typeface="+mj-cs"/>
+              </a:defRPr>
+            </a:lvl8pPr>
+            <a:lvl9pPr marL="3657600" indent="0" algn="ctr" defTabSz="457200" rtl="0" eaLnBrk="1" latinLnBrk="0" hangingPunct="1">
+              <a:spcBef>
+                <a:spcPts val="1000"/>
+              </a:spcBef>
+              <a:spcAft>
+                <a:spcPts val="0"/>
+              </a:spcAft>
+              <a:buClr>
+                <a:schemeClr val="accent1"/>
+              </a:buClr>
+              <a:buSzPct val="80000"/>
+              <a:buFont typeface="Wingdings 3" charset="2"/>
+              <a:buNone/>
+              <a:defRPr sz="1400" b="0" i="0" kern="1200">
+                <a:solidFill>
+                  <a:schemeClr val="tx1">
+                    <a:tint val="75000"/>
+                  </a:schemeClr>
+                </a:solidFill>
+                <a:latin typeface="+mj-lt"/>
+                <a:ea typeface="+mj-ea"/>
+                <a:cs typeface="+mj-cs"/>
+              </a:defRPr>
+            </a:lvl9pPr>
+          </a:lstStyle>
+          <a:p>
+            <a:r>
+              <a:rPr lang="en-US" altLang="zh-CN" sz="3600" b="1" cap="none" dirty="0"/>
+              <a:t>5.1/5.2 The &lt;link&gt; component</a:t>
+            </a:r>
+            <a:endParaRPr lang="en-US" sz="3600" b="1" cap="none" dirty="0"/>
+          </a:p>
+        </p:txBody>
+      </p:sp>
+      <p:sp>
+        <p:nvSpPr>
+          <p:cNvPr id="3" name="Subtitle 2">
+            <a:extLst>
+              <a:ext uri="{FF2B5EF4-FFF2-40B4-BE49-F238E27FC236}">
+                <a16:creationId xmlns:a16="http://schemas.microsoft.com/office/drawing/2014/main" id="{7B252368-82D0-25C4-BA76-E53E13B11B99}"/>
+              </a:ext>
+            </a:extLst>
+          </p:cNvPr>
+          <p:cNvSpPr>
+            <a:spLocks noGrp="1"/>
+          </p:cNvSpPr>
+          <p:nvPr>
+            <p:ph type="subTitle" idx="1"/>
+          </p:nvPr>
+        </p:nvSpPr>
+        <p:spPr>
+          <a:xfrm>
+            <a:off x="2685143" y="1083848"/>
+            <a:ext cx="9407727" cy="788415"/>
+          </a:xfrm>
+          <a:solidFill>
+            <a:schemeClr val="accent6">
+              <a:alpha val="50000"/>
+            </a:schemeClr>
+          </a:solidFill>
+          <a:ln>
+            <a:noFill/>
+          </a:ln>
+        </p:spPr>
+        <p:style>
+          <a:lnRef idx="0">
+            <a:scrgbClr r="0" g="0" b="0"/>
+          </a:lnRef>
+          <a:fillRef idx="0">
+            <a:scrgbClr r="0" g="0" b="0"/>
+          </a:fillRef>
+          <a:effectRef idx="0">
+            <a:scrgbClr r="0" g="0" b="0"/>
+          </a:effectRef>
+          <a:fontRef idx="minor">
+            <a:schemeClr val="lt1"/>
+          </a:fontRef>
+        </p:style>
+        <p:txBody>
+          <a:bodyPr anchor="ctr">
+            <a:normAutofit fontScale="92500"/>
+          </a:bodyPr>
+          <a:lstStyle/>
+          <a:p>
+            <a:r>
+              <a:rPr lang="en-US" altLang="zh-CN" sz="4800" b="1" dirty="0"/>
+              <a:t>5. Navigating between Pages</a:t>
+            </a:r>
+            <a:endParaRPr lang="en-US" sz="4800" b="1" dirty="0"/>
+          </a:p>
+        </p:txBody>
+      </p:sp>
+      <p:pic>
+        <p:nvPicPr>
+          <p:cNvPr id="10" name="Picture 9">
+            <a:extLst>
+              <a:ext uri="{FF2B5EF4-FFF2-40B4-BE49-F238E27FC236}">
+                <a16:creationId xmlns:a16="http://schemas.microsoft.com/office/drawing/2014/main" id="{E75D916B-D182-2FD2-07E4-80862A861ABD}"/>
+              </a:ext>
+            </a:extLst>
+          </p:cNvPr>
+          <p:cNvPicPr>
+            <a:picLocks noChangeAspect="1"/>
+          </p:cNvPicPr>
+          <p:nvPr/>
+        </p:nvPicPr>
+        <p:blipFill>
+          <a:blip r:embed="rId6"/>
+          <a:stretch>
+            <a:fillRect/>
+          </a:stretch>
+        </p:blipFill>
+        <p:spPr>
+          <a:xfrm>
+            <a:off x="99130" y="1959518"/>
+            <a:ext cx="9991916" cy="4368479"/>
+          </a:xfrm>
+          <a:prstGeom prst="roundRect">
+            <a:avLst>
+              <a:gd name="adj" fmla="val 16667"/>
+            </a:avLst>
+          </a:prstGeom>
+          <a:ln>
+            <a:noFill/>
+          </a:ln>
+          <a:effectLst>
+            <a:outerShdw blurRad="152400" dist="12000" dir="900000" sy="98000" kx="110000" ky="200000" algn="tl" rotWithShape="0">
+              <a:srgbClr val="000000">
+                <a:alpha val="30000"/>
+              </a:srgbClr>
+            </a:outerShdw>
+          </a:effectLst>
+          <a:scene3d>
+            <a:camera prst="perspectiveRelaxed">
+              <a:rot lat="19800000" lon="1200000" rev="20820000"/>
+            </a:camera>
+            <a:lightRig rig="threePt" dir="t"/>
+          </a:scene3d>
+          <a:sp3d contourW="6350" prstMaterial="matte">
+            <a:bevelT w="101600" h="101600"/>
+            <a:contourClr>
+              <a:srgbClr val="969696"/>
+            </a:contourClr>
+          </a:sp3d>
+        </p:spPr>
+      </p:pic>
+    </p:spTree>
+    <p:extLst>
+      <p:ext uri="{BB962C8B-B14F-4D97-AF65-F5344CB8AC3E}">
+        <p14:creationId xmlns:p14="http://schemas.microsoft.com/office/powerpoint/2010/main" val="2515259060"/>
+      </p:ext>
+    </p:extLst>
+  </p:cSld>
+  <p:clrMapOvr>
+    <a:masterClrMapping/>
+  </p:clrMapOvr>
+</p:sld>
+</file>
+
+<file path=ppt/slides/slide15.xml><?xml version="1.0" encoding="utf-8"?>
+<p:sld xmlns:a="http://schemas.openxmlformats.org/drawingml/2006/main" xmlns:r="http://schemas.openxmlformats.org/officeDocument/2006/relationships" xmlns:p="http://schemas.openxmlformats.org/presentationml/2006/main">
+  <p:cSld>
+    <p:spTree>
+      <p:nvGrpSpPr>
+        <p:cNvPr id="1" name="">
+          <a:extLst>
+            <a:ext uri="{FF2B5EF4-FFF2-40B4-BE49-F238E27FC236}">
+              <a16:creationId xmlns:a16="http://schemas.microsoft.com/office/drawing/2014/main" id="{AD238B21-0E37-DA28-B60C-EB42C459FD9C}"/>
+            </a:ext>
+          </a:extLst>
+        </p:cNvPr>
+        <p:cNvGrpSpPr/>
+        <p:nvPr/>
+      </p:nvGrpSpPr>
+      <p:grpSpPr>
+        <a:xfrm>
+          <a:off x="0" y="0"/>
+          <a:ext cx="0" cy="0"/>
+          <a:chOff x="0" y="0"/>
+          <a:chExt cx="0" cy="0"/>
+        </a:xfrm>
+      </p:grpSpPr>
+      <p:pic>
+        <p:nvPicPr>
+          <p:cNvPr id="5" name="Picture 4" descr="chain links">
+            <a:extLst>
+              <a:ext uri="{FF2B5EF4-FFF2-40B4-BE49-F238E27FC236}">
+                <a16:creationId xmlns:a16="http://schemas.microsoft.com/office/drawing/2014/main" id="{57AFAE3B-EC0D-5F8E-6FAA-6F2A992E5626}"/>
+              </a:ext>
+            </a:extLst>
+          </p:cNvPr>
+          <p:cNvPicPr>
+            <a:picLocks noChangeAspect="1"/>
+          </p:cNvPicPr>
+          <p:nvPr/>
+        </p:nvPicPr>
+        <p:blipFill rotWithShape="1">
+          <a:blip r:embed="rId3">
+            <a:duotone>
+              <a:prstClr val="black"/>
+              <a:schemeClr val="accent5">
+                <a:tint val="45000"/>
+                <a:satMod val="400000"/>
+              </a:schemeClr>
+            </a:duotone>
+            <a:alphaModFix amt="25000"/>
+          </a:blip>
+          <a:srcRect t="23391" r="9091"/>
+          <a:stretch/>
+        </p:blipFill>
+        <p:spPr>
+          <a:xfrm>
+            <a:off x="0" y="10"/>
+            <a:ext cx="12191980" cy="6857990"/>
+          </a:xfrm>
+          <a:prstGeom prst="rect">
+            <a:avLst/>
+          </a:prstGeom>
+        </p:spPr>
+      </p:pic>
+      <p:sp>
+        <p:nvSpPr>
+          <p:cNvPr id="7" name="Subtitle 2">
+            <a:extLst>
+              <a:ext uri="{FF2B5EF4-FFF2-40B4-BE49-F238E27FC236}">
+                <a16:creationId xmlns:a16="http://schemas.microsoft.com/office/drawing/2014/main" id="{32CC5D40-6355-8C95-DF25-B72964546D6C}"/>
+              </a:ext>
+            </a:extLst>
+          </p:cNvPr>
+          <p:cNvSpPr txBox="1">
+            <a:spLocks/>
+          </p:cNvSpPr>
+          <p:nvPr/>
+        </p:nvSpPr>
+        <p:spPr>
+          <a:xfrm>
+            <a:off x="8483689" y="2419"/>
+            <a:ext cx="2102069" cy="1447801"/>
+          </a:xfrm>
+          <a:prstGeom prst="rect">
+            <a:avLst/>
+          </a:prstGeom>
+        </p:spPr>
+        <p:txBody>
+          <a:bodyPr vert="horz" lIns="91440" tIns="45720" rIns="91440" bIns="45720" rtlCol="0" anchor="ctr">
+            <a:normAutofit fontScale="92500" lnSpcReduction="20000"/>
+          </a:bodyPr>
+          <a:lstStyle>
+            <a:lvl1pPr marL="0" indent="0" algn="l" defTabSz="457200" rtl="0" eaLnBrk="1" latinLnBrk="0" hangingPunct="1">
+              <a:spcBef>
+                <a:spcPts val="1000"/>
+              </a:spcBef>
+              <a:spcAft>
+                <a:spcPts val="0"/>
+              </a:spcAft>
+              <a:buClr>
+                <a:schemeClr val="accent1"/>
+              </a:buClr>
+              <a:buSzPct val="80000"/>
+              <a:buFont typeface="Wingdings 3" charset="2"/>
+              <a:buNone/>
+              <a:defRPr sz="2000" b="0" i="0" kern="1200" cap="all">
+                <a:solidFill>
+                  <a:schemeClr val="accent1"/>
+                </a:solidFill>
+                <a:latin typeface="+mj-lt"/>
+                <a:ea typeface="+mj-ea"/>
+                <a:cs typeface="+mj-cs"/>
+              </a:defRPr>
+            </a:lvl1pPr>
+            <a:lvl2pPr marL="457200" indent="0" algn="ctr" defTabSz="457200" rtl="0" eaLnBrk="1" latinLnBrk="0" hangingPunct="1">
+              <a:spcBef>
+                <a:spcPts val="1000"/>
+              </a:spcBef>
+              <a:spcAft>
+                <a:spcPts val="0"/>
+              </a:spcAft>
+              <a:buClr>
+                <a:schemeClr val="accent1"/>
+              </a:buClr>
+              <a:buSzPct val="80000"/>
+              <a:buFont typeface="Wingdings 3" charset="2"/>
+              <a:buNone/>
+              <a:defRPr sz="1800" b="0" i="0" kern="1200">
+                <a:solidFill>
+                  <a:schemeClr val="tx1">
+                    <a:tint val="75000"/>
+                  </a:schemeClr>
+                </a:solidFill>
+                <a:latin typeface="+mj-lt"/>
+                <a:ea typeface="+mj-ea"/>
+                <a:cs typeface="+mj-cs"/>
+              </a:defRPr>
+            </a:lvl2pPr>
+            <a:lvl3pPr marL="914400" indent="0" algn="ctr" defTabSz="457200" rtl="0" eaLnBrk="1" latinLnBrk="0" hangingPunct="1">
+              <a:spcBef>
+                <a:spcPts val="1000"/>
+              </a:spcBef>
+              <a:spcAft>
+                <a:spcPts val="0"/>
+              </a:spcAft>
+              <a:buClr>
+                <a:schemeClr val="accent1"/>
+              </a:buClr>
+              <a:buSzPct val="80000"/>
+              <a:buFont typeface="Wingdings 3" charset="2"/>
+              <a:buNone/>
+              <a:defRPr sz="1600" b="0" i="0" kern="1200">
+                <a:solidFill>
+                  <a:schemeClr val="tx1">
+                    <a:tint val="75000"/>
+                  </a:schemeClr>
+                </a:solidFill>
+                <a:latin typeface="+mj-lt"/>
+                <a:ea typeface="+mj-ea"/>
+                <a:cs typeface="+mj-cs"/>
+              </a:defRPr>
+            </a:lvl3pPr>
+            <a:lvl4pPr marL="1371600" indent="0" algn="ctr" defTabSz="457200" rtl="0" eaLnBrk="1" latinLnBrk="0" hangingPunct="1">
+              <a:spcBef>
+                <a:spcPts val="1000"/>
+              </a:spcBef>
+              <a:spcAft>
+                <a:spcPts val="0"/>
+              </a:spcAft>
+              <a:buClr>
+                <a:schemeClr val="accent1"/>
+              </a:buClr>
+              <a:buSzPct val="80000"/>
+              <a:buFont typeface="Wingdings 3" charset="2"/>
+              <a:buNone/>
+              <a:defRPr sz="1400" b="0" i="0" kern="1200">
+                <a:solidFill>
+                  <a:schemeClr val="tx1">
+                    <a:tint val="75000"/>
+                  </a:schemeClr>
+                </a:solidFill>
+                <a:latin typeface="+mj-lt"/>
+                <a:ea typeface="+mj-ea"/>
+                <a:cs typeface="+mj-cs"/>
+              </a:defRPr>
+            </a:lvl4pPr>
+            <a:lvl5pPr marL="1828800" indent="0" algn="ctr" defTabSz="457200" rtl="0" eaLnBrk="1" latinLnBrk="0" hangingPunct="1">
+              <a:spcBef>
+                <a:spcPts val="1000"/>
+              </a:spcBef>
+              <a:spcAft>
+                <a:spcPts val="0"/>
+              </a:spcAft>
+              <a:buClr>
+                <a:schemeClr val="accent1"/>
+              </a:buClr>
+              <a:buSzPct val="80000"/>
+              <a:buFont typeface="Wingdings 3" charset="2"/>
+              <a:buNone/>
+              <a:defRPr sz="1400" b="0" i="0" kern="1200">
+                <a:solidFill>
+                  <a:schemeClr val="tx1">
+                    <a:tint val="75000"/>
+                  </a:schemeClr>
+                </a:solidFill>
+                <a:latin typeface="+mj-lt"/>
+                <a:ea typeface="+mj-ea"/>
+                <a:cs typeface="+mj-cs"/>
+              </a:defRPr>
+            </a:lvl5pPr>
+            <a:lvl6pPr marL="2286000" indent="0" algn="ctr" defTabSz="457200" rtl="0" eaLnBrk="1" latinLnBrk="0" hangingPunct="1">
+              <a:spcBef>
+                <a:spcPts val="1000"/>
+              </a:spcBef>
+              <a:spcAft>
+                <a:spcPts val="0"/>
+              </a:spcAft>
+              <a:buClr>
+                <a:schemeClr val="accent1"/>
+              </a:buClr>
+              <a:buSzPct val="80000"/>
+              <a:buFont typeface="Wingdings 3" charset="2"/>
+              <a:buNone/>
+              <a:defRPr sz="1400" b="0" i="0" kern="1200">
+                <a:solidFill>
+                  <a:schemeClr val="tx1">
+                    <a:tint val="75000"/>
+                  </a:schemeClr>
+                </a:solidFill>
+                <a:latin typeface="+mj-lt"/>
+                <a:ea typeface="+mj-ea"/>
+                <a:cs typeface="+mj-cs"/>
+              </a:defRPr>
+            </a:lvl6pPr>
+            <a:lvl7pPr marL="2743200" indent="0" algn="ctr" defTabSz="457200" rtl="0" eaLnBrk="1" latinLnBrk="0" hangingPunct="1">
+              <a:spcBef>
+                <a:spcPts val="1000"/>
+              </a:spcBef>
+              <a:spcAft>
+                <a:spcPts val="0"/>
+              </a:spcAft>
+              <a:buClr>
+                <a:schemeClr val="accent1"/>
+              </a:buClr>
+              <a:buSzPct val="80000"/>
+              <a:buFont typeface="Wingdings 3" charset="2"/>
+              <a:buNone/>
+              <a:defRPr sz="1400" b="0" i="0" kern="1200">
+                <a:solidFill>
+                  <a:schemeClr val="tx1">
+                    <a:tint val="75000"/>
+                  </a:schemeClr>
+                </a:solidFill>
+                <a:latin typeface="+mj-lt"/>
+                <a:ea typeface="+mj-ea"/>
+                <a:cs typeface="+mj-cs"/>
+              </a:defRPr>
+            </a:lvl7pPr>
+            <a:lvl8pPr marL="3200400" indent="0" algn="ctr" defTabSz="457200" rtl="0" eaLnBrk="1" latinLnBrk="0" hangingPunct="1">
+              <a:spcBef>
+                <a:spcPts val="1000"/>
+              </a:spcBef>
+              <a:spcAft>
+                <a:spcPts val="0"/>
+              </a:spcAft>
+              <a:buClr>
+                <a:schemeClr val="accent1"/>
+              </a:buClr>
+              <a:buSzPct val="80000"/>
+              <a:buFont typeface="Wingdings 3" charset="2"/>
+              <a:buNone/>
+              <a:defRPr sz="1400" b="0" i="0" kern="1200">
+                <a:solidFill>
+                  <a:schemeClr val="tx1">
+                    <a:tint val="75000"/>
+                  </a:schemeClr>
+                </a:solidFill>
+                <a:latin typeface="+mj-lt"/>
+                <a:ea typeface="+mj-ea"/>
+                <a:cs typeface="+mj-cs"/>
+              </a:defRPr>
+            </a:lvl8pPr>
+            <a:lvl9pPr marL="3657600" indent="0" algn="ctr" defTabSz="457200" rtl="0" eaLnBrk="1" latinLnBrk="0" hangingPunct="1">
+              <a:spcBef>
+                <a:spcPts val="1000"/>
+              </a:spcBef>
+              <a:spcAft>
+                <a:spcPts val="0"/>
+              </a:spcAft>
+              <a:buClr>
+                <a:schemeClr val="accent1"/>
+              </a:buClr>
+              <a:buSzPct val="80000"/>
+              <a:buFont typeface="Wingdings 3" charset="2"/>
+              <a:buNone/>
+              <a:defRPr sz="1400" b="0" i="0" kern="1200">
+                <a:solidFill>
+                  <a:schemeClr val="tx1">
+                    <a:tint val="75000"/>
+                  </a:schemeClr>
+                </a:solidFill>
+                <a:latin typeface="+mj-lt"/>
+                <a:ea typeface="+mj-ea"/>
+                <a:cs typeface="+mj-cs"/>
+              </a:defRPr>
+            </a:lvl9pPr>
+          </a:lstStyle>
+          <a:p>
+            <a:pPr algn="ctr"/>
+            <a:r>
+              <a:rPr lang="en-US" sz="11500" b="1" dirty="0"/>
+              <a:t>14</a:t>
+            </a:r>
+          </a:p>
+        </p:txBody>
+      </p:sp>
+      <p:pic>
+        <p:nvPicPr>
+          <p:cNvPr id="4" name="Picture 3">
+            <a:extLst>
+              <a:ext uri="{FF2B5EF4-FFF2-40B4-BE49-F238E27FC236}">
+                <a16:creationId xmlns:a16="http://schemas.microsoft.com/office/drawing/2014/main" id="{CBE25B37-DF0A-5B98-E8F0-BFA113A90CAB}"/>
+              </a:ext>
+            </a:extLst>
+          </p:cNvPr>
+          <p:cNvPicPr>
+            <a:picLocks noChangeAspect="1"/>
+          </p:cNvPicPr>
+          <p:nvPr/>
+        </p:nvPicPr>
+        <p:blipFill>
+          <a:blip r:embed="rId4"/>
+          <a:stretch>
+            <a:fillRect/>
+          </a:stretch>
+        </p:blipFill>
+        <p:spPr>
+          <a:xfrm>
+            <a:off x="0" y="0"/>
+            <a:ext cx="3896391" cy="2481677"/>
+          </a:xfrm>
+          <a:prstGeom prst="rect">
+            <a:avLst/>
+          </a:prstGeom>
+          <a:ln>
+            <a:noFill/>
+          </a:ln>
+          <a:effectLst>
+            <a:softEdge rad="112500"/>
+          </a:effectLst>
+        </p:spPr>
+      </p:pic>
+      <p:sp>
+        <p:nvSpPr>
+          <p:cNvPr id="2" name="Title 1">
+            <a:extLst>
+              <a:ext uri="{FF2B5EF4-FFF2-40B4-BE49-F238E27FC236}">
+                <a16:creationId xmlns:a16="http://schemas.microsoft.com/office/drawing/2014/main" id="{635294E8-A181-8B17-DD85-972867A9B41A}"/>
+              </a:ext>
+            </a:extLst>
+          </p:cNvPr>
+          <p:cNvSpPr>
+            <a:spLocks noGrp="1"/>
+          </p:cNvSpPr>
+          <p:nvPr>
+            <p:ph type="ctrTitle"/>
+          </p:nvPr>
+        </p:nvSpPr>
+        <p:spPr>
+          <a:xfrm>
+            <a:off x="3477730" y="50040"/>
+            <a:ext cx="4741596" cy="946553"/>
+          </a:xfrm>
+        </p:spPr>
+        <p:txBody>
+          <a:bodyPr anchor="ctr">
+            <a:normAutofit fontScale="90000"/>
+          </a:bodyPr>
+          <a:lstStyle/>
+          <a:p>
+            <a:r>
+              <a:rPr lang="en-US" sz="6000" b="1" dirty="0"/>
+              <a:t>App Router</a:t>
+            </a:r>
+            <a:endParaRPr lang="ru-RU" sz="6000" b="1" dirty="0"/>
+          </a:p>
+        </p:txBody>
+      </p:sp>
+      <p:pic>
+        <p:nvPicPr>
+          <p:cNvPr id="6" name="Picture 5">
+            <a:extLst>
+              <a:ext uri="{FF2B5EF4-FFF2-40B4-BE49-F238E27FC236}">
+                <a16:creationId xmlns:a16="http://schemas.microsoft.com/office/drawing/2014/main" id="{E65A5E9B-ED0F-1BE5-E2F3-31BAA42FDBC3}"/>
+              </a:ext>
+            </a:extLst>
+          </p:cNvPr>
+          <p:cNvPicPr>
+            <a:picLocks noChangeAspect="1"/>
+          </p:cNvPicPr>
+          <p:nvPr/>
+        </p:nvPicPr>
+        <p:blipFill>
+          <a:blip r:embed="rId5"/>
+          <a:stretch>
+            <a:fillRect/>
+          </a:stretch>
+        </p:blipFill>
+        <p:spPr>
+          <a:xfrm>
+            <a:off x="10672842" y="271032"/>
+            <a:ext cx="1420028" cy="652758"/>
+          </a:xfrm>
+          <a:prstGeom prst="rect">
+            <a:avLst/>
+          </a:prstGeom>
+          <a:ln>
+            <a:noFill/>
+          </a:ln>
+          <a:effectLst>
+            <a:softEdge rad="112500"/>
+          </a:effectLst>
+        </p:spPr>
+      </p:pic>
+      <p:sp>
+        <p:nvSpPr>
+          <p:cNvPr id="9" name="Subtitle 2">
+            <a:extLst>
+              <a:ext uri="{FF2B5EF4-FFF2-40B4-BE49-F238E27FC236}">
+                <a16:creationId xmlns:a16="http://schemas.microsoft.com/office/drawing/2014/main" id="{3EEB62C2-0FE2-48CB-AE68-33FF8003729E}"/>
+              </a:ext>
+            </a:extLst>
+          </p:cNvPr>
+          <p:cNvSpPr txBox="1">
+            <a:spLocks/>
+          </p:cNvSpPr>
+          <p:nvPr/>
+        </p:nvSpPr>
+        <p:spPr>
+          <a:xfrm>
+            <a:off x="3896391" y="1718833"/>
+            <a:ext cx="8196479" cy="788415"/>
+          </a:xfrm>
+          <a:prstGeom prst="rect">
+            <a:avLst/>
+          </a:prstGeom>
+        </p:spPr>
+        <p:txBody>
+          <a:bodyPr vert="horz" lIns="91440" tIns="45720" rIns="91440" bIns="45720" rtlCol="0" anchor="ctr">
+            <a:normAutofit/>
+          </a:bodyPr>
+          <a:lstStyle>
+            <a:lvl1pPr marL="0" indent="0" algn="l" defTabSz="457200" rtl="0" eaLnBrk="1" latinLnBrk="0" hangingPunct="1">
+              <a:spcBef>
+                <a:spcPts val="1000"/>
+              </a:spcBef>
+              <a:spcAft>
+                <a:spcPts val="0"/>
+              </a:spcAft>
+              <a:buClr>
+                <a:schemeClr val="accent1"/>
+              </a:buClr>
+              <a:buSzPct val="80000"/>
+              <a:buFont typeface="Wingdings 3" charset="2"/>
+              <a:buNone/>
+              <a:defRPr sz="2000" b="0" i="0" kern="1200" cap="all">
+                <a:solidFill>
+                  <a:schemeClr val="accent1"/>
+                </a:solidFill>
+                <a:latin typeface="+mj-lt"/>
+                <a:ea typeface="+mj-ea"/>
+                <a:cs typeface="+mj-cs"/>
+              </a:defRPr>
+            </a:lvl1pPr>
+            <a:lvl2pPr marL="457200" indent="0" algn="ctr" defTabSz="457200" rtl="0" eaLnBrk="1" latinLnBrk="0" hangingPunct="1">
+              <a:spcBef>
+                <a:spcPts val="1000"/>
+              </a:spcBef>
+              <a:spcAft>
+                <a:spcPts val="0"/>
+              </a:spcAft>
+              <a:buClr>
+                <a:schemeClr val="accent1"/>
+              </a:buClr>
+              <a:buSzPct val="80000"/>
+              <a:buFont typeface="Wingdings 3" charset="2"/>
+              <a:buNone/>
+              <a:defRPr sz="1800" b="0" i="0" kern="1200">
+                <a:solidFill>
+                  <a:schemeClr val="tx1">
+                    <a:tint val="75000"/>
+                  </a:schemeClr>
+                </a:solidFill>
+                <a:latin typeface="+mj-lt"/>
+                <a:ea typeface="+mj-ea"/>
+                <a:cs typeface="+mj-cs"/>
+              </a:defRPr>
+            </a:lvl2pPr>
+            <a:lvl3pPr marL="914400" indent="0" algn="ctr" defTabSz="457200" rtl="0" eaLnBrk="1" latinLnBrk="0" hangingPunct="1">
+              <a:spcBef>
+                <a:spcPts val="1000"/>
+              </a:spcBef>
+              <a:spcAft>
+                <a:spcPts val="0"/>
+              </a:spcAft>
+              <a:buClr>
+                <a:schemeClr val="accent1"/>
+              </a:buClr>
+              <a:buSzPct val="80000"/>
+              <a:buFont typeface="Wingdings 3" charset="2"/>
+              <a:buNone/>
+              <a:defRPr sz="1600" b="0" i="0" kern="1200">
+                <a:solidFill>
+                  <a:schemeClr val="tx1">
+                    <a:tint val="75000"/>
+                  </a:schemeClr>
+                </a:solidFill>
+                <a:latin typeface="+mj-lt"/>
+                <a:ea typeface="+mj-ea"/>
+                <a:cs typeface="+mj-cs"/>
+              </a:defRPr>
+            </a:lvl3pPr>
+            <a:lvl4pPr marL="1371600" indent="0" algn="ctr" defTabSz="457200" rtl="0" eaLnBrk="1" latinLnBrk="0" hangingPunct="1">
+              <a:spcBef>
+                <a:spcPts val="1000"/>
+              </a:spcBef>
+              <a:spcAft>
+                <a:spcPts val="0"/>
+              </a:spcAft>
+              <a:buClr>
+                <a:schemeClr val="accent1"/>
+              </a:buClr>
+              <a:buSzPct val="80000"/>
+              <a:buFont typeface="Wingdings 3" charset="2"/>
+              <a:buNone/>
+              <a:defRPr sz="1400" b="0" i="0" kern="1200">
+                <a:solidFill>
+                  <a:schemeClr val="tx1">
+                    <a:tint val="75000"/>
+                  </a:schemeClr>
+                </a:solidFill>
+                <a:latin typeface="+mj-lt"/>
+                <a:ea typeface="+mj-ea"/>
+                <a:cs typeface="+mj-cs"/>
+              </a:defRPr>
+            </a:lvl4pPr>
+            <a:lvl5pPr marL="1828800" indent="0" algn="ctr" defTabSz="457200" rtl="0" eaLnBrk="1" latinLnBrk="0" hangingPunct="1">
+              <a:spcBef>
+                <a:spcPts val="1000"/>
+              </a:spcBef>
+              <a:spcAft>
+                <a:spcPts val="0"/>
+              </a:spcAft>
+              <a:buClr>
+                <a:schemeClr val="accent1"/>
+              </a:buClr>
+              <a:buSzPct val="80000"/>
+              <a:buFont typeface="Wingdings 3" charset="2"/>
+              <a:buNone/>
+              <a:defRPr sz="1400" b="0" i="0" kern="1200">
+                <a:solidFill>
+                  <a:schemeClr val="tx1">
+                    <a:tint val="75000"/>
+                  </a:schemeClr>
+                </a:solidFill>
+                <a:latin typeface="+mj-lt"/>
+                <a:ea typeface="+mj-ea"/>
+                <a:cs typeface="+mj-cs"/>
+              </a:defRPr>
+            </a:lvl5pPr>
+            <a:lvl6pPr marL="2286000" indent="0" algn="ctr" defTabSz="457200" rtl="0" eaLnBrk="1" latinLnBrk="0" hangingPunct="1">
+              <a:spcBef>
+                <a:spcPts val="1000"/>
+              </a:spcBef>
+              <a:spcAft>
+                <a:spcPts val="0"/>
+              </a:spcAft>
+              <a:buClr>
+                <a:schemeClr val="accent1"/>
+              </a:buClr>
+              <a:buSzPct val="80000"/>
+              <a:buFont typeface="Wingdings 3" charset="2"/>
+              <a:buNone/>
+              <a:defRPr sz="1400" b="0" i="0" kern="1200">
+                <a:solidFill>
+                  <a:schemeClr val="tx1">
+                    <a:tint val="75000"/>
+                  </a:schemeClr>
+                </a:solidFill>
+                <a:latin typeface="+mj-lt"/>
+                <a:ea typeface="+mj-ea"/>
+                <a:cs typeface="+mj-cs"/>
+              </a:defRPr>
+            </a:lvl6pPr>
+            <a:lvl7pPr marL="2743200" indent="0" algn="ctr" defTabSz="457200" rtl="0" eaLnBrk="1" latinLnBrk="0" hangingPunct="1">
+              <a:spcBef>
+                <a:spcPts val="1000"/>
+              </a:spcBef>
+              <a:spcAft>
+                <a:spcPts val="0"/>
+              </a:spcAft>
+              <a:buClr>
+                <a:schemeClr val="accent1"/>
+              </a:buClr>
+              <a:buSzPct val="80000"/>
+              <a:buFont typeface="Wingdings 3" charset="2"/>
+              <a:buNone/>
+              <a:defRPr sz="1400" b="0" i="0" kern="1200">
+                <a:solidFill>
+                  <a:schemeClr val="tx1">
+                    <a:tint val="75000"/>
+                  </a:schemeClr>
+                </a:solidFill>
+                <a:latin typeface="+mj-lt"/>
+                <a:ea typeface="+mj-ea"/>
+                <a:cs typeface="+mj-cs"/>
+              </a:defRPr>
+            </a:lvl7pPr>
+            <a:lvl8pPr marL="3200400" indent="0" algn="ctr" defTabSz="457200" rtl="0" eaLnBrk="1" latinLnBrk="0" hangingPunct="1">
+              <a:spcBef>
+                <a:spcPts val="1000"/>
+              </a:spcBef>
+              <a:spcAft>
+                <a:spcPts val="0"/>
+              </a:spcAft>
+              <a:buClr>
+                <a:schemeClr val="accent1"/>
+              </a:buClr>
+              <a:buSzPct val="80000"/>
+              <a:buFont typeface="Wingdings 3" charset="2"/>
+              <a:buNone/>
+              <a:defRPr sz="1400" b="0" i="0" kern="1200">
+                <a:solidFill>
+                  <a:schemeClr val="tx1">
+                    <a:tint val="75000"/>
+                  </a:schemeClr>
+                </a:solidFill>
+                <a:latin typeface="+mj-lt"/>
+                <a:ea typeface="+mj-ea"/>
+                <a:cs typeface="+mj-cs"/>
+              </a:defRPr>
+            </a:lvl8pPr>
+            <a:lvl9pPr marL="3657600" indent="0" algn="ctr" defTabSz="457200" rtl="0" eaLnBrk="1" latinLnBrk="0" hangingPunct="1">
+              <a:spcBef>
+                <a:spcPts val="1000"/>
+              </a:spcBef>
+              <a:spcAft>
+                <a:spcPts val="0"/>
+              </a:spcAft>
+              <a:buClr>
+                <a:schemeClr val="accent1"/>
+              </a:buClr>
+              <a:buSzPct val="80000"/>
+              <a:buFont typeface="Wingdings 3" charset="2"/>
+              <a:buNone/>
+              <a:defRPr sz="1400" b="0" i="0" kern="1200">
+                <a:solidFill>
+                  <a:schemeClr val="tx1">
+                    <a:tint val="75000"/>
+                  </a:schemeClr>
+                </a:solidFill>
+                <a:latin typeface="+mj-lt"/>
+                <a:ea typeface="+mj-ea"/>
+                <a:cs typeface="+mj-cs"/>
+              </a:defRPr>
+            </a:lvl9pPr>
+          </a:lstStyle>
+          <a:p>
+            <a:r>
+              <a:rPr lang="en-US" altLang="zh-CN" sz="3600" b="1" cap="none" dirty="0"/>
+              <a:t>5.3 Pattern: Showing active links</a:t>
+            </a:r>
+            <a:endParaRPr lang="en-US" sz="3600" b="1" cap="none" dirty="0"/>
+          </a:p>
+        </p:txBody>
+      </p:sp>
+      <p:sp>
+        <p:nvSpPr>
+          <p:cNvPr id="3" name="Subtitle 2">
+            <a:extLst>
+              <a:ext uri="{FF2B5EF4-FFF2-40B4-BE49-F238E27FC236}">
+                <a16:creationId xmlns:a16="http://schemas.microsoft.com/office/drawing/2014/main" id="{43E89E21-9529-4A57-7970-DF75CED8427F}"/>
+              </a:ext>
+            </a:extLst>
+          </p:cNvPr>
+          <p:cNvSpPr>
+            <a:spLocks noGrp="1"/>
+          </p:cNvSpPr>
+          <p:nvPr>
+            <p:ph type="subTitle" idx="1"/>
+          </p:nvPr>
+        </p:nvSpPr>
+        <p:spPr>
+          <a:xfrm>
+            <a:off x="2685143" y="1083848"/>
+            <a:ext cx="9407727" cy="788415"/>
+          </a:xfrm>
+          <a:solidFill>
+            <a:schemeClr val="accent6">
+              <a:alpha val="50000"/>
+            </a:schemeClr>
+          </a:solidFill>
+          <a:ln>
+            <a:noFill/>
+          </a:ln>
+        </p:spPr>
+        <p:style>
+          <a:lnRef idx="0">
+            <a:scrgbClr r="0" g="0" b="0"/>
+          </a:lnRef>
+          <a:fillRef idx="0">
+            <a:scrgbClr r="0" g="0" b="0"/>
+          </a:fillRef>
+          <a:effectRef idx="0">
+            <a:scrgbClr r="0" g="0" b="0"/>
+          </a:effectRef>
+          <a:fontRef idx="minor">
+            <a:schemeClr val="lt1"/>
+          </a:fontRef>
+        </p:style>
+        <p:txBody>
+          <a:bodyPr anchor="ctr">
+            <a:normAutofit fontScale="92500"/>
+          </a:bodyPr>
+          <a:lstStyle/>
+          <a:p>
+            <a:r>
+              <a:rPr lang="en-US" altLang="zh-CN" sz="4800" b="1" dirty="0"/>
+              <a:t>5. Navigating between Pages</a:t>
+            </a:r>
+            <a:endParaRPr lang="en-US" sz="4800" b="1" dirty="0"/>
+          </a:p>
+        </p:txBody>
+      </p:sp>
+      <p:pic>
+        <p:nvPicPr>
+          <p:cNvPr id="11" name="Picture 10">
+            <a:extLst>
+              <a:ext uri="{FF2B5EF4-FFF2-40B4-BE49-F238E27FC236}">
+                <a16:creationId xmlns:a16="http://schemas.microsoft.com/office/drawing/2014/main" id="{595BFB16-0741-9180-CFF1-FBDED588F693}"/>
+              </a:ext>
+            </a:extLst>
+          </p:cNvPr>
+          <p:cNvPicPr>
+            <a:picLocks noChangeAspect="1"/>
+          </p:cNvPicPr>
+          <p:nvPr/>
+        </p:nvPicPr>
+        <p:blipFill>
+          <a:blip r:embed="rId6"/>
+          <a:stretch>
+            <a:fillRect/>
+          </a:stretch>
+        </p:blipFill>
+        <p:spPr>
+          <a:xfrm>
+            <a:off x="169694" y="1959518"/>
+            <a:ext cx="10503148" cy="4523475"/>
+          </a:xfrm>
+          <a:prstGeom prst="roundRect">
+            <a:avLst>
+              <a:gd name="adj" fmla="val 16667"/>
+            </a:avLst>
+          </a:prstGeom>
+          <a:ln>
+            <a:noFill/>
+          </a:ln>
+          <a:effectLst>
+            <a:outerShdw blurRad="152400" dist="12000" dir="900000" sy="98000" kx="110000" ky="200000" algn="tl" rotWithShape="0">
+              <a:srgbClr val="000000">
+                <a:alpha val="30000"/>
+              </a:srgbClr>
+            </a:outerShdw>
+          </a:effectLst>
+          <a:scene3d>
+            <a:camera prst="perspectiveRelaxed">
+              <a:rot lat="19800000" lon="1200000" rev="20820000"/>
+            </a:camera>
+            <a:lightRig rig="threePt" dir="t"/>
+          </a:scene3d>
+          <a:sp3d contourW="6350" prstMaterial="matte">
+            <a:bevelT w="101600" h="101600"/>
+            <a:contourClr>
+              <a:srgbClr val="969696"/>
+            </a:contourClr>
+          </a:sp3d>
+        </p:spPr>
+      </p:pic>
+    </p:spTree>
+    <p:extLst>
+      <p:ext uri="{BB962C8B-B14F-4D97-AF65-F5344CB8AC3E}">
+        <p14:creationId xmlns:p14="http://schemas.microsoft.com/office/powerpoint/2010/main" val="2605189572"/>
+      </p:ext>
+    </p:extLst>
+  </p:cSld>
+  <p:clrMapOvr>
+    <a:masterClrMapping/>
+  </p:clrMapOvr>
+</p:sld>
+</file>
+
+<file path=ppt/slides/slide16.xml><?xml version="1.0" encoding="utf-8"?>
+<p:sld xmlns:a="http://schemas.openxmlformats.org/drawingml/2006/main" xmlns:r="http://schemas.openxmlformats.org/officeDocument/2006/relationships" xmlns:p="http://schemas.openxmlformats.org/presentationml/2006/main">
+  <p:cSld>
+    <p:spTree>
+      <p:nvGrpSpPr>
+        <p:cNvPr id="1" name="">
+          <a:extLst>
+            <a:ext uri="{FF2B5EF4-FFF2-40B4-BE49-F238E27FC236}">
+              <a16:creationId xmlns:a16="http://schemas.microsoft.com/office/drawing/2014/main" id="{7B559127-ABA3-C64C-AABE-2B3F834D31C9}"/>
+            </a:ext>
+          </a:extLst>
+        </p:cNvPr>
+        <p:cNvGrpSpPr/>
+        <p:nvPr/>
+      </p:nvGrpSpPr>
+      <p:grpSpPr>
+        <a:xfrm>
+          <a:off x="0" y="0"/>
+          <a:ext cx="0" cy="0"/>
+          <a:chOff x="0" y="0"/>
+          <a:chExt cx="0" cy="0"/>
+        </a:xfrm>
+      </p:grpSpPr>
+      <p:pic>
+        <p:nvPicPr>
+          <p:cNvPr id="5" name="Picture 4" descr="chain links">
+            <a:extLst>
+              <a:ext uri="{FF2B5EF4-FFF2-40B4-BE49-F238E27FC236}">
+                <a16:creationId xmlns:a16="http://schemas.microsoft.com/office/drawing/2014/main" id="{A24B1E36-D5D1-3877-AB0E-283BC0131BF3}"/>
+              </a:ext>
+            </a:extLst>
+          </p:cNvPr>
+          <p:cNvPicPr>
+            <a:picLocks noChangeAspect="1"/>
+          </p:cNvPicPr>
+          <p:nvPr/>
+        </p:nvPicPr>
+        <p:blipFill rotWithShape="1">
+          <a:blip r:embed="rId3">
+            <a:duotone>
+              <a:prstClr val="black"/>
+              <a:schemeClr val="accent5">
+                <a:tint val="45000"/>
+                <a:satMod val="400000"/>
+              </a:schemeClr>
+            </a:duotone>
+            <a:alphaModFix amt="25000"/>
+          </a:blip>
+          <a:srcRect t="23391" r="9091"/>
+          <a:stretch/>
+        </p:blipFill>
+        <p:spPr>
+          <a:xfrm>
+            <a:off x="0" y="10"/>
+            <a:ext cx="12191980" cy="6857990"/>
+          </a:xfrm>
+          <a:prstGeom prst="rect">
+            <a:avLst/>
+          </a:prstGeom>
+        </p:spPr>
+      </p:pic>
+      <p:sp>
+        <p:nvSpPr>
+          <p:cNvPr id="7" name="Subtitle 2">
+            <a:extLst>
+              <a:ext uri="{FF2B5EF4-FFF2-40B4-BE49-F238E27FC236}">
+                <a16:creationId xmlns:a16="http://schemas.microsoft.com/office/drawing/2014/main" id="{4FC49BAF-7B78-A90F-26AA-190400EC5ADB}"/>
+              </a:ext>
+            </a:extLst>
+          </p:cNvPr>
+          <p:cNvSpPr txBox="1">
+            <a:spLocks/>
+          </p:cNvSpPr>
+          <p:nvPr/>
+        </p:nvSpPr>
+        <p:spPr>
+          <a:xfrm>
+            <a:off x="8483689" y="2419"/>
+            <a:ext cx="2102069" cy="1447801"/>
+          </a:xfrm>
+          <a:prstGeom prst="rect">
+            <a:avLst/>
+          </a:prstGeom>
+        </p:spPr>
+        <p:txBody>
+          <a:bodyPr vert="horz" lIns="91440" tIns="45720" rIns="91440" bIns="45720" rtlCol="0" anchor="ctr">
+            <a:normAutofit fontScale="92500" lnSpcReduction="20000"/>
+          </a:bodyPr>
+          <a:lstStyle>
+            <a:lvl1pPr marL="0" indent="0" algn="l" defTabSz="457200" rtl="0" eaLnBrk="1" latinLnBrk="0" hangingPunct="1">
+              <a:spcBef>
+                <a:spcPts val="1000"/>
+              </a:spcBef>
+              <a:spcAft>
+                <a:spcPts val="0"/>
+              </a:spcAft>
+              <a:buClr>
+                <a:schemeClr val="accent1"/>
+              </a:buClr>
+              <a:buSzPct val="80000"/>
+              <a:buFont typeface="Wingdings 3" charset="2"/>
+              <a:buNone/>
+              <a:defRPr sz="2000" b="0" i="0" kern="1200" cap="all">
+                <a:solidFill>
+                  <a:schemeClr val="accent1"/>
+                </a:solidFill>
+                <a:latin typeface="+mj-lt"/>
+                <a:ea typeface="+mj-ea"/>
+                <a:cs typeface="+mj-cs"/>
+              </a:defRPr>
+            </a:lvl1pPr>
+            <a:lvl2pPr marL="457200" indent="0" algn="ctr" defTabSz="457200" rtl="0" eaLnBrk="1" latinLnBrk="0" hangingPunct="1">
+              <a:spcBef>
+                <a:spcPts val="1000"/>
+              </a:spcBef>
+              <a:spcAft>
+                <a:spcPts val="0"/>
+              </a:spcAft>
+              <a:buClr>
+                <a:schemeClr val="accent1"/>
+              </a:buClr>
+              <a:buSzPct val="80000"/>
+              <a:buFont typeface="Wingdings 3" charset="2"/>
+              <a:buNone/>
+              <a:defRPr sz="1800" b="0" i="0" kern="1200">
+                <a:solidFill>
+                  <a:schemeClr val="tx1">
+                    <a:tint val="75000"/>
+                  </a:schemeClr>
+                </a:solidFill>
+                <a:latin typeface="+mj-lt"/>
+                <a:ea typeface="+mj-ea"/>
+                <a:cs typeface="+mj-cs"/>
+              </a:defRPr>
+            </a:lvl2pPr>
+            <a:lvl3pPr marL="914400" indent="0" algn="ctr" defTabSz="457200" rtl="0" eaLnBrk="1" latinLnBrk="0" hangingPunct="1">
+              <a:spcBef>
+                <a:spcPts val="1000"/>
+              </a:spcBef>
+              <a:spcAft>
+                <a:spcPts val="0"/>
+              </a:spcAft>
+              <a:buClr>
+                <a:schemeClr val="accent1"/>
+              </a:buClr>
+              <a:buSzPct val="80000"/>
+              <a:buFont typeface="Wingdings 3" charset="2"/>
+              <a:buNone/>
+              <a:defRPr sz="1600" b="0" i="0" kern="1200">
+                <a:solidFill>
+                  <a:schemeClr val="tx1">
+                    <a:tint val="75000"/>
+                  </a:schemeClr>
+                </a:solidFill>
+                <a:latin typeface="+mj-lt"/>
+                <a:ea typeface="+mj-ea"/>
+                <a:cs typeface="+mj-cs"/>
+              </a:defRPr>
+            </a:lvl3pPr>
+            <a:lvl4pPr marL="1371600" indent="0" algn="ctr" defTabSz="457200" rtl="0" eaLnBrk="1" latinLnBrk="0" hangingPunct="1">
+              <a:spcBef>
+                <a:spcPts val="1000"/>
+              </a:spcBef>
+              <a:spcAft>
+                <a:spcPts val="0"/>
+              </a:spcAft>
+              <a:buClr>
+                <a:schemeClr val="accent1"/>
+              </a:buClr>
+              <a:buSzPct val="80000"/>
+              <a:buFont typeface="Wingdings 3" charset="2"/>
+              <a:buNone/>
+              <a:defRPr sz="1400" b="0" i="0" kern="1200">
+                <a:solidFill>
+                  <a:schemeClr val="tx1">
+                    <a:tint val="75000"/>
+                  </a:schemeClr>
+                </a:solidFill>
+                <a:latin typeface="+mj-lt"/>
+                <a:ea typeface="+mj-ea"/>
+                <a:cs typeface="+mj-cs"/>
+              </a:defRPr>
+            </a:lvl4pPr>
+            <a:lvl5pPr marL="1828800" indent="0" algn="ctr" defTabSz="457200" rtl="0" eaLnBrk="1" latinLnBrk="0" hangingPunct="1">
+              <a:spcBef>
+                <a:spcPts val="1000"/>
+              </a:spcBef>
+              <a:spcAft>
+                <a:spcPts val="0"/>
+              </a:spcAft>
+              <a:buClr>
+                <a:schemeClr val="accent1"/>
+              </a:buClr>
+              <a:buSzPct val="80000"/>
+              <a:buFont typeface="Wingdings 3" charset="2"/>
+              <a:buNone/>
+              <a:defRPr sz="1400" b="0" i="0" kern="1200">
+                <a:solidFill>
+                  <a:schemeClr val="tx1">
+                    <a:tint val="75000"/>
+                  </a:schemeClr>
+                </a:solidFill>
+                <a:latin typeface="+mj-lt"/>
+                <a:ea typeface="+mj-ea"/>
+                <a:cs typeface="+mj-cs"/>
+              </a:defRPr>
+            </a:lvl5pPr>
+            <a:lvl6pPr marL="2286000" indent="0" algn="ctr" defTabSz="457200" rtl="0" eaLnBrk="1" latinLnBrk="0" hangingPunct="1">
+              <a:spcBef>
+                <a:spcPts val="1000"/>
+              </a:spcBef>
+              <a:spcAft>
+                <a:spcPts val="0"/>
+              </a:spcAft>
+              <a:buClr>
+                <a:schemeClr val="accent1"/>
+              </a:buClr>
+              <a:buSzPct val="80000"/>
+              <a:buFont typeface="Wingdings 3" charset="2"/>
+              <a:buNone/>
+              <a:defRPr sz="1400" b="0" i="0" kern="1200">
+                <a:solidFill>
+                  <a:schemeClr val="tx1">
+                    <a:tint val="75000"/>
+                  </a:schemeClr>
+                </a:solidFill>
+                <a:latin typeface="+mj-lt"/>
+                <a:ea typeface="+mj-ea"/>
+                <a:cs typeface="+mj-cs"/>
+              </a:defRPr>
+            </a:lvl6pPr>
+            <a:lvl7pPr marL="2743200" indent="0" algn="ctr" defTabSz="457200" rtl="0" eaLnBrk="1" latinLnBrk="0" hangingPunct="1">
+              <a:spcBef>
+                <a:spcPts val="1000"/>
+              </a:spcBef>
+              <a:spcAft>
+                <a:spcPts val="0"/>
+              </a:spcAft>
+              <a:buClr>
+                <a:schemeClr val="accent1"/>
+              </a:buClr>
+              <a:buSzPct val="80000"/>
+              <a:buFont typeface="Wingdings 3" charset="2"/>
+              <a:buNone/>
+              <a:defRPr sz="1400" b="0" i="0" kern="1200">
+                <a:solidFill>
+                  <a:schemeClr val="tx1">
+                    <a:tint val="75000"/>
+                  </a:schemeClr>
+                </a:solidFill>
+                <a:latin typeface="+mj-lt"/>
+                <a:ea typeface="+mj-ea"/>
+                <a:cs typeface="+mj-cs"/>
+              </a:defRPr>
+            </a:lvl7pPr>
+            <a:lvl8pPr marL="3200400" indent="0" algn="ctr" defTabSz="457200" rtl="0" eaLnBrk="1" latinLnBrk="0" hangingPunct="1">
+              <a:spcBef>
+                <a:spcPts val="1000"/>
+              </a:spcBef>
+              <a:spcAft>
+                <a:spcPts val="0"/>
+              </a:spcAft>
+              <a:buClr>
+                <a:schemeClr val="accent1"/>
+              </a:buClr>
+              <a:buSzPct val="80000"/>
+              <a:buFont typeface="Wingdings 3" charset="2"/>
+              <a:buNone/>
+              <a:defRPr sz="1400" b="0" i="0" kern="1200">
+                <a:solidFill>
+                  <a:schemeClr val="tx1">
+                    <a:tint val="75000"/>
+                  </a:schemeClr>
+                </a:solidFill>
+                <a:latin typeface="+mj-lt"/>
+                <a:ea typeface="+mj-ea"/>
+                <a:cs typeface="+mj-cs"/>
+              </a:defRPr>
+            </a:lvl8pPr>
+            <a:lvl9pPr marL="3657600" indent="0" algn="ctr" defTabSz="457200" rtl="0" eaLnBrk="1" latinLnBrk="0" hangingPunct="1">
+              <a:spcBef>
+                <a:spcPts val="1000"/>
+              </a:spcBef>
+              <a:spcAft>
+                <a:spcPts val="0"/>
+              </a:spcAft>
+              <a:buClr>
+                <a:schemeClr val="accent1"/>
+              </a:buClr>
+              <a:buSzPct val="80000"/>
+              <a:buFont typeface="Wingdings 3" charset="2"/>
+              <a:buNone/>
+              <a:defRPr sz="1400" b="0" i="0" kern="1200">
+                <a:solidFill>
+                  <a:schemeClr val="tx1">
+                    <a:tint val="75000"/>
+                  </a:schemeClr>
+                </a:solidFill>
+                <a:latin typeface="+mj-lt"/>
+                <a:ea typeface="+mj-ea"/>
+                <a:cs typeface="+mj-cs"/>
+              </a:defRPr>
+            </a:lvl9pPr>
+          </a:lstStyle>
+          <a:p>
+            <a:pPr algn="ctr"/>
+            <a:r>
+              <a:rPr lang="en-US" sz="11500" b="1" dirty="0"/>
+              <a:t>15</a:t>
+            </a:r>
+          </a:p>
+        </p:txBody>
+      </p:sp>
+      <p:pic>
+        <p:nvPicPr>
+          <p:cNvPr id="4" name="Picture 3">
+            <a:extLst>
+              <a:ext uri="{FF2B5EF4-FFF2-40B4-BE49-F238E27FC236}">
+                <a16:creationId xmlns:a16="http://schemas.microsoft.com/office/drawing/2014/main" id="{CE895D2C-880B-5B6A-4A81-59D1F62222C5}"/>
+              </a:ext>
+            </a:extLst>
+          </p:cNvPr>
+          <p:cNvPicPr>
+            <a:picLocks noChangeAspect="1"/>
+          </p:cNvPicPr>
+          <p:nvPr/>
+        </p:nvPicPr>
+        <p:blipFill>
+          <a:blip r:embed="rId4"/>
+          <a:stretch>
+            <a:fillRect/>
+          </a:stretch>
+        </p:blipFill>
+        <p:spPr>
+          <a:xfrm>
+            <a:off x="0" y="0"/>
+            <a:ext cx="3896391" cy="2481677"/>
+          </a:xfrm>
+          <a:prstGeom prst="rect">
+            <a:avLst/>
+          </a:prstGeom>
+          <a:ln>
+            <a:noFill/>
+          </a:ln>
+          <a:effectLst>
+            <a:softEdge rad="112500"/>
+          </a:effectLst>
+        </p:spPr>
+      </p:pic>
+      <p:sp>
+        <p:nvSpPr>
+          <p:cNvPr id="2" name="Title 1">
+            <a:extLst>
+              <a:ext uri="{FF2B5EF4-FFF2-40B4-BE49-F238E27FC236}">
+                <a16:creationId xmlns:a16="http://schemas.microsoft.com/office/drawing/2014/main" id="{AAA3D7CA-19AD-B408-513A-72B544319889}"/>
+              </a:ext>
+            </a:extLst>
+          </p:cNvPr>
+          <p:cNvSpPr>
+            <a:spLocks noGrp="1"/>
+          </p:cNvSpPr>
+          <p:nvPr>
+            <p:ph type="ctrTitle"/>
+          </p:nvPr>
+        </p:nvSpPr>
+        <p:spPr>
+          <a:xfrm>
+            <a:off x="3477730" y="50040"/>
+            <a:ext cx="4741596" cy="946553"/>
+          </a:xfrm>
+        </p:spPr>
+        <p:txBody>
+          <a:bodyPr anchor="ctr">
+            <a:normAutofit fontScale="90000"/>
+          </a:bodyPr>
+          <a:lstStyle/>
+          <a:p>
+            <a:r>
+              <a:rPr lang="en-US" sz="6000" b="1" dirty="0"/>
+              <a:t>App Router</a:t>
+            </a:r>
+            <a:endParaRPr lang="ru-RU" sz="6000" b="1" dirty="0"/>
+          </a:p>
+        </p:txBody>
+      </p:sp>
+      <p:pic>
+        <p:nvPicPr>
+          <p:cNvPr id="6" name="Picture 5">
+            <a:extLst>
+              <a:ext uri="{FF2B5EF4-FFF2-40B4-BE49-F238E27FC236}">
+                <a16:creationId xmlns:a16="http://schemas.microsoft.com/office/drawing/2014/main" id="{E52A4634-C732-645D-7808-DE312E720BDE}"/>
+              </a:ext>
+            </a:extLst>
+          </p:cNvPr>
+          <p:cNvPicPr>
+            <a:picLocks noChangeAspect="1"/>
+          </p:cNvPicPr>
+          <p:nvPr/>
+        </p:nvPicPr>
+        <p:blipFill>
+          <a:blip r:embed="rId5"/>
+          <a:stretch>
+            <a:fillRect/>
+          </a:stretch>
+        </p:blipFill>
+        <p:spPr>
+          <a:xfrm>
+            <a:off x="10672842" y="271032"/>
+            <a:ext cx="1420028" cy="652758"/>
+          </a:xfrm>
+          <a:prstGeom prst="rect">
+            <a:avLst/>
+          </a:prstGeom>
+          <a:ln>
+            <a:noFill/>
+          </a:ln>
+          <a:effectLst>
+            <a:softEdge rad="112500"/>
+          </a:effectLst>
+        </p:spPr>
+      </p:pic>
+      <p:sp>
+        <p:nvSpPr>
+          <p:cNvPr id="9" name="Subtitle 2">
+            <a:extLst>
+              <a:ext uri="{FF2B5EF4-FFF2-40B4-BE49-F238E27FC236}">
+                <a16:creationId xmlns:a16="http://schemas.microsoft.com/office/drawing/2014/main" id="{B3227543-C3FB-955E-F688-D72837FD5A68}"/>
+              </a:ext>
+            </a:extLst>
+          </p:cNvPr>
+          <p:cNvSpPr txBox="1">
+            <a:spLocks/>
+          </p:cNvSpPr>
+          <p:nvPr/>
+        </p:nvSpPr>
+        <p:spPr>
+          <a:xfrm>
+            <a:off x="2685143" y="1872263"/>
+            <a:ext cx="9407727" cy="634985"/>
+          </a:xfrm>
+          <a:prstGeom prst="rect">
+            <a:avLst/>
+          </a:prstGeom>
+        </p:spPr>
+        <p:txBody>
+          <a:bodyPr vert="horz" lIns="91440" tIns="45720" rIns="91440" bIns="45720" rtlCol="0" anchor="ctr">
+            <a:normAutofit fontScale="85000" lnSpcReduction="10000"/>
+          </a:bodyPr>
+          <a:lstStyle>
+            <a:lvl1pPr marL="0" indent="0" algn="l" defTabSz="457200" rtl="0" eaLnBrk="1" latinLnBrk="0" hangingPunct="1">
+              <a:spcBef>
+                <a:spcPts val="1000"/>
+              </a:spcBef>
+              <a:spcAft>
+                <a:spcPts val="0"/>
+              </a:spcAft>
+              <a:buClr>
+                <a:schemeClr val="accent1"/>
+              </a:buClr>
+              <a:buSzPct val="80000"/>
+              <a:buFont typeface="Wingdings 3" charset="2"/>
+              <a:buNone/>
+              <a:defRPr sz="2000" b="0" i="0" kern="1200" cap="all">
+                <a:solidFill>
+                  <a:schemeClr val="accent1"/>
+                </a:solidFill>
+                <a:latin typeface="+mj-lt"/>
+                <a:ea typeface="+mj-ea"/>
+                <a:cs typeface="+mj-cs"/>
+              </a:defRPr>
+            </a:lvl1pPr>
+            <a:lvl2pPr marL="457200" indent="0" algn="ctr" defTabSz="457200" rtl="0" eaLnBrk="1" latinLnBrk="0" hangingPunct="1">
+              <a:spcBef>
+                <a:spcPts val="1000"/>
+              </a:spcBef>
+              <a:spcAft>
+                <a:spcPts val="0"/>
+              </a:spcAft>
+              <a:buClr>
+                <a:schemeClr val="accent1"/>
+              </a:buClr>
+              <a:buSzPct val="80000"/>
+              <a:buFont typeface="Wingdings 3" charset="2"/>
+              <a:buNone/>
+              <a:defRPr sz="1800" b="0" i="0" kern="1200">
+                <a:solidFill>
+                  <a:schemeClr val="tx1">
+                    <a:tint val="75000"/>
+                  </a:schemeClr>
+                </a:solidFill>
+                <a:latin typeface="+mj-lt"/>
+                <a:ea typeface="+mj-ea"/>
+                <a:cs typeface="+mj-cs"/>
+              </a:defRPr>
+            </a:lvl2pPr>
+            <a:lvl3pPr marL="914400" indent="0" algn="ctr" defTabSz="457200" rtl="0" eaLnBrk="1" latinLnBrk="0" hangingPunct="1">
+              <a:spcBef>
+                <a:spcPts val="1000"/>
+              </a:spcBef>
+              <a:spcAft>
+                <a:spcPts val="0"/>
+              </a:spcAft>
+              <a:buClr>
+                <a:schemeClr val="accent1"/>
+              </a:buClr>
+              <a:buSzPct val="80000"/>
+              <a:buFont typeface="Wingdings 3" charset="2"/>
+              <a:buNone/>
+              <a:defRPr sz="1600" b="0" i="0" kern="1200">
+                <a:solidFill>
+                  <a:schemeClr val="tx1">
+                    <a:tint val="75000"/>
+                  </a:schemeClr>
+                </a:solidFill>
+                <a:latin typeface="+mj-lt"/>
+                <a:ea typeface="+mj-ea"/>
+                <a:cs typeface="+mj-cs"/>
+              </a:defRPr>
+            </a:lvl3pPr>
+            <a:lvl4pPr marL="1371600" indent="0" algn="ctr" defTabSz="457200" rtl="0" eaLnBrk="1" latinLnBrk="0" hangingPunct="1">
+              <a:spcBef>
+                <a:spcPts val="1000"/>
+              </a:spcBef>
+              <a:spcAft>
+                <a:spcPts val="0"/>
+              </a:spcAft>
+              <a:buClr>
+                <a:schemeClr val="accent1"/>
+              </a:buClr>
+              <a:buSzPct val="80000"/>
+              <a:buFont typeface="Wingdings 3" charset="2"/>
+              <a:buNone/>
+              <a:defRPr sz="1400" b="0" i="0" kern="1200">
+                <a:solidFill>
+                  <a:schemeClr val="tx1">
+                    <a:tint val="75000"/>
+                  </a:schemeClr>
+                </a:solidFill>
+                <a:latin typeface="+mj-lt"/>
+                <a:ea typeface="+mj-ea"/>
+                <a:cs typeface="+mj-cs"/>
+              </a:defRPr>
+            </a:lvl4pPr>
+            <a:lvl5pPr marL="1828800" indent="0" algn="ctr" defTabSz="457200" rtl="0" eaLnBrk="1" latinLnBrk="0" hangingPunct="1">
+              <a:spcBef>
+                <a:spcPts val="1000"/>
+              </a:spcBef>
+              <a:spcAft>
+                <a:spcPts val="0"/>
+              </a:spcAft>
+              <a:buClr>
+                <a:schemeClr val="accent1"/>
+              </a:buClr>
+              <a:buSzPct val="80000"/>
+              <a:buFont typeface="Wingdings 3" charset="2"/>
+              <a:buNone/>
+              <a:defRPr sz="1400" b="0" i="0" kern="1200">
+                <a:solidFill>
+                  <a:schemeClr val="tx1">
+                    <a:tint val="75000"/>
+                  </a:schemeClr>
+                </a:solidFill>
+                <a:latin typeface="+mj-lt"/>
+                <a:ea typeface="+mj-ea"/>
+                <a:cs typeface="+mj-cs"/>
+              </a:defRPr>
+            </a:lvl5pPr>
+            <a:lvl6pPr marL="2286000" indent="0" algn="ctr" defTabSz="457200" rtl="0" eaLnBrk="1" latinLnBrk="0" hangingPunct="1">
+              <a:spcBef>
+                <a:spcPts val="1000"/>
+              </a:spcBef>
+              <a:spcAft>
+                <a:spcPts val="0"/>
+              </a:spcAft>
+              <a:buClr>
+                <a:schemeClr val="accent1"/>
+              </a:buClr>
+              <a:buSzPct val="80000"/>
+              <a:buFont typeface="Wingdings 3" charset="2"/>
+              <a:buNone/>
+              <a:defRPr sz="1400" b="0" i="0" kern="1200">
+                <a:solidFill>
+                  <a:schemeClr val="tx1">
+                    <a:tint val="75000"/>
+                  </a:schemeClr>
+                </a:solidFill>
+                <a:latin typeface="+mj-lt"/>
+                <a:ea typeface="+mj-ea"/>
+                <a:cs typeface="+mj-cs"/>
+              </a:defRPr>
+            </a:lvl6pPr>
+            <a:lvl7pPr marL="2743200" indent="0" algn="ctr" defTabSz="457200" rtl="0" eaLnBrk="1" latinLnBrk="0" hangingPunct="1">
+              <a:spcBef>
+                <a:spcPts val="1000"/>
+              </a:spcBef>
+              <a:spcAft>
+                <a:spcPts val="0"/>
+              </a:spcAft>
+              <a:buClr>
+                <a:schemeClr val="accent1"/>
+              </a:buClr>
+              <a:buSzPct val="80000"/>
+              <a:buFont typeface="Wingdings 3" charset="2"/>
+              <a:buNone/>
+              <a:defRPr sz="1400" b="0" i="0" kern="1200">
+                <a:solidFill>
+                  <a:schemeClr val="tx1">
+                    <a:tint val="75000"/>
+                  </a:schemeClr>
+                </a:solidFill>
+                <a:latin typeface="+mj-lt"/>
+                <a:ea typeface="+mj-ea"/>
+                <a:cs typeface="+mj-cs"/>
+              </a:defRPr>
+            </a:lvl7pPr>
+            <a:lvl8pPr marL="3200400" indent="0" algn="ctr" defTabSz="457200" rtl="0" eaLnBrk="1" latinLnBrk="0" hangingPunct="1">
+              <a:spcBef>
+                <a:spcPts val="1000"/>
+              </a:spcBef>
+              <a:spcAft>
+                <a:spcPts val="0"/>
+              </a:spcAft>
+              <a:buClr>
+                <a:schemeClr val="accent1"/>
+              </a:buClr>
+              <a:buSzPct val="80000"/>
+              <a:buFont typeface="Wingdings 3" charset="2"/>
+              <a:buNone/>
+              <a:defRPr sz="1400" b="0" i="0" kern="1200">
+                <a:solidFill>
+                  <a:schemeClr val="tx1">
+                    <a:tint val="75000"/>
+                  </a:schemeClr>
+                </a:solidFill>
+                <a:latin typeface="+mj-lt"/>
+                <a:ea typeface="+mj-ea"/>
+                <a:cs typeface="+mj-cs"/>
+              </a:defRPr>
+            </a:lvl8pPr>
+            <a:lvl9pPr marL="3657600" indent="0" algn="ctr" defTabSz="457200" rtl="0" eaLnBrk="1" latinLnBrk="0" hangingPunct="1">
+              <a:spcBef>
+                <a:spcPts val="1000"/>
+              </a:spcBef>
+              <a:spcAft>
+                <a:spcPts val="0"/>
+              </a:spcAft>
+              <a:buClr>
+                <a:schemeClr val="accent1"/>
+              </a:buClr>
+              <a:buSzPct val="80000"/>
+              <a:buFont typeface="Wingdings 3" charset="2"/>
+              <a:buNone/>
+              <a:defRPr sz="1400" b="0" i="0" kern="1200">
+                <a:solidFill>
+                  <a:schemeClr val="tx1">
+                    <a:tint val="75000"/>
+                  </a:schemeClr>
+                </a:solidFill>
+                <a:latin typeface="+mj-lt"/>
+                <a:ea typeface="+mj-ea"/>
+                <a:cs typeface="+mj-cs"/>
+              </a:defRPr>
+            </a:lvl9pPr>
+          </a:lstStyle>
+          <a:p>
+            <a:r>
+              <a:rPr lang="en-US" altLang="zh-CN" sz="3600" b="1" cap="none" dirty="0"/>
+              <a:t>6.1 Create </a:t>
+            </a:r>
+            <a:r>
+              <a:rPr lang="en-US" altLang="zh-CN" sz="3600" b="1" cap="none" dirty="0" err="1"/>
+              <a:t>Github</a:t>
+            </a:r>
+            <a:r>
+              <a:rPr lang="en-US" altLang="zh-CN" sz="3600" b="1" cap="none" dirty="0"/>
+              <a:t> Repo and 6.2 </a:t>
+            </a:r>
+            <a:r>
+              <a:rPr lang="en-US" altLang="zh-CN" sz="3600" b="1" cap="none" dirty="0" err="1"/>
+              <a:t>Vercel</a:t>
+            </a:r>
+            <a:r>
+              <a:rPr lang="en-US" altLang="zh-CN" sz="3600" b="1" cap="none" dirty="0"/>
+              <a:t> Account</a:t>
+            </a:r>
+            <a:endParaRPr lang="en-US" sz="3600" b="1" cap="none" dirty="0"/>
+          </a:p>
+        </p:txBody>
+      </p:sp>
+      <p:sp>
+        <p:nvSpPr>
+          <p:cNvPr id="3" name="Subtitle 2">
+            <a:extLst>
+              <a:ext uri="{FF2B5EF4-FFF2-40B4-BE49-F238E27FC236}">
+                <a16:creationId xmlns:a16="http://schemas.microsoft.com/office/drawing/2014/main" id="{358032A5-AC50-B445-F084-5476CE4119EE}"/>
+              </a:ext>
+            </a:extLst>
+          </p:cNvPr>
+          <p:cNvSpPr>
+            <a:spLocks noGrp="1"/>
+          </p:cNvSpPr>
+          <p:nvPr>
+            <p:ph type="subTitle" idx="1"/>
+          </p:nvPr>
+        </p:nvSpPr>
+        <p:spPr>
+          <a:xfrm>
+            <a:off x="2685143" y="1083848"/>
+            <a:ext cx="9407727" cy="788415"/>
+          </a:xfrm>
+          <a:solidFill>
+            <a:schemeClr val="accent6">
+              <a:alpha val="50000"/>
+            </a:schemeClr>
+          </a:solidFill>
+          <a:ln>
+            <a:noFill/>
+          </a:ln>
+        </p:spPr>
+        <p:style>
+          <a:lnRef idx="0">
+            <a:scrgbClr r="0" g="0" b="0"/>
+          </a:lnRef>
+          <a:fillRef idx="0">
+            <a:scrgbClr r="0" g="0" b="0"/>
+          </a:fillRef>
+          <a:effectRef idx="0">
+            <a:scrgbClr r="0" g="0" b="0"/>
+          </a:effectRef>
+          <a:fontRef idx="minor">
+            <a:schemeClr val="lt1"/>
+          </a:fontRef>
+        </p:style>
+        <p:txBody>
+          <a:bodyPr anchor="ctr">
+            <a:normAutofit lnSpcReduction="10000"/>
+          </a:bodyPr>
+          <a:lstStyle/>
+          <a:p>
+            <a:r>
+              <a:rPr lang="en-US" altLang="zh-CN" sz="4800" b="1" dirty="0"/>
+              <a:t>6. Setting Up Your Database</a:t>
+            </a:r>
+            <a:endParaRPr lang="en-US" sz="4800" b="1" dirty="0"/>
+          </a:p>
+        </p:txBody>
+      </p:sp>
+      <p:pic>
+        <p:nvPicPr>
+          <p:cNvPr id="10" name="Picture 9">
+            <a:extLst>
+              <a:ext uri="{FF2B5EF4-FFF2-40B4-BE49-F238E27FC236}">
+                <a16:creationId xmlns:a16="http://schemas.microsoft.com/office/drawing/2014/main" id="{98526ECE-2943-A3DB-5112-6B57C3AE244B}"/>
+              </a:ext>
+            </a:extLst>
+          </p:cNvPr>
+          <p:cNvPicPr>
+            <a:picLocks noChangeAspect="1"/>
+          </p:cNvPicPr>
+          <p:nvPr/>
+        </p:nvPicPr>
+        <p:blipFill>
+          <a:blip r:embed="rId6"/>
+          <a:stretch>
+            <a:fillRect/>
+          </a:stretch>
+        </p:blipFill>
+        <p:spPr>
+          <a:xfrm>
+            <a:off x="-82193" y="2032321"/>
+            <a:ext cx="9914562" cy="4400664"/>
+          </a:xfrm>
+          <a:prstGeom prst="roundRect">
+            <a:avLst>
+              <a:gd name="adj" fmla="val 16667"/>
+            </a:avLst>
+          </a:prstGeom>
+          <a:ln>
+            <a:noFill/>
+          </a:ln>
+          <a:effectLst>
+            <a:outerShdw blurRad="152400" dist="12000" dir="900000" sy="98000" kx="110000" ky="200000" algn="tl" rotWithShape="0">
+              <a:srgbClr val="000000">
+                <a:alpha val="30000"/>
+              </a:srgbClr>
+            </a:outerShdw>
+          </a:effectLst>
+          <a:scene3d>
+            <a:camera prst="perspectiveRelaxed">
+              <a:rot lat="19800000" lon="1200000" rev="20820000"/>
+            </a:camera>
+            <a:lightRig rig="threePt" dir="t"/>
+          </a:scene3d>
+          <a:sp3d contourW="6350" prstMaterial="matte">
+            <a:bevelT w="101600" h="101600"/>
+            <a:contourClr>
+              <a:srgbClr val="969696"/>
+            </a:contourClr>
+          </a:sp3d>
+        </p:spPr>
+      </p:pic>
+      <p:pic>
+        <p:nvPicPr>
+          <p:cNvPr id="12" name="Picture 11">
+            <a:extLst>
+              <a:ext uri="{FF2B5EF4-FFF2-40B4-BE49-F238E27FC236}">
+                <a16:creationId xmlns:a16="http://schemas.microsoft.com/office/drawing/2014/main" id="{82C187A3-AD07-6580-5059-B952F05CC6E6}"/>
+              </a:ext>
+            </a:extLst>
+          </p:cNvPr>
+          <p:cNvPicPr>
+            <a:picLocks noChangeAspect="1"/>
+          </p:cNvPicPr>
+          <p:nvPr/>
+        </p:nvPicPr>
+        <p:blipFill>
+          <a:blip r:embed="rId7"/>
+          <a:stretch>
+            <a:fillRect/>
+          </a:stretch>
+        </p:blipFill>
+        <p:spPr>
+          <a:xfrm>
+            <a:off x="7826372" y="4621914"/>
+            <a:ext cx="1204612" cy="1152238"/>
+          </a:xfrm>
+          <a:prstGeom prst="rect">
+            <a:avLst/>
+          </a:prstGeom>
+          <a:ln>
+            <a:noFill/>
+          </a:ln>
+          <a:effectLst>
+            <a:softEdge rad="112500"/>
+          </a:effectLst>
+        </p:spPr>
+      </p:pic>
+      <p:pic>
+        <p:nvPicPr>
+          <p:cNvPr id="14" name="Picture 13">
+            <a:extLst>
+              <a:ext uri="{FF2B5EF4-FFF2-40B4-BE49-F238E27FC236}">
+                <a16:creationId xmlns:a16="http://schemas.microsoft.com/office/drawing/2014/main" id="{590B8ADC-111F-AED7-B90E-7DF1C2FCE9C9}"/>
+              </a:ext>
+            </a:extLst>
+          </p:cNvPr>
+          <p:cNvPicPr>
+            <a:picLocks noChangeAspect="1"/>
+          </p:cNvPicPr>
+          <p:nvPr/>
+        </p:nvPicPr>
+        <p:blipFill>
+          <a:blip r:embed="rId8"/>
+          <a:stretch>
+            <a:fillRect/>
+          </a:stretch>
+        </p:blipFill>
+        <p:spPr>
+          <a:xfrm>
+            <a:off x="9201474" y="4621914"/>
+            <a:ext cx="1902937" cy="1064946"/>
+          </a:xfrm>
+          <a:prstGeom prst="rect">
+            <a:avLst/>
+          </a:prstGeom>
+          <a:ln>
+            <a:noFill/>
+          </a:ln>
+          <a:effectLst>
+            <a:softEdge rad="112500"/>
+          </a:effectLst>
+        </p:spPr>
+      </p:pic>
+    </p:spTree>
+    <p:extLst>
+      <p:ext uri="{BB962C8B-B14F-4D97-AF65-F5344CB8AC3E}">
+        <p14:creationId xmlns:p14="http://schemas.microsoft.com/office/powerpoint/2010/main" val="2988739048"/>
+      </p:ext>
+    </p:extLst>
+  </p:cSld>
+  <p:clrMapOvr>
+    <a:masterClrMapping/>
+  </p:clrMapOvr>
+</p:sld>
+</file>
+
+<file path=ppt/slides/slide17.xml><?xml version="1.0" encoding="utf-8"?>
+<p:sld xmlns:a="http://schemas.openxmlformats.org/drawingml/2006/main" xmlns:r="http://schemas.openxmlformats.org/officeDocument/2006/relationships" xmlns:p="http://schemas.openxmlformats.org/presentationml/2006/main">
+  <p:cSld>
+    <p:spTree>
+      <p:nvGrpSpPr>
+        <p:cNvPr id="1" name="">
+          <a:extLst>
+            <a:ext uri="{FF2B5EF4-FFF2-40B4-BE49-F238E27FC236}">
+              <a16:creationId xmlns:a16="http://schemas.microsoft.com/office/drawing/2014/main" id="{0FA55835-1C7B-0AF9-3BBF-ED4D233112BF}"/>
+            </a:ext>
+          </a:extLst>
+        </p:cNvPr>
+        <p:cNvGrpSpPr/>
+        <p:nvPr/>
+      </p:nvGrpSpPr>
+      <p:grpSpPr>
+        <a:xfrm>
+          <a:off x="0" y="0"/>
+          <a:ext cx="0" cy="0"/>
+          <a:chOff x="0" y="0"/>
+          <a:chExt cx="0" cy="0"/>
+        </a:xfrm>
+      </p:grpSpPr>
+      <p:pic>
+        <p:nvPicPr>
+          <p:cNvPr id="5" name="Picture 4" descr="chain links">
+            <a:extLst>
+              <a:ext uri="{FF2B5EF4-FFF2-40B4-BE49-F238E27FC236}">
+                <a16:creationId xmlns:a16="http://schemas.microsoft.com/office/drawing/2014/main" id="{E247015B-CAEB-1F8F-6555-4E5D8C439D47}"/>
+              </a:ext>
+            </a:extLst>
+          </p:cNvPr>
+          <p:cNvPicPr>
+            <a:picLocks noChangeAspect="1"/>
+          </p:cNvPicPr>
+          <p:nvPr/>
+        </p:nvPicPr>
+        <p:blipFill rotWithShape="1">
+          <a:blip r:embed="rId3">
+            <a:duotone>
+              <a:prstClr val="black"/>
+              <a:schemeClr val="accent5">
+                <a:tint val="45000"/>
+                <a:satMod val="400000"/>
+              </a:schemeClr>
+            </a:duotone>
+            <a:alphaModFix amt="25000"/>
+          </a:blip>
+          <a:srcRect t="23391" r="9091"/>
+          <a:stretch/>
+        </p:blipFill>
+        <p:spPr>
+          <a:xfrm>
+            <a:off x="0" y="10"/>
+            <a:ext cx="12191980" cy="6857990"/>
+          </a:xfrm>
+          <a:prstGeom prst="rect">
+            <a:avLst/>
+          </a:prstGeom>
+        </p:spPr>
+      </p:pic>
+      <p:sp>
+        <p:nvSpPr>
+          <p:cNvPr id="7" name="Subtitle 2">
+            <a:extLst>
+              <a:ext uri="{FF2B5EF4-FFF2-40B4-BE49-F238E27FC236}">
+                <a16:creationId xmlns:a16="http://schemas.microsoft.com/office/drawing/2014/main" id="{58013667-5AC9-72FC-A2CA-5D72DA0C2806}"/>
+              </a:ext>
+            </a:extLst>
+          </p:cNvPr>
+          <p:cNvSpPr txBox="1">
+            <a:spLocks/>
+          </p:cNvSpPr>
+          <p:nvPr/>
+        </p:nvSpPr>
+        <p:spPr>
+          <a:xfrm>
+            <a:off x="8483689" y="2419"/>
+            <a:ext cx="2102069" cy="1447801"/>
+          </a:xfrm>
+          <a:prstGeom prst="rect">
+            <a:avLst/>
+          </a:prstGeom>
+        </p:spPr>
+        <p:txBody>
+          <a:bodyPr vert="horz" lIns="91440" tIns="45720" rIns="91440" bIns="45720" rtlCol="0" anchor="ctr">
+            <a:normAutofit fontScale="92500" lnSpcReduction="20000"/>
+          </a:bodyPr>
+          <a:lstStyle>
+            <a:lvl1pPr marL="0" indent="0" algn="l" defTabSz="457200" rtl="0" eaLnBrk="1" latinLnBrk="0" hangingPunct="1">
+              <a:spcBef>
+                <a:spcPts val="1000"/>
+              </a:spcBef>
+              <a:spcAft>
+                <a:spcPts val="0"/>
+              </a:spcAft>
+              <a:buClr>
+                <a:schemeClr val="accent1"/>
+              </a:buClr>
+              <a:buSzPct val="80000"/>
+              <a:buFont typeface="Wingdings 3" charset="2"/>
+              <a:buNone/>
+              <a:defRPr sz="2000" b="0" i="0" kern="1200" cap="all">
+                <a:solidFill>
+                  <a:schemeClr val="accent1"/>
+                </a:solidFill>
+                <a:latin typeface="+mj-lt"/>
+                <a:ea typeface="+mj-ea"/>
+                <a:cs typeface="+mj-cs"/>
+              </a:defRPr>
+            </a:lvl1pPr>
+            <a:lvl2pPr marL="457200" indent="0" algn="ctr" defTabSz="457200" rtl="0" eaLnBrk="1" latinLnBrk="0" hangingPunct="1">
+              <a:spcBef>
+                <a:spcPts val="1000"/>
+              </a:spcBef>
+              <a:spcAft>
+                <a:spcPts val="0"/>
+              </a:spcAft>
+              <a:buClr>
+                <a:schemeClr val="accent1"/>
+              </a:buClr>
+              <a:buSzPct val="80000"/>
+              <a:buFont typeface="Wingdings 3" charset="2"/>
+              <a:buNone/>
+              <a:defRPr sz="1800" b="0" i="0" kern="1200">
+                <a:solidFill>
+                  <a:schemeClr val="tx1">
+                    <a:tint val="75000"/>
+                  </a:schemeClr>
+                </a:solidFill>
+                <a:latin typeface="+mj-lt"/>
+                <a:ea typeface="+mj-ea"/>
+                <a:cs typeface="+mj-cs"/>
+              </a:defRPr>
+            </a:lvl2pPr>
+            <a:lvl3pPr marL="914400" indent="0" algn="ctr" defTabSz="457200" rtl="0" eaLnBrk="1" latinLnBrk="0" hangingPunct="1">
+              <a:spcBef>
+                <a:spcPts val="1000"/>
+              </a:spcBef>
+              <a:spcAft>
+                <a:spcPts val="0"/>
+              </a:spcAft>
+              <a:buClr>
+                <a:schemeClr val="accent1"/>
+              </a:buClr>
+              <a:buSzPct val="80000"/>
+              <a:buFont typeface="Wingdings 3" charset="2"/>
+              <a:buNone/>
+              <a:defRPr sz="1600" b="0" i="0" kern="1200">
+                <a:solidFill>
+                  <a:schemeClr val="tx1">
+                    <a:tint val="75000"/>
+                  </a:schemeClr>
+                </a:solidFill>
+                <a:latin typeface="+mj-lt"/>
+                <a:ea typeface="+mj-ea"/>
+                <a:cs typeface="+mj-cs"/>
+              </a:defRPr>
+            </a:lvl3pPr>
+            <a:lvl4pPr marL="1371600" indent="0" algn="ctr" defTabSz="457200" rtl="0" eaLnBrk="1" latinLnBrk="0" hangingPunct="1">
+              <a:spcBef>
+                <a:spcPts val="1000"/>
+              </a:spcBef>
+              <a:spcAft>
+                <a:spcPts val="0"/>
+              </a:spcAft>
+              <a:buClr>
+                <a:schemeClr val="accent1"/>
+              </a:buClr>
+              <a:buSzPct val="80000"/>
+              <a:buFont typeface="Wingdings 3" charset="2"/>
+              <a:buNone/>
+              <a:defRPr sz="1400" b="0" i="0" kern="1200">
+                <a:solidFill>
+                  <a:schemeClr val="tx1">
+                    <a:tint val="75000"/>
+                  </a:schemeClr>
+                </a:solidFill>
+                <a:latin typeface="+mj-lt"/>
+                <a:ea typeface="+mj-ea"/>
+                <a:cs typeface="+mj-cs"/>
+              </a:defRPr>
+            </a:lvl4pPr>
+            <a:lvl5pPr marL="1828800" indent="0" algn="ctr" defTabSz="457200" rtl="0" eaLnBrk="1" latinLnBrk="0" hangingPunct="1">
+              <a:spcBef>
+                <a:spcPts val="1000"/>
+              </a:spcBef>
+              <a:spcAft>
+                <a:spcPts val="0"/>
+              </a:spcAft>
+              <a:buClr>
+                <a:schemeClr val="accent1"/>
+              </a:buClr>
+              <a:buSzPct val="80000"/>
+              <a:buFont typeface="Wingdings 3" charset="2"/>
+              <a:buNone/>
+              <a:defRPr sz="1400" b="0" i="0" kern="1200">
+                <a:solidFill>
+                  <a:schemeClr val="tx1">
+                    <a:tint val="75000"/>
+                  </a:schemeClr>
+                </a:solidFill>
+                <a:latin typeface="+mj-lt"/>
+                <a:ea typeface="+mj-ea"/>
+                <a:cs typeface="+mj-cs"/>
+              </a:defRPr>
+            </a:lvl5pPr>
+            <a:lvl6pPr marL="2286000" indent="0" algn="ctr" defTabSz="457200" rtl="0" eaLnBrk="1" latinLnBrk="0" hangingPunct="1">
+              <a:spcBef>
+                <a:spcPts val="1000"/>
+              </a:spcBef>
+              <a:spcAft>
+                <a:spcPts val="0"/>
+              </a:spcAft>
+              <a:buClr>
+                <a:schemeClr val="accent1"/>
+              </a:buClr>
+              <a:buSzPct val="80000"/>
+              <a:buFont typeface="Wingdings 3" charset="2"/>
+              <a:buNone/>
+              <a:defRPr sz="1400" b="0" i="0" kern="1200">
+                <a:solidFill>
+                  <a:schemeClr val="tx1">
+                    <a:tint val="75000"/>
+                  </a:schemeClr>
+                </a:solidFill>
+                <a:latin typeface="+mj-lt"/>
+                <a:ea typeface="+mj-ea"/>
+                <a:cs typeface="+mj-cs"/>
+              </a:defRPr>
+            </a:lvl6pPr>
+            <a:lvl7pPr marL="2743200" indent="0" algn="ctr" defTabSz="457200" rtl="0" eaLnBrk="1" latinLnBrk="0" hangingPunct="1">
+              <a:spcBef>
+                <a:spcPts val="1000"/>
+              </a:spcBef>
+              <a:spcAft>
+                <a:spcPts val="0"/>
+              </a:spcAft>
+              <a:buClr>
+                <a:schemeClr val="accent1"/>
+              </a:buClr>
+              <a:buSzPct val="80000"/>
+              <a:buFont typeface="Wingdings 3" charset="2"/>
+              <a:buNone/>
+              <a:defRPr sz="1400" b="0" i="0" kern="1200">
+                <a:solidFill>
+                  <a:schemeClr val="tx1">
+                    <a:tint val="75000"/>
+                  </a:schemeClr>
+                </a:solidFill>
+                <a:latin typeface="+mj-lt"/>
+                <a:ea typeface="+mj-ea"/>
+                <a:cs typeface="+mj-cs"/>
+              </a:defRPr>
+            </a:lvl7pPr>
+            <a:lvl8pPr marL="3200400" indent="0" algn="ctr" defTabSz="457200" rtl="0" eaLnBrk="1" latinLnBrk="0" hangingPunct="1">
+              <a:spcBef>
+                <a:spcPts val="1000"/>
+              </a:spcBef>
+              <a:spcAft>
+                <a:spcPts val="0"/>
+              </a:spcAft>
+              <a:buClr>
+                <a:schemeClr val="accent1"/>
+              </a:buClr>
+              <a:buSzPct val="80000"/>
+              <a:buFont typeface="Wingdings 3" charset="2"/>
+              <a:buNone/>
+              <a:defRPr sz="1400" b="0" i="0" kern="1200">
+                <a:solidFill>
+                  <a:schemeClr val="tx1">
+                    <a:tint val="75000"/>
+                  </a:schemeClr>
+                </a:solidFill>
+                <a:latin typeface="+mj-lt"/>
+                <a:ea typeface="+mj-ea"/>
+                <a:cs typeface="+mj-cs"/>
+              </a:defRPr>
+            </a:lvl8pPr>
+            <a:lvl9pPr marL="3657600" indent="0" algn="ctr" defTabSz="457200" rtl="0" eaLnBrk="1" latinLnBrk="0" hangingPunct="1">
+              <a:spcBef>
+                <a:spcPts val="1000"/>
+              </a:spcBef>
+              <a:spcAft>
+                <a:spcPts val="0"/>
+              </a:spcAft>
+              <a:buClr>
+                <a:schemeClr val="accent1"/>
+              </a:buClr>
+              <a:buSzPct val="80000"/>
+              <a:buFont typeface="Wingdings 3" charset="2"/>
+              <a:buNone/>
+              <a:defRPr sz="1400" b="0" i="0" kern="1200">
+                <a:solidFill>
+                  <a:schemeClr val="tx1">
+                    <a:tint val="75000"/>
+                  </a:schemeClr>
+                </a:solidFill>
+                <a:latin typeface="+mj-lt"/>
+                <a:ea typeface="+mj-ea"/>
+                <a:cs typeface="+mj-cs"/>
+              </a:defRPr>
+            </a:lvl9pPr>
+          </a:lstStyle>
+          <a:p>
+            <a:pPr algn="ctr"/>
+            <a:r>
+              <a:rPr lang="en-US" sz="11500" b="1" dirty="0"/>
+              <a:t>16</a:t>
+            </a:r>
+          </a:p>
+        </p:txBody>
+      </p:sp>
+      <p:pic>
+        <p:nvPicPr>
+          <p:cNvPr id="4" name="Picture 3">
+            <a:extLst>
+              <a:ext uri="{FF2B5EF4-FFF2-40B4-BE49-F238E27FC236}">
+                <a16:creationId xmlns:a16="http://schemas.microsoft.com/office/drawing/2014/main" id="{E8FC03A2-0990-05CA-C194-22682781E8BD}"/>
+              </a:ext>
+            </a:extLst>
+          </p:cNvPr>
+          <p:cNvPicPr>
+            <a:picLocks noChangeAspect="1"/>
+          </p:cNvPicPr>
+          <p:nvPr/>
+        </p:nvPicPr>
+        <p:blipFill>
+          <a:blip r:embed="rId4"/>
+          <a:stretch>
+            <a:fillRect/>
+          </a:stretch>
+        </p:blipFill>
+        <p:spPr>
+          <a:xfrm>
+            <a:off x="0" y="0"/>
+            <a:ext cx="3896391" cy="2481677"/>
+          </a:xfrm>
+          <a:prstGeom prst="rect">
+            <a:avLst/>
+          </a:prstGeom>
+          <a:ln>
+            <a:noFill/>
+          </a:ln>
+          <a:effectLst>
+            <a:softEdge rad="112500"/>
+          </a:effectLst>
+        </p:spPr>
+      </p:pic>
+      <p:sp>
+        <p:nvSpPr>
+          <p:cNvPr id="2" name="Title 1">
+            <a:extLst>
+              <a:ext uri="{FF2B5EF4-FFF2-40B4-BE49-F238E27FC236}">
+                <a16:creationId xmlns:a16="http://schemas.microsoft.com/office/drawing/2014/main" id="{AC86A7A8-AA4B-3ABF-9254-D8DF183F2FBD}"/>
+              </a:ext>
+            </a:extLst>
+          </p:cNvPr>
+          <p:cNvSpPr>
+            <a:spLocks noGrp="1"/>
+          </p:cNvSpPr>
+          <p:nvPr>
+            <p:ph type="ctrTitle"/>
+          </p:nvPr>
+        </p:nvSpPr>
+        <p:spPr>
+          <a:xfrm>
+            <a:off x="3477730" y="50040"/>
+            <a:ext cx="4741596" cy="946553"/>
+          </a:xfrm>
+        </p:spPr>
+        <p:txBody>
+          <a:bodyPr anchor="ctr">
+            <a:normAutofit fontScale="90000"/>
+          </a:bodyPr>
+          <a:lstStyle/>
+          <a:p>
+            <a:r>
+              <a:rPr lang="en-US" sz="6000" b="1" dirty="0"/>
+              <a:t>App Router</a:t>
+            </a:r>
+            <a:endParaRPr lang="ru-RU" sz="6000" b="1" dirty="0"/>
+          </a:p>
+        </p:txBody>
+      </p:sp>
+      <p:pic>
+        <p:nvPicPr>
+          <p:cNvPr id="6" name="Picture 5">
+            <a:extLst>
+              <a:ext uri="{FF2B5EF4-FFF2-40B4-BE49-F238E27FC236}">
+                <a16:creationId xmlns:a16="http://schemas.microsoft.com/office/drawing/2014/main" id="{C1F5438A-59F5-92DE-1871-ADF141E89772}"/>
+              </a:ext>
+            </a:extLst>
+          </p:cNvPr>
+          <p:cNvPicPr>
+            <a:picLocks noChangeAspect="1"/>
+          </p:cNvPicPr>
+          <p:nvPr/>
+        </p:nvPicPr>
+        <p:blipFill>
+          <a:blip r:embed="rId5"/>
+          <a:stretch>
+            <a:fillRect/>
+          </a:stretch>
+        </p:blipFill>
+        <p:spPr>
+          <a:xfrm>
+            <a:off x="10672842" y="271032"/>
+            <a:ext cx="1420028" cy="652758"/>
+          </a:xfrm>
+          <a:prstGeom prst="rect">
+            <a:avLst/>
+          </a:prstGeom>
+          <a:ln>
+            <a:noFill/>
+          </a:ln>
+          <a:effectLst>
+            <a:softEdge rad="112500"/>
+          </a:effectLst>
+        </p:spPr>
+      </p:pic>
+      <p:sp>
+        <p:nvSpPr>
+          <p:cNvPr id="9" name="Subtitle 2">
+            <a:extLst>
+              <a:ext uri="{FF2B5EF4-FFF2-40B4-BE49-F238E27FC236}">
+                <a16:creationId xmlns:a16="http://schemas.microsoft.com/office/drawing/2014/main" id="{177B65EC-1852-E523-911C-3C3DC72EBE35}"/>
+              </a:ext>
+            </a:extLst>
+          </p:cNvPr>
+          <p:cNvSpPr txBox="1">
+            <a:spLocks/>
+          </p:cNvSpPr>
+          <p:nvPr/>
+        </p:nvSpPr>
+        <p:spPr>
+          <a:xfrm>
+            <a:off x="2685143" y="1872263"/>
+            <a:ext cx="9407727" cy="634985"/>
+          </a:xfrm>
+          <a:prstGeom prst="rect">
+            <a:avLst/>
+          </a:prstGeom>
+        </p:spPr>
+        <p:txBody>
+          <a:bodyPr vert="horz" lIns="91440" tIns="45720" rIns="91440" bIns="45720" rtlCol="0" anchor="ctr">
+            <a:normAutofit lnSpcReduction="10000"/>
+          </a:bodyPr>
+          <a:lstStyle>
+            <a:lvl1pPr marL="0" indent="0" algn="l" defTabSz="457200" rtl="0" eaLnBrk="1" latinLnBrk="0" hangingPunct="1">
+              <a:spcBef>
+                <a:spcPts val="1000"/>
+              </a:spcBef>
+              <a:spcAft>
+                <a:spcPts val="0"/>
+              </a:spcAft>
+              <a:buClr>
+                <a:schemeClr val="accent1"/>
+              </a:buClr>
+              <a:buSzPct val="80000"/>
+              <a:buFont typeface="Wingdings 3" charset="2"/>
+              <a:buNone/>
+              <a:defRPr sz="2000" b="0" i="0" kern="1200" cap="all">
+                <a:solidFill>
+                  <a:schemeClr val="accent1"/>
+                </a:solidFill>
+                <a:latin typeface="+mj-lt"/>
+                <a:ea typeface="+mj-ea"/>
+                <a:cs typeface="+mj-cs"/>
+              </a:defRPr>
+            </a:lvl1pPr>
+            <a:lvl2pPr marL="457200" indent="0" algn="ctr" defTabSz="457200" rtl="0" eaLnBrk="1" latinLnBrk="0" hangingPunct="1">
+              <a:spcBef>
+                <a:spcPts val="1000"/>
+              </a:spcBef>
+              <a:spcAft>
+                <a:spcPts val="0"/>
+              </a:spcAft>
+              <a:buClr>
+                <a:schemeClr val="accent1"/>
+              </a:buClr>
+              <a:buSzPct val="80000"/>
+              <a:buFont typeface="Wingdings 3" charset="2"/>
+              <a:buNone/>
+              <a:defRPr sz="1800" b="0" i="0" kern="1200">
+                <a:solidFill>
+                  <a:schemeClr val="tx1">
+                    <a:tint val="75000"/>
+                  </a:schemeClr>
+                </a:solidFill>
+                <a:latin typeface="+mj-lt"/>
+                <a:ea typeface="+mj-ea"/>
+                <a:cs typeface="+mj-cs"/>
+              </a:defRPr>
+            </a:lvl2pPr>
+            <a:lvl3pPr marL="914400" indent="0" algn="ctr" defTabSz="457200" rtl="0" eaLnBrk="1" latinLnBrk="0" hangingPunct="1">
+              <a:spcBef>
+                <a:spcPts val="1000"/>
+              </a:spcBef>
+              <a:spcAft>
+                <a:spcPts val="0"/>
+              </a:spcAft>
+              <a:buClr>
+                <a:schemeClr val="accent1"/>
+              </a:buClr>
+              <a:buSzPct val="80000"/>
+              <a:buFont typeface="Wingdings 3" charset="2"/>
+              <a:buNone/>
+              <a:defRPr sz="1600" b="0" i="0" kern="1200">
+                <a:solidFill>
+                  <a:schemeClr val="tx1">
+                    <a:tint val="75000"/>
+                  </a:schemeClr>
+                </a:solidFill>
+                <a:latin typeface="+mj-lt"/>
+                <a:ea typeface="+mj-ea"/>
+                <a:cs typeface="+mj-cs"/>
+              </a:defRPr>
+            </a:lvl3pPr>
+            <a:lvl4pPr marL="1371600" indent="0" algn="ctr" defTabSz="457200" rtl="0" eaLnBrk="1" latinLnBrk="0" hangingPunct="1">
+              <a:spcBef>
+                <a:spcPts val="1000"/>
+              </a:spcBef>
+              <a:spcAft>
+                <a:spcPts val="0"/>
+              </a:spcAft>
+              <a:buClr>
+                <a:schemeClr val="accent1"/>
+              </a:buClr>
+              <a:buSzPct val="80000"/>
+              <a:buFont typeface="Wingdings 3" charset="2"/>
+              <a:buNone/>
+              <a:defRPr sz="1400" b="0" i="0" kern="1200">
+                <a:solidFill>
+                  <a:schemeClr val="tx1">
+                    <a:tint val="75000"/>
+                  </a:schemeClr>
+                </a:solidFill>
+                <a:latin typeface="+mj-lt"/>
+                <a:ea typeface="+mj-ea"/>
+                <a:cs typeface="+mj-cs"/>
+              </a:defRPr>
+            </a:lvl4pPr>
+            <a:lvl5pPr marL="1828800" indent="0" algn="ctr" defTabSz="457200" rtl="0" eaLnBrk="1" latinLnBrk="0" hangingPunct="1">
+              <a:spcBef>
+                <a:spcPts val="1000"/>
+              </a:spcBef>
+              <a:spcAft>
+                <a:spcPts val="0"/>
+              </a:spcAft>
+              <a:buClr>
+                <a:schemeClr val="accent1"/>
+              </a:buClr>
+              <a:buSzPct val="80000"/>
+              <a:buFont typeface="Wingdings 3" charset="2"/>
+              <a:buNone/>
+              <a:defRPr sz="1400" b="0" i="0" kern="1200">
+                <a:solidFill>
+                  <a:schemeClr val="tx1">
+                    <a:tint val="75000"/>
+                  </a:schemeClr>
+                </a:solidFill>
+                <a:latin typeface="+mj-lt"/>
+                <a:ea typeface="+mj-ea"/>
+                <a:cs typeface="+mj-cs"/>
+              </a:defRPr>
+            </a:lvl5pPr>
+            <a:lvl6pPr marL="2286000" indent="0" algn="ctr" defTabSz="457200" rtl="0" eaLnBrk="1" latinLnBrk="0" hangingPunct="1">
+              <a:spcBef>
+                <a:spcPts val="1000"/>
+              </a:spcBef>
+              <a:spcAft>
+                <a:spcPts val="0"/>
+              </a:spcAft>
+              <a:buClr>
+                <a:schemeClr val="accent1"/>
+              </a:buClr>
+              <a:buSzPct val="80000"/>
+              <a:buFont typeface="Wingdings 3" charset="2"/>
+              <a:buNone/>
+              <a:defRPr sz="1400" b="0" i="0" kern="1200">
+                <a:solidFill>
+                  <a:schemeClr val="tx1">
+                    <a:tint val="75000"/>
+                  </a:schemeClr>
+                </a:solidFill>
+                <a:latin typeface="+mj-lt"/>
+                <a:ea typeface="+mj-ea"/>
+                <a:cs typeface="+mj-cs"/>
+              </a:defRPr>
+            </a:lvl6pPr>
+            <a:lvl7pPr marL="2743200" indent="0" algn="ctr" defTabSz="457200" rtl="0" eaLnBrk="1" latinLnBrk="0" hangingPunct="1">
+              <a:spcBef>
+                <a:spcPts val="1000"/>
+              </a:spcBef>
+              <a:spcAft>
+                <a:spcPts val="0"/>
+              </a:spcAft>
+              <a:buClr>
+                <a:schemeClr val="accent1"/>
+              </a:buClr>
+              <a:buSzPct val="80000"/>
+              <a:buFont typeface="Wingdings 3" charset="2"/>
+              <a:buNone/>
+              <a:defRPr sz="1400" b="0" i="0" kern="1200">
+                <a:solidFill>
+                  <a:schemeClr val="tx1">
+                    <a:tint val="75000"/>
+                  </a:schemeClr>
+                </a:solidFill>
+                <a:latin typeface="+mj-lt"/>
+                <a:ea typeface="+mj-ea"/>
+                <a:cs typeface="+mj-cs"/>
+              </a:defRPr>
+            </a:lvl7pPr>
+            <a:lvl8pPr marL="3200400" indent="0" algn="ctr" defTabSz="457200" rtl="0" eaLnBrk="1" latinLnBrk="0" hangingPunct="1">
+              <a:spcBef>
+                <a:spcPts val="1000"/>
+              </a:spcBef>
+              <a:spcAft>
+                <a:spcPts val="0"/>
+              </a:spcAft>
+              <a:buClr>
+                <a:schemeClr val="accent1"/>
+              </a:buClr>
+              <a:buSzPct val="80000"/>
+              <a:buFont typeface="Wingdings 3" charset="2"/>
+              <a:buNone/>
+              <a:defRPr sz="1400" b="0" i="0" kern="1200">
+                <a:solidFill>
+                  <a:schemeClr val="tx1">
+                    <a:tint val="75000"/>
+                  </a:schemeClr>
+                </a:solidFill>
+                <a:latin typeface="+mj-lt"/>
+                <a:ea typeface="+mj-ea"/>
+                <a:cs typeface="+mj-cs"/>
+              </a:defRPr>
+            </a:lvl8pPr>
+            <a:lvl9pPr marL="3657600" indent="0" algn="ctr" defTabSz="457200" rtl="0" eaLnBrk="1" latinLnBrk="0" hangingPunct="1">
+              <a:spcBef>
+                <a:spcPts val="1000"/>
+              </a:spcBef>
+              <a:spcAft>
+                <a:spcPts val="0"/>
+              </a:spcAft>
+              <a:buClr>
+                <a:schemeClr val="accent1"/>
+              </a:buClr>
+              <a:buSzPct val="80000"/>
+              <a:buFont typeface="Wingdings 3" charset="2"/>
+              <a:buNone/>
+              <a:defRPr sz="1400" b="0" i="0" kern="1200">
+                <a:solidFill>
+                  <a:schemeClr val="tx1">
+                    <a:tint val="75000"/>
+                  </a:schemeClr>
+                </a:solidFill>
+                <a:latin typeface="+mj-lt"/>
+                <a:ea typeface="+mj-ea"/>
+                <a:cs typeface="+mj-cs"/>
+              </a:defRPr>
+            </a:lvl9pPr>
+          </a:lstStyle>
+          <a:p>
+            <a:r>
+              <a:rPr lang="en-US" altLang="zh-CN" sz="3600" b="1" cap="none" dirty="0"/>
+              <a:t>6.3 Connect and Deploy Project</a:t>
+            </a:r>
+            <a:endParaRPr lang="en-US" sz="3600" b="1" cap="none" dirty="0"/>
+          </a:p>
+        </p:txBody>
+      </p:sp>
+      <p:sp>
+        <p:nvSpPr>
+          <p:cNvPr id="3" name="Subtitle 2">
+            <a:extLst>
+              <a:ext uri="{FF2B5EF4-FFF2-40B4-BE49-F238E27FC236}">
+                <a16:creationId xmlns:a16="http://schemas.microsoft.com/office/drawing/2014/main" id="{52724144-44E4-45FA-9EA8-146C90B9533A}"/>
+              </a:ext>
+            </a:extLst>
+          </p:cNvPr>
+          <p:cNvSpPr>
+            <a:spLocks noGrp="1"/>
+          </p:cNvSpPr>
+          <p:nvPr>
+            <p:ph type="subTitle" idx="1"/>
+          </p:nvPr>
+        </p:nvSpPr>
+        <p:spPr>
+          <a:xfrm>
+            <a:off x="2685143" y="1083848"/>
+            <a:ext cx="9407727" cy="788415"/>
+          </a:xfrm>
+          <a:solidFill>
+            <a:schemeClr val="accent6">
+              <a:alpha val="50000"/>
+            </a:schemeClr>
+          </a:solidFill>
+          <a:ln>
+            <a:noFill/>
+          </a:ln>
+        </p:spPr>
+        <p:style>
+          <a:lnRef idx="0">
+            <a:scrgbClr r="0" g="0" b="0"/>
+          </a:lnRef>
+          <a:fillRef idx="0">
+            <a:scrgbClr r="0" g="0" b="0"/>
+          </a:fillRef>
+          <a:effectRef idx="0">
+            <a:scrgbClr r="0" g="0" b="0"/>
+          </a:effectRef>
+          <a:fontRef idx="minor">
+            <a:schemeClr val="lt1"/>
+          </a:fontRef>
+        </p:style>
+        <p:txBody>
+          <a:bodyPr anchor="ctr">
+            <a:normAutofit lnSpcReduction="10000"/>
+          </a:bodyPr>
+          <a:lstStyle/>
+          <a:p>
+            <a:r>
+              <a:rPr lang="en-US" altLang="zh-CN" sz="4800" b="1" dirty="0"/>
+              <a:t>6. Setting Up Your Database</a:t>
+            </a:r>
+            <a:endParaRPr lang="en-US" sz="4800" b="1" dirty="0"/>
+          </a:p>
+        </p:txBody>
+      </p:sp>
+      <p:pic>
+        <p:nvPicPr>
+          <p:cNvPr id="13" name="Picture 12">
+            <a:extLst>
+              <a:ext uri="{FF2B5EF4-FFF2-40B4-BE49-F238E27FC236}">
+                <a16:creationId xmlns:a16="http://schemas.microsoft.com/office/drawing/2014/main" id="{0BD08636-912A-72E6-F9DF-EA231556B594}"/>
+              </a:ext>
+            </a:extLst>
+          </p:cNvPr>
+          <p:cNvPicPr>
+            <a:picLocks noChangeAspect="1"/>
+          </p:cNvPicPr>
+          <p:nvPr/>
+        </p:nvPicPr>
+        <p:blipFill>
+          <a:blip r:embed="rId6"/>
+          <a:stretch>
+            <a:fillRect/>
+          </a:stretch>
+        </p:blipFill>
+        <p:spPr>
+          <a:xfrm>
+            <a:off x="0" y="2032321"/>
+            <a:ext cx="10189931" cy="4477557"/>
+          </a:xfrm>
+          <a:prstGeom prst="roundRect">
+            <a:avLst>
+              <a:gd name="adj" fmla="val 16667"/>
+            </a:avLst>
+          </a:prstGeom>
+          <a:ln>
+            <a:noFill/>
+          </a:ln>
+          <a:effectLst>
+            <a:outerShdw blurRad="152400" dist="12000" dir="900000" sy="98000" kx="110000" ky="200000" algn="tl" rotWithShape="0">
+              <a:srgbClr val="000000">
+                <a:alpha val="30000"/>
+              </a:srgbClr>
+            </a:outerShdw>
+          </a:effectLst>
+          <a:scene3d>
+            <a:camera prst="perspectiveRelaxed">
+              <a:rot lat="19800000" lon="1200000" rev="20820000"/>
+            </a:camera>
+            <a:lightRig rig="threePt" dir="t"/>
+          </a:scene3d>
+          <a:sp3d contourW="6350" prstMaterial="matte">
+            <a:bevelT w="101600" h="101600"/>
+            <a:contourClr>
+              <a:srgbClr val="969696"/>
+            </a:contourClr>
+          </a:sp3d>
+        </p:spPr>
+      </p:pic>
+      <p:pic>
+        <p:nvPicPr>
+          <p:cNvPr id="12" name="Picture 11">
+            <a:extLst>
+              <a:ext uri="{FF2B5EF4-FFF2-40B4-BE49-F238E27FC236}">
+                <a16:creationId xmlns:a16="http://schemas.microsoft.com/office/drawing/2014/main" id="{0918B25F-D1A4-7F30-7F12-4BD240D98775}"/>
+              </a:ext>
+            </a:extLst>
+          </p:cNvPr>
+          <p:cNvPicPr>
+            <a:picLocks noChangeAspect="1"/>
+          </p:cNvPicPr>
+          <p:nvPr/>
+        </p:nvPicPr>
+        <p:blipFill>
+          <a:blip r:embed="rId7"/>
+          <a:stretch>
+            <a:fillRect/>
+          </a:stretch>
+        </p:blipFill>
+        <p:spPr>
+          <a:xfrm>
+            <a:off x="9902096" y="3669298"/>
+            <a:ext cx="1204612" cy="1152238"/>
+          </a:xfrm>
+          <a:prstGeom prst="rect">
+            <a:avLst/>
+          </a:prstGeom>
+          <a:ln>
+            <a:noFill/>
+          </a:ln>
+          <a:effectLst>
+            <a:softEdge rad="112500"/>
+          </a:effectLst>
+        </p:spPr>
+      </p:pic>
+      <p:pic>
+        <p:nvPicPr>
+          <p:cNvPr id="14" name="Picture 13">
+            <a:extLst>
+              <a:ext uri="{FF2B5EF4-FFF2-40B4-BE49-F238E27FC236}">
+                <a16:creationId xmlns:a16="http://schemas.microsoft.com/office/drawing/2014/main" id="{9D53845D-1113-CC62-04C4-6AD121658D32}"/>
+              </a:ext>
+            </a:extLst>
+          </p:cNvPr>
+          <p:cNvPicPr>
+            <a:picLocks noChangeAspect="1"/>
+          </p:cNvPicPr>
+          <p:nvPr/>
+        </p:nvPicPr>
+        <p:blipFill>
+          <a:blip r:embed="rId8"/>
+          <a:stretch>
+            <a:fillRect/>
+          </a:stretch>
+        </p:blipFill>
+        <p:spPr>
+          <a:xfrm>
+            <a:off x="9552934" y="5604990"/>
+            <a:ext cx="1902937" cy="1064946"/>
+          </a:xfrm>
+          <a:prstGeom prst="rect">
+            <a:avLst/>
+          </a:prstGeom>
+          <a:ln>
+            <a:noFill/>
+          </a:ln>
+          <a:effectLst>
+            <a:softEdge rad="112500"/>
+          </a:effectLst>
+        </p:spPr>
+      </p:pic>
+      <p:sp>
+        <p:nvSpPr>
+          <p:cNvPr id="8" name="Arrow: Down 7">
+            <a:extLst>
+              <a:ext uri="{FF2B5EF4-FFF2-40B4-BE49-F238E27FC236}">
+                <a16:creationId xmlns:a16="http://schemas.microsoft.com/office/drawing/2014/main" id="{74A70F6E-A23E-606D-B37E-6745ABA38B50}"/>
+              </a:ext>
+            </a:extLst>
+          </p:cNvPr>
+          <p:cNvSpPr/>
+          <p:nvPr/>
+        </p:nvSpPr>
+        <p:spPr>
+          <a:xfrm>
+            <a:off x="10144807" y="4885218"/>
+            <a:ext cx="719191" cy="656090"/>
+          </a:xfrm>
+          <a:prstGeom prst="downArrow">
+            <a:avLst/>
+          </a:prstGeom>
+          <a:effectLst>
+            <a:outerShdw blurRad="63500" sx="102000" sy="102000" algn="ctr" rotWithShape="0">
+              <a:prstClr val="black">
+                <a:alpha val="40000"/>
+              </a:prstClr>
+            </a:outerShdw>
+          </a:effectLst>
+        </p:spPr>
+        <p:style>
+          <a:lnRef idx="1">
+            <a:schemeClr val="accent2"/>
+          </a:lnRef>
+          <a:fillRef idx="2">
+            <a:schemeClr val="accent2"/>
+          </a:fillRef>
+          <a:effectRef idx="1">
+            <a:schemeClr val="accent2"/>
+          </a:effectRef>
+          <a:fontRef idx="minor">
+            <a:schemeClr val="dk1"/>
+          </a:fontRef>
+        </p:style>
+        <p:txBody>
+          <a:bodyPr rtlCol="0" anchor="ctr"/>
+          <a:lstStyle/>
+          <a:p>
+            <a:pPr algn="ctr"/>
+            <a:endParaRPr lang="en-US"/>
+          </a:p>
+        </p:txBody>
+      </p:sp>
+    </p:spTree>
+    <p:extLst>
+      <p:ext uri="{BB962C8B-B14F-4D97-AF65-F5344CB8AC3E}">
+        <p14:creationId xmlns:p14="http://schemas.microsoft.com/office/powerpoint/2010/main" val="2737572927"/>
+      </p:ext>
+    </p:extLst>
+  </p:cSld>
+  <p:clrMapOvr>
+    <a:masterClrMapping/>
+  </p:clrMapOvr>
+</p:sld>
+</file>
+
+<file path=ppt/slides/slide18.xml><?xml version="1.0" encoding="utf-8"?>
+<p:sld xmlns:a="http://schemas.openxmlformats.org/drawingml/2006/main" xmlns:r="http://schemas.openxmlformats.org/officeDocument/2006/relationships" xmlns:p="http://schemas.openxmlformats.org/presentationml/2006/main">
+  <p:cSld>
+    <p:spTree>
+      <p:nvGrpSpPr>
+        <p:cNvPr id="1" name="">
+          <a:extLst>
+            <a:ext uri="{FF2B5EF4-FFF2-40B4-BE49-F238E27FC236}">
               <a16:creationId xmlns:a16="http://schemas.microsoft.com/office/drawing/2014/main" id="{0CC0224E-FBBF-DCF2-BCE0-F89D770B9121}"/>
             </a:ext>
           </a:extLst>
@@ -19876,7 +24676,7 @@
 </p:sld>
 </file>
 
-<file path=ppt/slides/slide14.xml><?xml version="1.0" encoding="utf-8"?>
+<file path=ppt/slides/slide19.xml><?xml version="1.0" encoding="utf-8"?>
 <p:sld xmlns:a="http://schemas.openxmlformats.org/drawingml/2006/main" xmlns:r="http://schemas.openxmlformats.org/officeDocument/2006/relationships" xmlns:p="http://schemas.openxmlformats.org/presentationml/2006/main">
   <p:cSld>
     <p:spTree>
@@ -20152,7 +24952,531 @@
 </p:sld>
 </file>
 
-<file path=ppt/slides/slide15.xml><?xml version="1.0" encoding="utf-8"?>
+<file path=ppt/slides/slide2.xml><?xml version="1.0" encoding="utf-8"?>
+<p:sld xmlns:a="http://schemas.openxmlformats.org/drawingml/2006/main" xmlns:r="http://schemas.openxmlformats.org/officeDocument/2006/relationships" xmlns:p="http://schemas.openxmlformats.org/presentationml/2006/main">
+  <p:cSld>
+    <p:spTree>
+      <p:nvGrpSpPr>
+        <p:cNvPr id="1" name="">
+          <a:extLst>
+            <a:ext uri="{FF2B5EF4-FFF2-40B4-BE49-F238E27FC236}">
+              <a16:creationId xmlns:a16="http://schemas.microsoft.com/office/drawing/2014/main" id="{778A1C15-014E-A0FF-65BC-6C140972FC0B}"/>
+            </a:ext>
+          </a:extLst>
+        </p:cNvPr>
+        <p:cNvGrpSpPr/>
+        <p:nvPr/>
+      </p:nvGrpSpPr>
+      <p:grpSpPr>
+        <a:xfrm>
+          <a:off x="0" y="0"/>
+          <a:ext cx="0" cy="0"/>
+          <a:chOff x="0" y="0"/>
+          <a:chExt cx="0" cy="0"/>
+        </a:xfrm>
+      </p:grpSpPr>
+      <p:pic>
+        <p:nvPicPr>
+          <p:cNvPr id="5" name="Picture 4" descr="chain links">
+            <a:extLst>
+              <a:ext uri="{FF2B5EF4-FFF2-40B4-BE49-F238E27FC236}">
+                <a16:creationId xmlns:a16="http://schemas.microsoft.com/office/drawing/2014/main" id="{9A59AD99-950D-555E-A1FF-F48A1223D754}"/>
+              </a:ext>
+            </a:extLst>
+          </p:cNvPr>
+          <p:cNvPicPr>
+            <a:picLocks noChangeAspect="1"/>
+          </p:cNvPicPr>
+          <p:nvPr/>
+        </p:nvPicPr>
+        <p:blipFill rotWithShape="1">
+          <a:blip r:embed="rId3">
+            <a:duotone>
+              <a:prstClr val="black"/>
+              <a:schemeClr val="accent5">
+                <a:tint val="45000"/>
+                <a:satMod val="400000"/>
+              </a:schemeClr>
+            </a:duotone>
+            <a:alphaModFix amt="25000"/>
+          </a:blip>
+          <a:srcRect t="23391" r="9091"/>
+          <a:stretch/>
+        </p:blipFill>
+        <p:spPr>
+          <a:xfrm>
+            <a:off x="0" y="10"/>
+            <a:ext cx="12191980" cy="6857990"/>
+          </a:xfrm>
+          <a:prstGeom prst="rect">
+            <a:avLst/>
+          </a:prstGeom>
+        </p:spPr>
+      </p:pic>
+      <p:sp>
+        <p:nvSpPr>
+          <p:cNvPr id="3" name="Subtitle 2">
+            <a:extLst>
+              <a:ext uri="{FF2B5EF4-FFF2-40B4-BE49-F238E27FC236}">
+                <a16:creationId xmlns:a16="http://schemas.microsoft.com/office/drawing/2014/main" id="{C4B6EF80-44AE-CBB6-E106-B68D5FEC15BA}"/>
+              </a:ext>
+            </a:extLst>
+          </p:cNvPr>
+          <p:cNvSpPr>
+            <a:spLocks noGrp="1"/>
+          </p:cNvSpPr>
+          <p:nvPr>
+            <p:ph type="subTitle" idx="1"/>
+          </p:nvPr>
+        </p:nvSpPr>
+        <p:spPr>
+          <a:xfrm>
+            <a:off x="5065159" y="1398922"/>
+            <a:ext cx="7011227" cy="788415"/>
+          </a:xfrm>
+        </p:spPr>
+        <p:txBody>
+          <a:bodyPr>
+            <a:normAutofit lnSpcReduction="10000"/>
+          </a:bodyPr>
+          <a:lstStyle/>
+          <a:p>
+            <a:r>
+              <a:rPr lang="en-US" altLang="zh-CN" sz="4800" b="1" dirty="0"/>
+              <a:t>1. Getting Started</a:t>
+            </a:r>
+            <a:endParaRPr lang="en-US" sz="4800" b="1" dirty="0"/>
+          </a:p>
+        </p:txBody>
+      </p:sp>
+      <p:sp>
+        <p:nvSpPr>
+          <p:cNvPr id="7" name="Subtitle 2">
+            <a:extLst>
+              <a:ext uri="{FF2B5EF4-FFF2-40B4-BE49-F238E27FC236}">
+                <a16:creationId xmlns:a16="http://schemas.microsoft.com/office/drawing/2014/main" id="{6EE4F4E5-6CA5-F3AC-A077-FBB6AC88A6CD}"/>
+              </a:ext>
+            </a:extLst>
+          </p:cNvPr>
+          <p:cNvSpPr txBox="1">
+            <a:spLocks/>
+          </p:cNvSpPr>
+          <p:nvPr/>
+        </p:nvSpPr>
+        <p:spPr>
+          <a:xfrm>
+            <a:off x="8570773" y="2419"/>
+            <a:ext cx="2102069" cy="1447801"/>
+          </a:xfrm>
+          <a:prstGeom prst="rect">
+            <a:avLst/>
+          </a:prstGeom>
+        </p:spPr>
+        <p:txBody>
+          <a:bodyPr vert="horz" lIns="91440" tIns="45720" rIns="91440" bIns="45720" rtlCol="0" anchor="ctr">
+            <a:normAutofit fontScale="92500" lnSpcReduction="20000"/>
+          </a:bodyPr>
+          <a:lstStyle>
+            <a:lvl1pPr marL="0" indent="0" algn="l" defTabSz="457200" rtl="0" eaLnBrk="1" latinLnBrk="0" hangingPunct="1">
+              <a:spcBef>
+                <a:spcPts val="1000"/>
+              </a:spcBef>
+              <a:spcAft>
+                <a:spcPts val="0"/>
+              </a:spcAft>
+              <a:buClr>
+                <a:schemeClr val="accent1"/>
+              </a:buClr>
+              <a:buSzPct val="80000"/>
+              <a:buFont typeface="Wingdings 3" charset="2"/>
+              <a:buNone/>
+              <a:defRPr sz="2000" b="0" i="0" kern="1200" cap="all">
+                <a:solidFill>
+                  <a:schemeClr val="accent1"/>
+                </a:solidFill>
+                <a:latin typeface="+mj-lt"/>
+                <a:ea typeface="+mj-ea"/>
+                <a:cs typeface="+mj-cs"/>
+              </a:defRPr>
+            </a:lvl1pPr>
+            <a:lvl2pPr marL="457200" indent="0" algn="ctr" defTabSz="457200" rtl="0" eaLnBrk="1" latinLnBrk="0" hangingPunct="1">
+              <a:spcBef>
+                <a:spcPts val="1000"/>
+              </a:spcBef>
+              <a:spcAft>
+                <a:spcPts val="0"/>
+              </a:spcAft>
+              <a:buClr>
+                <a:schemeClr val="accent1"/>
+              </a:buClr>
+              <a:buSzPct val="80000"/>
+              <a:buFont typeface="Wingdings 3" charset="2"/>
+              <a:buNone/>
+              <a:defRPr sz="1800" b="0" i="0" kern="1200">
+                <a:solidFill>
+                  <a:schemeClr val="tx1">
+                    <a:tint val="75000"/>
+                  </a:schemeClr>
+                </a:solidFill>
+                <a:latin typeface="+mj-lt"/>
+                <a:ea typeface="+mj-ea"/>
+                <a:cs typeface="+mj-cs"/>
+              </a:defRPr>
+            </a:lvl2pPr>
+            <a:lvl3pPr marL="914400" indent="0" algn="ctr" defTabSz="457200" rtl="0" eaLnBrk="1" latinLnBrk="0" hangingPunct="1">
+              <a:spcBef>
+                <a:spcPts val="1000"/>
+              </a:spcBef>
+              <a:spcAft>
+                <a:spcPts val="0"/>
+              </a:spcAft>
+              <a:buClr>
+                <a:schemeClr val="accent1"/>
+              </a:buClr>
+              <a:buSzPct val="80000"/>
+              <a:buFont typeface="Wingdings 3" charset="2"/>
+              <a:buNone/>
+              <a:defRPr sz="1600" b="0" i="0" kern="1200">
+                <a:solidFill>
+                  <a:schemeClr val="tx1">
+                    <a:tint val="75000"/>
+                  </a:schemeClr>
+                </a:solidFill>
+                <a:latin typeface="+mj-lt"/>
+                <a:ea typeface="+mj-ea"/>
+                <a:cs typeface="+mj-cs"/>
+              </a:defRPr>
+            </a:lvl3pPr>
+            <a:lvl4pPr marL="1371600" indent="0" algn="ctr" defTabSz="457200" rtl="0" eaLnBrk="1" latinLnBrk="0" hangingPunct="1">
+              <a:spcBef>
+                <a:spcPts val="1000"/>
+              </a:spcBef>
+              <a:spcAft>
+                <a:spcPts val="0"/>
+              </a:spcAft>
+              <a:buClr>
+                <a:schemeClr val="accent1"/>
+              </a:buClr>
+              <a:buSzPct val="80000"/>
+              <a:buFont typeface="Wingdings 3" charset="2"/>
+              <a:buNone/>
+              <a:defRPr sz="1400" b="0" i="0" kern="1200">
+                <a:solidFill>
+                  <a:schemeClr val="tx1">
+                    <a:tint val="75000"/>
+                  </a:schemeClr>
+                </a:solidFill>
+                <a:latin typeface="+mj-lt"/>
+                <a:ea typeface="+mj-ea"/>
+                <a:cs typeface="+mj-cs"/>
+              </a:defRPr>
+            </a:lvl4pPr>
+            <a:lvl5pPr marL="1828800" indent="0" algn="ctr" defTabSz="457200" rtl="0" eaLnBrk="1" latinLnBrk="0" hangingPunct="1">
+              <a:spcBef>
+                <a:spcPts val="1000"/>
+              </a:spcBef>
+              <a:spcAft>
+                <a:spcPts val="0"/>
+              </a:spcAft>
+              <a:buClr>
+                <a:schemeClr val="accent1"/>
+              </a:buClr>
+              <a:buSzPct val="80000"/>
+              <a:buFont typeface="Wingdings 3" charset="2"/>
+              <a:buNone/>
+              <a:defRPr sz="1400" b="0" i="0" kern="1200">
+                <a:solidFill>
+                  <a:schemeClr val="tx1">
+                    <a:tint val="75000"/>
+                  </a:schemeClr>
+                </a:solidFill>
+                <a:latin typeface="+mj-lt"/>
+                <a:ea typeface="+mj-ea"/>
+                <a:cs typeface="+mj-cs"/>
+              </a:defRPr>
+            </a:lvl5pPr>
+            <a:lvl6pPr marL="2286000" indent="0" algn="ctr" defTabSz="457200" rtl="0" eaLnBrk="1" latinLnBrk="0" hangingPunct="1">
+              <a:spcBef>
+                <a:spcPts val="1000"/>
+              </a:spcBef>
+              <a:spcAft>
+                <a:spcPts val="0"/>
+              </a:spcAft>
+              <a:buClr>
+                <a:schemeClr val="accent1"/>
+              </a:buClr>
+              <a:buSzPct val="80000"/>
+              <a:buFont typeface="Wingdings 3" charset="2"/>
+              <a:buNone/>
+              <a:defRPr sz="1400" b="0" i="0" kern="1200">
+                <a:solidFill>
+                  <a:schemeClr val="tx1">
+                    <a:tint val="75000"/>
+                  </a:schemeClr>
+                </a:solidFill>
+                <a:latin typeface="+mj-lt"/>
+                <a:ea typeface="+mj-ea"/>
+                <a:cs typeface="+mj-cs"/>
+              </a:defRPr>
+            </a:lvl6pPr>
+            <a:lvl7pPr marL="2743200" indent="0" algn="ctr" defTabSz="457200" rtl="0" eaLnBrk="1" latinLnBrk="0" hangingPunct="1">
+              <a:spcBef>
+                <a:spcPts val="1000"/>
+              </a:spcBef>
+              <a:spcAft>
+                <a:spcPts val="0"/>
+              </a:spcAft>
+              <a:buClr>
+                <a:schemeClr val="accent1"/>
+              </a:buClr>
+              <a:buSzPct val="80000"/>
+              <a:buFont typeface="Wingdings 3" charset="2"/>
+              <a:buNone/>
+              <a:defRPr sz="1400" b="0" i="0" kern="1200">
+                <a:solidFill>
+                  <a:schemeClr val="tx1">
+                    <a:tint val="75000"/>
+                  </a:schemeClr>
+                </a:solidFill>
+                <a:latin typeface="+mj-lt"/>
+                <a:ea typeface="+mj-ea"/>
+                <a:cs typeface="+mj-cs"/>
+              </a:defRPr>
+            </a:lvl7pPr>
+            <a:lvl8pPr marL="3200400" indent="0" algn="ctr" defTabSz="457200" rtl="0" eaLnBrk="1" latinLnBrk="0" hangingPunct="1">
+              <a:spcBef>
+                <a:spcPts val="1000"/>
+              </a:spcBef>
+              <a:spcAft>
+                <a:spcPts val="0"/>
+              </a:spcAft>
+              <a:buClr>
+                <a:schemeClr val="accent1"/>
+              </a:buClr>
+              <a:buSzPct val="80000"/>
+              <a:buFont typeface="Wingdings 3" charset="2"/>
+              <a:buNone/>
+              <a:defRPr sz="1400" b="0" i="0" kern="1200">
+                <a:solidFill>
+                  <a:schemeClr val="tx1">
+                    <a:tint val="75000"/>
+                  </a:schemeClr>
+                </a:solidFill>
+                <a:latin typeface="+mj-lt"/>
+                <a:ea typeface="+mj-ea"/>
+                <a:cs typeface="+mj-cs"/>
+              </a:defRPr>
+            </a:lvl8pPr>
+            <a:lvl9pPr marL="3657600" indent="0" algn="ctr" defTabSz="457200" rtl="0" eaLnBrk="1" latinLnBrk="0" hangingPunct="1">
+              <a:spcBef>
+                <a:spcPts val="1000"/>
+              </a:spcBef>
+              <a:spcAft>
+                <a:spcPts val="0"/>
+              </a:spcAft>
+              <a:buClr>
+                <a:schemeClr val="accent1"/>
+              </a:buClr>
+              <a:buSzPct val="80000"/>
+              <a:buFont typeface="Wingdings 3" charset="2"/>
+              <a:buNone/>
+              <a:defRPr sz="1400" b="0" i="0" kern="1200">
+                <a:solidFill>
+                  <a:schemeClr val="tx1">
+                    <a:tint val="75000"/>
+                  </a:schemeClr>
+                </a:solidFill>
+                <a:latin typeface="+mj-lt"/>
+                <a:ea typeface="+mj-ea"/>
+                <a:cs typeface="+mj-cs"/>
+              </a:defRPr>
+            </a:lvl9pPr>
+          </a:lstStyle>
+          <a:p>
+            <a:pPr algn="ctr"/>
+            <a:r>
+              <a:rPr lang="en-US" sz="11500" b="1" dirty="0"/>
+              <a:t>01</a:t>
+            </a:r>
+          </a:p>
+        </p:txBody>
+      </p:sp>
+      <p:pic>
+        <p:nvPicPr>
+          <p:cNvPr id="4" name="Picture 3">
+            <a:extLst>
+              <a:ext uri="{FF2B5EF4-FFF2-40B4-BE49-F238E27FC236}">
+                <a16:creationId xmlns:a16="http://schemas.microsoft.com/office/drawing/2014/main" id="{E1C0B91F-5EDF-4DD4-3D99-59EDEEB7CE9B}"/>
+              </a:ext>
+            </a:extLst>
+          </p:cNvPr>
+          <p:cNvPicPr>
+            <a:picLocks noChangeAspect="1"/>
+          </p:cNvPicPr>
+          <p:nvPr/>
+        </p:nvPicPr>
+        <p:blipFill>
+          <a:blip r:embed="rId4"/>
+          <a:stretch>
+            <a:fillRect/>
+          </a:stretch>
+        </p:blipFill>
+        <p:spPr>
+          <a:xfrm>
+            <a:off x="0" y="0"/>
+            <a:ext cx="5065160" cy="3226085"/>
+          </a:xfrm>
+          <a:prstGeom prst="rect">
+            <a:avLst/>
+          </a:prstGeom>
+          <a:ln>
+            <a:noFill/>
+          </a:ln>
+          <a:effectLst>
+            <a:softEdge rad="112500"/>
+          </a:effectLst>
+        </p:spPr>
+      </p:pic>
+      <p:pic>
+        <p:nvPicPr>
+          <p:cNvPr id="10" name="Picture 9">
+            <a:extLst>
+              <a:ext uri="{FF2B5EF4-FFF2-40B4-BE49-F238E27FC236}">
+                <a16:creationId xmlns:a16="http://schemas.microsoft.com/office/drawing/2014/main" id="{9E00445A-227F-602E-C4EC-989B5130E473}"/>
+              </a:ext>
+            </a:extLst>
+          </p:cNvPr>
+          <p:cNvPicPr>
+            <a:picLocks noChangeAspect="1"/>
+          </p:cNvPicPr>
+          <p:nvPr/>
+        </p:nvPicPr>
+        <p:blipFill>
+          <a:blip r:embed="rId5"/>
+          <a:stretch>
+            <a:fillRect/>
+          </a:stretch>
+        </p:blipFill>
+        <p:spPr>
+          <a:xfrm>
+            <a:off x="10672842" y="271032"/>
+            <a:ext cx="1420028" cy="652758"/>
+          </a:xfrm>
+          <a:prstGeom prst="rect">
+            <a:avLst/>
+          </a:prstGeom>
+          <a:ln>
+            <a:noFill/>
+          </a:ln>
+          <a:effectLst>
+            <a:softEdge rad="112500"/>
+          </a:effectLst>
+        </p:spPr>
+      </p:pic>
+      <p:sp>
+        <p:nvSpPr>
+          <p:cNvPr id="2" name="Title 1">
+            <a:extLst>
+              <a:ext uri="{FF2B5EF4-FFF2-40B4-BE49-F238E27FC236}">
+                <a16:creationId xmlns:a16="http://schemas.microsoft.com/office/drawing/2014/main" id="{5FBA322D-1392-BB78-1864-C41469BC59B4}"/>
+              </a:ext>
+            </a:extLst>
+          </p:cNvPr>
+          <p:cNvSpPr>
+            <a:spLocks noGrp="1"/>
+          </p:cNvSpPr>
+          <p:nvPr>
+            <p:ph type="ctrTitle"/>
+          </p:nvPr>
+        </p:nvSpPr>
+        <p:spPr>
+          <a:xfrm>
+            <a:off x="4011986" y="30293"/>
+            <a:ext cx="4741596" cy="1266497"/>
+          </a:xfrm>
+        </p:spPr>
+        <p:txBody>
+          <a:bodyPr anchor="ctr">
+            <a:normAutofit/>
+          </a:bodyPr>
+          <a:lstStyle/>
+          <a:p>
+            <a:r>
+              <a:rPr lang="en-US" sz="6000" b="1" dirty="0"/>
+              <a:t>App Router</a:t>
+            </a:r>
+            <a:endParaRPr lang="ru-RU" sz="6000" b="1" dirty="0"/>
+          </a:p>
+        </p:txBody>
+      </p:sp>
+      <p:pic>
+        <p:nvPicPr>
+          <p:cNvPr id="8" name="Picture 7">
+            <a:extLst>
+              <a:ext uri="{FF2B5EF4-FFF2-40B4-BE49-F238E27FC236}">
+                <a16:creationId xmlns:a16="http://schemas.microsoft.com/office/drawing/2014/main" id="{9DB10A20-E426-E955-9570-E22A7E2EE97E}"/>
+              </a:ext>
+            </a:extLst>
+          </p:cNvPr>
+          <p:cNvPicPr>
+            <a:picLocks noChangeAspect="1"/>
+          </p:cNvPicPr>
+          <p:nvPr/>
+        </p:nvPicPr>
+        <p:blipFill>
+          <a:blip r:embed="rId6"/>
+          <a:stretch>
+            <a:fillRect/>
+          </a:stretch>
+        </p:blipFill>
+        <p:spPr>
+          <a:xfrm>
+            <a:off x="226031" y="2090603"/>
+            <a:ext cx="8897420" cy="4413955"/>
+          </a:xfrm>
+          <a:prstGeom prst="roundRect">
+            <a:avLst>
+              <a:gd name="adj" fmla="val 16667"/>
+            </a:avLst>
+          </a:prstGeom>
+          <a:ln>
+            <a:noFill/>
+          </a:ln>
+          <a:effectLst>
+            <a:outerShdw blurRad="152400" dist="12000" dir="900000" sy="98000" kx="110000" ky="200000" algn="tl" rotWithShape="0">
+              <a:srgbClr val="000000">
+                <a:alpha val="30000"/>
+              </a:srgbClr>
+            </a:outerShdw>
+          </a:effectLst>
+          <a:scene3d>
+            <a:camera prst="perspectiveRelaxed">
+              <a:rot lat="19800000" lon="1200000" rev="20820000"/>
+            </a:camera>
+            <a:lightRig rig="threePt" dir="t"/>
+          </a:scene3d>
+          <a:sp3d contourW="6350" prstMaterial="matte">
+            <a:bevelT w="101600" h="101600"/>
+            <a:contourClr>
+              <a:srgbClr val="969696"/>
+            </a:contourClr>
+          </a:sp3d>
+        </p:spPr>
+      </p:pic>
+    </p:spTree>
+    <p:extLst>
+      <p:ext uri="{BB962C8B-B14F-4D97-AF65-F5344CB8AC3E}">
+        <p14:creationId xmlns:p14="http://schemas.microsoft.com/office/powerpoint/2010/main" val="1953970769"/>
+      </p:ext>
+    </p:extLst>
+  </p:cSld>
+  <p:clrMapOvr>
+    <a:masterClrMapping/>
+  </p:clrMapOvr>
+</p:sld>
+</file>
+
+<file path=ppt/slides/slide20.xml><?xml version="1.0" encoding="utf-8"?>
 <p:sld xmlns:a="http://schemas.openxmlformats.org/drawingml/2006/main" xmlns:r="http://schemas.openxmlformats.org/officeDocument/2006/relationships" xmlns:p="http://schemas.openxmlformats.org/presentationml/2006/main">
   <p:cSld>
     <p:spTree>
@@ -20413,530 +25737,6 @@
     <p:extLst>
       <p:ext uri="{BB962C8B-B14F-4D97-AF65-F5344CB8AC3E}">
         <p14:creationId xmlns:p14="http://schemas.microsoft.com/office/powerpoint/2010/main" val="1150308760"/>
-      </p:ext>
-    </p:extLst>
-  </p:cSld>
-  <p:clrMapOvr>
-    <a:masterClrMapping/>
-  </p:clrMapOvr>
-</p:sld>
-</file>
-
-<file path=ppt/slides/slide2.xml><?xml version="1.0" encoding="utf-8"?>
-<p:sld xmlns:a="http://schemas.openxmlformats.org/drawingml/2006/main" xmlns:r="http://schemas.openxmlformats.org/officeDocument/2006/relationships" xmlns:p="http://schemas.openxmlformats.org/presentationml/2006/main">
-  <p:cSld>
-    <p:spTree>
-      <p:nvGrpSpPr>
-        <p:cNvPr id="1" name="">
-          <a:extLst>
-            <a:ext uri="{FF2B5EF4-FFF2-40B4-BE49-F238E27FC236}">
-              <a16:creationId xmlns:a16="http://schemas.microsoft.com/office/drawing/2014/main" id="{778A1C15-014E-A0FF-65BC-6C140972FC0B}"/>
-            </a:ext>
-          </a:extLst>
-        </p:cNvPr>
-        <p:cNvGrpSpPr/>
-        <p:nvPr/>
-      </p:nvGrpSpPr>
-      <p:grpSpPr>
-        <a:xfrm>
-          <a:off x="0" y="0"/>
-          <a:ext cx="0" cy="0"/>
-          <a:chOff x="0" y="0"/>
-          <a:chExt cx="0" cy="0"/>
-        </a:xfrm>
-      </p:grpSpPr>
-      <p:pic>
-        <p:nvPicPr>
-          <p:cNvPr id="5" name="Picture 4" descr="chain links">
-            <a:extLst>
-              <a:ext uri="{FF2B5EF4-FFF2-40B4-BE49-F238E27FC236}">
-                <a16:creationId xmlns:a16="http://schemas.microsoft.com/office/drawing/2014/main" id="{9A59AD99-950D-555E-A1FF-F48A1223D754}"/>
-              </a:ext>
-            </a:extLst>
-          </p:cNvPr>
-          <p:cNvPicPr>
-            <a:picLocks noChangeAspect="1"/>
-          </p:cNvPicPr>
-          <p:nvPr/>
-        </p:nvPicPr>
-        <p:blipFill rotWithShape="1">
-          <a:blip r:embed="rId3">
-            <a:duotone>
-              <a:prstClr val="black"/>
-              <a:schemeClr val="accent5">
-                <a:tint val="45000"/>
-                <a:satMod val="400000"/>
-              </a:schemeClr>
-            </a:duotone>
-            <a:alphaModFix amt="25000"/>
-          </a:blip>
-          <a:srcRect t="23391" r="9091"/>
-          <a:stretch/>
-        </p:blipFill>
-        <p:spPr>
-          <a:xfrm>
-            <a:off x="0" y="10"/>
-            <a:ext cx="12191980" cy="6857990"/>
-          </a:xfrm>
-          <a:prstGeom prst="rect">
-            <a:avLst/>
-          </a:prstGeom>
-        </p:spPr>
-      </p:pic>
-      <p:sp>
-        <p:nvSpPr>
-          <p:cNvPr id="3" name="Subtitle 2">
-            <a:extLst>
-              <a:ext uri="{FF2B5EF4-FFF2-40B4-BE49-F238E27FC236}">
-                <a16:creationId xmlns:a16="http://schemas.microsoft.com/office/drawing/2014/main" id="{C4B6EF80-44AE-CBB6-E106-B68D5FEC15BA}"/>
-              </a:ext>
-            </a:extLst>
-          </p:cNvPr>
-          <p:cNvSpPr>
-            <a:spLocks noGrp="1"/>
-          </p:cNvSpPr>
-          <p:nvPr>
-            <p:ph type="subTitle" idx="1"/>
-          </p:nvPr>
-        </p:nvSpPr>
-        <p:spPr>
-          <a:xfrm>
-            <a:off x="5065159" y="1398922"/>
-            <a:ext cx="7011227" cy="788415"/>
-          </a:xfrm>
-        </p:spPr>
-        <p:txBody>
-          <a:bodyPr>
-            <a:normAutofit lnSpcReduction="10000"/>
-          </a:bodyPr>
-          <a:lstStyle/>
-          <a:p>
-            <a:r>
-              <a:rPr lang="en-US" altLang="zh-CN" sz="4800" b="1" dirty="0"/>
-              <a:t>1. Getting Started</a:t>
-            </a:r>
-            <a:endParaRPr lang="en-US" sz="4800" b="1" dirty="0"/>
-          </a:p>
-        </p:txBody>
-      </p:sp>
-      <p:sp>
-        <p:nvSpPr>
-          <p:cNvPr id="7" name="Subtitle 2">
-            <a:extLst>
-              <a:ext uri="{FF2B5EF4-FFF2-40B4-BE49-F238E27FC236}">
-                <a16:creationId xmlns:a16="http://schemas.microsoft.com/office/drawing/2014/main" id="{6EE4F4E5-6CA5-F3AC-A077-FBB6AC88A6CD}"/>
-              </a:ext>
-            </a:extLst>
-          </p:cNvPr>
-          <p:cNvSpPr txBox="1">
-            <a:spLocks/>
-          </p:cNvSpPr>
-          <p:nvPr/>
-        </p:nvSpPr>
-        <p:spPr>
-          <a:xfrm>
-            <a:off x="8570773" y="2419"/>
-            <a:ext cx="2102069" cy="1447801"/>
-          </a:xfrm>
-          <a:prstGeom prst="rect">
-            <a:avLst/>
-          </a:prstGeom>
-        </p:spPr>
-        <p:txBody>
-          <a:bodyPr vert="horz" lIns="91440" tIns="45720" rIns="91440" bIns="45720" rtlCol="0" anchor="ctr">
-            <a:normAutofit fontScale="92500" lnSpcReduction="20000"/>
-          </a:bodyPr>
-          <a:lstStyle>
-            <a:lvl1pPr marL="0" indent="0" algn="l" defTabSz="457200" rtl="0" eaLnBrk="1" latinLnBrk="0" hangingPunct="1">
-              <a:spcBef>
-                <a:spcPts val="1000"/>
-              </a:spcBef>
-              <a:spcAft>
-                <a:spcPts val="0"/>
-              </a:spcAft>
-              <a:buClr>
-                <a:schemeClr val="accent1"/>
-              </a:buClr>
-              <a:buSzPct val="80000"/>
-              <a:buFont typeface="Wingdings 3" charset="2"/>
-              <a:buNone/>
-              <a:defRPr sz="2000" b="0" i="0" kern="1200" cap="all">
-                <a:solidFill>
-                  <a:schemeClr val="accent1"/>
-                </a:solidFill>
-                <a:latin typeface="+mj-lt"/>
-                <a:ea typeface="+mj-ea"/>
-                <a:cs typeface="+mj-cs"/>
-              </a:defRPr>
-            </a:lvl1pPr>
-            <a:lvl2pPr marL="457200" indent="0" algn="ctr" defTabSz="457200" rtl="0" eaLnBrk="1" latinLnBrk="0" hangingPunct="1">
-              <a:spcBef>
-                <a:spcPts val="1000"/>
-              </a:spcBef>
-              <a:spcAft>
-                <a:spcPts val="0"/>
-              </a:spcAft>
-              <a:buClr>
-                <a:schemeClr val="accent1"/>
-              </a:buClr>
-              <a:buSzPct val="80000"/>
-              <a:buFont typeface="Wingdings 3" charset="2"/>
-              <a:buNone/>
-              <a:defRPr sz="1800" b="0" i="0" kern="1200">
-                <a:solidFill>
-                  <a:schemeClr val="tx1">
-                    <a:tint val="75000"/>
-                  </a:schemeClr>
-                </a:solidFill>
-                <a:latin typeface="+mj-lt"/>
-                <a:ea typeface="+mj-ea"/>
-                <a:cs typeface="+mj-cs"/>
-              </a:defRPr>
-            </a:lvl2pPr>
-            <a:lvl3pPr marL="914400" indent="0" algn="ctr" defTabSz="457200" rtl="0" eaLnBrk="1" latinLnBrk="0" hangingPunct="1">
-              <a:spcBef>
-                <a:spcPts val="1000"/>
-              </a:spcBef>
-              <a:spcAft>
-                <a:spcPts val="0"/>
-              </a:spcAft>
-              <a:buClr>
-                <a:schemeClr val="accent1"/>
-              </a:buClr>
-              <a:buSzPct val="80000"/>
-              <a:buFont typeface="Wingdings 3" charset="2"/>
-              <a:buNone/>
-              <a:defRPr sz="1600" b="0" i="0" kern="1200">
-                <a:solidFill>
-                  <a:schemeClr val="tx1">
-                    <a:tint val="75000"/>
-                  </a:schemeClr>
-                </a:solidFill>
-                <a:latin typeface="+mj-lt"/>
-                <a:ea typeface="+mj-ea"/>
-                <a:cs typeface="+mj-cs"/>
-              </a:defRPr>
-            </a:lvl3pPr>
-            <a:lvl4pPr marL="1371600" indent="0" algn="ctr" defTabSz="457200" rtl="0" eaLnBrk="1" latinLnBrk="0" hangingPunct="1">
-              <a:spcBef>
-                <a:spcPts val="1000"/>
-              </a:spcBef>
-              <a:spcAft>
-                <a:spcPts val="0"/>
-              </a:spcAft>
-              <a:buClr>
-                <a:schemeClr val="accent1"/>
-              </a:buClr>
-              <a:buSzPct val="80000"/>
-              <a:buFont typeface="Wingdings 3" charset="2"/>
-              <a:buNone/>
-              <a:defRPr sz="1400" b="0" i="0" kern="1200">
-                <a:solidFill>
-                  <a:schemeClr val="tx1">
-                    <a:tint val="75000"/>
-                  </a:schemeClr>
-                </a:solidFill>
-                <a:latin typeface="+mj-lt"/>
-                <a:ea typeface="+mj-ea"/>
-                <a:cs typeface="+mj-cs"/>
-              </a:defRPr>
-            </a:lvl4pPr>
-            <a:lvl5pPr marL="1828800" indent="0" algn="ctr" defTabSz="457200" rtl="0" eaLnBrk="1" latinLnBrk="0" hangingPunct="1">
-              <a:spcBef>
-                <a:spcPts val="1000"/>
-              </a:spcBef>
-              <a:spcAft>
-                <a:spcPts val="0"/>
-              </a:spcAft>
-              <a:buClr>
-                <a:schemeClr val="accent1"/>
-              </a:buClr>
-              <a:buSzPct val="80000"/>
-              <a:buFont typeface="Wingdings 3" charset="2"/>
-              <a:buNone/>
-              <a:defRPr sz="1400" b="0" i="0" kern="1200">
-                <a:solidFill>
-                  <a:schemeClr val="tx1">
-                    <a:tint val="75000"/>
-                  </a:schemeClr>
-                </a:solidFill>
-                <a:latin typeface="+mj-lt"/>
-                <a:ea typeface="+mj-ea"/>
-                <a:cs typeface="+mj-cs"/>
-              </a:defRPr>
-            </a:lvl5pPr>
-            <a:lvl6pPr marL="2286000" indent="0" algn="ctr" defTabSz="457200" rtl="0" eaLnBrk="1" latinLnBrk="0" hangingPunct="1">
-              <a:spcBef>
-                <a:spcPts val="1000"/>
-              </a:spcBef>
-              <a:spcAft>
-                <a:spcPts val="0"/>
-              </a:spcAft>
-              <a:buClr>
-                <a:schemeClr val="accent1"/>
-              </a:buClr>
-              <a:buSzPct val="80000"/>
-              <a:buFont typeface="Wingdings 3" charset="2"/>
-              <a:buNone/>
-              <a:defRPr sz="1400" b="0" i="0" kern="1200">
-                <a:solidFill>
-                  <a:schemeClr val="tx1">
-                    <a:tint val="75000"/>
-                  </a:schemeClr>
-                </a:solidFill>
-                <a:latin typeface="+mj-lt"/>
-                <a:ea typeface="+mj-ea"/>
-                <a:cs typeface="+mj-cs"/>
-              </a:defRPr>
-            </a:lvl6pPr>
-            <a:lvl7pPr marL="2743200" indent="0" algn="ctr" defTabSz="457200" rtl="0" eaLnBrk="1" latinLnBrk="0" hangingPunct="1">
-              <a:spcBef>
-                <a:spcPts val="1000"/>
-              </a:spcBef>
-              <a:spcAft>
-                <a:spcPts val="0"/>
-              </a:spcAft>
-              <a:buClr>
-                <a:schemeClr val="accent1"/>
-              </a:buClr>
-              <a:buSzPct val="80000"/>
-              <a:buFont typeface="Wingdings 3" charset="2"/>
-              <a:buNone/>
-              <a:defRPr sz="1400" b="0" i="0" kern="1200">
-                <a:solidFill>
-                  <a:schemeClr val="tx1">
-                    <a:tint val="75000"/>
-                  </a:schemeClr>
-                </a:solidFill>
-                <a:latin typeface="+mj-lt"/>
-                <a:ea typeface="+mj-ea"/>
-                <a:cs typeface="+mj-cs"/>
-              </a:defRPr>
-            </a:lvl7pPr>
-            <a:lvl8pPr marL="3200400" indent="0" algn="ctr" defTabSz="457200" rtl="0" eaLnBrk="1" latinLnBrk="0" hangingPunct="1">
-              <a:spcBef>
-                <a:spcPts val="1000"/>
-              </a:spcBef>
-              <a:spcAft>
-                <a:spcPts val="0"/>
-              </a:spcAft>
-              <a:buClr>
-                <a:schemeClr val="accent1"/>
-              </a:buClr>
-              <a:buSzPct val="80000"/>
-              <a:buFont typeface="Wingdings 3" charset="2"/>
-              <a:buNone/>
-              <a:defRPr sz="1400" b="0" i="0" kern="1200">
-                <a:solidFill>
-                  <a:schemeClr val="tx1">
-                    <a:tint val="75000"/>
-                  </a:schemeClr>
-                </a:solidFill>
-                <a:latin typeface="+mj-lt"/>
-                <a:ea typeface="+mj-ea"/>
-                <a:cs typeface="+mj-cs"/>
-              </a:defRPr>
-            </a:lvl8pPr>
-            <a:lvl9pPr marL="3657600" indent="0" algn="ctr" defTabSz="457200" rtl="0" eaLnBrk="1" latinLnBrk="0" hangingPunct="1">
-              <a:spcBef>
-                <a:spcPts val="1000"/>
-              </a:spcBef>
-              <a:spcAft>
-                <a:spcPts val="0"/>
-              </a:spcAft>
-              <a:buClr>
-                <a:schemeClr val="accent1"/>
-              </a:buClr>
-              <a:buSzPct val="80000"/>
-              <a:buFont typeface="Wingdings 3" charset="2"/>
-              <a:buNone/>
-              <a:defRPr sz="1400" b="0" i="0" kern="1200">
-                <a:solidFill>
-                  <a:schemeClr val="tx1">
-                    <a:tint val="75000"/>
-                  </a:schemeClr>
-                </a:solidFill>
-                <a:latin typeface="+mj-lt"/>
-                <a:ea typeface="+mj-ea"/>
-                <a:cs typeface="+mj-cs"/>
-              </a:defRPr>
-            </a:lvl9pPr>
-          </a:lstStyle>
-          <a:p>
-            <a:pPr algn="ctr"/>
-            <a:r>
-              <a:rPr lang="en-US" sz="11500" b="1" dirty="0"/>
-              <a:t>01</a:t>
-            </a:r>
-          </a:p>
-        </p:txBody>
-      </p:sp>
-      <p:pic>
-        <p:nvPicPr>
-          <p:cNvPr id="4" name="Picture 3">
-            <a:extLst>
-              <a:ext uri="{FF2B5EF4-FFF2-40B4-BE49-F238E27FC236}">
-                <a16:creationId xmlns:a16="http://schemas.microsoft.com/office/drawing/2014/main" id="{E1C0B91F-5EDF-4DD4-3D99-59EDEEB7CE9B}"/>
-              </a:ext>
-            </a:extLst>
-          </p:cNvPr>
-          <p:cNvPicPr>
-            <a:picLocks noChangeAspect="1"/>
-          </p:cNvPicPr>
-          <p:nvPr/>
-        </p:nvPicPr>
-        <p:blipFill>
-          <a:blip r:embed="rId4"/>
-          <a:stretch>
-            <a:fillRect/>
-          </a:stretch>
-        </p:blipFill>
-        <p:spPr>
-          <a:xfrm>
-            <a:off x="0" y="0"/>
-            <a:ext cx="5065160" cy="3226085"/>
-          </a:xfrm>
-          <a:prstGeom prst="rect">
-            <a:avLst/>
-          </a:prstGeom>
-          <a:ln>
-            <a:noFill/>
-          </a:ln>
-          <a:effectLst>
-            <a:softEdge rad="112500"/>
-          </a:effectLst>
-        </p:spPr>
-      </p:pic>
-      <p:pic>
-        <p:nvPicPr>
-          <p:cNvPr id="10" name="Picture 9">
-            <a:extLst>
-              <a:ext uri="{FF2B5EF4-FFF2-40B4-BE49-F238E27FC236}">
-                <a16:creationId xmlns:a16="http://schemas.microsoft.com/office/drawing/2014/main" id="{9E00445A-227F-602E-C4EC-989B5130E473}"/>
-              </a:ext>
-            </a:extLst>
-          </p:cNvPr>
-          <p:cNvPicPr>
-            <a:picLocks noChangeAspect="1"/>
-          </p:cNvPicPr>
-          <p:nvPr/>
-        </p:nvPicPr>
-        <p:blipFill>
-          <a:blip r:embed="rId5"/>
-          <a:stretch>
-            <a:fillRect/>
-          </a:stretch>
-        </p:blipFill>
-        <p:spPr>
-          <a:xfrm>
-            <a:off x="10672842" y="271032"/>
-            <a:ext cx="1420028" cy="652758"/>
-          </a:xfrm>
-          <a:prstGeom prst="rect">
-            <a:avLst/>
-          </a:prstGeom>
-          <a:ln>
-            <a:noFill/>
-          </a:ln>
-          <a:effectLst>
-            <a:softEdge rad="112500"/>
-          </a:effectLst>
-        </p:spPr>
-      </p:pic>
-      <p:sp>
-        <p:nvSpPr>
-          <p:cNvPr id="2" name="Title 1">
-            <a:extLst>
-              <a:ext uri="{FF2B5EF4-FFF2-40B4-BE49-F238E27FC236}">
-                <a16:creationId xmlns:a16="http://schemas.microsoft.com/office/drawing/2014/main" id="{5FBA322D-1392-BB78-1864-C41469BC59B4}"/>
-              </a:ext>
-            </a:extLst>
-          </p:cNvPr>
-          <p:cNvSpPr>
-            <a:spLocks noGrp="1"/>
-          </p:cNvSpPr>
-          <p:nvPr>
-            <p:ph type="ctrTitle"/>
-          </p:nvPr>
-        </p:nvSpPr>
-        <p:spPr>
-          <a:xfrm>
-            <a:off x="4011986" y="30293"/>
-            <a:ext cx="4741596" cy="1266497"/>
-          </a:xfrm>
-        </p:spPr>
-        <p:txBody>
-          <a:bodyPr anchor="ctr">
-            <a:normAutofit/>
-          </a:bodyPr>
-          <a:lstStyle/>
-          <a:p>
-            <a:r>
-              <a:rPr lang="en-US" sz="6000" b="1" dirty="0"/>
-              <a:t>App Router</a:t>
-            </a:r>
-            <a:endParaRPr lang="ru-RU" sz="6000" b="1" dirty="0"/>
-          </a:p>
-        </p:txBody>
-      </p:sp>
-      <p:pic>
-        <p:nvPicPr>
-          <p:cNvPr id="8" name="Picture 7">
-            <a:extLst>
-              <a:ext uri="{FF2B5EF4-FFF2-40B4-BE49-F238E27FC236}">
-                <a16:creationId xmlns:a16="http://schemas.microsoft.com/office/drawing/2014/main" id="{9DB10A20-E426-E955-9570-E22A7E2EE97E}"/>
-              </a:ext>
-            </a:extLst>
-          </p:cNvPr>
-          <p:cNvPicPr>
-            <a:picLocks noChangeAspect="1"/>
-          </p:cNvPicPr>
-          <p:nvPr/>
-        </p:nvPicPr>
-        <p:blipFill>
-          <a:blip r:embed="rId6"/>
-          <a:stretch>
-            <a:fillRect/>
-          </a:stretch>
-        </p:blipFill>
-        <p:spPr>
-          <a:xfrm>
-            <a:off x="226031" y="2090603"/>
-            <a:ext cx="8897420" cy="4413955"/>
-          </a:xfrm>
-          <a:prstGeom prst="roundRect">
-            <a:avLst>
-              <a:gd name="adj" fmla="val 16667"/>
-            </a:avLst>
-          </a:prstGeom>
-          <a:ln>
-            <a:noFill/>
-          </a:ln>
-          <a:effectLst>
-            <a:outerShdw blurRad="152400" dist="12000" dir="900000" sy="98000" kx="110000" ky="200000" algn="tl" rotWithShape="0">
-              <a:srgbClr val="000000">
-                <a:alpha val="30000"/>
-              </a:srgbClr>
-            </a:outerShdw>
-          </a:effectLst>
-          <a:scene3d>
-            <a:camera prst="perspectiveRelaxed">
-              <a:rot lat="19800000" lon="1200000" rev="20820000"/>
-            </a:camera>
-            <a:lightRig rig="threePt" dir="t"/>
-          </a:scene3d>
-          <a:sp3d contourW="6350" prstMaterial="matte">
-            <a:bevelT w="101600" h="101600"/>
-            <a:contourClr>
-              <a:srgbClr val="969696"/>
-            </a:contourClr>
-          </a:sp3d>
-        </p:spPr>
-      </p:pic>
-    </p:spTree>
-    <p:extLst>
-      <p:ext uri="{BB962C8B-B14F-4D97-AF65-F5344CB8AC3E}">
-        <p14:creationId xmlns:p14="http://schemas.microsoft.com/office/powerpoint/2010/main" val="1953970769"/>
       </p:ext>
     </p:extLst>
   </p:cSld>
